--- a/lecons/USA/Practical Geography/11_USA_PRA_QT02_Data_Collection_Sources_and_Techniques.pptx
+++ b/lecons/USA/Practical Geography/11_USA_PRA_QT02_Data_Collection_Sources_and_Techniques.pptx
@@ -60,9 +60,16 @@
     <p:sldId id="308" r:id="rId54"/>
     <p:sldId id="309" r:id="rId55"/>
     <p:sldId id="310" r:id="rId56"/>
+    <p:sldId id="311" r:id="rId57"/>
+    <p:sldId id="312" r:id="rId58"/>
+    <p:sldId id="313" r:id="rId59"/>
+    <p:sldId id="314" r:id="rId60"/>
+    <p:sldId id="315" r:id="rId61"/>
+    <p:sldId id="316" r:id="rId62"/>
+    <p:sldId id="317" r:id="rId63"/>
   </p:sldIdLst>
   <p:notesMasterIdLst>
-    <p:notesMasterId r:id="rId57"/>
+    <p:notesMasterId r:id="rId64"/>
   </p:notesMasterIdLst>
   <p:sldSz cx="12192000" cy="6858000"/>
   <p:notesSz cx="6858000" cy="12192000"/>
@@ -644,7 +651,7 @@
           <a:p>
             <a:r>
               <a:rPr lang="en-US" dirty="0"/>
-              <a:t>Listen carefully to this situation from real life. The class wants to know why people in the town buy food at the market rather than in shops. They cannot ask everybody, so they must choose some people and prepare questions. Think about it, because I am going to ask you some questions.</a:t>
+              <a:t>Take your time to copy this part; we will continue together.</a:t>
             </a:r>
             <a:endParaRPr lang="en-US" dirty="0"/>
           </a:p>
@@ -732,7 +739,7 @@
           <a:p>
             <a:r>
               <a:rPr lang="en-US" dirty="0"/>
-              <a:t>Question 1: What is the problem in the situation? Think for a moment, then raise your hand to answer.</a:t>
+              <a:t>Listen carefully to this situation from real life. Aïcha's mother sells fabrics at the Grand Marché of Garoua and has had fewer customers recently. Aïcha wants to use her geography to find out why. She cannot question the thousands of people who visit the market, and she does not know which information to collect or how. She asks: "Where can I find reliable information, how can I choose the people to question, and which methods should I use?" Think about it, because I am going to ask you some questions.</a:t>
             </a:r>
             <a:endParaRPr lang="en-US" dirty="0"/>
           </a:p>
@@ -820,7 +827,7 @@
           <a:p>
             <a:r>
               <a:rPr lang="en-US" dirty="0"/>
-              <a:t>Good. The class must collect data from part of the population.</a:t>
+              <a:t>Question 1: What is the problem in the situation? Think for a moment, then raise your hand to answer.</a:t>
             </a:r>
             <a:endParaRPr lang="en-US" dirty="0"/>
           </a:p>
@@ -908,7 +915,7 @@
           <a:p>
             <a:r>
               <a:rPr lang="en-US" dirty="0"/>
-              <a:t>Question 2: What is choosing some people called? Think for a moment, then raise your hand to answer.</a:t>
+              <a:t>Good. Aïcha does not know how to collect geographical data for her investigation.</a:t>
             </a:r>
             <a:endParaRPr lang="en-US" dirty="0"/>
           </a:p>
@@ -996,7 +1003,7 @@
           <a:p>
             <a:r>
               <a:rPr lang="en-US" dirty="0"/>
-              <a:t>Good. Sampling.</a:t>
+              <a:t>Question 2: What does Aïcha need first? Think for a moment, then raise your hand to answer.</a:t>
             </a:r>
             <a:endParaRPr lang="en-US" dirty="0"/>
           </a:p>
@@ -1084,7 +1091,7 @@
           <a:p>
             <a:r>
               <a:rPr lang="en-US" dirty="0"/>
-              <a:t>Question 3: Which tool contains the questions? Think for a moment, then raise your hand to answer.</a:t>
+              <a:t>Good. Data: facts about customers and the market, not guesses.</a:t>
             </a:r>
             <a:endParaRPr lang="en-US" dirty="0"/>
           </a:p>
@@ -1172,7 +1179,7 @@
           <a:p>
             <a:r>
               <a:rPr lang="en-US" dirty="0"/>
-              <a:t>Good. A questionnaire.</a:t>
+              <a:t>Question 3: How can she study the market without questioning everyone? Think for a moment, then raise your hand to answer.</a:t>
             </a:r>
             <a:endParaRPr lang="en-US" dirty="0"/>
           </a:p>
@@ -1260,7 +1267,7 @@
           <a:p>
             <a:r>
               <a:rPr lang="en-US" dirty="0"/>
-              <a:t>From this situation, the action we are working towards in this lesson is the following: collect data honestly and with the right method.</a:t>
+              <a:t>Good. By sampling: choosing a small, representative group.</a:t>
             </a:r>
             <a:endParaRPr lang="en-US" dirty="0"/>
           </a:p>
@@ -1348,7 +1355,7 @@
           <a:p>
             <a:r>
               <a:rPr lang="en-US" dirty="0"/>
-              <a:t>Why is this lesson important for you? This lesson helps us to collect reliable data for geographical studies.</a:t>
+              <a:t>From this situation, the action we are working towards in this lesson is the following: plan every investigation by stating the data needed, the sample and the collection techniques.</a:t>
             </a:r>
             <a:endParaRPr lang="en-US" dirty="0"/>
           </a:p>
@@ -1436,7 +1443,7 @@
           <a:p>
             <a:r>
               <a:rPr lang="en-US" dirty="0"/>
-              <a:t>Activity 1. Look carefully at this diagram: primary and secondary data. Observe every detail before I ask the question.</a:t>
+              <a:t>Why is this lesson important for you? This lesson gives the methods used in fieldwork, projects and examinations to collect reliable data.</a:t>
             </a:r>
             <a:endParaRPr lang="en-US" dirty="0"/>
           </a:p>
@@ -1612,7 +1619,7 @@
           <a:p>
             <a:r>
               <a:rPr lang="en-US" dirty="0"/>
-              <a:t>Here is the question for Activity 1: Distinguish primary and secondary data with one example each. Take one minute to think and write your answer in your rough notebook.</a:t>
+              <a:t>Activity 1. Look carefully at this diagram: primary and secondary data. Observe every detail before I ask the question.</a:t>
             </a:r>
             <a:endParaRPr lang="en-US" dirty="0"/>
           </a:p>
@@ -1700,7 +1707,7 @@
           <a:p>
             <a:r>
               <a:rPr lang="en-US" dirty="0"/>
-              <a:t>Let us check the answer together. Primary: collected yourself (a traffic count). Secondary: already exists (census).</a:t>
+              <a:t>Here is the question for Activity 1: Is a BUCREP census report primary or secondary data for a student? Take one minute to think and write your answer in your rough notebook.</a:t>
             </a:r>
             <a:endParaRPr lang="en-US" dirty="0"/>
           </a:p>
@@ -1788,7 +1795,7 @@
           <a:p>
             <a:r>
               <a:rPr lang="en-US" dirty="0"/>
-              <a:t>Activity 2. Look carefully at this diagram: sampling methods. Observe every detail before I ask the question.</a:t>
+              <a:t>Let us check the answer together. Secondary data.</a:t>
             </a:r>
             <a:endParaRPr lang="en-US" dirty="0"/>
           </a:p>
@@ -1876,7 +1883,7 @@
           <a:p>
             <a:r>
               <a:rPr lang="en-US" dirty="0"/>
-              <a:t>Here is the question for Activity 2: Why do geographers use samples? Take one minute to think and write your answer in your rough notebook.</a:t>
+              <a:t>Activity 2. Look carefully at this diagram: three sampling methods. Observe every detail before I ask the question.</a:t>
             </a:r>
             <a:endParaRPr lang="en-US" dirty="0"/>
           </a:p>
@@ -1964,7 +1971,7 @@
           <a:p>
             <a:r>
               <a:rPr lang="en-US" dirty="0"/>
-              <a:t>Let us check the answer together. It saves time and money when the whole population cannot be studied.</a:t>
+              <a:t>Here is the question for Activity 2: In which method does every member have an equal chance of being chosen? Take one minute to think and write your answer in your rough notebook.</a:t>
             </a:r>
             <a:endParaRPr lang="en-US" dirty="0"/>
           </a:p>
@@ -2052,7 +2059,7 @@
           <a:p>
             <a:r>
               <a:rPr lang="en-US" dirty="0"/>
-              <a:t>Activity 3. Look carefully at this diagram: random, systematic and stratified. Observe every detail before I ask the question.</a:t>
+              <a:t>Let us check the answer together. Random sampling.</a:t>
             </a:r>
             <a:endParaRPr lang="en-US" dirty="0"/>
           </a:p>
@@ -2140,7 +2147,7 @@
           <a:p>
             <a:r>
               <a:rPr lang="en-US" dirty="0"/>
-              <a:t>Here is the question for Activity 3: How would you take a systematic sample of 20 houses on a street of 200? Take one minute to think and write your answer in your rough notebook.</a:t>
+              <a:t>Activity 3. Look carefully at this picture: systematic sampling. Observe every detail before I ask the question.</a:t>
             </a:r>
             <a:endParaRPr lang="en-US" dirty="0"/>
           </a:p>
@@ -2228,7 +2235,7 @@
           <a:p>
             <a:r>
               <a:rPr lang="en-US" dirty="0"/>
-              <a:t>Let us check the answer together. Choose every 10th house.</a:t>
+              <a:t>Here is the question for Activity 3: What is the sampling interval for 20 students chosen from 200? Take one minute to think and write your answer in your rough notebook.</a:t>
             </a:r>
             <a:endParaRPr lang="en-US" dirty="0"/>
           </a:p>
@@ -2316,7 +2323,7 @@
           <a:p>
             <a:r>
               <a:rPr lang="en-US" dirty="0"/>
-              <a:t>Activity 4. Look carefully at this picture: measuring in the field. Observe every detail before I ask the question.</a:t>
+              <a:t>Let us check the answer together. k = 200 ÷ 20 = 10.</a:t>
             </a:r>
             <a:endParaRPr lang="en-US" dirty="0"/>
           </a:p>
@@ -2404,7 +2411,7 @@
           <a:p>
             <a:r>
               <a:rPr lang="en-US" dirty="0"/>
-              <a:t>Here is the question for Activity 4: Give two tools for field measurement. Take one minute to think and write your answer in your rough notebook.</a:t>
+              <a:t>Activity 4. Look carefully at this picture: primary data collection techniques. Observe every detail before I ask the question.</a:t>
             </a:r>
             <a:endParaRPr lang="en-US" dirty="0"/>
           </a:p>
@@ -2492,7 +2499,7 @@
           <a:p>
             <a:r>
               <a:rPr lang="en-US" dirty="0"/>
-              <a:t>Our topic is Quantitative Techniques in Geography, and the sub-topic is Statistical Techniques. The key notions we shall use today are: primary data, secondary data, sampling, random, systematic, stratified, questionnaire, interview, focus group. At the end, you should be able to do this: learners are able to choose data sources, select samples and design simple questionnaires.</a:t>
+              <a:t>Our topic is Quantitative Techniques in Geography, and the sub-topic is Statistical Techniques. The key notions we shall use today are: geographical data, primary data, secondary data, population, sample, random, systematic and stratified sampling, observation, measurement, questionnaire, interview, focus group. At the end, you should be able to do this: learners are able to choose sources, sampling methods and techniques to collect data for a geographical investigation in Garoua.</a:t>
             </a:r>
             <a:endParaRPr lang="en-US" dirty="0"/>
           </a:p>
@@ -2580,7 +2587,7 @@
           <a:p>
             <a:r>
               <a:rPr lang="en-US" dirty="0"/>
-              <a:t>Let us check the answer together. Measuring tape and rain gauge (also compass, clinometer, GPS).</a:t>
+              <a:t>Here is the question for Activity 4: How can you study traffic on the Pont Neuf of Garoua? Take one minute to think and write your answer in your rough notebook.</a:t>
             </a:r>
             <a:endParaRPr lang="en-US" dirty="0"/>
           </a:p>
@@ -2668,7 +2675,7 @@
           <a:p>
             <a:r>
               <a:rPr lang="en-US" dirty="0"/>
-              <a:t>Activity 5. Look carefully at this diagram: good and bad questions. Observe every detail before I ask the question.</a:t>
+              <a:t>Let us check the answer together. By counting vehicles for a fixed time (observation and counting).</a:t>
             </a:r>
             <a:endParaRPr lang="en-US" dirty="0"/>
           </a:p>
@@ -2756,7 +2763,7 @@
           <a:p>
             <a:r>
               <a:rPr lang="en-US" dirty="0"/>
-              <a:t>Here is the question for Activity 5: Give two rules for a good questionnaire. Take one minute to think and write your answer in your rough notebook.</a:t>
+              <a:t>Activity 5. Look carefully at this diagram: good and bad questions. Observe every detail before I ask the question.</a:t>
             </a:r>
             <a:endParaRPr lang="en-US" dirty="0"/>
           </a:p>
@@ -2844,7 +2851,7 @@
           <a:p>
             <a:r>
               <a:rPr lang="en-US" dirty="0"/>
-              <a:t>Let us check the answer together. Short, clear questions that are not leading or too personal.</a:t>
+              <a:t>Here is the question for Activity 5: Why is "Isn't the market dirty?" a bad question? Take one minute to think and write your answer in your rough notebook.</a:t>
             </a:r>
             <a:endParaRPr lang="en-US" dirty="0"/>
           </a:p>
@@ -2932,7 +2939,7 @@
           <a:p>
             <a:r>
               <a:rPr lang="en-US" dirty="0"/>
-              <a:t>Now we are going to copy the board summary. Write the title and the headings neatly in your notebooks. I will give you enough time for each slide, so do not rush.</a:t>
+              <a:t>Let us check the answer together. It is a leading question that suggests the answer.</a:t>
             </a:r>
             <a:endParaRPr lang="en-US" dirty="0"/>
           </a:p>
@@ -3020,7 +3027,7 @@
           <a:p>
             <a:r>
               <a:rPr lang="en-US" dirty="0"/>
-              <a:t>Let us copy Sources of Geographical Data. Geographical data come from two sources. On this slide we have Primary data. Write each point on a new line, with the key term first, and explain it in your own words when we revise. When you finish, we go to the next slide.</a:t>
+              <a:t>Now we are going to copy the board summary. Write the title and the headings neatly in your notebooks. I will give you enough time for each slide, so do not rush.</a:t>
             </a:r>
             <a:endParaRPr lang="en-US" dirty="0"/>
           </a:p>
@@ -3108,7 +3115,7 @@
           <a:p>
             <a:r>
               <a:rPr lang="en-US" dirty="0"/>
-              <a:t>We continue with Sources of Geographical Data. On this slide we have Secondary data. Write each point on a new line, with the key term first, and explain it in your own words when we revise.</a:t>
+              <a:t>Let us copy the definitions. The key terms of this lesson are defined as follows. On this slide we have Geographical data. Write each point on a new line, with the key term first, and explain it in your own words when we revise. When you finish, we go to the next slide.</a:t>
             </a:r>
             <a:endParaRPr lang="en-US" dirty="0"/>
           </a:p>
@@ -3196,7 +3203,7 @@
           <a:p>
             <a:r>
               <a:rPr lang="en-US" dirty="0"/>
-              <a:t>Now draw this illustration in your notebook: primary and secondary data. Give it a title and label it clearly.</a:t>
+              <a:t>We continue with the definitions. On this slide we have Primary data and Secondary data. Write each point on a new line, with the key term first, and explain it in your own words when we revise. When you finish, we go to the next slide.</a:t>
             </a:r>
             <a:endParaRPr lang="en-US" dirty="0"/>
           </a:p>
@@ -3284,7 +3291,7 @@
           <a:p>
             <a:r>
               <a:rPr lang="en-US" dirty="0"/>
-              <a:t>Let us copy Basic Sampling Procedures. Samples are taken with the following methods. On this slide we have Random sampling. Write each point on a new line, with the key term first, and explain it in your own words when we revise. When you finish, we go to the next slide.</a:t>
+              <a:t>We continue with the definitions. On this slide we have Population (in statistics) and Sample. Write each point on a new line, with the key term first, and explain it in your own words when we revise.</a:t>
             </a:r>
             <a:endParaRPr lang="en-US" dirty="0"/>
           </a:p>
@@ -3372,7 +3379,7 @@
           <a:p>
             <a:r>
               <a:rPr lang="en-US" dirty="0"/>
-              <a:t>We continue with Basic Sampling Procedures. On this slide we have Systematic sampling and Stratified sampling. Write each point on a new line, with the key term first, and explain it in your own words when we revise.</a:t>
+              <a:t>Let us copy Sources of Geographical Data. Geographical data come from the following sources. Copy the point on Primary data on the left, then draw the diagram on the right: primary and secondary data. Give it a title and label it clearly.</a:t>
             </a:r>
             <a:endParaRPr lang="en-US" dirty="0"/>
           </a:p>
@@ -3460,7 +3467,7 @@
           <a:p>
             <a:r>
               <a:rPr lang="en-US" dirty="0"/>
-              <a:t>Before we start the new lesson, let us correct the homework I gave you at the end of Quantitative Techniques 1: Analysis of Cartographic Tools. The question was: Draw a choropleth map of population density by region of Cameroon. Take out your exercise books.</a:t>
+              <a:t>Before we start the new lesson, let us correct the homework I gave you at the end of Quantitative Techniques 1: Analysis of Cartographic Tools. The question was: Name two sources of secondary data. Take out your exercise books.</a:t>
             </a:r>
             <a:endParaRPr lang="en-US" dirty="0"/>
           </a:p>
@@ -3548,7 +3555,7 @@
           <a:p>
             <a:r>
               <a:rPr lang="en-US" dirty="0"/>
-              <a:t>Now draw this illustration in your notebook: sampling methods. Give it a title and label it clearly.</a:t>
+              <a:t>We continue with Sources of Geographical Data. On this slide we have Example of primary data and Secondary data. Write each point on a new line, with the key term first, and explain it in your own words when we revise. When you finish, we go to the next slide.</a:t>
             </a:r>
             <a:endParaRPr lang="en-US" dirty="0"/>
           </a:p>
@@ -3636,7 +3643,7 @@
           <a:p>
             <a:r>
               <a:rPr lang="en-US" dirty="0"/>
-              <a:t>Let us copy Field Techniques. Data are collected in the field with the following techniques. On this slide we have Observation and measurement. Write each point on a new line, with the key term first, and explain it in your own words when we revise. When you finish, we go to the next slide.</a:t>
+              <a:t>We continue with Sources of Geographical Data. On this slide we have Sources of secondary data. Write each point on a new line, with the key term first, and explain it in your own words when we revise.</a:t>
             </a:r>
             <a:endParaRPr lang="en-US" dirty="0"/>
           </a:p>
@@ -3724,7 +3731,7 @@
           <a:p>
             <a:r>
               <a:rPr lang="en-US" dirty="0"/>
-              <a:t>We continue with Field Techniques. On this slide we have Questionnaires and interviews. Write each point on a new line, with the key term first, and explain it in your own words when we revise.</a:t>
+              <a:t>Let us copy Basic Sampling Procedures. The basic sampling procedures are the following. Copy the point on Why sample on the left, then draw the diagram on the right: three sampling methods. Give it a title and label it clearly.</a:t>
             </a:r>
             <a:endParaRPr lang="en-US" dirty="0"/>
           </a:p>
@@ -3812,7 +3819,7 @@
           <a:p>
             <a:r>
               <a:rPr lang="en-US" dirty="0"/>
-              <a:t>Now draw this illustration in your notebook: good and bad questions. Give it a title and label it clearly.</a:t>
+              <a:t>We continue with Basic Sampling Procedures. On this slide we have Random sampling. Write each point on a new line, with the key term first, and explain it in your own words when we revise.</a:t>
             </a:r>
             <a:endParaRPr lang="en-US" dirty="0"/>
           </a:p>
@@ -3900,7 +3907,7 @@
           <a:p>
             <a:r>
               <a:rPr lang="en-US" dirty="0"/>
-              <a:t>Now let us check what you have understood. Question 1: Give one advantage of each sampling method. Answer in your exercise book.</a:t>
+              <a:t>Copy the point on Systematic sampling on the left, then draw the diagram on the right: systematic sampling. Give it a title and label it clearly.</a:t>
             </a:r>
             <a:endParaRPr lang="en-US" dirty="0"/>
           </a:p>
@@ -3988,7 +3995,7 @@
           <a:p>
             <a:r>
               <a:rPr lang="en-US" dirty="0"/>
-              <a:t>The expected answer is: random: no bias. Systematic: easy. Stratified: represents all groups. If you got it right, well done.</a:t>
+              <a:t>We continue with Basic Sampling Procedures. On this slide we have Stratified sampling. Write each point on a new line, with the key term first, and explain it in your own words when we revise.</a:t>
             </a:r>
             <a:endParaRPr lang="en-US" dirty="0"/>
           </a:p>
@@ -4076,7 +4083,7 @@
           <a:p>
             <a:r>
               <a:rPr lang="en-US" dirty="0"/>
-              <a:t>Now let us check what you have understood. Question 2: Give two primary and two secondary sources. Answer in your exercise book.</a:t>
+              <a:t>Let us copy Primary Data Collection Techniques. The main techniques of primary data collection are the following. Copy the point on Observation, counting and recording on the left, then draw the diagram on the right: collection techniques. Give it a title and label it clearly.</a:t>
             </a:r>
             <a:endParaRPr lang="en-US" dirty="0"/>
           </a:p>
@@ -4164,7 +4171,7 @@
           <a:p>
             <a:r>
               <a:rPr lang="en-US" dirty="0"/>
-              <a:t>The expected answer is: primary: counts, questionnaires. Secondary: census, maps. If you got it right, well done.</a:t>
+              <a:t>We continue with Primary Data Collection Techniques. On this slide we have Measurement. Write each point on a new line, with the key term first, and explain it in your own words when we revise.</a:t>
             </a:r>
             <a:endParaRPr lang="en-US" dirty="0"/>
           </a:p>
@@ -4252,7 +4259,7 @@
           <a:p>
             <a:r>
               <a:rPr lang="en-US" dirty="0"/>
-              <a:t>For those who need more practice, fill in the blanks in your exercise book. The answers are: number 1, primary; number 2, systematic; number 3, focus.</a:t>
+              <a:t>Copy the point on Questionnaires on the left, then draw the diagram on the right: good and bad questions. Give it a title and label it clearly.</a:t>
             </a:r>
             <a:endParaRPr lang="en-US" dirty="0"/>
           </a:p>
@@ -4340,7 +4347,7 @@
           <a:p>
             <a:r>
               <a:rPr lang="en-US" dirty="0"/>
-              <a:t>For your homework: Prepare a questionnaire of five questions about how students travel to school. We shall correct it at the beginning of our next lesson.</a:t>
+              <a:t>We continue with Primary Data Collection Techniques. On this slide we have Interviews and Focus group discussions. Write each point on a new line, with the key term first, and explain it in your own words when we revise.</a:t>
             </a:r>
             <a:endParaRPr lang="en-US" dirty="0"/>
           </a:p>
@@ -4428,7 +4435,7 @@
           <a:p>
             <a:r>
               <a:rPr lang="en-US" dirty="0"/>
-              <a:t>Here is a good answer. Group the densities into 4–5 classes (e.g. &lt;25, 25–50, 50–100, &gt;100 per km²), shade from light to dark, and add a key. The Littoral and West appear darkest, the East and Adamawa lightest. Compare it with your own answer and correct your work in red.</a:t>
+              <a:t>Here is a good answer. Census reports (BUCREP), statistical yearbooks (INS), books, maps, newspapers or websites (any two). Compare it with your own answer and correct your work in red.</a:t>
             </a:r>
             <a:endParaRPr lang="en-US" dirty="0"/>
           </a:p>
@@ -4516,7 +4523,7 @@
           <a:p>
             <a:r>
               <a:rPr lang="en-US" dirty="0"/>
-              <a:t>Our next lesson will be on Quantitative Techniques 3: Basic Tools of Data Analysis. Thank you for your attention, and see you next time.</a:t>
+              <a:t>Now let us check what you have understood. Question 1: Distinguish primary data from secondary data, with one example from Garoua for each. Answer in your exercise book.</a:t>
             </a:r>
             <a:endParaRPr lang="en-US" dirty="0"/>
           </a:p>
@@ -4604,7 +4611,7 @@
           <a:p>
             <a:r>
               <a:rPr lang="en-US" dirty="0"/>
-              <a:t>Let us play the bilingual game. I say a word in English, and you give me the French word. Then we do the reverse.</a:t>
+              <a:t>The expected answer is: primary: collected by the researcher (counting motos at a crossroads); secondary: already published (BUCREP census figures). If you got it right, well done.</a:t>
             </a:r>
             <a:endParaRPr lang="en-US" dirty="0"/>
           </a:p>
@@ -4692,7 +4699,7 @@
           <a:p>
             <a:r>
               <a:rPr lang="en-US" dirty="0"/>
-              <a:t>I record this information in the official logbook of the class after the lesson.</a:t>
+              <a:t>Now let us check what you have understood. Question 2: Explain how to select 30 people from a list of 600 by systematic sampling. Answer in your exercise book.</a:t>
             </a:r>
             <a:endParaRPr lang="en-US" dirty="0"/>
           </a:p>
@@ -4780,7 +4787,7 @@
           <a:p>
             <a:r>
               <a:rPr lang="en-US" dirty="0"/>
-              <a:t>I complete the second page of the logbook: the matter taught, the evaluation, the homework and the attendance.</a:t>
+              <a:t>The expected answer is: k = 600 ÷ 30 = 20; choose a random start between 1 and 20, then every 20th person. If you got it right, well done.</a:t>
             </a:r>
             <a:endParaRPr lang="en-US" dirty="0"/>
           </a:p>
@@ -4868,7 +4875,7 @@
           <a:p>
             <a:r>
               <a:rPr lang="en-US" dirty="0"/>
-              <a:t>This slide is for me, the teacher: it gives the timing of the lesson and what to do if the projector is not available.</a:t>
+              <a:t>Take your time to copy this part; we will continue together.</a:t>
             </a:r>
             <a:endParaRPr lang="en-US" dirty="0"/>
           </a:p>
@@ -4956,7 +4963,7 @@
           <a:p>
             <a:r>
               <a:rPr lang="en-US" dirty="0"/>
-              <a:t>These are the references and picture credits used to prepare this lesson.</a:t>
+              <a:t>For those who need more practice, fill in the blanks in your exercise book. The answers are: number 1, primary; number 2, systematic; number 3, stratified.</a:t>
             </a:r>
             <a:endParaRPr lang="en-US" dirty="0"/>
           </a:p>
@@ -4980,6 +4987,358 @@
             <a:fld id="{F7021451-1387-4CA6-816F-3879F97B5CBC}" type="slidenum">
               <a:rPr lang="en-US"/>
               <a:t>55</a:t>
+            </a:fld>
+            <a:endParaRPr lang="en-US"/>
+          </a:p>
+        </p:txBody>
+      </p:sp>
+    </p:spTree>
+    <p:extLst>
+      <p:ext uri="{BB962C8B-B14F-4D97-AF65-F5344CB8AC3E}">
+        <p14:creationId xmlns:p14="http://schemas.microsoft.com/office/powerpoint/2010/main" val="1024086991"/>
+      </p:ext>
+    </p:extLst>
+  </p:cSld>
+  <p:clrMapOvr>
+    <a:masterClrMapping/>
+  </p:clrMapOvr>
+</p:notes>
+</file>
+
+<file path=ppt/notesSlides/notesSlide56.xml><?xml version="1.0" encoding="utf-8"?>
+<p:notes xmlns:a="http://schemas.openxmlformats.org/drawingml/2006/main" xmlns:r="http://schemas.openxmlformats.org/officeDocument/2006/relationships" xmlns:p="http://schemas.openxmlformats.org/presentationml/2006/main">
+  <p:cSld>
+    <p:spTree>
+      <p:nvGrpSpPr>
+        <p:cNvPr id="1" name=""/>
+        <p:cNvGrpSpPr/>
+        <p:nvPr/>
+      </p:nvGrpSpPr>
+      <p:grpSpPr>
+        <a:xfrm>
+          <a:off x="0" y="0"/>
+          <a:ext cx="0" cy="0"/>
+          <a:chOff x="0" y="0"/>
+          <a:chExt cx="0" cy="0"/>
+        </a:xfrm>
+      </p:grpSpPr>
+      <p:sp>
+        <p:nvSpPr>
+          <p:cNvPr id="2" name="Slide Image Placeholder 1"/>
+          <p:cNvSpPr>
+            <a:spLocks noGrp="1" noRot="1" noChangeAspect="1"/>
+          </p:cNvSpPr>
+          <p:nvPr>
+            <p:ph type="sldImg"/>
+          </p:nvPr>
+        </p:nvSpPr>
+        <p:spPr/>
+      </p:sp>
+      <p:sp>
+        <p:nvSpPr>
+          <p:cNvPr id="3" name="Notes Placeholder 2"/>
+          <p:cNvSpPr>
+            <a:spLocks noGrp="1"/>
+          </p:cNvSpPr>
+          <p:nvPr>
+            <p:ph type="body" idx="1"/>
+          </p:nvPr>
+        </p:nvSpPr>
+        <p:spPr/>
+        <p:txBody>
+          <a:bodyPr/>
+          <a:lstStyle/>
+          <a:p>
+            <a:r>
+              <a:rPr lang="en-US" dirty="0"/>
+              <a:t>For your homework: Define the arithmetic mean. We shall correct it at the beginning of our next lesson.</a:t>
+            </a:r>
+            <a:endParaRPr lang="en-US" dirty="0"/>
+          </a:p>
+        </p:txBody>
+      </p:sp>
+      <p:sp>
+        <p:nvSpPr>
+          <p:cNvPr id="4" name="Slide Number Placeholder 3"/>
+          <p:cNvSpPr>
+            <a:spLocks noGrp="1"/>
+          </p:cNvSpPr>
+          <p:nvPr>
+            <p:ph type="sldNum" sz="quarter" idx="10"/>
+          </p:nvPr>
+        </p:nvSpPr>
+        <p:spPr/>
+        <p:txBody>
+          <a:bodyPr/>
+          <a:lstStyle/>
+          <a:p>
+            <a:fld id="{F7021451-1387-4CA6-816F-3879F97B5CBC}" type="slidenum">
+              <a:rPr lang="en-US"/>
+              <a:t>56</a:t>
+            </a:fld>
+            <a:endParaRPr lang="en-US"/>
+          </a:p>
+        </p:txBody>
+      </p:sp>
+    </p:spTree>
+    <p:extLst>
+      <p:ext uri="{BB962C8B-B14F-4D97-AF65-F5344CB8AC3E}">
+        <p14:creationId xmlns:p14="http://schemas.microsoft.com/office/powerpoint/2010/main" val="1024086991"/>
+      </p:ext>
+    </p:extLst>
+  </p:cSld>
+  <p:clrMapOvr>
+    <a:masterClrMapping/>
+  </p:clrMapOvr>
+</p:notes>
+</file>
+
+<file path=ppt/notesSlides/notesSlide57.xml><?xml version="1.0" encoding="utf-8"?>
+<p:notes xmlns:a="http://schemas.openxmlformats.org/drawingml/2006/main" xmlns:r="http://schemas.openxmlformats.org/officeDocument/2006/relationships" xmlns:p="http://schemas.openxmlformats.org/presentationml/2006/main">
+  <p:cSld>
+    <p:spTree>
+      <p:nvGrpSpPr>
+        <p:cNvPr id="1" name=""/>
+        <p:cNvGrpSpPr/>
+        <p:nvPr/>
+      </p:nvGrpSpPr>
+      <p:grpSpPr>
+        <a:xfrm>
+          <a:off x="0" y="0"/>
+          <a:ext cx="0" cy="0"/>
+          <a:chOff x="0" y="0"/>
+          <a:chExt cx="0" cy="0"/>
+        </a:xfrm>
+      </p:grpSpPr>
+      <p:sp>
+        <p:nvSpPr>
+          <p:cNvPr id="2" name="Slide Image Placeholder 1"/>
+          <p:cNvSpPr>
+            <a:spLocks noGrp="1" noRot="1" noChangeAspect="1"/>
+          </p:cNvSpPr>
+          <p:nvPr>
+            <p:ph type="sldImg"/>
+          </p:nvPr>
+        </p:nvSpPr>
+        <p:spPr/>
+      </p:sp>
+      <p:sp>
+        <p:nvSpPr>
+          <p:cNvPr id="3" name="Notes Placeholder 2"/>
+          <p:cNvSpPr>
+            <a:spLocks noGrp="1"/>
+          </p:cNvSpPr>
+          <p:nvPr>
+            <p:ph type="body" idx="1"/>
+          </p:nvPr>
+        </p:nvSpPr>
+        <p:spPr/>
+        <p:txBody>
+          <a:bodyPr/>
+          <a:lstStyle/>
+          <a:p>
+            <a:r>
+              <a:rPr lang="en-US" dirty="0"/>
+              <a:t>Our next lesson will be on Quantitative Techniques 3 (Part 1): Measures of Central Tendency, Range and Quartiles. Thank you for your attention, and see you next time.</a:t>
+            </a:r>
+            <a:endParaRPr lang="en-US" dirty="0"/>
+          </a:p>
+        </p:txBody>
+      </p:sp>
+      <p:sp>
+        <p:nvSpPr>
+          <p:cNvPr id="4" name="Slide Number Placeholder 3"/>
+          <p:cNvSpPr>
+            <a:spLocks noGrp="1"/>
+          </p:cNvSpPr>
+          <p:nvPr>
+            <p:ph type="sldNum" sz="quarter" idx="10"/>
+          </p:nvPr>
+        </p:nvSpPr>
+        <p:spPr/>
+        <p:txBody>
+          <a:bodyPr/>
+          <a:lstStyle/>
+          <a:p>
+            <a:fld id="{F7021451-1387-4CA6-816F-3879F97B5CBC}" type="slidenum">
+              <a:rPr lang="en-US"/>
+              <a:t>57</a:t>
+            </a:fld>
+            <a:endParaRPr lang="en-US"/>
+          </a:p>
+        </p:txBody>
+      </p:sp>
+    </p:spTree>
+    <p:extLst>
+      <p:ext uri="{BB962C8B-B14F-4D97-AF65-F5344CB8AC3E}">
+        <p14:creationId xmlns:p14="http://schemas.microsoft.com/office/powerpoint/2010/main" val="1024086991"/>
+      </p:ext>
+    </p:extLst>
+  </p:cSld>
+  <p:clrMapOvr>
+    <a:masterClrMapping/>
+  </p:clrMapOvr>
+</p:notes>
+</file>
+
+<file path=ppt/notesSlides/notesSlide58.xml><?xml version="1.0" encoding="utf-8"?>
+<p:notes xmlns:a="http://schemas.openxmlformats.org/drawingml/2006/main" xmlns:r="http://schemas.openxmlformats.org/officeDocument/2006/relationships" xmlns:p="http://schemas.openxmlformats.org/presentationml/2006/main">
+  <p:cSld>
+    <p:spTree>
+      <p:nvGrpSpPr>
+        <p:cNvPr id="1" name=""/>
+        <p:cNvGrpSpPr/>
+        <p:nvPr/>
+      </p:nvGrpSpPr>
+      <p:grpSpPr>
+        <a:xfrm>
+          <a:off x="0" y="0"/>
+          <a:ext cx="0" cy="0"/>
+          <a:chOff x="0" y="0"/>
+          <a:chExt cx="0" cy="0"/>
+        </a:xfrm>
+      </p:grpSpPr>
+      <p:sp>
+        <p:nvSpPr>
+          <p:cNvPr id="2" name="Slide Image Placeholder 1"/>
+          <p:cNvSpPr>
+            <a:spLocks noGrp="1" noRot="1" noChangeAspect="1"/>
+          </p:cNvSpPr>
+          <p:nvPr>
+            <p:ph type="sldImg"/>
+          </p:nvPr>
+        </p:nvSpPr>
+        <p:spPr/>
+      </p:sp>
+      <p:sp>
+        <p:nvSpPr>
+          <p:cNvPr id="3" name="Notes Placeholder 2"/>
+          <p:cNvSpPr>
+            <a:spLocks noGrp="1"/>
+          </p:cNvSpPr>
+          <p:nvPr>
+            <p:ph type="body" idx="1"/>
+          </p:nvPr>
+        </p:nvSpPr>
+        <p:spPr/>
+        <p:txBody>
+          <a:bodyPr/>
+          <a:lstStyle/>
+          <a:p>
+            <a:r>
+              <a:rPr lang="en-US" dirty="0"/>
+              <a:t>Let us play the bilingual game. I say a word in English, and you give me the French word. Then we do the reverse.</a:t>
+            </a:r>
+            <a:endParaRPr lang="en-US" dirty="0"/>
+          </a:p>
+        </p:txBody>
+      </p:sp>
+      <p:sp>
+        <p:nvSpPr>
+          <p:cNvPr id="4" name="Slide Number Placeholder 3"/>
+          <p:cNvSpPr>
+            <a:spLocks noGrp="1"/>
+          </p:cNvSpPr>
+          <p:nvPr>
+            <p:ph type="sldNum" sz="quarter" idx="10"/>
+          </p:nvPr>
+        </p:nvSpPr>
+        <p:spPr/>
+        <p:txBody>
+          <a:bodyPr/>
+          <a:lstStyle/>
+          <a:p>
+            <a:fld id="{F7021451-1387-4CA6-816F-3879F97B5CBC}" type="slidenum">
+              <a:rPr lang="en-US"/>
+              <a:t>58</a:t>
+            </a:fld>
+            <a:endParaRPr lang="en-US"/>
+          </a:p>
+        </p:txBody>
+      </p:sp>
+    </p:spTree>
+    <p:extLst>
+      <p:ext uri="{BB962C8B-B14F-4D97-AF65-F5344CB8AC3E}">
+        <p14:creationId xmlns:p14="http://schemas.microsoft.com/office/powerpoint/2010/main" val="1024086991"/>
+      </p:ext>
+    </p:extLst>
+  </p:cSld>
+  <p:clrMapOvr>
+    <a:masterClrMapping/>
+  </p:clrMapOvr>
+</p:notes>
+</file>
+
+<file path=ppt/notesSlides/notesSlide59.xml><?xml version="1.0" encoding="utf-8"?>
+<p:notes xmlns:a="http://schemas.openxmlformats.org/drawingml/2006/main" xmlns:r="http://schemas.openxmlformats.org/officeDocument/2006/relationships" xmlns:p="http://schemas.openxmlformats.org/presentationml/2006/main">
+  <p:cSld>
+    <p:spTree>
+      <p:nvGrpSpPr>
+        <p:cNvPr id="1" name=""/>
+        <p:cNvGrpSpPr/>
+        <p:nvPr/>
+      </p:nvGrpSpPr>
+      <p:grpSpPr>
+        <a:xfrm>
+          <a:off x="0" y="0"/>
+          <a:ext cx="0" cy="0"/>
+          <a:chOff x="0" y="0"/>
+          <a:chExt cx="0" cy="0"/>
+        </a:xfrm>
+      </p:grpSpPr>
+      <p:sp>
+        <p:nvSpPr>
+          <p:cNvPr id="2" name="Slide Image Placeholder 1"/>
+          <p:cNvSpPr>
+            <a:spLocks noGrp="1" noRot="1" noChangeAspect="1"/>
+          </p:cNvSpPr>
+          <p:nvPr>
+            <p:ph type="sldImg"/>
+          </p:nvPr>
+        </p:nvSpPr>
+        <p:spPr/>
+      </p:sp>
+      <p:sp>
+        <p:nvSpPr>
+          <p:cNvPr id="3" name="Notes Placeholder 2"/>
+          <p:cNvSpPr>
+            <a:spLocks noGrp="1"/>
+          </p:cNvSpPr>
+          <p:nvPr>
+            <p:ph type="body" idx="1"/>
+          </p:nvPr>
+        </p:nvSpPr>
+        <p:spPr/>
+        <p:txBody>
+          <a:bodyPr/>
+          <a:lstStyle/>
+          <a:p>
+            <a:r>
+              <a:rPr lang="en-US" dirty="0"/>
+              <a:t>I record this information in the official logbook of the class after the lesson.</a:t>
+            </a:r>
+            <a:endParaRPr lang="en-US" dirty="0"/>
+          </a:p>
+        </p:txBody>
+      </p:sp>
+      <p:sp>
+        <p:nvSpPr>
+          <p:cNvPr id="4" name="Slide Number Placeholder 3"/>
+          <p:cNvSpPr>
+            <a:spLocks noGrp="1"/>
+          </p:cNvSpPr>
+          <p:nvPr>
+            <p:ph type="sldNum" sz="quarter" idx="10"/>
+          </p:nvPr>
+        </p:nvSpPr>
+        <p:spPr/>
+        <p:txBody>
+          <a:bodyPr/>
+          <a:lstStyle/>
+          <a:p>
+            <a:fld id="{F7021451-1387-4CA6-816F-3879F97B5CBC}" type="slidenum">
+              <a:rPr lang="en-US"/>
+              <a:t>59</a:t>
             </a:fld>
             <a:endParaRPr lang="en-US"/>
           </a:p>
@@ -5086,6 +5445,270 @@
 </p:notes>
 </file>
 
+<file path=ppt/notesSlides/notesSlide60.xml><?xml version="1.0" encoding="utf-8"?>
+<p:notes xmlns:a="http://schemas.openxmlformats.org/drawingml/2006/main" xmlns:r="http://schemas.openxmlformats.org/officeDocument/2006/relationships" xmlns:p="http://schemas.openxmlformats.org/presentationml/2006/main">
+  <p:cSld>
+    <p:spTree>
+      <p:nvGrpSpPr>
+        <p:cNvPr id="1" name=""/>
+        <p:cNvGrpSpPr/>
+        <p:nvPr/>
+      </p:nvGrpSpPr>
+      <p:grpSpPr>
+        <a:xfrm>
+          <a:off x="0" y="0"/>
+          <a:ext cx="0" cy="0"/>
+          <a:chOff x="0" y="0"/>
+          <a:chExt cx="0" cy="0"/>
+        </a:xfrm>
+      </p:grpSpPr>
+      <p:sp>
+        <p:nvSpPr>
+          <p:cNvPr id="2" name="Slide Image Placeholder 1"/>
+          <p:cNvSpPr>
+            <a:spLocks noGrp="1" noRot="1" noChangeAspect="1"/>
+          </p:cNvSpPr>
+          <p:nvPr>
+            <p:ph type="sldImg"/>
+          </p:nvPr>
+        </p:nvSpPr>
+        <p:spPr/>
+      </p:sp>
+      <p:sp>
+        <p:nvSpPr>
+          <p:cNvPr id="3" name="Notes Placeholder 2"/>
+          <p:cNvSpPr>
+            <a:spLocks noGrp="1"/>
+          </p:cNvSpPr>
+          <p:nvPr>
+            <p:ph type="body" idx="1"/>
+          </p:nvPr>
+        </p:nvSpPr>
+        <p:spPr/>
+        <p:txBody>
+          <a:bodyPr/>
+          <a:lstStyle/>
+          <a:p>
+            <a:r>
+              <a:rPr lang="en-US" dirty="0"/>
+              <a:t>I complete the second page of the logbook: the matter taught, the evaluation, the homework and the attendance.</a:t>
+            </a:r>
+            <a:endParaRPr lang="en-US" dirty="0"/>
+          </a:p>
+        </p:txBody>
+      </p:sp>
+      <p:sp>
+        <p:nvSpPr>
+          <p:cNvPr id="4" name="Slide Number Placeholder 3"/>
+          <p:cNvSpPr>
+            <a:spLocks noGrp="1"/>
+          </p:cNvSpPr>
+          <p:nvPr>
+            <p:ph type="sldNum" sz="quarter" idx="10"/>
+          </p:nvPr>
+        </p:nvSpPr>
+        <p:spPr/>
+        <p:txBody>
+          <a:bodyPr/>
+          <a:lstStyle/>
+          <a:p>
+            <a:fld id="{F7021451-1387-4CA6-816F-3879F97B5CBC}" type="slidenum">
+              <a:rPr lang="en-US"/>
+              <a:t>60</a:t>
+            </a:fld>
+            <a:endParaRPr lang="en-US"/>
+          </a:p>
+        </p:txBody>
+      </p:sp>
+    </p:spTree>
+    <p:extLst>
+      <p:ext uri="{BB962C8B-B14F-4D97-AF65-F5344CB8AC3E}">
+        <p14:creationId xmlns:p14="http://schemas.microsoft.com/office/powerpoint/2010/main" val="1024086991"/>
+      </p:ext>
+    </p:extLst>
+  </p:cSld>
+  <p:clrMapOvr>
+    <a:masterClrMapping/>
+  </p:clrMapOvr>
+</p:notes>
+</file>
+
+<file path=ppt/notesSlides/notesSlide61.xml><?xml version="1.0" encoding="utf-8"?>
+<p:notes xmlns:a="http://schemas.openxmlformats.org/drawingml/2006/main" xmlns:r="http://schemas.openxmlformats.org/officeDocument/2006/relationships" xmlns:p="http://schemas.openxmlformats.org/presentationml/2006/main">
+  <p:cSld>
+    <p:spTree>
+      <p:nvGrpSpPr>
+        <p:cNvPr id="1" name=""/>
+        <p:cNvGrpSpPr/>
+        <p:nvPr/>
+      </p:nvGrpSpPr>
+      <p:grpSpPr>
+        <a:xfrm>
+          <a:off x="0" y="0"/>
+          <a:ext cx="0" cy="0"/>
+          <a:chOff x="0" y="0"/>
+          <a:chExt cx="0" cy="0"/>
+        </a:xfrm>
+      </p:grpSpPr>
+      <p:sp>
+        <p:nvSpPr>
+          <p:cNvPr id="2" name="Slide Image Placeholder 1"/>
+          <p:cNvSpPr>
+            <a:spLocks noGrp="1" noRot="1" noChangeAspect="1"/>
+          </p:cNvSpPr>
+          <p:nvPr>
+            <p:ph type="sldImg"/>
+          </p:nvPr>
+        </p:nvSpPr>
+        <p:spPr/>
+      </p:sp>
+      <p:sp>
+        <p:nvSpPr>
+          <p:cNvPr id="3" name="Notes Placeholder 2"/>
+          <p:cNvSpPr>
+            <a:spLocks noGrp="1"/>
+          </p:cNvSpPr>
+          <p:nvPr>
+            <p:ph type="body" idx="1"/>
+          </p:nvPr>
+        </p:nvSpPr>
+        <p:spPr/>
+        <p:txBody>
+          <a:bodyPr/>
+          <a:lstStyle/>
+          <a:p>
+            <a:r>
+              <a:rPr lang="en-US" dirty="0"/>
+              <a:t>This slide is for me, the teacher: it gives the timing of the lesson and what to do if the projector is not available.</a:t>
+            </a:r>
+            <a:endParaRPr lang="en-US" dirty="0"/>
+          </a:p>
+        </p:txBody>
+      </p:sp>
+      <p:sp>
+        <p:nvSpPr>
+          <p:cNvPr id="4" name="Slide Number Placeholder 3"/>
+          <p:cNvSpPr>
+            <a:spLocks noGrp="1"/>
+          </p:cNvSpPr>
+          <p:nvPr>
+            <p:ph type="sldNum" sz="quarter" idx="10"/>
+          </p:nvPr>
+        </p:nvSpPr>
+        <p:spPr/>
+        <p:txBody>
+          <a:bodyPr/>
+          <a:lstStyle/>
+          <a:p>
+            <a:fld id="{F7021451-1387-4CA6-816F-3879F97B5CBC}" type="slidenum">
+              <a:rPr lang="en-US"/>
+              <a:t>61</a:t>
+            </a:fld>
+            <a:endParaRPr lang="en-US"/>
+          </a:p>
+        </p:txBody>
+      </p:sp>
+    </p:spTree>
+    <p:extLst>
+      <p:ext uri="{BB962C8B-B14F-4D97-AF65-F5344CB8AC3E}">
+        <p14:creationId xmlns:p14="http://schemas.microsoft.com/office/powerpoint/2010/main" val="1024086991"/>
+      </p:ext>
+    </p:extLst>
+  </p:cSld>
+  <p:clrMapOvr>
+    <a:masterClrMapping/>
+  </p:clrMapOvr>
+</p:notes>
+</file>
+
+<file path=ppt/notesSlides/notesSlide62.xml><?xml version="1.0" encoding="utf-8"?>
+<p:notes xmlns:a="http://schemas.openxmlformats.org/drawingml/2006/main" xmlns:r="http://schemas.openxmlformats.org/officeDocument/2006/relationships" xmlns:p="http://schemas.openxmlformats.org/presentationml/2006/main">
+  <p:cSld>
+    <p:spTree>
+      <p:nvGrpSpPr>
+        <p:cNvPr id="1" name=""/>
+        <p:cNvGrpSpPr/>
+        <p:nvPr/>
+      </p:nvGrpSpPr>
+      <p:grpSpPr>
+        <a:xfrm>
+          <a:off x="0" y="0"/>
+          <a:ext cx="0" cy="0"/>
+          <a:chOff x="0" y="0"/>
+          <a:chExt cx="0" cy="0"/>
+        </a:xfrm>
+      </p:grpSpPr>
+      <p:sp>
+        <p:nvSpPr>
+          <p:cNvPr id="2" name="Slide Image Placeholder 1"/>
+          <p:cNvSpPr>
+            <a:spLocks noGrp="1" noRot="1" noChangeAspect="1"/>
+          </p:cNvSpPr>
+          <p:nvPr>
+            <p:ph type="sldImg"/>
+          </p:nvPr>
+        </p:nvSpPr>
+        <p:spPr/>
+      </p:sp>
+      <p:sp>
+        <p:nvSpPr>
+          <p:cNvPr id="3" name="Notes Placeholder 2"/>
+          <p:cNvSpPr>
+            <a:spLocks noGrp="1"/>
+          </p:cNvSpPr>
+          <p:nvPr>
+            <p:ph type="body" idx="1"/>
+          </p:nvPr>
+        </p:nvSpPr>
+        <p:spPr/>
+        <p:txBody>
+          <a:bodyPr/>
+          <a:lstStyle/>
+          <a:p>
+            <a:r>
+              <a:rPr lang="en-US" dirty="0"/>
+              <a:t>These are the references and picture credits used to prepare this lesson.</a:t>
+            </a:r>
+            <a:endParaRPr lang="en-US" dirty="0"/>
+          </a:p>
+        </p:txBody>
+      </p:sp>
+      <p:sp>
+        <p:nvSpPr>
+          <p:cNvPr id="4" name="Slide Number Placeholder 3"/>
+          <p:cNvSpPr>
+            <a:spLocks noGrp="1"/>
+          </p:cNvSpPr>
+          <p:nvPr>
+            <p:ph type="sldNum" sz="quarter" idx="10"/>
+          </p:nvPr>
+        </p:nvSpPr>
+        <p:spPr/>
+        <p:txBody>
+          <a:bodyPr/>
+          <a:lstStyle/>
+          <a:p>
+            <a:fld id="{F7021451-1387-4CA6-816F-3879F97B5CBC}" type="slidenum">
+              <a:rPr lang="en-US"/>
+              <a:t>62</a:t>
+            </a:fld>
+            <a:endParaRPr lang="en-US"/>
+          </a:p>
+        </p:txBody>
+      </p:sp>
+    </p:spTree>
+    <p:extLst>
+      <p:ext uri="{BB962C8B-B14F-4D97-AF65-F5344CB8AC3E}">
+        <p14:creationId xmlns:p14="http://schemas.microsoft.com/office/powerpoint/2010/main" val="1024086991"/>
+      </p:ext>
+    </p:extLst>
+  </p:cSld>
+  <p:clrMapOvr>
+    <a:masterClrMapping/>
+  </p:clrMapOvr>
+</p:notes>
+</file>
+
 <file path=ppt/notesSlides/notesSlide7.xml><?xml version="1.0" encoding="utf-8"?>
 <p:notes xmlns:a="http://schemas.openxmlformats.org/drawingml/2006/main" xmlns:r="http://schemas.openxmlformats.org/officeDocument/2006/relationships" xmlns:p="http://schemas.openxmlformats.org/presentationml/2006/main">
   <p:cSld>
@@ -5220,7 +5843,7 @@
           <a:p>
             <a:r>
               <a:rPr lang="en-US" dirty="0"/>
-              <a:t>By the end of this lesson, you should be able to do three things. Number 1: distinguish primary and secondary data. Number 2: describe random, systematic and stratified sampling. Number 3: design a simple questionnaire and plan an interview.</a:t>
+              <a:t>By the end of this lesson, you should be able to do four things. Number 1: distinguish primary and secondary data with examples. Number 2: explain why sampling is used. Number 3: describe random, systematic and stratified sampling. Number 4: describe the main primary data collection techniques.</a:t>
             </a:r>
             <a:endParaRPr lang="en-US" dirty="0"/>
           </a:p>
@@ -5308,7 +5931,7 @@
           <a:p>
             <a:r>
               <a:rPr lang="en-US" dirty="0"/>
-              <a:t>Let us first remember what you already know. Geographers collect information in the field. A census counts people. Keep this in mind, because we shall build on it today.</a:t>
+              <a:t>Let us first remember what you already know. A census counts the whole population. A sample is a part of the population. A rain gauge measures rainfall. Keep this in mind, because we shall build on it today.</a:t>
             </a:r>
             <a:endParaRPr lang="en-US" dirty="0"/>
           </a:p>
@@ -6772,7 +7395,27 @@
                 <a:ea typeface="Times New Roman" pitchFamily="34" charset="-122"/>
                 <a:cs typeface="Times New Roman" pitchFamily="34" charset="-120"/>
               </a:rPr>
-              <a:t>The class wants to know why people in the town buy food at the market rather than in shops. They cannot ask everybody, so they must choose some people and prepare questions.</a:t>
+              <a:t>Aïcha's mother sells fabrics at the Grand Marché of Garoua and has had fewer customers recently.</a:t>
+            </a:r>
+            <a:endParaRPr lang="en-US" sz="4000" dirty="0"/>
+          </a:p>
+          <a:p>
+            <a:pPr algn="l" indent="0" marL="0">
+              <a:spcAft>
+                <a:spcPts val="800"/>
+              </a:spcAft>
+              <a:buNone/>
+            </a:pPr>
+            <a:r>
+              <a:rPr lang="en-US" sz="4000" dirty="0">
+                <a:solidFill>
+                  <a:srgbClr val="111111"/>
+                </a:solidFill>
+                <a:latin typeface="Times New Roman" pitchFamily="34" charset="0"/>
+                <a:ea typeface="Times New Roman" pitchFamily="34" charset="-122"/>
+                <a:cs typeface="Times New Roman" pitchFamily="34" charset="-120"/>
+              </a:rPr>
+              <a:t>Aïcha wants to use her geography to find out why.</a:t>
             </a:r>
             <a:endParaRPr lang="en-US" sz="4000" dirty="0"/>
           </a:p>
@@ -6907,7 +7550,7 @@
         <p:spPr>
           <a:xfrm>
             <a:off x="0" y="658368"/>
-            <a:ext cx="5120640" cy="5833872"/>
+            <a:ext cx="1463040" cy="5833872"/>
           </a:xfrm>
           <a:prstGeom prst="rect">
             <a:avLst/>
@@ -6922,8 +7565,8 @@
         </p:nvSpPr>
         <p:spPr>
           <a:xfrm>
-            <a:off x="5349240" y="1005840"/>
-            <a:ext cx="6522415" cy="731520"/>
+            <a:off x="1691640" y="1005840"/>
+            <a:ext cx="10180015" cy="731520"/>
           </a:xfrm>
           <a:prstGeom prst="rect">
             <a:avLst/>
@@ -6949,7 +7592,7 @@
                 <a:ea typeface="Times New Roman" pitchFamily="34" charset="-122"/>
                 <a:cs typeface="Times New Roman" pitchFamily="34" charset="-120"/>
               </a:rPr>
-              <a:t>Situation: Question 1</a:t>
+              <a:t>Situation in Real Life (continued)</a:t>
             </a:r>
             <a:endParaRPr lang="en-US" sz="3600" dirty="0"/>
           </a:p>
@@ -6963,8 +7606,8 @@
         </p:nvSpPr>
         <p:spPr>
           <a:xfrm>
-            <a:off x="5349240" y="1783080"/>
-            <a:ext cx="6522415" cy="4663440"/>
+            <a:off x="1691640" y="1783080"/>
+            <a:ext cx="10180015" cy="4663440"/>
           </a:xfrm>
           <a:prstGeom prst="rect">
             <a:avLst/>
@@ -6991,7 +7634,27 @@
                 <a:ea typeface="Times New Roman" pitchFamily="34" charset="-122"/>
                 <a:cs typeface="Times New Roman" pitchFamily="34" charset="-120"/>
               </a:rPr>
-              <a:t>What is the problem in the situation?</a:t>
+              <a:t>She cannot question the thousands of people who visit the market, and she does not know which information to collect or how.</a:t>
+            </a:r>
+            <a:endParaRPr lang="en-US" sz="4000" dirty="0"/>
+          </a:p>
+          <a:p>
+            <a:pPr algn="l" indent="0" marL="0">
+              <a:spcAft>
+                <a:spcPts val="800"/>
+              </a:spcAft>
+              <a:buNone/>
+            </a:pPr>
+            <a:r>
+              <a:rPr lang="en-US" sz="4000" dirty="0">
+                <a:solidFill>
+                  <a:srgbClr val="111111"/>
+                </a:solidFill>
+                <a:latin typeface="Times New Roman" pitchFamily="34" charset="0"/>
+                <a:ea typeface="Times New Roman" pitchFamily="34" charset="-122"/>
+                <a:cs typeface="Times New Roman" pitchFamily="34" charset="-120"/>
+              </a:rPr>
+              <a:t>She asks: "Where can I find reliable information, how can I choose the people to question, and which methods should I use?"</a:t>
             </a:r>
             <a:endParaRPr lang="en-US" sz="4000" dirty="0"/>
           </a:p>
@@ -7168,7 +7831,7 @@
                 <a:ea typeface="Times New Roman" pitchFamily="34" charset="-122"/>
                 <a:cs typeface="Times New Roman" pitchFamily="34" charset="-120"/>
               </a:rPr>
-              <a:t>Answer</a:t>
+              <a:t>Situation: Question 1</a:t>
             </a:r>
             <a:endParaRPr lang="en-US" sz="3600" dirty="0"/>
           </a:p>
@@ -7210,7 +7873,7 @@
                 <a:ea typeface="Times New Roman" pitchFamily="34" charset="-122"/>
                 <a:cs typeface="Times New Roman" pitchFamily="34" charset="-120"/>
               </a:rPr>
-              <a:t>The class must collect data from part of the population.</a:t>
+              <a:t>What is the problem in the situation?</a:t>
             </a:r>
             <a:endParaRPr lang="en-US" sz="4000" dirty="0"/>
           </a:p>
@@ -7387,7 +8050,7 @@
                 <a:ea typeface="Times New Roman" pitchFamily="34" charset="-122"/>
                 <a:cs typeface="Times New Roman" pitchFamily="34" charset="-120"/>
               </a:rPr>
-              <a:t>Situation: Question 2</a:t>
+              <a:t>Answer</a:t>
             </a:r>
             <a:endParaRPr lang="en-US" sz="3600" dirty="0"/>
           </a:p>
@@ -7429,7 +8092,7 @@
                 <a:ea typeface="Times New Roman" pitchFamily="34" charset="-122"/>
                 <a:cs typeface="Times New Roman" pitchFamily="34" charset="-120"/>
               </a:rPr>
-              <a:t>What is choosing some people called?</a:t>
+              <a:t>Aïcha does not know how to collect geographical data for her investigation.</a:t>
             </a:r>
             <a:endParaRPr lang="en-US" sz="4000" dirty="0"/>
           </a:p>
@@ -7606,7 +8269,7 @@
                 <a:ea typeface="Times New Roman" pitchFamily="34" charset="-122"/>
                 <a:cs typeface="Times New Roman" pitchFamily="34" charset="-120"/>
               </a:rPr>
-              <a:t>Answer</a:t>
+              <a:t>Situation: Question 2</a:t>
             </a:r>
             <a:endParaRPr lang="en-US" sz="3600" dirty="0"/>
           </a:p>
@@ -7648,7 +8311,7 @@
                 <a:ea typeface="Times New Roman" pitchFamily="34" charset="-122"/>
                 <a:cs typeface="Times New Roman" pitchFamily="34" charset="-120"/>
               </a:rPr>
-              <a:t>Sampling.</a:t>
+              <a:t>What does Aïcha need first?</a:t>
             </a:r>
             <a:endParaRPr lang="en-US" sz="4000" dirty="0"/>
           </a:p>
@@ -7825,7 +8488,7 @@
                 <a:ea typeface="Times New Roman" pitchFamily="34" charset="-122"/>
                 <a:cs typeface="Times New Roman" pitchFamily="34" charset="-120"/>
               </a:rPr>
-              <a:t>Situation: Question 3</a:t>
+              <a:t>Answer</a:t>
             </a:r>
             <a:endParaRPr lang="en-US" sz="3600" dirty="0"/>
           </a:p>
@@ -7867,7 +8530,7 @@
                 <a:ea typeface="Times New Roman" pitchFamily="34" charset="-122"/>
                 <a:cs typeface="Times New Roman" pitchFamily="34" charset="-120"/>
               </a:rPr>
-              <a:t>Which tool contains the questions?</a:t>
+              <a:t>Data: facts about customers and the market, not guesses.</a:t>
             </a:r>
             <a:endParaRPr lang="en-US" sz="4000" dirty="0"/>
           </a:p>
@@ -8044,7 +8707,7 @@
                 <a:ea typeface="Times New Roman" pitchFamily="34" charset="-122"/>
                 <a:cs typeface="Times New Roman" pitchFamily="34" charset="-120"/>
               </a:rPr>
-              <a:t>Possible Answer</a:t>
+              <a:t>Situation: Question 3</a:t>
             </a:r>
             <a:endParaRPr lang="en-US" sz="3600" dirty="0"/>
           </a:p>
@@ -8086,7 +8749,7 @@
                 <a:ea typeface="Times New Roman" pitchFamily="34" charset="-122"/>
                 <a:cs typeface="Times New Roman" pitchFamily="34" charset="-120"/>
               </a:rPr>
-              <a:t>A questionnaire.</a:t>
+              <a:t>How can she study the market without questioning everyone?</a:t>
             </a:r>
             <a:endParaRPr lang="en-US" sz="4000" dirty="0"/>
           </a:p>
@@ -8198,7 +8861,7 @@
                 <a:ea typeface="Calibri" pitchFamily="34" charset="-122"/>
                 <a:cs typeface="Calibri" pitchFamily="34" charset="-120"/>
               </a:rPr>
-              <a:t>ACTION TO TAKE</a:t>
+              <a:t>REAL-LIFE SITUATION</a:t>
             </a:r>
             <a:endParaRPr lang="en-US" sz="1400" dirty="0"/>
           </a:p>
@@ -8263,7 +8926,7 @@
                 <a:ea typeface="Times New Roman" pitchFamily="34" charset="-122"/>
                 <a:cs typeface="Times New Roman" pitchFamily="34" charset="-120"/>
               </a:rPr>
-              <a:t>Action to Take</a:t>
+              <a:t>Possible Answer</a:t>
             </a:r>
             <a:endParaRPr lang="en-US" sz="3600" dirty="0"/>
           </a:p>
@@ -8305,7 +8968,7 @@
                 <a:ea typeface="Times New Roman" pitchFamily="34" charset="-122"/>
                 <a:cs typeface="Times New Roman" pitchFamily="34" charset="-120"/>
               </a:rPr>
-              <a:t>Collect data honestly and with the right method.</a:t>
+              <a:t>By sampling: choosing a small, representative group.</a:t>
             </a:r>
             <a:endParaRPr lang="en-US" sz="4000" dirty="0"/>
           </a:p>
@@ -8417,7 +9080,7 @@
                 <a:ea typeface="Calibri" pitchFamily="34" charset="-122"/>
                 <a:cs typeface="Calibri" pitchFamily="34" charset="-120"/>
               </a:rPr>
-              <a:t>JUSTIFICATION</a:t>
+              <a:t>ACTION TO TAKE</a:t>
             </a:r>
             <a:endParaRPr lang="en-US" sz="1400" dirty="0"/>
           </a:p>
@@ -8482,7 +9145,7 @@
                 <a:ea typeface="Times New Roman" pitchFamily="34" charset="-122"/>
                 <a:cs typeface="Times New Roman" pitchFamily="34" charset="-120"/>
               </a:rPr>
-              <a:t>Justification of the Lesson</a:t>
+              <a:t>Action to Take</a:t>
             </a:r>
             <a:endParaRPr lang="en-US" sz="3600" dirty="0"/>
           </a:p>
@@ -8524,7 +9187,7 @@
                 <a:ea typeface="Times New Roman" pitchFamily="34" charset="-122"/>
                 <a:cs typeface="Times New Roman" pitchFamily="34" charset="-120"/>
               </a:rPr>
-              <a:t>This lesson helps us to collect reliable data for geographical studies.</a:t>
+              <a:t>Plan every investigation by stating the data needed, the sample and the collection techniques.</a:t>
             </a:r>
             <a:endParaRPr lang="en-US" sz="4000" dirty="0"/>
           </a:p>
@@ -8636,54 +9299,15 @@
                 <a:ea typeface="Calibri" pitchFamily="34" charset="-122"/>
                 <a:cs typeface="Calibri" pitchFamily="34" charset="-120"/>
               </a:rPr>
-              <a:t>1. SOURCES OF DATA</a:t>
+              <a:t>JUSTIFICATION</a:t>
             </a:r>
             <a:endParaRPr lang="en-US" sz="1400" dirty="0"/>
-          </a:p>
-        </p:txBody>
-      </p:sp>
-      <p:sp>
-        <p:nvSpPr>
-          <p:cNvPr id="3" name="Text 1"/>
-          <p:cNvSpPr/>
-          <p:nvPr/>
-        </p:nvSpPr>
-        <p:spPr>
-          <a:xfrm>
-            <a:off x="457200" y="1005840"/>
-            <a:ext cx="11277295" cy="731520"/>
-          </a:xfrm>
-          <a:prstGeom prst="rect">
-            <a:avLst/>
-          </a:prstGeom>
-          <a:noFill/>
-          <a:ln/>
-        </p:spPr>
-        <p:txBody>
-          <a:bodyPr wrap="square" lIns="0" tIns="0" rIns="0" bIns="0" rtlCol="0" anchor="ctr"/>
-          <a:lstStyle/>
-          <a:p>
-            <a:pPr algn="ctr" indent="0" marL="0">
-              <a:buNone/>
-            </a:pPr>
-            <a:r>
-              <a:rPr lang="en-US" sz="3600" b="1" dirty="0">
-                <a:solidFill>
-                  <a:srgbClr val="990011"/>
-                </a:solidFill>
-                <a:latin typeface="Times New Roman" pitchFamily="34" charset="0"/>
-                <a:ea typeface="Times New Roman" pitchFamily="34" charset="-122"/>
-                <a:cs typeface="Times New Roman" pitchFamily="34" charset="-120"/>
-              </a:rPr>
-              <a:t>Activity 1</a:t>
-            </a:r>
-            <a:endParaRPr lang="en-US" sz="3600" dirty="0"/>
           </a:p>
         </p:txBody>
       </p:sp>
       <p:pic>
         <p:nvPicPr>
-          <p:cNvPr id="4" name="Image 0" descr="/home/claude/f4/img/v2/data_sources_big.png">    </p:cNvPr>
+          <p:cNvPr id="3" name="Image 0" descr="/home/claude/f4/img/minesec_sheet.png">    </p:cNvPr>
           <p:cNvPicPr>
             <a:picLocks noChangeAspect="1"/>
           </p:cNvPicPr>
@@ -8697,8 +9321,8 @@
         </p:blipFill>
         <p:spPr>
           <a:xfrm>
-            <a:off x="629930" y="1783080"/>
-            <a:ext cx="10931835" cy="4270248"/>
+            <a:off x="0" y="658368"/>
+            <a:ext cx="5120640" cy="5833872"/>
           </a:xfrm>
           <a:prstGeom prst="rect">
             <a:avLst/>
@@ -8707,14 +9331,14 @@
       </p:pic>
       <p:sp>
         <p:nvSpPr>
-          <p:cNvPr id="5" name="Text 2"/>
+          <p:cNvPr id="4" name="Text 1"/>
           <p:cNvSpPr/>
           <p:nvPr/>
         </p:nvSpPr>
         <p:spPr>
           <a:xfrm>
-            <a:off x="457200" y="6089904"/>
-            <a:ext cx="11277295" cy="347472"/>
+            <a:off x="5349240" y="1005840"/>
+            <a:ext cx="6522415" cy="731520"/>
           </a:xfrm>
           <a:prstGeom prst="rect">
             <a:avLst/>
@@ -8723,24 +9347,68 @@
           <a:ln/>
         </p:spPr>
         <p:txBody>
-          <a:bodyPr wrap="square" lIns="0" tIns="0" rIns="0" bIns="0" rtlCol="0" anchor="ctr"/>
+          <a:bodyPr wrap="square" lIns="0" tIns="0" rIns="0" bIns="0" rtlCol="0" anchor="ctr">
+            <a:normAutofit/>
+          </a:bodyPr>
           <a:lstStyle/>
           <a:p>
             <a:pPr algn="ctr" indent="0" marL="0">
               <a:buNone/>
             </a:pPr>
             <a:r>
-              <a:rPr lang="en-US" sz="1800" i="1" dirty="0">
-                <a:solidFill>
-                  <a:srgbClr val="555555"/>
+              <a:rPr lang="en-US" sz="3600" b="1" dirty="0">
+                <a:solidFill>
+                  <a:srgbClr val="990011"/>
                 </a:solidFill>
                 <a:latin typeface="Times New Roman" pitchFamily="34" charset="0"/>
                 <a:ea typeface="Times New Roman" pitchFamily="34" charset="-122"/>
                 <a:cs typeface="Times New Roman" pitchFamily="34" charset="-120"/>
               </a:rPr>
-              <a:t>Primary and secondary data.</a:t>
-            </a:r>
-            <a:endParaRPr lang="en-US" sz="1800" dirty="0"/>
+              <a:t>Justification of the Lesson</a:t>
+            </a:r>
+            <a:endParaRPr lang="en-US" sz="3600" dirty="0"/>
+          </a:p>
+        </p:txBody>
+      </p:sp>
+      <p:sp>
+        <p:nvSpPr>
+          <p:cNvPr id="5" name="Text 2"/>
+          <p:cNvSpPr/>
+          <p:nvPr/>
+        </p:nvSpPr>
+        <p:spPr>
+          <a:xfrm>
+            <a:off x="5349240" y="1783080"/>
+            <a:ext cx="6522415" cy="4663440"/>
+          </a:xfrm>
+          <a:prstGeom prst="rect">
+            <a:avLst/>
+          </a:prstGeom>
+          <a:noFill/>
+          <a:ln/>
+        </p:spPr>
+        <p:txBody>
+          <a:bodyPr wrap="square" lIns="0" tIns="0" rIns="0" bIns="0" rtlCol="0" anchor="t"/>
+          <a:lstStyle/>
+          <a:p>
+            <a:pPr algn="l" indent="0" marL="0">
+              <a:spcAft>
+                <a:spcPts val="800"/>
+              </a:spcAft>
+              <a:buNone/>
+            </a:pPr>
+            <a:r>
+              <a:rPr lang="en-US" sz="4000" dirty="0">
+                <a:solidFill>
+                  <a:srgbClr val="111111"/>
+                </a:solidFill>
+                <a:latin typeface="Times New Roman" pitchFamily="34" charset="0"/>
+                <a:ea typeface="Times New Roman" pitchFamily="34" charset="-122"/>
+                <a:cs typeface="Times New Roman" pitchFamily="34" charset="-120"/>
+              </a:rPr>
+              <a:t>This lesson gives the methods used in fieldwork, projects and examinations to collect reliable data.</a:t>
+            </a:r>
+            <a:endParaRPr lang="en-US" sz="4000" dirty="0"/>
           </a:p>
         </p:txBody>
       </p:sp>
@@ -9445,15 +10113,54 @@
                 <a:ea typeface="Calibri" pitchFamily="34" charset="-122"/>
                 <a:cs typeface="Calibri" pitchFamily="34" charset="-120"/>
               </a:rPr>
-              <a:t>1. SOURCES OF DATA</a:t>
+              <a:t>1. SOURCES</a:t>
             </a:r>
             <a:endParaRPr lang="en-US" sz="1400" dirty="0"/>
+          </a:p>
+        </p:txBody>
+      </p:sp>
+      <p:sp>
+        <p:nvSpPr>
+          <p:cNvPr id="3" name="Text 1"/>
+          <p:cNvSpPr/>
+          <p:nvPr/>
+        </p:nvSpPr>
+        <p:spPr>
+          <a:xfrm>
+            <a:off x="457200" y="1005840"/>
+            <a:ext cx="11277295" cy="731520"/>
+          </a:xfrm>
+          <a:prstGeom prst="rect">
+            <a:avLst/>
+          </a:prstGeom>
+          <a:noFill/>
+          <a:ln/>
+        </p:spPr>
+        <p:txBody>
+          <a:bodyPr wrap="square" lIns="0" tIns="0" rIns="0" bIns="0" rtlCol="0" anchor="ctr"/>
+          <a:lstStyle/>
+          <a:p>
+            <a:pPr algn="ctr" indent="0" marL="0">
+              <a:buNone/>
+            </a:pPr>
+            <a:r>
+              <a:rPr lang="en-US" sz="3600" b="1" dirty="0">
+                <a:solidFill>
+                  <a:srgbClr val="990011"/>
+                </a:solidFill>
+                <a:latin typeface="Times New Roman" pitchFamily="34" charset="0"/>
+                <a:ea typeface="Times New Roman" pitchFamily="34" charset="-122"/>
+                <a:cs typeface="Times New Roman" pitchFamily="34" charset="-120"/>
+              </a:rPr>
+              <a:t>Activity 1</a:t>
+            </a:r>
+            <a:endParaRPr lang="en-US" sz="3600" dirty="0"/>
           </a:p>
         </p:txBody>
       </p:sp>
       <p:pic>
         <p:nvPicPr>
-          <p:cNvPr id="3" name="Image 0" descr="/home/claude/f4/img/minesec_sheet.png">    </p:cNvPr>
+          <p:cNvPr id="4" name="Image 0" descr="/home/claude/f4/img/v2/data_sources_big.png">    </p:cNvPr>
           <p:cNvPicPr>
             <a:picLocks noChangeAspect="1"/>
           </p:cNvPicPr>
@@ -9467,8 +10174,8 @@
         </p:blipFill>
         <p:spPr>
           <a:xfrm>
-            <a:off x="0" y="658368"/>
-            <a:ext cx="5120640" cy="5833872"/>
+            <a:off x="629930" y="1783080"/>
+            <a:ext cx="10931835" cy="4270248"/>
           </a:xfrm>
           <a:prstGeom prst="rect">
             <a:avLst/>
@@ -9477,14 +10184,14 @@
       </p:pic>
       <p:sp>
         <p:nvSpPr>
-          <p:cNvPr id="4" name="Text 1"/>
+          <p:cNvPr id="5" name="Text 2"/>
           <p:cNvSpPr/>
           <p:nvPr/>
         </p:nvSpPr>
         <p:spPr>
           <a:xfrm>
-            <a:off x="5349240" y="1005840"/>
-            <a:ext cx="6522415" cy="731520"/>
+            <a:off x="457200" y="6089904"/>
+            <a:ext cx="11277295" cy="347472"/>
           </a:xfrm>
           <a:prstGeom prst="rect">
             <a:avLst/>
@@ -9493,68 +10200,24 @@
           <a:ln/>
         </p:spPr>
         <p:txBody>
-          <a:bodyPr wrap="square" lIns="0" tIns="0" rIns="0" bIns="0" rtlCol="0" anchor="ctr">
-            <a:normAutofit/>
-          </a:bodyPr>
+          <a:bodyPr wrap="square" lIns="0" tIns="0" rIns="0" bIns="0" rtlCol="0" anchor="ctr"/>
           <a:lstStyle/>
           <a:p>
             <a:pPr algn="ctr" indent="0" marL="0">
               <a:buNone/>
             </a:pPr>
             <a:r>
-              <a:rPr lang="en-US" sz="3600" b="1" dirty="0">
-                <a:solidFill>
-                  <a:srgbClr val="990011"/>
+              <a:rPr lang="en-US" sz="1800" i="1" dirty="0">
+                <a:solidFill>
+                  <a:srgbClr val="555555"/>
                 </a:solidFill>
                 <a:latin typeface="Times New Roman" pitchFamily="34" charset="0"/>
                 <a:ea typeface="Times New Roman" pitchFamily="34" charset="-122"/>
                 <a:cs typeface="Times New Roman" pitchFamily="34" charset="-120"/>
               </a:rPr>
-              <a:t>Activity 1: Question</a:t>
-            </a:r>
-            <a:endParaRPr lang="en-US" sz="3600" dirty="0"/>
-          </a:p>
-        </p:txBody>
-      </p:sp>
-      <p:sp>
-        <p:nvSpPr>
-          <p:cNvPr id="5" name="Text 2"/>
-          <p:cNvSpPr/>
-          <p:nvPr/>
-        </p:nvSpPr>
-        <p:spPr>
-          <a:xfrm>
-            <a:off x="5349240" y="1783080"/>
-            <a:ext cx="6522415" cy="4663440"/>
-          </a:xfrm>
-          <a:prstGeom prst="rect">
-            <a:avLst/>
-          </a:prstGeom>
-          <a:noFill/>
-          <a:ln/>
-        </p:spPr>
-        <p:txBody>
-          <a:bodyPr wrap="square" lIns="0" tIns="0" rIns="0" bIns="0" rtlCol="0" anchor="t"/>
-          <a:lstStyle/>
-          <a:p>
-            <a:pPr algn="l" indent="0" marL="0">
-              <a:spcAft>
-                <a:spcPts val="800"/>
-              </a:spcAft>
-              <a:buNone/>
-            </a:pPr>
-            <a:r>
-              <a:rPr lang="en-US" sz="4000" dirty="0">
-                <a:solidFill>
-                  <a:srgbClr val="111111"/>
-                </a:solidFill>
-                <a:latin typeface="Times New Roman" pitchFamily="34" charset="0"/>
-                <a:ea typeface="Times New Roman" pitchFamily="34" charset="-122"/>
-                <a:cs typeface="Times New Roman" pitchFamily="34" charset="-120"/>
-              </a:rPr>
-              <a:t>Distinguish primary and secondary data with one example each.</a:t>
-            </a:r>
-            <a:endParaRPr lang="en-US" sz="4000" dirty="0"/>
+              <a:t>Primary and secondary data.</a:t>
+            </a:r>
+            <a:endParaRPr lang="en-US" sz="1800" dirty="0"/>
           </a:p>
         </p:txBody>
       </p:sp>
@@ -9664,7 +10327,7 @@
                 <a:ea typeface="Calibri" pitchFamily="34" charset="-122"/>
                 <a:cs typeface="Calibri" pitchFamily="34" charset="-120"/>
               </a:rPr>
-              <a:t>1. SOURCES OF DATA</a:t>
+              <a:t>1. SOURCES</a:t>
             </a:r>
             <a:endParaRPr lang="en-US" sz="1400" dirty="0"/>
           </a:p>
@@ -9729,7 +10392,7 @@
                 <a:ea typeface="Times New Roman" pitchFamily="34" charset="-122"/>
                 <a:cs typeface="Times New Roman" pitchFamily="34" charset="-120"/>
               </a:rPr>
-              <a:t>Activity 1: Answer</a:t>
+              <a:t>Activity 1: Question</a:t>
             </a:r>
             <a:endParaRPr lang="en-US" sz="3600" dirty="0"/>
           </a:p>
@@ -9771,7 +10434,7 @@
                 <a:ea typeface="Times New Roman" pitchFamily="34" charset="-122"/>
                 <a:cs typeface="Times New Roman" pitchFamily="34" charset="-120"/>
               </a:rPr>
-              <a:t>Primary: collected yourself (a traffic count). Secondary: already exists (census).</a:t>
+              <a:t>Is a BUCREP census report primary or secondary data for a student?</a:t>
             </a:r>
             <a:endParaRPr lang="en-US" sz="4000" dirty="0"/>
           </a:p>
@@ -9883,54 +10546,15 @@
                 <a:ea typeface="Calibri" pitchFamily="34" charset="-122"/>
                 <a:cs typeface="Calibri" pitchFamily="34" charset="-120"/>
               </a:rPr>
-              <a:t>2. SAMPLING</a:t>
+              <a:t>1. SOURCES</a:t>
             </a:r>
             <a:endParaRPr lang="en-US" sz="1400" dirty="0"/>
-          </a:p>
-        </p:txBody>
-      </p:sp>
-      <p:sp>
-        <p:nvSpPr>
-          <p:cNvPr id="3" name="Text 1"/>
-          <p:cNvSpPr/>
-          <p:nvPr/>
-        </p:nvSpPr>
-        <p:spPr>
-          <a:xfrm>
-            <a:off x="457200" y="1005840"/>
-            <a:ext cx="11277295" cy="731520"/>
-          </a:xfrm>
-          <a:prstGeom prst="rect">
-            <a:avLst/>
-          </a:prstGeom>
-          <a:noFill/>
-          <a:ln/>
-        </p:spPr>
-        <p:txBody>
-          <a:bodyPr wrap="square" lIns="0" tIns="0" rIns="0" bIns="0" rtlCol="0" anchor="ctr"/>
-          <a:lstStyle/>
-          <a:p>
-            <a:pPr algn="ctr" indent="0" marL="0">
-              <a:buNone/>
-            </a:pPr>
-            <a:r>
-              <a:rPr lang="en-US" sz="3600" b="1" dirty="0">
-                <a:solidFill>
-                  <a:srgbClr val="990011"/>
-                </a:solidFill>
-                <a:latin typeface="Times New Roman" pitchFamily="34" charset="0"/>
-                <a:ea typeface="Times New Roman" pitchFamily="34" charset="-122"/>
-                <a:cs typeface="Times New Roman" pitchFamily="34" charset="-120"/>
-              </a:rPr>
-              <a:t>Activity 2</a:t>
-            </a:r>
-            <a:endParaRPr lang="en-US" sz="3600" dirty="0"/>
           </a:p>
         </p:txBody>
       </p:sp>
       <p:pic>
         <p:nvPicPr>
-          <p:cNvPr id="4" name="Image 0" descr="/home/claude/f4/img/v2/sampling_big.png">    </p:cNvPr>
+          <p:cNvPr id="3" name="Image 0" descr="/home/claude/f4/img/minesec_sheet.png">    </p:cNvPr>
           <p:cNvPicPr>
             <a:picLocks noChangeAspect="1"/>
           </p:cNvPicPr>
@@ -9944,8 +10568,8 @@
         </p:blipFill>
         <p:spPr>
           <a:xfrm>
-            <a:off x="629930" y="1783080"/>
-            <a:ext cx="10931835" cy="4270248"/>
+            <a:off x="0" y="658368"/>
+            <a:ext cx="5120640" cy="5833872"/>
           </a:xfrm>
           <a:prstGeom prst="rect">
             <a:avLst/>
@@ -9954,14 +10578,14 @@
       </p:pic>
       <p:sp>
         <p:nvSpPr>
-          <p:cNvPr id="5" name="Text 2"/>
+          <p:cNvPr id="4" name="Text 1"/>
           <p:cNvSpPr/>
           <p:nvPr/>
         </p:nvSpPr>
         <p:spPr>
           <a:xfrm>
-            <a:off x="457200" y="6089904"/>
-            <a:ext cx="11277295" cy="347472"/>
+            <a:off x="5349240" y="1005840"/>
+            <a:ext cx="6522415" cy="731520"/>
           </a:xfrm>
           <a:prstGeom prst="rect">
             <a:avLst/>
@@ -9970,24 +10594,68 @@
           <a:ln/>
         </p:spPr>
         <p:txBody>
-          <a:bodyPr wrap="square" lIns="0" tIns="0" rIns="0" bIns="0" rtlCol="0" anchor="ctr"/>
+          <a:bodyPr wrap="square" lIns="0" tIns="0" rIns="0" bIns="0" rtlCol="0" anchor="ctr">
+            <a:normAutofit/>
+          </a:bodyPr>
           <a:lstStyle/>
           <a:p>
             <a:pPr algn="ctr" indent="0" marL="0">
               <a:buNone/>
             </a:pPr>
             <a:r>
-              <a:rPr lang="en-US" sz="1800" i="1" dirty="0">
-                <a:solidFill>
-                  <a:srgbClr val="555555"/>
+              <a:rPr lang="en-US" sz="3600" b="1" dirty="0">
+                <a:solidFill>
+                  <a:srgbClr val="990011"/>
                 </a:solidFill>
                 <a:latin typeface="Times New Roman" pitchFamily="34" charset="0"/>
                 <a:ea typeface="Times New Roman" pitchFamily="34" charset="-122"/>
                 <a:cs typeface="Times New Roman" pitchFamily="34" charset="-120"/>
               </a:rPr>
-              <a:t>Sampling methods.</a:t>
-            </a:r>
-            <a:endParaRPr lang="en-US" sz="1800" dirty="0"/>
+              <a:t>Activity 1: Answer</a:t>
+            </a:r>
+            <a:endParaRPr lang="en-US" sz="3600" dirty="0"/>
+          </a:p>
+        </p:txBody>
+      </p:sp>
+      <p:sp>
+        <p:nvSpPr>
+          <p:cNvPr id="5" name="Text 2"/>
+          <p:cNvSpPr/>
+          <p:nvPr/>
+        </p:nvSpPr>
+        <p:spPr>
+          <a:xfrm>
+            <a:off x="5349240" y="1783080"/>
+            <a:ext cx="6522415" cy="4663440"/>
+          </a:xfrm>
+          <a:prstGeom prst="rect">
+            <a:avLst/>
+          </a:prstGeom>
+          <a:noFill/>
+          <a:ln/>
+        </p:spPr>
+        <p:txBody>
+          <a:bodyPr wrap="square" lIns="0" tIns="0" rIns="0" bIns="0" rtlCol="0" anchor="t"/>
+          <a:lstStyle/>
+          <a:p>
+            <a:pPr algn="l" indent="0" marL="0">
+              <a:spcAft>
+                <a:spcPts val="800"/>
+              </a:spcAft>
+              <a:buNone/>
+            </a:pPr>
+            <a:r>
+              <a:rPr lang="en-US" sz="4000" dirty="0">
+                <a:solidFill>
+                  <a:srgbClr val="111111"/>
+                </a:solidFill>
+                <a:latin typeface="Times New Roman" pitchFamily="34" charset="0"/>
+                <a:ea typeface="Times New Roman" pitchFamily="34" charset="-122"/>
+                <a:cs typeface="Times New Roman" pitchFamily="34" charset="-120"/>
+              </a:rPr>
+              <a:t>Secondary data.</a:t>
+            </a:r>
+            <a:endParaRPr lang="en-US" sz="4000" dirty="0"/>
           </a:p>
         </p:txBody>
       </p:sp>
@@ -10103,9 +10771,48 @@
           </a:p>
         </p:txBody>
       </p:sp>
+      <p:sp>
+        <p:nvSpPr>
+          <p:cNvPr id="3" name="Text 1"/>
+          <p:cNvSpPr/>
+          <p:nvPr/>
+        </p:nvSpPr>
+        <p:spPr>
+          <a:xfrm>
+            <a:off x="457200" y="1005840"/>
+            <a:ext cx="11277295" cy="731520"/>
+          </a:xfrm>
+          <a:prstGeom prst="rect">
+            <a:avLst/>
+          </a:prstGeom>
+          <a:noFill/>
+          <a:ln/>
+        </p:spPr>
+        <p:txBody>
+          <a:bodyPr wrap="square" lIns="0" tIns="0" rIns="0" bIns="0" rtlCol="0" anchor="ctr"/>
+          <a:lstStyle/>
+          <a:p>
+            <a:pPr algn="ctr" indent="0" marL="0">
+              <a:buNone/>
+            </a:pPr>
+            <a:r>
+              <a:rPr lang="en-US" sz="3600" b="1" dirty="0">
+                <a:solidFill>
+                  <a:srgbClr val="990011"/>
+                </a:solidFill>
+                <a:latin typeface="Times New Roman" pitchFamily="34" charset="0"/>
+                <a:ea typeface="Times New Roman" pitchFamily="34" charset="-122"/>
+                <a:cs typeface="Times New Roman" pitchFamily="34" charset="-120"/>
+              </a:rPr>
+              <a:t>Activity 2</a:t>
+            </a:r>
+            <a:endParaRPr lang="en-US" sz="3600" dirty="0"/>
+          </a:p>
+        </p:txBody>
+      </p:sp>
       <p:pic>
         <p:nvPicPr>
-          <p:cNvPr id="3" name="Image 0" descr="/home/claude/f4/img/minesec_sheet.png">    </p:cNvPr>
+          <p:cNvPr id="4" name="Image 0" descr="/home/claude/f4/img/v2/sampling_big.png">    </p:cNvPr>
           <p:cNvPicPr>
             <a:picLocks noChangeAspect="1"/>
           </p:cNvPicPr>
@@ -10119,8 +10826,8 @@
         </p:blipFill>
         <p:spPr>
           <a:xfrm>
-            <a:off x="0" y="658368"/>
-            <a:ext cx="5120640" cy="5833872"/>
+            <a:off x="629930" y="1783080"/>
+            <a:ext cx="10931835" cy="4270248"/>
           </a:xfrm>
           <a:prstGeom prst="rect">
             <a:avLst/>
@@ -10129,14 +10836,14 @@
       </p:pic>
       <p:sp>
         <p:nvSpPr>
-          <p:cNvPr id="4" name="Text 1"/>
+          <p:cNvPr id="5" name="Text 2"/>
           <p:cNvSpPr/>
           <p:nvPr/>
         </p:nvSpPr>
         <p:spPr>
           <a:xfrm>
-            <a:off x="5349240" y="1005840"/>
-            <a:ext cx="6522415" cy="731520"/>
+            <a:off x="457200" y="6089904"/>
+            <a:ext cx="11277295" cy="347472"/>
           </a:xfrm>
           <a:prstGeom prst="rect">
             <a:avLst/>
@@ -10145,68 +10852,24 @@
           <a:ln/>
         </p:spPr>
         <p:txBody>
-          <a:bodyPr wrap="square" lIns="0" tIns="0" rIns="0" bIns="0" rtlCol="0" anchor="ctr">
-            <a:normAutofit/>
-          </a:bodyPr>
+          <a:bodyPr wrap="square" lIns="0" tIns="0" rIns="0" bIns="0" rtlCol="0" anchor="ctr"/>
           <a:lstStyle/>
           <a:p>
             <a:pPr algn="ctr" indent="0" marL="0">
               <a:buNone/>
             </a:pPr>
             <a:r>
-              <a:rPr lang="en-US" sz="3600" b="1" dirty="0">
-                <a:solidFill>
-                  <a:srgbClr val="990011"/>
+              <a:rPr lang="en-US" sz="1800" i="1" dirty="0">
+                <a:solidFill>
+                  <a:srgbClr val="555555"/>
                 </a:solidFill>
                 <a:latin typeface="Times New Roman" pitchFamily="34" charset="0"/>
                 <a:ea typeface="Times New Roman" pitchFamily="34" charset="-122"/>
                 <a:cs typeface="Times New Roman" pitchFamily="34" charset="-120"/>
               </a:rPr>
-              <a:t>Activity 2: Question</a:t>
-            </a:r>
-            <a:endParaRPr lang="en-US" sz="3600" dirty="0"/>
-          </a:p>
-        </p:txBody>
-      </p:sp>
-      <p:sp>
-        <p:nvSpPr>
-          <p:cNvPr id="5" name="Text 2"/>
-          <p:cNvSpPr/>
-          <p:nvPr/>
-        </p:nvSpPr>
-        <p:spPr>
-          <a:xfrm>
-            <a:off x="5349240" y="1783080"/>
-            <a:ext cx="6522415" cy="4663440"/>
-          </a:xfrm>
-          <a:prstGeom prst="rect">
-            <a:avLst/>
-          </a:prstGeom>
-          <a:noFill/>
-          <a:ln/>
-        </p:spPr>
-        <p:txBody>
-          <a:bodyPr wrap="square" lIns="0" tIns="0" rIns="0" bIns="0" rtlCol="0" anchor="t"/>
-          <a:lstStyle/>
-          <a:p>
-            <a:pPr algn="l" indent="0" marL="0">
-              <a:spcAft>
-                <a:spcPts val="800"/>
-              </a:spcAft>
-              <a:buNone/>
-            </a:pPr>
-            <a:r>
-              <a:rPr lang="en-US" sz="4000" dirty="0">
-                <a:solidFill>
-                  <a:srgbClr val="111111"/>
-                </a:solidFill>
-                <a:latin typeface="Times New Roman" pitchFamily="34" charset="0"/>
-                <a:ea typeface="Times New Roman" pitchFamily="34" charset="-122"/>
-                <a:cs typeface="Times New Roman" pitchFamily="34" charset="-120"/>
-              </a:rPr>
-              <a:t>Why do geographers use samples?</a:t>
-            </a:r>
-            <a:endParaRPr lang="en-US" sz="4000" dirty="0"/>
+              <a:t>Three sampling methods.</a:t>
+            </a:r>
+            <a:endParaRPr lang="en-US" sz="1800" dirty="0"/>
           </a:p>
         </p:txBody>
       </p:sp>
@@ -10381,7 +11044,7 @@
                 <a:ea typeface="Times New Roman" pitchFamily="34" charset="-122"/>
                 <a:cs typeface="Times New Roman" pitchFamily="34" charset="-120"/>
               </a:rPr>
-              <a:t>Activity 2: Answer</a:t>
+              <a:t>Activity 2: Question</a:t>
             </a:r>
             <a:endParaRPr lang="en-US" sz="3600" dirty="0"/>
           </a:p>
@@ -10423,7 +11086,7 @@
                 <a:ea typeface="Times New Roman" pitchFamily="34" charset="-122"/>
                 <a:cs typeface="Times New Roman" pitchFamily="34" charset="-120"/>
               </a:rPr>
-              <a:t>It saves time and money when the whole population cannot be studied.</a:t>
+              <a:t>In which method does every member have an equal chance of being chosen?</a:t>
             </a:r>
             <a:endParaRPr lang="en-US" sz="4000" dirty="0"/>
           </a:p>
@@ -10535,54 +11198,15 @@
                 <a:ea typeface="Calibri" pitchFamily="34" charset="-122"/>
                 <a:cs typeface="Calibri" pitchFamily="34" charset="-120"/>
               </a:rPr>
-              <a:t>2. SAMPLING METHODS</a:t>
+              <a:t>2. SAMPLING</a:t>
             </a:r>
             <a:endParaRPr lang="en-US" sz="1400" dirty="0"/>
-          </a:p>
-        </p:txBody>
-      </p:sp>
-      <p:sp>
-        <p:nvSpPr>
-          <p:cNvPr id="3" name="Text 1"/>
-          <p:cNvSpPr/>
-          <p:nvPr/>
-        </p:nvSpPr>
-        <p:spPr>
-          <a:xfrm>
-            <a:off x="457200" y="1005840"/>
-            <a:ext cx="11277295" cy="731520"/>
-          </a:xfrm>
-          <a:prstGeom prst="rect">
-            <a:avLst/>
-          </a:prstGeom>
-          <a:noFill/>
-          <a:ln/>
-        </p:spPr>
-        <p:txBody>
-          <a:bodyPr wrap="square" lIns="0" tIns="0" rIns="0" bIns="0" rtlCol="0" anchor="ctr"/>
-          <a:lstStyle/>
-          <a:p>
-            <a:pPr algn="ctr" indent="0" marL="0">
-              <a:buNone/>
-            </a:pPr>
-            <a:r>
-              <a:rPr lang="en-US" sz="3600" b="1" dirty="0">
-                <a:solidFill>
-                  <a:srgbClr val="990011"/>
-                </a:solidFill>
-                <a:latin typeface="Times New Roman" pitchFamily="34" charset="0"/>
-                <a:ea typeface="Times New Roman" pitchFamily="34" charset="-122"/>
-                <a:cs typeface="Times New Roman" pitchFamily="34" charset="-120"/>
-              </a:rPr>
-              <a:t>Activity 3</a:t>
-            </a:r>
-            <a:endParaRPr lang="en-US" sz="3600" dirty="0"/>
           </a:p>
         </p:txBody>
       </p:sp>
       <p:pic>
         <p:nvPicPr>
-          <p:cNvPr id="4" name="Image 0" descr="/home/claude/f4/img/v2/sampling_big.png">    </p:cNvPr>
+          <p:cNvPr id="3" name="Image 0" descr="/home/claude/f4/img/minesec_sheet.png">    </p:cNvPr>
           <p:cNvPicPr>
             <a:picLocks noChangeAspect="1"/>
           </p:cNvPicPr>
@@ -10596,8 +11220,8 @@
         </p:blipFill>
         <p:spPr>
           <a:xfrm>
-            <a:off x="629930" y="1783080"/>
-            <a:ext cx="10931835" cy="4270248"/>
+            <a:off x="0" y="658368"/>
+            <a:ext cx="5120640" cy="5833872"/>
           </a:xfrm>
           <a:prstGeom prst="rect">
             <a:avLst/>
@@ -10606,14 +11230,14 @@
       </p:pic>
       <p:sp>
         <p:nvSpPr>
-          <p:cNvPr id="5" name="Text 2"/>
+          <p:cNvPr id="4" name="Text 1"/>
           <p:cNvSpPr/>
           <p:nvPr/>
         </p:nvSpPr>
         <p:spPr>
           <a:xfrm>
-            <a:off x="457200" y="6089904"/>
-            <a:ext cx="11277295" cy="347472"/>
+            <a:off x="5349240" y="1005840"/>
+            <a:ext cx="6522415" cy="731520"/>
           </a:xfrm>
           <a:prstGeom prst="rect">
             <a:avLst/>
@@ -10622,24 +11246,68 @@
           <a:ln/>
         </p:spPr>
         <p:txBody>
-          <a:bodyPr wrap="square" lIns="0" tIns="0" rIns="0" bIns="0" rtlCol="0" anchor="ctr"/>
+          <a:bodyPr wrap="square" lIns="0" tIns="0" rIns="0" bIns="0" rtlCol="0" anchor="ctr">
+            <a:normAutofit/>
+          </a:bodyPr>
           <a:lstStyle/>
           <a:p>
             <a:pPr algn="ctr" indent="0" marL="0">
               <a:buNone/>
             </a:pPr>
             <a:r>
-              <a:rPr lang="en-US" sz="1800" i="1" dirty="0">
-                <a:solidFill>
-                  <a:srgbClr val="555555"/>
+              <a:rPr lang="en-US" sz="3600" b="1" dirty="0">
+                <a:solidFill>
+                  <a:srgbClr val="990011"/>
                 </a:solidFill>
                 <a:latin typeface="Times New Roman" pitchFamily="34" charset="0"/>
                 <a:ea typeface="Times New Roman" pitchFamily="34" charset="-122"/>
                 <a:cs typeface="Times New Roman" pitchFamily="34" charset="-120"/>
               </a:rPr>
-              <a:t>Random, systematic and stratified.</a:t>
-            </a:r>
-            <a:endParaRPr lang="en-US" sz="1800" dirty="0"/>
+              <a:t>Activity 2: Answer</a:t>
+            </a:r>
+            <a:endParaRPr lang="en-US" sz="3600" dirty="0"/>
+          </a:p>
+        </p:txBody>
+      </p:sp>
+      <p:sp>
+        <p:nvSpPr>
+          <p:cNvPr id="5" name="Text 2"/>
+          <p:cNvSpPr/>
+          <p:nvPr/>
+        </p:nvSpPr>
+        <p:spPr>
+          <a:xfrm>
+            <a:off x="5349240" y="1783080"/>
+            <a:ext cx="6522415" cy="4663440"/>
+          </a:xfrm>
+          <a:prstGeom prst="rect">
+            <a:avLst/>
+          </a:prstGeom>
+          <a:noFill/>
+          <a:ln/>
+        </p:spPr>
+        <p:txBody>
+          <a:bodyPr wrap="square" lIns="0" tIns="0" rIns="0" bIns="0" rtlCol="0" anchor="t"/>
+          <a:lstStyle/>
+          <a:p>
+            <a:pPr algn="l" indent="0" marL="0">
+              <a:spcAft>
+                <a:spcPts val="800"/>
+              </a:spcAft>
+              <a:buNone/>
+            </a:pPr>
+            <a:r>
+              <a:rPr lang="en-US" sz="4000" dirty="0">
+                <a:solidFill>
+                  <a:srgbClr val="111111"/>
+                </a:solidFill>
+                <a:latin typeface="Times New Roman" pitchFamily="34" charset="0"/>
+                <a:ea typeface="Times New Roman" pitchFamily="34" charset="-122"/>
+                <a:cs typeface="Times New Roman" pitchFamily="34" charset="-120"/>
+              </a:rPr>
+              <a:t>Random sampling.</a:t>
+            </a:r>
+            <a:endParaRPr lang="en-US" sz="4000" dirty="0"/>
           </a:p>
         </p:txBody>
       </p:sp>
@@ -10749,15 +11417,54 @@
                 <a:ea typeface="Calibri" pitchFamily="34" charset="-122"/>
                 <a:cs typeface="Calibri" pitchFamily="34" charset="-120"/>
               </a:rPr>
-              <a:t>2. SAMPLING METHODS</a:t>
+              <a:t>2. SAMPLING</a:t>
             </a:r>
             <a:endParaRPr lang="en-US" sz="1400" dirty="0"/>
+          </a:p>
+        </p:txBody>
+      </p:sp>
+      <p:sp>
+        <p:nvSpPr>
+          <p:cNvPr id="3" name="Text 1"/>
+          <p:cNvSpPr/>
+          <p:nvPr/>
+        </p:nvSpPr>
+        <p:spPr>
+          <a:xfrm>
+            <a:off x="457200" y="1005840"/>
+            <a:ext cx="11277295" cy="731520"/>
+          </a:xfrm>
+          <a:prstGeom prst="rect">
+            <a:avLst/>
+          </a:prstGeom>
+          <a:noFill/>
+          <a:ln/>
+        </p:spPr>
+        <p:txBody>
+          <a:bodyPr wrap="square" lIns="0" tIns="0" rIns="0" bIns="0" rtlCol="0" anchor="ctr"/>
+          <a:lstStyle/>
+          <a:p>
+            <a:pPr algn="ctr" indent="0" marL="0">
+              <a:buNone/>
+            </a:pPr>
+            <a:r>
+              <a:rPr lang="en-US" sz="3600" b="1" dirty="0">
+                <a:solidFill>
+                  <a:srgbClr val="990011"/>
+                </a:solidFill>
+                <a:latin typeface="Times New Roman" pitchFamily="34" charset="0"/>
+                <a:ea typeface="Times New Roman" pitchFamily="34" charset="-122"/>
+                <a:cs typeface="Times New Roman" pitchFamily="34" charset="-120"/>
+              </a:rPr>
+              <a:t>Activity 3</a:t>
+            </a:r>
+            <a:endParaRPr lang="en-US" sz="3600" dirty="0"/>
           </a:p>
         </p:txBody>
       </p:sp>
       <p:pic>
         <p:nvPicPr>
-          <p:cNvPr id="3" name="Image 0" descr="/home/claude/f4/img/minesec_sheet.png">    </p:cNvPr>
+          <p:cNvPr id="4" name="Image 0" descr="/home/claude/f4/img/v2/stat2_systematic.png">    </p:cNvPr>
           <p:cNvPicPr>
             <a:picLocks noChangeAspect="1"/>
           </p:cNvPicPr>
@@ -10771,8 +11478,8 @@
         </p:blipFill>
         <p:spPr>
           <a:xfrm>
-            <a:off x="0" y="658368"/>
-            <a:ext cx="5120640" cy="5833872"/>
+            <a:off x="629930" y="1783080"/>
+            <a:ext cx="10931835" cy="4270248"/>
           </a:xfrm>
           <a:prstGeom prst="rect">
             <a:avLst/>
@@ -10781,14 +11488,14 @@
       </p:pic>
       <p:sp>
         <p:nvSpPr>
-          <p:cNvPr id="4" name="Text 1"/>
+          <p:cNvPr id="5" name="Text 2"/>
           <p:cNvSpPr/>
           <p:nvPr/>
         </p:nvSpPr>
         <p:spPr>
           <a:xfrm>
-            <a:off x="5349240" y="1005840"/>
-            <a:ext cx="6522415" cy="731520"/>
+            <a:off x="457200" y="6089904"/>
+            <a:ext cx="11277295" cy="347472"/>
           </a:xfrm>
           <a:prstGeom prst="rect">
             <a:avLst/>
@@ -10797,68 +11504,24 @@
           <a:ln/>
         </p:spPr>
         <p:txBody>
-          <a:bodyPr wrap="square" lIns="0" tIns="0" rIns="0" bIns="0" rtlCol="0" anchor="ctr">
-            <a:normAutofit/>
-          </a:bodyPr>
+          <a:bodyPr wrap="square" lIns="0" tIns="0" rIns="0" bIns="0" rtlCol="0" anchor="ctr"/>
           <a:lstStyle/>
           <a:p>
             <a:pPr algn="ctr" indent="0" marL="0">
               <a:buNone/>
             </a:pPr>
             <a:r>
-              <a:rPr lang="en-US" sz="3600" b="1" dirty="0">
-                <a:solidFill>
-                  <a:srgbClr val="990011"/>
+              <a:rPr lang="en-US" sz="1800" i="1" dirty="0">
+                <a:solidFill>
+                  <a:srgbClr val="555555"/>
                 </a:solidFill>
                 <a:latin typeface="Times New Roman" pitchFamily="34" charset="0"/>
                 <a:ea typeface="Times New Roman" pitchFamily="34" charset="-122"/>
                 <a:cs typeface="Times New Roman" pitchFamily="34" charset="-120"/>
               </a:rPr>
-              <a:t>Activity 3: Question</a:t>
-            </a:r>
-            <a:endParaRPr lang="en-US" sz="3600" dirty="0"/>
-          </a:p>
-        </p:txBody>
-      </p:sp>
-      <p:sp>
-        <p:nvSpPr>
-          <p:cNvPr id="5" name="Text 2"/>
-          <p:cNvSpPr/>
-          <p:nvPr/>
-        </p:nvSpPr>
-        <p:spPr>
-          <a:xfrm>
-            <a:off x="5349240" y="1783080"/>
-            <a:ext cx="6522415" cy="4663440"/>
-          </a:xfrm>
-          <a:prstGeom prst="rect">
-            <a:avLst/>
-          </a:prstGeom>
-          <a:noFill/>
-          <a:ln/>
-        </p:spPr>
-        <p:txBody>
-          <a:bodyPr wrap="square" lIns="0" tIns="0" rIns="0" bIns="0" rtlCol="0" anchor="t"/>
-          <a:lstStyle/>
-          <a:p>
-            <a:pPr algn="l" indent="0" marL="0">
-              <a:spcAft>
-                <a:spcPts val="800"/>
-              </a:spcAft>
-              <a:buNone/>
-            </a:pPr>
-            <a:r>
-              <a:rPr lang="en-US" sz="4000" dirty="0">
-                <a:solidFill>
-                  <a:srgbClr val="111111"/>
-                </a:solidFill>
-                <a:latin typeface="Times New Roman" pitchFamily="34" charset="0"/>
-                <a:ea typeface="Times New Roman" pitchFamily="34" charset="-122"/>
-                <a:cs typeface="Times New Roman" pitchFamily="34" charset="-120"/>
-              </a:rPr>
-              <a:t>How would you take a systematic sample of 20 houses on a street of 200?</a:t>
-            </a:r>
-            <a:endParaRPr lang="en-US" sz="4000" dirty="0"/>
+              <a:t>Systematic sampling.</a:t>
+            </a:r>
+            <a:endParaRPr lang="en-US" sz="1800" dirty="0"/>
           </a:p>
         </p:txBody>
       </p:sp>
@@ -10968,7 +11631,7 @@
                 <a:ea typeface="Calibri" pitchFamily="34" charset="-122"/>
                 <a:cs typeface="Calibri" pitchFamily="34" charset="-120"/>
               </a:rPr>
-              <a:t>2. SAMPLING METHODS</a:t>
+              <a:t>2. SAMPLING</a:t>
             </a:r>
             <a:endParaRPr lang="en-US" sz="1400" dirty="0"/>
           </a:p>
@@ -11033,7 +11696,7 @@
                 <a:ea typeface="Times New Roman" pitchFamily="34" charset="-122"/>
                 <a:cs typeface="Times New Roman" pitchFamily="34" charset="-120"/>
               </a:rPr>
-              <a:t>Activity 3: Answer</a:t>
+              <a:t>Activity 3: Question</a:t>
             </a:r>
             <a:endParaRPr lang="en-US" sz="3600" dirty="0"/>
           </a:p>
@@ -11075,7 +11738,7 @@
                 <a:ea typeface="Times New Roman" pitchFamily="34" charset="-122"/>
                 <a:cs typeface="Times New Roman" pitchFamily="34" charset="-120"/>
               </a:rPr>
-              <a:t>Choose every 10th house.</a:t>
+              <a:t>What is the sampling interval for 20 students chosen from 200?</a:t>
             </a:r>
             <a:endParaRPr lang="en-US" sz="4000" dirty="0"/>
           </a:p>
@@ -11187,54 +11850,15 @@
                 <a:ea typeface="Calibri" pitchFamily="34" charset="-122"/>
                 <a:cs typeface="Calibri" pitchFamily="34" charset="-120"/>
               </a:rPr>
-              <a:t>3. OBSERVATION AND MEASUREMENT</a:t>
+              <a:t>2. SAMPLING</a:t>
             </a:r>
             <a:endParaRPr lang="en-US" sz="1400" dirty="0"/>
-          </a:p>
-        </p:txBody>
-      </p:sp>
-      <p:sp>
-        <p:nvSpPr>
-          <p:cNvPr id="3" name="Text 1"/>
-          <p:cNvSpPr/>
-          <p:nvPr/>
-        </p:nvSpPr>
-        <p:spPr>
-          <a:xfrm>
-            <a:off x="457200" y="1005840"/>
-            <a:ext cx="11277295" cy="731520"/>
-          </a:xfrm>
-          <a:prstGeom prst="rect">
-            <a:avLst/>
-          </a:prstGeom>
-          <a:noFill/>
-          <a:ln/>
-        </p:spPr>
-        <p:txBody>
-          <a:bodyPr wrap="square" lIns="0" tIns="0" rIns="0" bIns="0" rtlCol="0" anchor="ctr"/>
-          <a:lstStyle/>
-          <a:p>
-            <a:pPr algn="ctr" indent="0" marL="0">
-              <a:buNone/>
-            </a:pPr>
-            <a:r>
-              <a:rPr lang="en-US" sz="3600" b="1" dirty="0">
-                <a:solidFill>
-                  <a:srgbClr val="990011"/>
-                </a:solidFill>
-                <a:latin typeface="Times New Roman" pitchFamily="34" charset="0"/>
-                <a:ea typeface="Times New Roman" pitchFamily="34" charset="-122"/>
-                <a:cs typeface="Times New Roman" pitchFamily="34" charset="-120"/>
-              </a:rPr>
-              <a:t>Activity 4</a:t>
-            </a:r>
-            <a:endParaRPr lang="en-US" sz="3600" dirty="0"/>
           </a:p>
         </p:txBody>
       </p:sp>
       <p:pic>
         <p:nvPicPr>
-          <p:cNvPr id="4" name="Image 0" descr="/home/claude/f4/img/v2/usa_tape.jpg">    </p:cNvPr>
+          <p:cNvPr id="3" name="Image 0" descr="/home/claude/f4/img/minesec_sheet.png">    </p:cNvPr>
           <p:cNvPicPr>
             <a:picLocks noChangeAspect="1"/>
           </p:cNvPicPr>
@@ -11248,8 +11872,8 @@
         </p:blipFill>
         <p:spPr>
           <a:xfrm>
-            <a:off x="2246610" y="1783080"/>
-            <a:ext cx="7698475" cy="4270248"/>
+            <a:off x="0" y="658368"/>
+            <a:ext cx="5120640" cy="5833872"/>
           </a:xfrm>
           <a:prstGeom prst="rect">
             <a:avLst/>
@@ -11258,14 +11882,14 @@
       </p:pic>
       <p:sp>
         <p:nvSpPr>
-          <p:cNvPr id="5" name="Text 2"/>
+          <p:cNvPr id="4" name="Text 1"/>
           <p:cNvSpPr/>
           <p:nvPr/>
         </p:nvSpPr>
         <p:spPr>
           <a:xfrm>
-            <a:off x="457200" y="6089904"/>
-            <a:ext cx="11277295" cy="347472"/>
+            <a:off x="5349240" y="1005840"/>
+            <a:ext cx="6522415" cy="731520"/>
           </a:xfrm>
           <a:prstGeom prst="rect">
             <a:avLst/>
@@ -11274,24 +11898,68 @@
           <a:ln/>
         </p:spPr>
         <p:txBody>
-          <a:bodyPr wrap="square" lIns="0" tIns="0" rIns="0" bIns="0" rtlCol="0" anchor="ctr"/>
+          <a:bodyPr wrap="square" lIns="0" tIns="0" rIns="0" bIns="0" rtlCol="0" anchor="ctr">
+            <a:normAutofit/>
+          </a:bodyPr>
           <a:lstStyle/>
           <a:p>
             <a:pPr algn="ctr" indent="0" marL="0">
               <a:buNone/>
             </a:pPr>
             <a:r>
-              <a:rPr lang="en-US" sz="1800" i="1" dirty="0">
-                <a:solidFill>
-                  <a:srgbClr val="555555"/>
+              <a:rPr lang="en-US" sz="3600" b="1" dirty="0">
+                <a:solidFill>
+                  <a:srgbClr val="990011"/>
                 </a:solidFill>
                 <a:latin typeface="Times New Roman" pitchFamily="34" charset="0"/>
                 <a:ea typeface="Times New Roman" pitchFamily="34" charset="-122"/>
                 <a:cs typeface="Times New Roman" pitchFamily="34" charset="-120"/>
               </a:rPr>
-              <a:t>Measuring in the field.</a:t>
-            </a:r>
-            <a:endParaRPr lang="en-US" sz="1800" dirty="0"/>
+              <a:t>Activity 3: Answer</a:t>
+            </a:r>
+            <a:endParaRPr lang="en-US" sz="3600" dirty="0"/>
+          </a:p>
+        </p:txBody>
+      </p:sp>
+      <p:sp>
+        <p:nvSpPr>
+          <p:cNvPr id="5" name="Text 2"/>
+          <p:cNvSpPr/>
+          <p:nvPr/>
+        </p:nvSpPr>
+        <p:spPr>
+          <a:xfrm>
+            <a:off x="5349240" y="1783080"/>
+            <a:ext cx="6522415" cy="4663440"/>
+          </a:xfrm>
+          <a:prstGeom prst="rect">
+            <a:avLst/>
+          </a:prstGeom>
+          <a:noFill/>
+          <a:ln/>
+        </p:spPr>
+        <p:txBody>
+          <a:bodyPr wrap="square" lIns="0" tIns="0" rIns="0" bIns="0" rtlCol="0" anchor="t"/>
+          <a:lstStyle/>
+          <a:p>
+            <a:pPr algn="l" indent="0" marL="0">
+              <a:spcAft>
+                <a:spcPts val="800"/>
+              </a:spcAft>
+              <a:buNone/>
+            </a:pPr>
+            <a:r>
+              <a:rPr lang="en-US" sz="4000" dirty="0">
+                <a:solidFill>
+                  <a:srgbClr val="111111"/>
+                </a:solidFill>
+                <a:latin typeface="Times New Roman" pitchFamily="34" charset="0"/>
+                <a:ea typeface="Times New Roman" pitchFamily="34" charset="-122"/>
+                <a:cs typeface="Times New Roman" pitchFamily="34" charset="-120"/>
+              </a:rPr>
+              <a:t>k = 200 ÷ 20 = 10.</a:t>
+            </a:r>
+            <a:endParaRPr lang="en-US" sz="4000" dirty="0"/>
           </a:p>
         </p:txBody>
       </p:sp>
@@ -11401,15 +12069,54 @@
                 <a:ea typeface="Calibri" pitchFamily="34" charset="-122"/>
                 <a:cs typeface="Calibri" pitchFamily="34" charset="-120"/>
               </a:rPr>
-              <a:t>3. OBSERVATION AND MEASUREMENT</a:t>
+              <a:t>3. TECHNIQUES</a:t>
             </a:r>
             <a:endParaRPr lang="en-US" sz="1400" dirty="0"/>
+          </a:p>
+        </p:txBody>
+      </p:sp>
+      <p:sp>
+        <p:nvSpPr>
+          <p:cNvPr id="3" name="Text 1"/>
+          <p:cNvSpPr/>
+          <p:nvPr/>
+        </p:nvSpPr>
+        <p:spPr>
+          <a:xfrm>
+            <a:off x="457200" y="1005840"/>
+            <a:ext cx="11277295" cy="731520"/>
+          </a:xfrm>
+          <a:prstGeom prst="rect">
+            <a:avLst/>
+          </a:prstGeom>
+          <a:noFill/>
+          <a:ln/>
+        </p:spPr>
+        <p:txBody>
+          <a:bodyPr wrap="square" lIns="0" tIns="0" rIns="0" bIns="0" rtlCol="0" anchor="ctr"/>
+          <a:lstStyle/>
+          <a:p>
+            <a:pPr algn="ctr" indent="0" marL="0">
+              <a:buNone/>
+            </a:pPr>
+            <a:r>
+              <a:rPr lang="en-US" sz="3600" b="1" dirty="0">
+                <a:solidFill>
+                  <a:srgbClr val="990011"/>
+                </a:solidFill>
+                <a:latin typeface="Times New Roman" pitchFamily="34" charset="0"/>
+                <a:ea typeface="Times New Roman" pitchFamily="34" charset="-122"/>
+                <a:cs typeface="Times New Roman" pitchFamily="34" charset="-120"/>
+              </a:rPr>
+              <a:t>Activity 4</a:t>
+            </a:r>
+            <a:endParaRPr lang="en-US" sz="3600" dirty="0"/>
           </a:p>
         </p:txBody>
       </p:sp>
       <p:pic>
         <p:nvPicPr>
-          <p:cNvPr id="3" name="Image 0" descr="/home/claude/f4/img/minesec_sheet.png">    </p:cNvPr>
+          <p:cNvPr id="4" name="Image 0" descr="/home/claude/f4/img/v2/stat2_techniques.png">    </p:cNvPr>
           <p:cNvPicPr>
             <a:picLocks noChangeAspect="1"/>
           </p:cNvPicPr>
@@ -11423,8 +12130,8 @@
         </p:blipFill>
         <p:spPr>
           <a:xfrm>
-            <a:off x="0" y="658368"/>
-            <a:ext cx="5120640" cy="5833872"/>
+            <a:off x="629930" y="1783080"/>
+            <a:ext cx="10931835" cy="4270248"/>
           </a:xfrm>
           <a:prstGeom prst="rect">
             <a:avLst/>
@@ -11433,14 +12140,14 @@
       </p:pic>
       <p:sp>
         <p:nvSpPr>
-          <p:cNvPr id="4" name="Text 1"/>
+          <p:cNvPr id="5" name="Text 2"/>
           <p:cNvSpPr/>
           <p:nvPr/>
         </p:nvSpPr>
         <p:spPr>
           <a:xfrm>
-            <a:off x="5349240" y="1005840"/>
-            <a:ext cx="6522415" cy="731520"/>
+            <a:off x="457200" y="6089904"/>
+            <a:ext cx="11277295" cy="347472"/>
           </a:xfrm>
           <a:prstGeom prst="rect">
             <a:avLst/>
@@ -11449,68 +12156,24 @@
           <a:ln/>
         </p:spPr>
         <p:txBody>
-          <a:bodyPr wrap="square" lIns="0" tIns="0" rIns="0" bIns="0" rtlCol="0" anchor="ctr">
-            <a:normAutofit/>
-          </a:bodyPr>
+          <a:bodyPr wrap="square" lIns="0" tIns="0" rIns="0" bIns="0" rtlCol="0" anchor="ctr"/>
           <a:lstStyle/>
           <a:p>
             <a:pPr algn="ctr" indent="0" marL="0">
               <a:buNone/>
             </a:pPr>
             <a:r>
-              <a:rPr lang="en-US" sz="3600" b="1" dirty="0">
-                <a:solidFill>
-                  <a:srgbClr val="990011"/>
+              <a:rPr lang="en-US" sz="1800" i="1" dirty="0">
+                <a:solidFill>
+                  <a:srgbClr val="555555"/>
                 </a:solidFill>
                 <a:latin typeface="Times New Roman" pitchFamily="34" charset="0"/>
                 <a:ea typeface="Times New Roman" pitchFamily="34" charset="-122"/>
                 <a:cs typeface="Times New Roman" pitchFamily="34" charset="-120"/>
               </a:rPr>
-              <a:t>Activity 4: Question</a:t>
-            </a:r>
-            <a:endParaRPr lang="en-US" sz="3600" dirty="0"/>
-          </a:p>
-        </p:txBody>
-      </p:sp>
-      <p:sp>
-        <p:nvSpPr>
-          <p:cNvPr id="5" name="Text 2"/>
-          <p:cNvSpPr/>
-          <p:nvPr/>
-        </p:nvSpPr>
-        <p:spPr>
-          <a:xfrm>
-            <a:off x="5349240" y="1783080"/>
-            <a:ext cx="6522415" cy="4663440"/>
-          </a:xfrm>
-          <a:prstGeom prst="rect">
-            <a:avLst/>
-          </a:prstGeom>
-          <a:noFill/>
-          <a:ln/>
-        </p:spPr>
-        <p:txBody>
-          <a:bodyPr wrap="square" lIns="0" tIns="0" rIns="0" bIns="0" rtlCol="0" anchor="t"/>
-          <a:lstStyle/>
-          <a:p>
-            <a:pPr algn="l" indent="0" marL="0">
-              <a:spcAft>
-                <a:spcPts val="800"/>
-              </a:spcAft>
-              <a:buNone/>
-            </a:pPr>
-            <a:r>
-              <a:rPr lang="en-US" sz="4000" dirty="0">
-                <a:solidFill>
-                  <a:srgbClr val="111111"/>
-                </a:solidFill>
-                <a:latin typeface="Times New Roman" pitchFamily="34" charset="0"/>
-                <a:ea typeface="Times New Roman" pitchFamily="34" charset="-122"/>
-                <a:cs typeface="Times New Roman" pitchFamily="34" charset="-120"/>
-              </a:rPr>
-              <a:t>Give two tools for field measurement.</a:t>
-            </a:r>
-            <a:endParaRPr lang="en-US" sz="4000" dirty="0"/>
+              <a:t>Primary data collection techniques.</a:t>
+            </a:r>
+            <a:endParaRPr lang="en-US" sz="1800" dirty="0"/>
           </a:p>
         </p:txBody>
       </p:sp>
@@ -12191,7 +12854,7 @@
                           <a:ea typeface="Calibri" pitchFamily="34" charset="-122"/>
                           <a:cs typeface="Calibri" pitchFamily="34" charset="-120"/>
                         </a:rPr>
-                        <a:t>Primary data, secondary data, sampling, random, systematic, stratified, questionnaire, interview, focus group.</a:t>
+                        <a:t>Geographical data, primary data, secondary data, population, sample, random, systematic and stratified sampling, observation, measurement, questionnaire, interview, focus group.</a:t>
                       </a:r>
                       <a:endParaRPr lang="en-US" sz="1700" dirty="0">
                         <a:latin typeface="Calibri" charset="0"/>
@@ -12329,7 +12992,7 @@
                           <a:ea typeface="Calibri" pitchFamily="34" charset="-122"/>
                           <a:cs typeface="Calibri" pitchFamily="34" charset="-120"/>
                         </a:rPr>
-                        <a:t>Sources of geographical data; basic sampling procedures; observation, counting, photographs and video; measurements; questionnaires, interviews and focus groups.</a:t>
+                        <a:t>Sources of geographical data (primary and secondary); basic sampling procedures (random, systematic, stratified); primary data collection techniques.</a:t>
                       </a:r>
                       <a:endParaRPr lang="en-US" sz="1700" dirty="0">
                         <a:latin typeface="Calibri" charset="0"/>
@@ -12467,7 +13130,7 @@
                           <a:ea typeface="Calibri" pitchFamily="34" charset="-122"/>
                           <a:cs typeface="Calibri" pitchFamily="34" charset="-120"/>
                         </a:rPr>
-                        <a:t>Learners are able to choose data sources, select samples and design simple questionnaires.</a:t>
+                        <a:t>Learners are able to choose sources, sampling methods and techniques to collect data for a geographical investigation in Garoua.</a:t>
                       </a:r>
                       <a:endParaRPr lang="en-US" sz="1700" dirty="0">
                         <a:latin typeface="Calibri" charset="0"/>
@@ -12629,7 +13292,7 @@
                 <a:ea typeface="Calibri" pitchFamily="34" charset="-122"/>
                 <a:cs typeface="Calibri" pitchFamily="34" charset="-120"/>
               </a:rPr>
-              <a:t>3. OBSERVATION AND MEASUREMENT</a:t>
+              <a:t>3. TECHNIQUES</a:t>
             </a:r>
             <a:endParaRPr lang="en-US" sz="1400" dirty="0"/>
           </a:p>
@@ -12694,7 +13357,7 @@
                 <a:ea typeface="Times New Roman" pitchFamily="34" charset="-122"/>
                 <a:cs typeface="Times New Roman" pitchFamily="34" charset="-120"/>
               </a:rPr>
-              <a:t>Activity 4: Answer</a:t>
+              <a:t>Activity 4: Question</a:t>
             </a:r>
             <a:endParaRPr lang="en-US" sz="3600" dirty="0"/>
           </a:p>
@@ -12736,7 +13399,7 @@
                 <a:ea typeface="Times New Roman" pitchFamily="34" charset="-122"/>
                 <a:cs typeface="Times New Roman" pitchFamily="34" charset="-120"/>
               </a:rPr>
-              <a:t>Measuring tape and rain gauge (also compass, clinometer, GPS).</a:t>
+              <a:t>How can you study traffic on the Pont Neuf of Garoua?</a:t>
             </a:r>
             <a:endParaRPr lang="en-US" sz="4000" dirty="0"/>
           </a:p>
@@ -12848,54 +13511,15 @@
                 <a:ea typeface="Calibri" pitchFamily="34" charset="-122"/>
                 <a:cs typeface="Calibri" pitchFamily="34" charset="-120"/>
               </a:rPr>
-              <a:t>4. QUESTIONNAIRES AND INTERVIEWS</a:t>
+              <a:t>3. TECHNIQUES</a:t>
             </a:r>
             <a:endParaRPr lang="en-US" sz="1400" dirty="0"/>
-          </a:p>
-        </p:txBody>
-      </p:sp>
-      <p:sp>
-        <p:nvSpPr>
-          <p:cNvPr id="3" name="Text 1"/>
-          <p:cNvSpPr/>
-          <p:nvPr/>
-        </p:nvSpPr>
-        <p:spPr>
-          <a:xfrm>
-            <a:off x="457200" y="1005840"/>
-            <a:ext cx="11277295" cy="731520"/>
-          </a:xfrm>
-          <a:prstGeom prst="rect">
-            <a:avLst/>
-          </a:prstGeom>
-          <a:noFill/>
-          <a:ln/>
-        </p:spPr>
-        <p:txBody>
-          <a:bodyPr wrap="square" lIns="0" tIns="0" rIns="0" bIns="0" rtlCol="0" anchor="ctr"/>
-          <a:lstStyle/>
-          <a:p>
-            <a:pPr algn="ctr" indent="0" marL="0">
-              <a:buNone/>
-            </a:pPr>
-            <a:r>
-              <a:rPr lang="en-US" sz="3600" b="1" dirty="0">
-                <a:solidFill>
-                  <a:srgbClr val="990011"/>
-                </a:solidFill>
-                <a:latin typeface="Times New Roman" pitchFamily="34" charset="0"/>
-                <a:ea typeface="Times New Roman" pitchFamily="34" charset="-122"/>
-                <a:cs typeface="Times New Roman" pitchFamily="34" charset="-120"/>
-              </a:rPr>
-              <a:t>Activity 5</a:t>
-            </a:r>
-            <a:endParaRPr lang="en-US" sz="3600" dirty="0"/>
           </a:p>
         </p:txBody>
       </p:sp>
       <p:pic>
         <p:nvPicPr>
-          <p:cNvPr id="4" name="Image 0" descr="/home/claude/f4/img/v2/questionnaire_big.png">    </p:cNvPr>
+          <p:cNvPr id="3" name="Image 0" descr="/home/claude/f4/img/minesec_sheet.png">    </p:cNvPr>
           <p:cNvPicPr>
             <a:picLocks noChangeAspect="1"/>
           </p:cNvPicPr>
@@ -12909,8 +13533,8 @@
         </p:blipFill>
         <p:spPr>
           <a:xfrm>
-            <a:off x="629930" y="1783080"/>
-            <a:ext cx="10931835" cy="4270248"/>
+            <a:off x="0" y="658368"/>
+            <a:ext cx="5120640" cy="5833872"/>
           </a:xfrm>
           <a:prstGeom prst="rect">
             <a:avLst/>
@@ -12919,14 +13543,14 @@
       </p:pic>
       <p:sp>
         <p:nvSpPr>
-          <p:cNvPr id="5" name="Text 2"/>
+          <p:cNvPr id="4" name="Text 1"/>
           <p:cNvSpPr/>
           <p:nvPr/>
         </p:nvSpPr>
         <p:spPr>
           <a:xfrm>
-            <a:off x="457200" y="6089904"/>
-            <a:ext cx="11277295" cy="347472"/>
+            <a:off x="5349240" y="1005840"/>
+            <a:ext cx="6522415" cy="731520"/>
           </a:xfrm>
           <a:prstGeom prst="rect">
             <a:avLst/>
@@ -12935,24 +13559,68 @@
           <a:ln/>
         </p:spPr>
         <p:txBody>
-          <a:bodyPr wrap="square" lIns="0" tIns="0" rIns="0" bIns="0" rtlCol="0" anchor="ctr"/>
+          <a:bodyPr wrap="square" lIns="0" tIns="0" rIns="0" bIns="0" rtlCol="0" anchor="ctr">
+            <a:normAutofit/>
+          </a:bodyPr>
           <a:lstStyle/>
           <a:p>
             <a:pPr algn="ctr" indent="0" marL="0">
               <a:buNone/>
             </a:pPr>
             <a:r>
-              <a:rPr lang="en-US" sz="1800" i="1" dirty="0">
-                <a:solidFill>
-                  <a:srgbClr val="555555"/>
+              <a:rPr lang="en-US" sz="3600" b="1" dirty="0">
+                <a:solidFill>
+                  <a:srgbClr val="990011"/>
                 </a:solidFill>
                 <a:latin typeface="Times New Roman" pitchFamily="34" charset="0"/>
                 <a:ea typeface="Times New Roman" pitchFamily="34" charset="-122"/>
                 <a:cs typeface="Times New Roman" pitchFamily="34" charset="-120"/>
               </a:rPr>
-              <a:t>Good and bad questions.</a:t>
-            </a:r>
-            <a:endParaRPr lang="en-US" sz="1800" dirty="0"/>
+              <a:t>Activity 4: Answer</a:t>
+            </a:r>
+            <a:endParaRPr lang="en-US" sz="3600" dirty="0"/>
+          </a:p>
+        </p:txBody>
+      </p:sp>
+      <p:sp>
+        <p:nvSpPr>
+          <p:cNvPr id="5" name="Text 2"/>
+          <p:cNvSpPr/>
+          <p:nvPr/>
+        </p:nvSpPr>
+        <p:spPr>
+          <a:xfrm>
+            <a:off x="5349240" y="1783080"/>
+            <a:ext cx="6522415" cy="4663440"/>
+          </a:xfrm>
+          <a:prstGeom prst="rect">
+            <a:avLst/>
+          </a:prstGeom>
+          <a:noFill/>
+          <a:ln/>
+        </p:spPr>
+        <p:txBody>
+          <a:bodyPr wrap="square" lIns="0" tIns="0" rIns="0" bIns="0" rtlCol="0" anchor="t"/>
+          <a:lstStyle/>
+          <a:p>
+            <a:pPr algn="l" indent="0" marL="0">
+              <a:spcAft>
+                <a:spcPts val="800"/>
+              </a:spcAft>
+              <a:buNone/>
+            </a:pPr>
+            <a:r>
+              <a:rPr lang="en-US" sz="4000" dirty="0">
+                <a:solidFill>
+                  <a:srgbClr val="111111"/>
+                </a:solidFill>
+                <a:latin typeface="Times New Roman" pitchFamily="34" charset="0"/>
+                <a:ea typeface="Times New Roman" pitchFamily="34" charset="-122"/>
+                <a:cs typeface="Times New Roman" pitchFamily="34" charset="-120"/>
+              </a:rPr>
+              <a:t>By counting vehicles for a fixed time (observation and counting).</a:t>
+            </a:r>
+            <a:endParaRPr lang="en-US" sz="4000" dirty="0"/>
           </a:p>
         </p:txBody>
       </p:sp>
@@ -13062,15 +13730,54 @@
                 <a:ea typeface="Calibri" pitchFamily="34" charset="-122"/>
                 <a:cs typeface="Calibri" pitchFamily="34" charset="-120"/>
               </a:rPr>
-              <a:t>4. QUESTIONNAIRES AND INTERVIEWS</a:t>
+              <a:t>3. TECHNIQUES</a:t>
             </a:r>
             <a:endParaRPr lang="en-US" sz="1400" dirty="0"/>
+          </a:p>
+        </p:txBody>
+      </p:sp>
+      <p:sp>
+        <p:nvSpPr>
+          <p:cNvPr id="3" name="Text 1"/>
+          <p:cNvSpPr/>
+          <p:nvPr/>
+        </p:nvSpPr>
+        <p:spPr>
+          <a:xfrm>
+            <a:off x="457200" y="1005840"/>
+            <a:ext cx="11277295" cy="731520"/>
+          </a:xfrm>
+          <a:prstGeom prst="rect">
+            <a:avLst/>
+          </a:prstGeom>
+          <a:noFill/>
+          <a:ln/>
+        </p:spPr>
+        <p:txBody>
+          <a:bodyPr wrap="square" lIns="0" tIns="0" rIns="0" bIns="0" rtlCol="0" anchor="ctr"/>
+          <a:lstStyle/>
+          <a:p>
+            <a:pPr algn="ctr" indent="0" marL="0">
+              <a:buNone/>
+            </a:pPr>
+            <a:r>
+              <a:rPr lang="en-US" sz="3600" b="1" dirty="0">
+                <a:solidFill>
+                  <a:srgbClr val="990011"/>
+                </a:solidFill>
+                <a:latin typeface="Times New Roman" pitchFamily="34" charset="0"/>
+                <a:ea typeface="Times New Roman" pitchFamily="34" charset="-122"/>
+                <a:cs typeface="Times New Roman" pitchFamily="34" charset="-120"/>
+              </a:rPr>
+              <a:t>Activity 5</a:t>
+            </a:r>
+            <a:endParaRPr lang="en-US" sz="3600" dirty="0"/>
           </a:p>
         </p:txBody>
       </p:sp>
       <p:pic>
         <p:nvPicPr>
-          <p:cNvPr id="3" name="Image 0" descr="/home/claude/f4/img/minesec_sheet.png">    </p:cNvPr>
+          <p:cNvPr id="4" name="Image 0" descr="/home/claude/f4/img/v2/questionnaire_big.png">    </p:cNvPr>
           <p:cNvPicPr>
             <a:picLocks noChangeAspect="1"/>
           </p:cNvPicPr>
@@ -13084,8 +13791,8 @@
         </p:blipFill>
         <p:spPr>
           <a:xfrm>
-            <a:off x="0" y="658368"/>
-            <a:ext cx="5120640" cy="5833872"/>
+            <a:off x="629930" y="1783080"/>
+            <a:ext cx="10931835" cy="4270248"/>
           </a:xfrm>
           <a:prstGeom prst="rect">
             <a:avLst/>
@@ -13094,14 +13801,14 @@
       </p:pic>
       <p:sp>
         <p:nvSpPr>
-          <p:cNvPr id="4" name="Text 1"/>
+          <p:cNvPr id="5" name="Text 2"/>
           <p:cNvSpPr/>
           <p:nvPr/>
         </p:nvSpPr>
         <p:spPr>
           <a:xfrm>
-            <a:off x="5349240" y="1005840"/>
-            <a:ext cx="6522415" cy="731520"/>
+            <a:off x="457200" y="6089904"/>
+            <a:ext cx="11277295" cy="347472"/>
           </a:xfrm>
           <a:prstGeom prst="rect">
             <a:avLst/>
@@ -13110,68 +13817,24 @@
           <a:ln/>
         </p:spPr>
         <p:txBody>
-          <a:bodyPr wrap="square" lIns="0" tIns="0" rIns="0" bIns="0" rtlCol="0" anchor="ctr">
-            <a:normAutofit/>
-          </a:bodyPr>
+          <a:bodyPr wrap="square" lIns="0" tIns="0" rIns="0" bIns="0" rtlCol="0" anchor="ctr"/>
           <a:lstStyle/>
           <a:p>
             <a:pPr algn="ctr" indent="0" marL="0">
               <a:buNone/>
             </a:pPr>
             <a:r>
-              <a:rPr lang="en-US" sz="3600" b="1" dirty="0">
-                <a:solidFill>
-                  <a:srgbClr val="990011"/>
+              <a:rPr lang="en-US" sz="1800" i="1" dirty="0">
+                <a:solidFill>
+                  <a:srgbClr val="555555"/>
                 </a:solidFill>
                 <a:latin typeface="Times New Roman" pitchFamily="34" charset="0"/>
                 <a:ea typeface="Times New Roman" pitchFamily="34" charset="-122"/>
                 <a:cs typeface="Times New Roman" pitchFamily="34" charset="-120"/>
               </a:rPr>
-              <a:t>Activity 5: Question</a:t>
-            </a:r>
-            <a:endParaRPr lang="en-US" sz="3600" dirty="0"/>
-          </a:p>
-        </p:txBody>
-      </p:sp>
-      <p:sp>
-        <p:nvSpPr>
-          <p:cNvPr id="5" name="Text 2"/>
-          <p:cNvSpPr/>
-          <p:nvPr/>
-        </p:nvSpPr>
-        <p:spPr>
-          <a:xfrm>
-            <a:off x="5349240" y="1783080"/>
-            <a:ext cx="6522415" cy="4663440"/>
-          </a:xfrm>
-          <a:prstGeom prst="rect">
-            <a:avLst/>
-          </a:prstGeom>
-          <a:noFill/>
-          <a:ln/>
-        </p:spPr>
-        <p:txBody>
-          <a:bodyPr wrap="square" lIns="0" tIns="0" rIns="0" bIns="0" rtlCol="0" anchor="t"/>
-          <a:lstStyle/>
-          <a:p>
-            <a:pPr algn="l" indent="0" marL="0">
-              <a:spcAft>
-                <a:spcPts val="800"/>
-              </a:spcAft>
-              <a:buNone/>
-            </a:pPr>
-            <a:r>
-              <a:rPr lang="en-US" sz="4000" dirty="0">
-                <a:solidFill>
-                  <a:srgbClr val="111111"/>
-                </a:solidFill>
-                <a:latin typeface="Times New Roman" pitchFamily="34" charset="0"/>
-                <a:ea typeface="Times New Roman" pitchFamily="34" charset="-122"/>
-                <a:cs typeface="Times New Roman" pitchFamily="34" charset="-120"/>
-              </a:rPr>
-              <a:t>Give two rules for a good questionnaire.</a:t>
-            </a:r>
-            <a:endParaRPr lang="en-US" sz="4000" dirty="0"/>
+              <a:t>Good and bad questions.</a:t>
+            </a:r>
+            <a:endParaRPr lang="en-US" sz="1800" dirty="0"/>
           </a:p>
         </p:txBody>
       </p:sp>
@@ -13281,7 +13944,7 @@
                 <a:ea typeface="Calibri" pitchFamily="34" charset="-122"/>
                 <a:cs typeface="Calibri" pitchFamily="34" charset="-120"/>
               </a:rPr>
-              <a:t>4. QUESTIONNAIRES AND INTERVIEWS</a:t>
+              <a:t>3. TECHNIQUES</a:t>
             </a:r>
             <a:endParaRPr lang="en-US" sz="1400" dirty="0"/>
           </a:p>
@@ -13346,7 +14009,7 @@
                 <a:ea typeface="Times New Roman" pitchFamily="34" charset="-122"/>
                 <a:cs typeface="Times New Roman" pitchFamily="34" charset="-120"/>
               </a:rPr>
-              <a:t>Activity 5: Answer</a:t>
+              <a:t>Activity 5: Question</a:t>
             </a:r>
             <a:endParaRPr lang="en-US" sz="3600" dirty="0"/>
           </a:p>
@@ -13388,7 +14051,7 @@
                 <a:ea typeface="Times New Roman" pitchFamily="34" charset="-122"/>
                 <a:cs typeface="Times New Roman" pitchFamily="34" charset="-120"/>
               </a:rPr>
-              <a:t>Short, clear questions that are not leading or too personal.</a:t>
+              <a:t>Why is "Isn't the market dirty?" a bad question?</a:t>
             </a:r>
             <a:endParaRPr lang="en-US" sz="4000" dirty="0"/>
           </a:p>
@@ -13500,7 +14163,7 @@
                 <a:ea typeface="Calibri" pitchFamily="34" charset="-122"/>
                 <a:cs typeface="Calibri" pitchFamily="34" charset="-120"/>
               </a:rPr>
-              <a:t>BOARD SUMMARY</a:t>
+              <a:t>3. TECHNIQUES</a:t>
             </a:r>
             <a:endParaRPr lang="en-US" sz="1400" dirty="0"/>
           </a:p>
@@ -13565,7 +14228,7 @@
                 <a:ea typeface="Times New Roman" pitchFamily="34" charset="-122"/>
                 <a:cs typeface="Times New Roman" pitchFamily="34" charset="-120"/>
               </a:rPr>
-              <a:t>Board Summary</a:t>
+              <a:t>Activity 5: Answer</a:t>
             </a:r>
             <a:endParaRPr lang="en-US" sz="3600" dirty="0"/>
           </a:p>
@@ -13599,7 +14262,7 @@
               <a:buNone/>
             </a:pPr>
             <a:r>
-              <a:rPr lang="en-US" sz="4000" b="1" dirty="0">
+              <a:rPr lang="en-US" sz="4000" dirty="0">
                 <a:solidFill>
                   <a:srgbClr val="111111"/>
                 </a:solidFill>
@@ -13607,47 +14270,7 @@
                 <a:ea typeface="Times New Roman" pitchFamily="34" charset="-122"/>
                 <a:cs typeface="Times New Roman" pitchFamily="34" charset="-120"/>
               </a:rPr>
-              <a:t>Topic: Quantitative Techniques in Geography</a:t>
-            </a:r>
-            <a:endParaRPr lang="en-US" sz="4000" dirty="0"/>
-          </a:p>
-          <a:p>
-            <a:pPr algn="l" indent="0" marL="0">
-              <a:spcAft>
-                <a:spcPts val="800"/>
-              </a:spcAft>
-              <a:buNone/>
-            </a:pPr>
-            <a:r>
-              <a:rPr lang="en-US" sz="4000" b="1" dirty="0">
-                <a:solidFill>
-                  <a:srgbClr val="111111"/>
-                </a:solidFill>
-                <a:latin typeface="Times New Roman" pitchFamily="34" charset="0"/>
-                <a:ea typeface="Times New Roman" pitchFamily="34" charset="-122"/>
-                <a:cs typeface="Times New Roman" pitchFamily="34" charset="-120"/>
-              </a:rPr>
-              <a:t>Sub-topic: Statistical Techniques</a:t>
-            </a:r>
-            <a:endParaRPr lang="en-US" sz="4000" dirty="0"/>
-          </a:p>
-          <a:p>
-            <a:pPr algn="l" indent="0" marL="0">
-              <a:spcAft>
-                <a:spcPts val="800"/>
-              </a:spcAft>
-              <a:buNone/>
-            </a:pPr>
-            <a:r>
-              <a:rPr lang="en-US" sz="4000" b="1" dirty="0">
-                <a:solidFill>
-                  <a:srgbClr val="990011"/>
-                </a:solidFill>
-                <a:latin typeface="Times New Roman" pitchFamily="34" charset="0"/>
-                <a:ea typeface="Times New Roman" pitchFamily="34" charset="-122"/>
-                <a:cs typeface="Times New Roman" pitchFamily="34" charset="-120"/>
-              </a:rPr>
-              <a:t>Quantitative Techniques 2: Data Collection: Sources and Techniques</a:t>
+              <a:t>It is a leading question that suggests the answer.</a:t>
             </a:r>
             <a:endParaRPr lang="en-US" sz="4000" dirty="0"/>
           </a:p>
@@ -13782,7 +14405,7 @@
         <p:spPr>
           <a:xfrm>
             <a:off x="0" y="658368"/>
-            <a:ext cx="3840480" cy="5833872"/>
+            <a:ext cx="5120640" cy="5833872"/>
           </a:xfrm>
           <a:prstGeom prst="rect">
             <a:avLst/>
@@ -13797,8 +14420,8 @@
         </p:nvSpPr>
         <p:spPr>
           <a:xfrm>
-            <a:off x="4069080" y="1005840"/>
-            <a:ext cx="7802575" cy="731520"/>
+            <a:off x="5349240" y="1005840"/>
+            <a:ext cx="6522415" cy="731520"/>
           </a:xfrm>
           <a:prstGeom prst="rect">
             <a:avLst/>
@@ -13824,7 +14447,7 @@
                 <a:ea typeface="Times New Roman" pitchFamily="34" charset="-122"/>
                 <a:cs typeface="Times New Roman" pitchFamily="34" charset="-120"/>
               </a:rPr>
-              <a:t>1. Sources of Geographical Data</a:t>
+              <a:t>Board Summary</a:t>
             </a:r>
             <a:endParaRPr lang="en-US" sz="3600" dirty="0"/>
           </a:p>
@@ -13838,8 +14461,8 @@
         </p:nvSpPr>
         <p:spPr>
           <a:xfrm>
-            <a:off x="4069080" y="1783080"/>
-            <a:ext cx="7802575" cy="4663440"/>
+            <a:off x="5349240" y="1783080"/>
+            <a:ext cx="6522415" cy="4663440"/>
           </a:xfrm>
           <a:prstGeom prst="rect">
             <a:avLst/>
@@ -13858,7 +14481,7 @@
               <a:buNone/>
             </a:pPr>
             <a:r>
-              <a:rPr lang="en-US" sz="4000" i="1" dirty="0">
+              <a:rPr lang="en-US" sz="3200" b="1" dirty="0">
                 <a:solidFill>
                   <a:srgbClr val="111111"/>
                 </a:solidFill>
@@ -13866,9 +14489,9 @@
                 <a:ea typeface="Times New Roman" pitchFamily="34" charset="-122"/>
                 <a:cs typeface="Times New Roman" pitchFamily="34" charset="-120"/>
               </a:rPr>
-              <a:t>Geographical data come from two sources:</a:t>
-            </a:r>
-            <a:endParaRPr lang="en-US" sz="4000" dirty="0"/>
+              <a:t>Topic: Quantitative Techniques in Geography</a:t>
+            </a:r>
+            <a:endParaRPr lang="en-US" sz="3200" dirty="0"/>
           </a:p>
           <a:p>
             <a:pPr algn="l" indent="0" marL="0">
@@ -13878,7 +14501,7 @@
               <a:buNone/>
             </a:pPr>
             <a:r>
-              <a:rPr lang="en-US" sz="4000" b="1" dirty="0">
+              <a:rPr lang="en-US" sz="3200" b="1" dirty="0">
                 <a:solidFill>
                   <a:srgbClr val="111111"/>
                 </a:solidFill>
@@ -13886,8 +14509,11 @@
                 <a:ea typeface="Times New Roman" pitchFamily="34" charset="-122"/>
                 <a:cs typeface="Times New Roman" pitchFamily="34" charset="-120"/>
               </a:rPr>
-              <a:t>Primary data: </a:t>
-            </a:r>
+              <a:t>Sub-topic: Statistical Techniques</a:t>
+            </a:r>
+            <a:endParaRPr lang="en-US" sz="3200" dirty="0"/>
+          </a:p>
+          <a:p>
             <a:pPr algn="l" indent="0" marL="0">
               <a:spcAft>
                 <a:spcPts val="800"/>
@@ -13895,17 +14521,17 @@
               <a:buNone/>
             </a:pPr>
             <a:r>
-              <a:rPr lang="en-US" sz="4000" dirty="0">
-                <a:solidFill>
-                  <a:srgbClr val="111111"/>
+              <a:rPr lang="en-US" sz="3200" b="1" dirty="0">
+                <a:solidFill>
+                  <a:srgbClr val="990011"/>
                 </a:solidFill>
                 <a:latin typeface="Times New Roman" pitchFamily="34" charset="0"/>
                 <a:ea typeface="Times New Roman" pitchFamily="34" charset="-122"/>
                 <a:cs typeface="Times New Roman" pitchFamily="34" charset="-120"/>
               </a:rPr>
-              <a:t>They are collected by the researcher in the field, such as a traffic count or a questionnaire. They are up to date but take time.</a:t>
-            </a:r>
-            <a:endParaRPr lang="en-US" sz="4000" dirty="0"/>
+              <a:t>Quantitative Techniques 2: Data Collection: Sources and Techniques</a:t>
+            </a:r>
+            <a:endParaRPr lang="en-US" sz="3200" dirty="0"/>
           </a:p>
         </p:txBody>
       </p:sp>
@@ -14080,7 +14706,7 @@
                 <a:ea typeface="Times New Roman" pitchFamily="34" charset="-122"/>
                 <a:cs typeface="Times New Roman" pitchFamily="34" charset="-120"/>
               </a:rPr>
-              <a:t>1. Sources of Geographical Data (continued)</a:t>
+              <a:t>DEFINITIONS</a:t>
             </a:r>
             <a:endParaRPr lang="en-US" sz="3600" dirty="0"/>
           </a:p>
@@ -14114,7 +14740,7 @@
               <a:buNone/>
             </a:pPr>
             <a:r>
-              <a:rPr lang="en-US" sz="4000" b="1" dirty="0">
+              <a:rPr lang="en-US" sz="4000" i="1" dirty="0">
                 <a:solidFill>
                   <a:srgbClr val="111111"/>
                 </a:solidFill>
@@ -14122,8 +14748,11 @@
                 <a:ea typeface="Times New Roman" pitchFamily="34" charset="-122"/>
                 <a:cs typeface="Times New Roman" pitchFamily="34" charset="-120"/>
               </a:rPr>
-              <a:t>Secondary data: </a:t>
-            </a:r>
+              <a:t>The key terms of this lesson are defined as follows:</a:t>
+            </a:r>
+            <a:endParaRPr lang="en-US" sz="4000" dirty="0"/>
+          </a:p>
+          <a:p>
             <a:pPr algn="l" indent="0" marL="0">
               <a:spcAft>
                 <a:spcPts val="800"/>
@@ -14131,7 +14760,7 @@
               <a:buNone/>
             </a:pPr>
             <a:r>
-              <a:rPr lang="en-US" sz="4000" dirty="0">
+              <a:rPr lang="en-US" sz="4000" b="1" dirty="0">
                 <a:solidFill>
                   <a:srgbClr val="111111"/>
                 </a:solidFill>
@@ -14139,7 +14768,24 @@
                 <a:ea typeface="Times New Roman" pitchFamily="34" charset="-122"/>
                 <a:cs typeface="Times New Roman" pitchFamily="34" charset="-120"/>
               </a:rPr>
-              <a:t>They already exist, such as censuses, maps, books and websites. They are quick to use but may be old or not precise.</a:t>
+              <a:t>Geographical data: </a:t>
+            </a:r>
+            <a:pPr algn="l" indent="0" marL="0">
+              <a:spcAft>
+                <a:spcPts val="800"/>
+              </a:spcAft>
+              <a:buNone/>
+            </a:pPr>
+            <a:r>
+              <a:rPr lang="en-US" sz="4000" dirty="0">
+                <a:solidFill>
+                  <a:srgbClr val="111111"/>
+                </a:solidFill>
+                <a:latin typeface="Times New Roman" pitchFamily="34" charset="0"/>
+                <a:ea typeface="Times New Roman" pitchFamily="34" charset="-122"/>
+                <a:cs typeface="Times New Roman" pitchFamily="34" charset="-120"/>
+              </a:rPr>
+              <a:t>They are facts and figures collected to study places, people and environments.</a:t>
             </a:r>
             <a:endParaRPr lang="en-US" sz="4000" dirty="0"/>
           </a:p>
@@ -14257,48 +14903,9 @@
           </a:p>
         </p:txBody>
       </p:sp>
-      <p:sp>
-        <p:nvSpPr>
-          <p:cNvPr id="3" name="Text 1"/>
-          <p:cNvSpPr/>
-          <p:nvPr/>
-        </p:nvSpPr>
-        <p:spPr>
-          <a:xfrm>
-            <a:off x="457200" y="1005840"/>
-            <a:ext cx="11277295" cy="731520"/>
-          </a:xfrm>
-          <a:prstGeom prst="rect">
-            <a:avLst/>
-          </a:prstGeom>
-          <a:noFill/>
-          <a:ln/>
-        </p:spPr>
-        <p:txBody>
-          <a:bodyPr wrap="square" lIns="0" tIns="0" rIns="0" bIns="0" rtlCol="0" anchor="ctr"/>
-          <a:lstStyle/>
-          <a:p>
-            <a:pPr algn="ctr" indent="0" marL="0">
-              <a:buNone/>
-            </a:pPr>
-            <a:r>
-              <a:rPr lang="en-US" sz="3600" b="1" dirty="0">
-                <a:solidFill>
-                  <a:srgbClr val="990011"/>
-                </a:solidFill>
-                <a:latin typeface="Times New Roman" pitchFamily="34" charset="0"/>
-                <a:ea typeface="Times New Roman" pitchFamily="34" charset="-122"/>
-                <a:cs typeface="Times New Roman" pitchFamily="34" charset="-120"/>
-              </a:rPr>
-              <a:t>1. Sources of Geographical Data</a:t>
-            </a:r>
-            <a:endParaRPr lang="en-US" sz="3600" dirty="0"/>
-          </a:p>
-        </p:txBody>
-      </p:sp>
       <p:pic>
         <p:nvPicPr>
-          <p:cNvPr id="4" name="Image 0" descr="/home/claude/f4/img/v2/data_sources_big.png">    </p:cNvPr>
+          <p:cNvPr id="3" name="Image 0" descr="/home/claude/f4/img/minesec_sheet.png">    </p:cNvPr>
           <p:cNvPicPr>
             <a:picLocks noChangeAspect="1"/>
           </p:cNvPicPr>
@@ -14312,8 +14919,8 @@
         </p:blipFill>
         <p:spPr>
           <a:xfrm>
-            <a:off x="629930" y="1783080"/>
-            <a:ext cx="10931835" cy="4270248"/>
+            <a:off x="0" y="658368"/>
+            <a:ext cx="3840480" cy="5833872"/>
           </a:xfrm>
           <a:prstGeom prst="rect">
             <a:avLst/>
@@ -14322,14 +14929,14 @@
       </p:pic>
       <p:sp>
         <p:nvSpPr>
-          <p:cNvPr id="5" name="Text 2"/>
+          <p:cNvPr id="4" name="Text 1"/>
           <p:cNvSpPr/>
           <p:nvPr/>
         </p:nvSpPr>
         <p:spPr>
           <a:xfrm>
-            <a:off x="457200" y="6089904"/>
-            <a:ext cx="11277295" cy="347472"/>
+            <a:off x="4069080" y="1005840"/>
+            <a:ext cx="7802575" cy="731520"/>
           </a:xfrm>
           <a:prstGeom prst="rect">
             <a:avLst/>
@@ -14338,24 +14945,122 @@
           <a:ln/>
         </p:spPr>
         <p:txBody>
-          <a:bodyPr wrap="square" lIns="0" tIns="0" rIns="0" bIns="0" rtlCol="0" anchor="ctr"/>
+          <a:bodyPr wrap="square" lIns="0" tIns="0" rIns="0" bIns="0" rtlCol="0" anchor="ctr">
+            <a:normAutofit/>
+          </a:bodyPr>
           <a:lstStyle/>
           <a:p>
             <a:pPr algn="ctr" indent="0" marL="0">
               <a:buNone/>
             </a:pPr>
             <a:r>
-              <a:rPr lang="en-US" sz="1800" i="1" dirty="0">
-                <a:solidFill>
-                  <a:srgbClr val="555555"/>
+              <a:rPr lang="en-US" sz="3600" b="1" dirty="0">
+                <a:solidFill>
+                  <a:srgbClr val="990011"/>
                 </a:solidFill>
                 <a:latin typeface="Times New Roman" pitchFamily="34" charset="0"/>
                 <a:ea typeface="Times New Roman" pitchFamily="34" charset="-122"/>
                 <a:cs typeface="Times New Roman" pitchFamily="34" charset="-120"/>
               </a:rPr>
-              <a:t>Illustration: primary and secondary data</a:t>
-            </a:r>
-            <a:endParaRPr lang="en-US" sz="1800" dirty="0"/>
+              <a:t>DEFINITIONS (continued)</a:t>
+            </a:r>
+            <a:endParaRPr lang="en-US" sz="3600" dirty="0"/>
+          </a:p>
+        </p:txBody>
+      </p:sp>
+      <p:sp>
+        <p:nvSpPr>
+          <p:cNvPr id="5" name="Text 2"/>
+          <p:cNvSpPr/>
+          <p:nvPr/>
+        </p:nvSpPr>
+        <p:spPr>
+          <a:xfrm>
+            <a:off x="4069080" y="1783080"/>
+            <a:ext cx="7802575" cy="4663440"/>
+          </a:xfrm>
+          <a:prstGeom prst="rect">
+            <a:avLst/>
+          </a:prstGeom>
+          <a:noFill/>
+          <a:ln/>
+        </p:spPr>
+        <p:txBody>
+          <a:bodyPr wrap="square" lIns="0" tIns="0" rIns="0" bIns="0" rtlCol="0" anchor="t"/>
+          <a:lstStyle/>
+          <a:p>
+            <a:pPr algn="l" indent="0" marL="0">
+              <a:spcAft>
+                <a:spcPts val="800"/>
+              </a:spcAft>
+              <a:buNone/>
+            </a:pPr>
+            <a:r>
+              <a:rPr lang="en-US" sz="4000" b="1" dirty="0">
+                <a:solidFill>
+                  <a:srgbClr val="111111"/>
+                </a:solidFill>
+                <a:latin typeface="Times New Roman" pitchFamily="34" charset="0"/>
+                <a:ea typeface="Times New Roman" pitchFamily="34" charset="-122"/>
+                <a:cs typeface="Times New Roman" pitchFamily="34" charset="-120"/>
+              </a:rPr>
+              <a:t>Primary data: </a:t>
+            </a:r>
+            <a:pPr algn="l" indent="0" marL="0">
+              <a:spcAft>
+                <a:spcPts val="800"/>
+              </a:spcAft>
+              <a:buNone/>
+            </a:pPr>
+            <a:r>
+              <a:rPr lang="en-US" sz="4000" dirty="0">
+                <a:solidFill>
+                  <a:srgbClr val="111111"/>
+                </a:solidFill>
+                <a:latin typeface="Times New Roman" pitchFamily="34" charset="0"/>
+                <a:ea typeface="Times New Roman" pitchFamily="34" charset="-122"/>
+                <a:cs typeface="Times New Roman" pitchFamily="34" charset="-120"/>
+              </a:rPr>
+              <a:t>They are first-hand data collected by the researcher for a specific purpose.</a:t>
+            </a:r>
+            <a:endParaRPr lang="en-US" sz="4000" dirty="0"/>
+          </a:p>
+          <a:p>
+            <a:pPr algn="l" indent="0" marL="0">
+              <a:spcAft>
+                <a:spcPts val="800"/>
+              </a:spcAft>
+              <a:buNone/>
+            </a:pPr>
+            <a:r>
+              <a:rPr lang="en-US" sz="4000" b="1" dirty="0">
+                <a:solidFill>
+                  <a:srgbClr val="111111"/>
+                </a:solidFill>
+                <a:latin typeface="Times New Roman" pitchFamily="34" charset="0"/>
+                <a:ea typeface="Times New Roman" pitchFamily="34" charset="-122"/>
+                <a:cs typeface="Times New Roman" pitchFamily="34" charset="-120"/>
+              </a:rPr>
+              <a:t>Secondary data: </a:t>
+            </a:r>
+            <a:pPr algn="l" indent="0" marL="0">
+              <a:spcAft>
+                <a:spcPts val="800"/>
+              </a:spcAft>
+              <a:buNone/>
+            </a:pPr>
+            <a:r>
+              <a:rPr lang="en-US" sz="4000" dirty="0">
+                <a:solidFill>
+                  <a:srgbClr val="111111"/>
+                </a:solidFill>
+                <a:latin typeface="Times New Roman" pitchFamily="34" charset="0"/>
+                <a:ea typeface="Times New Roman" pitchFamily="34" charset="-122"/>
+                <a:cs typeface="Times New Roman" pitchFamily="34" charset="-120"/>
+              </a:rPr>
+              <a:t>They are data already collected by someone else for another purpose.</a:t>
+            </a:r>
+            <a:endParaRPr lang="en-US" sz="4000" dirty="0"/>
           </a:p>
         </p:txBody>
       </p:sp>
@@ -14530,7 +15235,7 @@
                 <a:ea typeface="Times New Roman" pitchFamily="34" charset="-122"/>
                 <a:cs typeface="Times New Roman" pitchFamily="34" charset="-120"/>
               </a:rPr>
-              <a:t>2. Basic Sampling Procedures</a:t>
+              <a:t>DEFINITIONS (continued)</a:t>
             </a:r>
             <a:endParaRPr lang="en-US" sz="3600" dirty="0"/>
           </a:p>
@@ -14564,7 +15269,7 @@
               <a:buNone/>
             </a:pPr>
             <a:r>
-              <a:rPr lang="en-US" sz="4000" i="1" dirty="0">
+              <a:rPr lang="en-US" sz="4000" b="1" dirty="0">
                 <a:solidFill>
                   <a:srgbClr val="111111"/>
                 </a:solidFill>
@@ -14572,11 +15277,8 @@
                 <a:ea typeface="Times New Roman" pitchFamily="34" charset="-122"/>
                 <a:cs typeface="Times New Roman" pitchFamily="34" charset="-120"/>
               </a:rPr>
-              <a:t>Samples are taken with the following methods:</a:t>
-            </a:r>
-            <a:endParaRPr lang="en-US" sz="4000" dirty="0"/>
-          </a:p>
-          <a:p>
+              <a:t>Population (in statistics): </a:t>
+            </a:r>
             <a:pPr algn="l" indent="0" marL="0">
               <a:spcAft>
                 <a:spcPts val="800"/>
@@ -14584,7 +15286,7 @@
               <a:buNone/>
             </a:pPr>
             <a:r>
-              <a:rPr lang="en-US" sz="4000" b="1" dirty="0">
+              <a:rPr lang="en-US" sz="4000" dirty="0">
                 <a:solidFill>
                   <a:srgbClr val="111111"/>
                 </a:solidFill>
@@ -14592,8 +15294,11 @@
                 <a:ea typeface="Times New Roman" pitchFamily="34" charset="-122"/>
                 <a:cs typeface="Times New Roman" pitchFamily="34" charset="-120"/>
               </a:rPr>
-              <a:t>Random sampling: </a:t>
-            </a:r>
+              <a:t>It is the whole group to be studied.</a:t>
+            </a:r>
+            <a:endParaRPr lang="en-US" sz="4000" dirty="0"/>
+          </a:p>
+          <a:p>
             <a:pPr algn="l" indent="0" marL="0">
               <a:spcAft>
                 <a:spcPts val="800"/>
@@ -14601,7 +15306,7 @@
               <a:buNone/>
             </a:pPr>
             <a:r>
-              <a:rPr lang="en-US" sz="4000" dirty="0">
+              <a:rPr lang="en-US" sz="4000" b="1" dirty="0">
                 <a:solidFill>
                   <a:srgbClr val="111111"/>
                 </a:solidFill>
@@ -14609,7 +15314,24 @@
                 <a:ea typeface="Times New Roman" pitchFamily="34" charset="-122"/>
                 <a:cs typeface="Times New Roman" pitchFamily="34" charset="-120"/>
               </a:rPr>
-              <a:t>Every member has an equal chance of being chosen, using random numbers. It avoids bias.</a:t>
+              <a:t>Sample: </a:t>
+            </a:r>
+            <a:pPr algn="l" indent="0" marL="0">
+              <a:spcAft>
+                <a:spcPts val="800"/>
+              </a:spcAft>
+              <a:buNone/>
+            </a:pPr>
+            <a:r>
+              <a:rPr lang="en-US" sz="4000" dirty="0">
+                <a:solidFill>
+                  <a:srgbClr val="111111"/>
+                </a:solidFill>
+                <a:latin typeface="Times New Roman" pitchFamily="34" charset="0"/>
+                <a:ea typeface="Times New Roman" pitchFamily="34" charset="-122"/>
+                <a:cs typeface="Times New Roman" pitchFamily="34" charset="-120"/>
+              </a:rPr>
+              <a:t>It is a smaller, representative part of the population.</a:t>
             </a:r>
             <a:endParaRPr lang="en-US" sz="4000" dirty="0"/>
           </a:p>
@@ -14727,9 +15449,129 @@
           </a:p>
         </p:txBody>
       </p:sp>
+      <p:sp>
+        <p:nvSpPr>
+          <p:cNvPr id="3" name="Text 1"/>
+          <p:cNvSpPr/>
+          <p:nvPr/>
+        </p:nvSpPr>
+        <p:spPr>
+          <a:xfrm>
+            <a:off x="365760" y="1005840"/>
+            <a:ext cx="11460175" cy="731520"/>
+          </a:xfrm>
+          <a:prstGeom prst="rect">
+            <a:avLst/>
+          </a:prstGeom>
+          <a:noFill/>
+          <a:ln/>
+        </p:spPr>
+        <p:txBody>
+          <a:bodyPr wrap="square" lIns="0" tIns="0" rIns="0" bIns="0" rtlCol="0" anchor="ctr">
+            <a:normAutofit/>
+          </a:bodyPr>
+          <a:lstStyle/>
+          <a:p>
+            <a:pPr algn="ctr" indent="0" marL="0">
+              <a:buNone/>
+            </a:pPr>
+            <a:r>
+              <a:rPr lang="en-US" sz="3600" b="1" dirty="0">
+                <a:solidFill>
+                  <a:srgbClr val="990011"/>
+                </a:solidFill>
+                <a:latin typeface="Times New Roman" pitchFamily="34" charset="0"/>
+                <a:ea typeface="Times New Roman" pitchFamily="34" charset="-122"/>
+                <a:cs typeface="Times New Roman" pitchFamily="34" charset="-120"/>
+              </a:rPr>
+              <a:t>1. Sources of Geographical Data</a:t>
+            </a:r>
+            <a:endParaRPr lang="en-US" sz="3600" dirty="0"/>
+          </a:p>
+        </p:txBody>
+      </p:sp>
+      <p:sp>
+        <p:nvSpPr>
+          <p:cNvPr id="4" name="Text 2"/>
+          <p:cNvSpPr/>
+          <p:nvPr/>
+        </p:nvSpPr>
+        <p:spPr>
+          <a:xfrm>
+            <a:off x="365760" y="1783080"/>
+            <a:ext cx="4846320" cy="4617720"/>
+          </a:xfrm>
+          <a:prstGeom prst="rect">
+            <a:avLst/>
+          </a:prstGeom>
+          <a:noFill/>
+          <a:ln/>
+        </p:spPr>
+        <p:txBody>
+          <a:bodyPr wrap="square" lIns="0" tIns="0" rIns="0" bIns="0" rtlCol="0" anchor="t"/>
+          <a:lstStyle/>
+          <a:p>
+            <a:pPr algn="l" indent="0" marL="0">
+              <a:spcAft>
+                <a:spcPts val="800"/>
+              </a:spcAft>
+              <a:buNone/>
+            </a:pPr>
+            <a:r>
+              <a:rPr lang="en-US" sz="3200" i="1" dirty="0">
+                <a:solidFill>
+                  <a:srgbClr val="111111"/>
+                </a:solidFill>
+                <a:latin typeface="Times New Roman" pitchFamily="34" charset="0"/>
+                <a:ea typeface="Times New Roman" pitchFamily="34" charset="-122"/>
+                <a:cs typeface="Times New Roman" pitchFamily="34" charset="-120"/>
+              </a:rPr>
+              <a:t>Geographical data come from the following sources:</a:t>
+            </a:r>
+            <a:endParaRPr lang="en-US" sz="3200" dirty="0"/>
+          </a:p>
+          <a:p>
+            <a:pPr algn="l" indent="0" marL="0">
+              <a:spcAft>
+                <a:spcPts val="800"/>
+              </a:spcAft>
+              <a:buNone/>
+            </a:pPr>
+            <a:r>
+              <a:rPr lang="en-US" sz="3200" b="1" dirty="0">
+                <a:solidFill>
+                  <a:srgbClr val="111111"/>
+                </a:solidFill>
+                <a:latin typeface="Times New Roman" pitchFamily="34" charset="0"/>
+                <a:ea typeface="Times New Roman" pitchFamily="34" charset="-122"/>
+                <a:cs typeface="Times New Roman" pitchFamily="34" charset="-120"/>
+              </a:rPr>
+              <a:t>Primary data: </a:t>
+            </a:r>
+            <a:pPr algn="l" indent="0" marL="0">
+              <a:spcAft>
+                <a:spcPts val="800"/>
+              </a:spcAft>
+              <a:buNone/>
+            </a:pPr>
+            <a:r>
+              <a:rPr lang="en-US" sz="3200" dirty="0">
+                <a:solidFill>
+                  <a:srgbClr val="111111"/>
+                </a:solidFill>
+                <a:latin typeface="Times New Roman" pitchFamily="34" charset="0"/>
+                <a:ea typeface="Times New Roman" pitchFamily="34" charset="-122"/>
+                <a:cs typeface="Times New Roman" pitchFamily="34" charset="-120"/>
+              </a:rPr>
+              <a:t>They are original, up to date and specific, collected by fieldwork, observation, measurement, interviews and questionnaires.</a:t>
+            </a:r>
+            <a:endParaRPr lang="en-US" sz="3200" dirty="0"/>
+          </a:p>
+        </p:txBody>
+      </p:sp>
       <p:pic>
         <p:nvPicPr>
-          <p:cNvPr id="3" name="Image 0" descr="/home/claude/f4/img/minesec_sheet.png">    </p:cNvPr>
+          <p:cNvPr id="5" name="Image 0" descr="/home/claude/f4/img/v2/data_sources_big.png">    </p:cNvPr>
           <p:cNvPicPr>
             <a:picLocks noChangeAspect="1"/>
           </p:cNvPicPr>
@@ -14743,8 +15585,8 @@
         </p:blipFill>
         <p:spPr>
           <a:xfrm>
-            <a:off x="0" y="658368"/>
-            <a:ext cx="1463040" cy="5833872"/>
+            <a:off x="5349240" y="2617506"/>
+            <a:ext cx="6659575" cy="2601397"/>
           </a:xfrm>
           <a:prstGeom prst="rect">
             <a:avLst/>
@@ -14753,14 +15595,14 @@
       </p:pic>
       <p:sp>
         <p:nvSpPr>
-          <p:cNvPr id="4" name="Text 1"/>
+          <p:cNvPr id="6" name="Text 3"/>
           <p:cNvSpPr/>
           <p:nvPr/>
         </p:nvSpPr>
         <p:spPr>
           <a:xfrm>
-            <a:off x="1691640" y="1005840"/>
-            <a:ext cx="10180015" cy="731520"/>
+            <a:off x="5349240" y="6089904"/>
+            <a:ext cx="6659575" cy="347472"/>
           </a:xfrm>
           <a:prstGeom prst="rect">
             <a:avLst/>
@@ -14769,122 +15611,24 @@
           <a:ln/>
         </p:spPr>
         <p:txBody>
-          <a:bodyPr wrap="square" lIns="0" tIns="0" rIns="0" bIns="0" rtlCol="0" anchor="ctr">
-            <a:normAutofit/>
-          </a:bodyPr>
+          <a:bodyPr wrap="square" lIns="0" tIns="0" rIns="0" bIns="0" rtlCol="0" anchor="ctr"/>
           <a:lstStyle/>
           <a:p>
             <a:pPr algn="ctr" indent="0" marL="0">
               <a:buNone/>
             </a:pPr>
             <a:r>
-              <a:rPr lang="en-US" sz="3600" b="1" dirty="0">
-                <a:solidFill>
-                  <a:srgbClr val="990011"/>
+              <a:rPr lang="en-US" sz="1600" i="1" dirty="0">
+                <a:solidFill>
+                  <a:srgbClr val="555555"/>
                 </a:solidFill>
                 <a:latin typeface="Times New Roman" pitchFamily="34" charset="0"/>
                 <a:ea typeface="Times New Roman" pitchFamily="34" charset="-122"/>
                 <a:cs typeface="Times New Roman" pitchFamily="34" charset="-120"/>
               </a:rPr>
-              <a:t>2. Basic Sampling Procedures (continued)</a:t>
-            </a:r>
-            <a:endParaRPr lang="en-US" sz="3600" dirty="0"/>
-          </a:p>
-        </p:txBody>
-      </p:sp>
-      <p:sp>
-        <p:nvSpPr>
-          <p:cNvPr id="5" name="Text 2"/>
-          <p:cNvSpPr/>
-          <p:nvPr/>
-        </p:nvSpPr>
-        <p:spPr>
-          <a:xfrm>
-            <a:off x="1691640" y="1783080"/>
-            <a:ext cx="10180015" cy="4663440"/>
-          </a:xfrm>
-          <a:prstGeom prst="rect">
-            <a:avLst/>
-          </a:prstGeom>
-          <a:noFill/>
-          <a:ln/>
-        </p:spPr>
-        <p:txBody>
-          <a:bodyPr wrap="square" lIns="0" tIns="0" rIns="0" bIns="0" rtlCol="0" anchor="t"/>
-          <a:lstStyle/>
-          <a:p>
-            <a:pPr algn="l" indent="0" marL="0">
-              <a:spcAft>
-                <a:spcPts val="800"/>
-              </a:spcAft>
-              <a:buNone/>
-            </a:pPr>
-            <a:r>
-              <a:rPr lang="en-US" sz="4000" b="1" dirty="0">
-                <a:solidFill>
-                  <a:srgbClr val="111111"/>
-                </a:solidFill>
-                <a:latin typeface="Times New Roman" pitchFamily="34" charset="0"/>
-                <a:ea typeface="Times New Roman" pitchFamily="34" charset="-122"/>
-                <a:cs typeface="Times New Roman" pitchFamily="34" charset="-120"/>
-              </a:rPr>
-              <a:t>Systematic sampling: </a:t>
-            </a:r>
-            <a:pPr algn="l" indent="0" marL="0">
-              <a:spcAft>
-                <a:spcPts val="800"/>
-              </a:spcAft>
-              <a:buNone/>
-            </a:pPr>
-            <a:r>
-              <a:rPr lang="en-US" sz="4000" dirty="0">
-                <a:solidFill>
-                  <a:srgbClr val="111111"/>
-                </a:solidFill>
-                <a:latin typeface="Times New Roman" pitchFamily="34" charset="0"/>
-                <a:ea typeface="Times New Roman" pitchFamily="34" charset="-122"/>
-                <a:cs typeface="Times New Roman" pitchFamily="34" charset="-120"/>
-              </a:rPr>
-              <a:t>Members are chosen at regular intervals, such as every 10th house. It is quick and covers the whole area.</a:t>
-            </a:r>
-            <a:endParaRPr lang="en-US" sz="4000" dirty="0"/>
-          </a:p>
-          <a:p>
-            <a:pPr algn="l" indent="0" marL="0">
-              <a:spcAft>
-                <a:spcPts val="800"/>
-              </a:spcAft>
-              <a:buNone/>
-            </a:pPr>
-            <a:r>
-              <a:rPr lang="en-US" sz="4000" b="1" dirty="0">
-                <a:solidFill>
-                  <a:srgbClr val="111111"/>
-                </a:solidFill>
-                <a:latin typeface="Times New Roman" pitchFamily="34" charset="0"/>
-                <a:ea typeface="Times New Roman" pitchFamily="34" charset="-122"/>
-                <a:cs typeface="Times New Roman" pitchFamily="34" charset="-120"/>
-              </a:rPr>
-              <a:t>Stratified sampling: </a:t>
-            </a:r>
-            <a:pPr algn="l" indent="0" marL="0">
-              <a:spcAft>
-                <a:spcPts val="800"/>
-              </a:spcAft>
-              <a:buNone/>
-            </a:pPr>
-            <a:r>
-              <a:rPr lang="en-US" sz="4000" dirty="0">
-                <a:solidFill>
-                  <a:srgbClr val="111111"/>
-                </a:solidFill>
-                <a:latin typeface="Times New Roman" pitchFamily="34" charset="0"/>
-                <a:ea typeface="Times New Roman" pitchFamily="34" charset="-122"/>
-                <a:cs typeface="Times New Roman" pitchFamily="34" charset="-120"/>
-              </a:rPr>
-              <a:t>The population is divided into groups, and each group is sampled in proportion to its size. It makes sure all groups are represented.</a:t>
-            </a:r>
-            <a:endParaRPr lang="en-US" sz="4000" dirty="0"/>
+              <a:t>Illustration: primary and secondary data</a:t>
+            </a:r>
+            <a:endParaRPr lang="en-US" sz="1600" dirty="0"/>
           </a:p>
         </p:txBody>
       </p:sp>
@@ -15121,7 +15865,7 @@
                 <a:ea typeface="Times New Roman" pitchFamily="34" charset="-122"/>
                 <a:cs typeface="Times New Roman" pitchFamily="34" charset="-120"/>
               </a:rPr>
-              <a:t>Draw a choropleth map of population density by region of Cameroon.</a:t>
+              <a:t>Name two sources of secondary data.</a:t>
             </a:r>
             <a:endParaRPr lang="en-US" sz="4000" dirty="0"/>
           </a:p>
@@ -15239,48 +15983,9 @@
           </a:p>
         </p:txBody>
       </p:sp>
-      <p:sp>
-        <p:nvSpPr>
-          <p:cNvPr id="3" name="Text 1"/>
-          <p:cNvSpPr/>
-          <p:nvPr/>
-        </p:nvSpPr>
-        <p:spPr>
-          <a:xfrm>
-            <a:off x="457200" y="1005840"/>
-            <a:ext cx="11277295" cy="731520"/>
-          </a:xfrm>
-          <a:prstGeom prst="rect">
-            <a:avLst/>
-          </a:prstGeom>
-          <a:noFill/>
-          <a:ln/>
-        </p:spPr>
-        <p:txBody>
-          <a:bodyPr wrap="square" lIns="0" tIns="0" rIns="0" bIns="0" rtlCol="0" anchor="ctr"/>
-          <a:lstStyle/>
-          <a:p>
-            <a:pPr algn="ctr" indent="0" marL="0">
-              <a:buNone/>
-            </a:pPr>
-            <a:r>
-              <a:rPr lang="en-US" sz="3600" b="1" dirty="0">
-                <a:solidFill>
-                  <a:srgbClr val="990011"/>
-                </a:solidFill>
-                <a:latin typeface="Times New Roman" pitchFamily="34" charset="0"/>
-                <a:ea typeface="Times New Roman" pitchFamily="34" charset="-122"/>
-                <a:cs typeface="Times New Roman" pitchFamily="34" charset="-120"/>
-              </a:rPr>
-              <a:t>2. Basic Sampling Procedures</a:t>
-            </a:r>
-            <a:endParaRPr lang="en-US" sz="3600" dirty="0"/>
-          </a:p>
-        </p:txBody>
-      </p:sp>
       <p:pic>
         <p:nvPicPr>
-          <p:cNvPr id="4" name="Image 0" descr="/home/claude/f4/img/v2/sampling_big.png">    </p:cNvPr>
+          <p:cNvPr id="3" name="Image 0" descr="/home/claude/f4/img/minesec_sheet.png">    </p:cNvPr>
           <p:cNvPicPr>
             <a:picLocks noChangeAspect="1"/>
           </p:cNvPicPr>
@@ -15294,8 +15999,8 @@
         </p:blipFill>
         <p:spPr>
           <a:xfrm>
-            <a:off x="629930" y="1783080"/>
-            <a:ext cx="10931835" cy="4270248"/>
+            <a:off x="0" y="658368"/>
+            <a:ext cx="3840480" cy="5833872"/>
           </a:xfrm>
           <a:prstGeom prst="rect">
             <a:avLst/>
@@ -15304,14 +16009,14 @@
       </p:pic>
       <p:sp>
         <p:nvSpPr>
-          <p:cNvPr id="5" name="Text 2"/>
+          <p:cNvPr id="4" name="Text 1"/>
           <p:cNvSpPr/>
           <p:nvPr/>
         </p:nvSpPr>
         <p:spPr>
           <a:xfrm>
-            <a:off x="457200" y="6089904"/>
-            <a:ext cx="11277295" cy="347472"/>
+            <a:off x="4069080" y="1005840"/>
+            <a:ext cx="7802575" cy="731520"/>
           </a:xfrm>
           <a:prstGeom prst="rect">
             <a:avLst/>
@@ -15320,24 +16025,122 @@
           <a:ln/>
         </p:spPr>
         <p:txBody>
-          <a:bodyPr wrap="square" lIns="0" tIns="0" rIns="0" bIns="0" rtlCol="0" anchor="ctr"/>
+          <a:bodyPr wrap="square" lIns="0" tIns="0" rIns="0" bIns="0" rtlCol="0" anchor="ctr">
+            <a:normAutofit/>
+          </a:bodyPr>
           <a:lstStyle/>
           <a:p>
             <a:pPr algn="ctr" indent="0" marL="0">
               <a:buNone/>
             </a:pPr>
             <a:r>
-              <a:rPr lang="en-US" sz="1800" i="1" dirty="0">
-                <a:solidFill>
-                  <a:srgbClr val="555555"/>
+              <a:rPr lang="en-US" sz="3600" b="1" dirty="0">
+                <a:solidFill>
+                  <a:srgbClr val="990011"/>
                 </a:solidFill>
                 <a:latin typeface="Times New Roman" pitchFamily="34" charset="0"/>
                 <a:ea typeface="Times New Roman" pitchFamily="34" charset="-122"/>
                 <a:cs typeface="Times New Roman" pitchFamily="34" charset="-120"/>
               </a:rPr>
-              <a:t>Illustration: sampling methods</a:t>
-            </a:r>
-            <a:endParaRPr lang="en-US" sz="1800" dirty="0"/>
+              <a:t>1. Sources of Geographical Data</a:t>
+            </a:r>
+            <a:endParaRPr lang="en-US" sz="3600" dirty="0"/>
+          </a:p>
+        </p:txBody>
+      </p:sp>
+      <p:sp>
+        <p:nvSpPr>
+          <p:cNvPr id="5" name="Text 2"/>
+          <p:cNvSpPr/>
+          <p:nvPr/>
+        </p:nvSpPr>
+        <p:spPr>
+          <a:xfrm>
+            <a:off x="4069080" y="1783080"/>
+            <a:ext cx="7802575" cy="4663440"/>
+          </a:xfrm>
+          <a:prstGeom prst="rect">
+            <a:avLst/>
+          </a:prstGeom>
+          <a:noFill/>
+          <a:ln/>
+        </p:spPr>
+        <p:txBody>
+          <a:bodyPr wrap="square" lIns="0" tIns="0" rIns="0" bIns="0" rtlCol="0" anchor="t"/>
+          <a:lstStyle/>
+          <a:p>
+            <a:pPr algn="l" indent="0" marL="0">
+              <a:spcAft>
+                <a:spcPts val="800"/>
+              </a:spcAft>
+              <a:buNone/>
+            </a:pPr>
+            <a:r>
+              <a:rPr lang="en-US" sz="4000" b="1" dirty="0">
+                <a:solidFill>
+                  <a:srgbClr val="111111"/>
+                </a:solidFill>
+                <a:latin typeface="Times New Roman" pitchFamily="34" charset="0"/>
+                <a:ea typeface="Times New Roman" pitchFamily="34" charset="-122"/>
+                <a:cs typeface="Times New Roman" pitchFamily="34" charset="-120"/>
+              </a:rPr>
+              <a:t>Example of primary data: </a:t>
+            </a:r>
+            <a:pPr algn="l" indent="0" marL="0">
+              <a:spcAft>
+                <a:spcPts val="800"/>
+              </a:spcAft>
+              <a:buNone/>
+            </a:pPr>
+            <a:r>
+              <a:rPr lang="en-US" sz="4000" dirty="0">
+                <a:solidFill>
+                  <a:srgbClr val="111111"/>
+                </a:solidFill>
+                <a:latin typeface="Times New Roman" pitchFamily="34" charset="0"/>
+                <a:ea typeface="Times New Roman" pitchFamily="34" charset="-122"/>
+                <a:cs typeface="Times New Roman" pitchFamily="34" charset="-120"/>
+              </a:rPr>
+              <a:t>Measuring the temperature of the Benue with a thermometer.</a:t>
+            </a:r>
+            <a:endParaRPr lang="en-US" sz="4000" dirty="0"/>
+          </a:p>
+          <a:p>
+            <a:pPr algn="l" indent="0" marL="0">
+              <a:spcAft>
+                <a:spcPts val="800"/>
+              </a:spcAft>
+              <a:buNone/>
+            </a:pPr>
+            <a:r>
+              <a:rPr lang="en-US" sz="4000" b="1" dirty="0">
+                <a:solidFill>
+                  <a:srgbClr val="111111"/>
+                </a:solidFill>
+                <a:latin typeface="Times New Roman" pitchFamily="34" charset="0"/>
+                <a:ea typeface="Times New Roman" pitchFamily="34" charset="-122"/>
+                <a:cs typeface="Times New Roman" pitchFamily="34" charset="-120"/>
+              </a:rPr>
+              <a:t>Secondary data: </a:t>
+            </a:r>
+            <a:pPr algn="l" indent="0" marL="0">
+              <a:spcAft>
+                <a:spcPts val="800"/>
+              </a:spcAft>
+              <a:buNone/>
+            </a:pPr>
+            <a:r>
+              <a:rPr lang="en-US" sz="4000" dirty="0">
+                <a:solidFill>
+                  <a:srgbClr val="111111"/>
+                </a:solidFill>
+                <a:latin typeface="Times New Roman" pitchFamily="34" charset="0"/>
+                <a:ea typeface="Times New Roman" pitchFamily="34" charset="-122"/>
+                <a:cs typeface="Times New Roman" pitchFamily="34" charset="-120"/>
+              </a:rPr>
+              <a:t>They already exist and are cheap and quick to obtain, but may be outdated or not fit the study.</a:t>
+            </a:r>
+            <a:endParaRPr lang="en-US" sz="4000" dirty="0"/>
           </a:p>
         </p:txBody>
       </p:sp>
@@ -15470,7 +16273,7 @@
         <p:spPr>
           <a:xfrm>
             <a:off x="0" y="658368"/>
-            <a:ext cx="2468880" cy="5833872"/>
+            <a:ext cx="5120640" cy="5833872"/>
           </a:xfrm>
           <a:prstGeom prst="rect">
             <a:avLst/>
@@ -15485,8 +16288,8 @@
         </p:nvSpPr>
         <p:spPr>
           <a:xfrm>
-            <a:off x="2697480" y="1005840"/>
-            <a:ext cx="9174175" cy="731520"/>
+            <a:off x="5349240" y="1005840"/>
+            <a:ext cx="6522415" cy="731520"/>
           </a:xfrm>
           <a:prstGeom prst="rect">
             <a:avLst/>
@@ -15512,7 +16315,7 @@
                 <a:ea typeface="Times New Roman" pitchFamily="34" charset="-122"/>
                 <a:cs typeface="Times New Roman" pitchFamily="34" charset="-120"/>
               </a:rPr>
-              <a:t>3. Field Techniques</a:t>
+              <a:t>1. Sources of Geographical Data (continued)</a:t>
             </a:r>
             <a:endParaRPr lang="en-US" sz="3600" dirty="0"/>
           </a:p>
@@ -15526,8 +16329,8 @@
         </p:nvSpPr>
         <p:spPr>
           <a:xfrm>
-            <a:off x="2697480" y="1783080"/>
-            <a:ext cx="9174175" cy="4663440"/>
+            <a:off x="5349240" y="1783080"/>
+            <a:ext cx="6522415" cy="4663440"/>
           </a:xfrm>
           <a:prstGeom prst="rect">
             <a:avLst/>
@@ -15546,7 +16349,7 @@
               <a:buNone/>
             </a:pPr>
             <a:r>
-              <a:rPr lang="en-US" sz="4000" i="1" dirty="0">
+              <a:rPr lang="en-US" sz="4000" b="1" dirty="0">
                 <a:solidFill>
                   <a:srgbClr val="111111"/>
                 </a:solidFill>
@@ -15554,11 +16357,8 @@
                 <a:ea typeface="Times New Roman" pitchFamily="34" charset="-122"/>
                 <a:cs typeface="Times New Roman" pitchFamily="34" charset="-120"/>
               </a:rPr>
-              <a:t>Data are collected in the field with the following techniques:</a:t>
-            </a:r>
-            <a:endParaRPr lang="en-US" sz="4000" dirty="0"/>
-          </a:p>
-          <a:p>
+              <a:t>Sources of secondary data: </a:t>
+            </a:r>
             <a:pPr algn="l" indent="0" marL="0">
               <a:spcAft>
                 <a:spcPts val="800"/>
@@ -15566,7 +16366,7 @@
               <a:buNone/>
             </a:pPr>
             <a:r>
-              <a:rPr lang="en-US" sz="4000" b="1" dirty="0">
+              <a:rPr lang="en-US" sz="4000" dirty="0">
                 <a:solidFill>
                   <a:srgbClr val="111111"/>
                 </a:solidFill>
@@ -15574,24 +16374,7 @@
                 <a:ea typeface="Times New Roman" pitchFamily="34" charset="-122"/>
                 <a:cs typeface="Times New Roman" pitchFamily="34" charset="-120"/>
               </a:rPr>
-              <a:t>Observation and measurement: </a:t>
-            </a:r>
-            <a:pPr algn="l" indent="0" marL="0">
-              <a:spcAft>
-                <a:spcPts val="800"/>
-              </a:spcAft>
-              <a:buNone/>
-            </a:pPr>
-            <a:r>
-              <a:rPr lang="en-US" sz="4000" dirty="0">
-                <a:solidFill>
-                  <a:srgbClr val="111111"/>
-                </a:solidFill>
-                <a:latin typeface="Times New Roman" pitchFamily="34" charset="0"/>
-                <a:ea typeface="Times New Roman" pitchFamily="34" charset="-122"/>
-                <a:cs typeface="Times New Roman" pitchFamily="34" charset="-120"/>
-              </a:rPr>
-              <a:t>Observation, counting, photographs and video record what is seen. Tapes, rain gauges, compasses, clinometers and GPS give measurements.</a:t>
+              <a:t>Books, BUCREP census reports, INS statistics, Cameroon Tribune, maps, websites and reports of the Ministry of Agriculture on cotton production.</a:t>
             </a:r>
             <a:endParaRPr lang="en-US" sz="4000" dirty="0"/>
           </a:p>
@@ -15709,9 +16492,129 @@
           </a:p>
         </p:txBody>
       </p:sp>
+      <p:sp>
+        <p:nvSpPr>
+          <p:cNvPr id="3" name="Text 1"/>
+          <p:cNvSpPr/>
+          <p:nvPr/>
+        </p:nvSpPr>
+        <p:spPr>
+          <a:xfrm>
+            <a:off x="365760" y="1005840"/>
+            <a:ext cx="11460175" cy="731520"/>
+          </a:xfrm>
+          <a:prstGeom prst="rect">
+            <a:avLst/>
+          </a:prstGeom>
+          <a:noFill/>
+          <a:ln/>
+        </p:spPr>
+        <p:txBody>
+          <a:bodyPr wrap="square" lIns="0" tIns="0" rIns="0" bIns="0" rtlCol="0" anchor="ctr">
+            <a:normAutofit/>
+          </a:bodyPr>
+          <a:lstStyle/>
+          <a:p>
+            <a:pPr algn="ctr" indent="0" marL="0">
+              <a:buNone/>
+            </a:pPr>
+            <a:r>
+              <a:rPr lang="en-US" sz="3600" b="1" dirty="0">
+                <a:solidFill>
+                  <a:srgbClr val="990011"/>
+                </a:solidFill>
+                <a:latin typeface="Times New Roman" pitchFamily="34" charset="0"/>
+                <a:ea typeface="Times New Roman" pitchFamily="34" charset="-122"/>
+                <a:cs typeface="Times New Roman" pitchFamily="34" charset="-120"/>
+              </a:rPr>
+              <a:t>2. Basic Sampling Procedures</a:t>
+            </a:r>
+            <a:endParaRPr lang="en-US" sz="3600" dirty="0"/>
+          </a:p>
+        </p:txBody>
+      </p:sp>
+      <p:sp>
+        <p:nvSpPr>
+          <p:cNvPr id="4" name="Text 2"/>
+          <p:cNvSpPr/>
+          <p:nvPr/>
+        </p:nvSpPr>
+        <p:spPr>
+          <a:xfrm>
+            <a:off x="365760" y="1783080"/>
+            <a:ext cx="4846320" cy="4617720"/>
+          </a:xfrm>
+          <a:prstGeom prst="rect">
+            <a:avLst/>
+          </a:prstGeom>
+          <a:noFill/>
+          <a:ln/>
+        </p:spPr>
+        <p:txBody>
+          <a:bodyPr wrap="square" lIns="0" tIns="0" rIns="0" bIns="0" rtlCol="0" anchor="t"/>
+          <a:lstStyle/>
+          <a:p>
+            <a:pPr algn="l" indent="0" marL="0">
+              <a:spcAft>
+                <a:spcPts val="800"/>
+              </a:spcAft>
+              <a:buNone/>
+            </a:pPr>
+            <a:r>
+              <a:rPr lang="en-US" sz="3600" i="1" dirty="0">
+                <a:solidFill>
+                  <a:srgbClr val="111111"/>
+                </a:solidFill>
+                <a:latin typeface="Times New Roman" pitchFamily="34" charset="0"/>
+                <a:ea typeface="Times New Roman" pitchFamily="34" charset="-122"/>
+                <a:cs typeface="Times New Roman" pitchFamily="34" charset="-120"/>
+              </a:rPr>
+              <a:t>The basic sampling procedures are the following:</a:t>
+            </a:r>
+            <a:endParaRPr lang="en-US" sz="3600" dirty="0"/>
+          </a:p>
+          <a:p>
+            <a:pPr algn="l" indent="0" marL="0">
+              <a:spcAft>
+                <a:spcPts val="800"/>
+              </a:spcAft>
+              <a:buNone/>
+            </a:pPr>
+            <a:r>
+              <a:rPr lang="en-US" sz="3600" b="1" dirty="0">
+                <a:solidFill>
+                  <a:srgbClr val="111111"/>
+                </a:solidFill>
+                <a:latin typeface="Times New Roman" pitchFamily="34" charset="0"/>
+                <a:ea typeface="Times New Roman" pitchFamily="34" charset="-122"/>
+                <a:cs typeface="Times New Roman" pitchFamily="34" charset="-120"/>
+              </a:rPr>
+              <a:t>Why sample: </a:t>
+            </a:r>
+            <a:pPr algn="l" indent="0" marL="0">
+              <a:spcAft>
+                <a:spcPts val="800"/>
+              </a:spcAft>
+              <a:buNone/>
+            </a:pPr>
+            <a:r>
+              <a:rPr lang="en-US" sz="3600" dirty="0">
+                <a:solidFill>
+                  <a:srgbClr val="111111"/>
+                </a:solidFill>
+                <a:latin typeface="Times New Roman" pitchFamily="34" charset="0"/>
+                <a:ea typeface="Times New Roman" pitchFamily="34" charset="-122"/>
+                <a:cs typeface="Times New Roman" pitchFamily="34" charset="-120"/>
+              </a:rPr>
+              <a:t>It is often impossible, too slow or too costly to study the whole population.</a:t>
+            </a:r>
+            <a:endParaRPr lang="en-US" sz="3600" dirty="0"/>
+          </a:p>
+        </p:txBody>
+      </p:sp>
       <p:pic>
         <p:nvPicPr>
-          <p:cNvPr id="3" name="Image 0" descr="/home/claude/f4/img/minesec_sheet.png">    </p:cNvPr>
+          <p:cNvPr id="5" name="Image 0" descr="/home/claude/f4/img/v2/sampling_big.png">    </p:cNvPr>
           <p:cNvPicPr>
             <a:picLocks noChangeAspect="1"/>
           </p:cNvPicPr>
@@ -15725,8 +16628,8 @@
         </p:blipFill>
         <p:spPr>
           <a:xfrm>
-            <a:off x="0" y="658368"/>
-            <a:ext cx="5120640" cy="5833872"/>
+            <a:off x="5349240" y="2617506"/>
+            <a:ext cx="6659575" cy="2601397"/>
           </a:xfrm>
           <a:prstGeom prst="rect">
             <a:avLst/>
@@ -15735,14 +16638,14 @@
       </p:pic>
       <p:sp>
         <p:nvSpPr>
-          <p:cNvPr id="4" name="Text 1"/>
+          <p:cNvPr id="6" name="Text 3"/>
           <p:cNvSpPr/>
           <p:nvPr/>
         </p:nvSpPr>
         <p:spPr>
           <a:xfrm>
-            <a:off x="5349240" y="1005840"/>
-            <a:ext cx="6522415" cy="731520"/>
+            <a:off x="5349240" y="6089904"/>
+            <a:ext cx="6659575" cy="347472"/>
           </a:xfrm>
           <a:prstGeom prst="rect">
             <a:avLst/>
@@ -15751,85 +16654,24 @@
           <a:ln/>
         </p:spPr>
         <p:txBody>
-          <a:bodyPr wrap="square" lIns="0" tIns="0" rIns="0" bIns="0" rtlCol="0" anchor="ctr">
-            <a:normAutofit/>
-          </a:bodyPr>
+          <a:bodyPr wrap="square" lIns="0" tIns="0" rIns="0" bIns="0" rtlCol="0" anchor="ctr"/>
           <a:lstStyle/>
           <a:p>
             <a:pPr algn="ctr" indent="0" marL="0">
               <a:buNone/>
             </a:pPr>
             <a:r>
-              <a:rPr lang="en-US" sz="3600" b="1" dirty="0">
-                <a:solidFill>
-                  <a:srgbClr val="990011"/>
+              <a:rPr lang="en-US" sz="1600" i="1" dirty="0">
+                <a:solidFill>
+                  <a:srgbClr val="555555"/>
                 </a:solidFill>
                 <a:latin typeface="Times New Roman" pitchFamily="34" charset="0"/>
                 <a:ea typeface="Times New Roman" pitchFamily="34" charset="-122"/>
                 <a:cs typeface="Times New Roman" pitchFamily="34" charset="-120"/>
               </a:rPr>
-              <a:t>3. Field Techniques (continued)</a:t>
-            </a:r>
-            <a:endParaRPr lang="en-US" sz="3600" dirty="0"/>
-          </a:p>
-        </p:txBody>
-      </p:sp>
-      <p:sp>
-        <p:nvSpPr>
-          <p:cNvPr id="5" name="Text 2"/>
-          <p:cNvSpPr/>
-          <p:nvPr/>
-        </p:nvSpPr>
-        <p:spPr>
-          <a:xfrm>
-            <a:off x="5349240" y="1783080"/>
-            <a:ext cx="6522415" cy="4663440"/>
-          </a:xfrm>
-          <a:prstGeom prst="rect">
-            <a:avLst/>
-          </a:prstGeom>
-          <a:noFill/>
-          <a:ln/>
-        </p:spPr>
-        <p:txBody>
-          <a:bodyPr wrap="square" lIns="0" tIns="0" rIns="0" bIns="0" rtlCol="0" anchor="t"/>
-          <a:lstStyle/>
-          <a:p>
-            <a:pPr algn="l" indent="0" marL="0">
-              <a:spcAft>
-                <a:spcPts val="800"/>
-              </a:spcAft>
-              <a:buNone/>
-            </a:pPr>
-            <a:r>
-              <a:rPr lang="en-US" sz="4000" b="1" dirty="0">
-                <a:solidFill>
-                  <a:srgbClr val="111111"/>
-                </a:solidFill>
-                <a:latin typeface="Times New Roman" pitchFamily="34" charset="0"/>
-                <a:ea typeface="Times New Roman" pitchFamily="34" charset="-122"/>
-                <a:cs typeface="Times New Roman" pitchFamily="34" charset="-120"/>
-              </a:rPr>
-              <a:t>Questionnaires and interviews: </a:t>
-            </a:r>
-            <a:pPr algn="l" indent="0" marL="0">
-              <a:spcAft>
-                <a:spcPts val="800"/>
-              </a:spcAft>
-              <a:buNone/>
-            </a:pPr>
-            <a:r>
-              <a:rPr lang="en-US" sz="4000" dirty="0">
-                <a:solidFill>
-                  <a:srgbClr val="111111"/>
-                </a:solidFill>
-                <a:latin typeface="Times New Roman" pitchFamily="34" charset="0"/>
-                <a:ea typeface="Times New Roman" pitchFamily="34" charset="-122"/>
-                <a:cs typeface="Times New Roman" pitchFamily="34" charset="-120"/>
-              </a:rPr>
-              <a:t>A questionnaire has short, clear and non-leading questions. Interviews and focus groups give deeper answers from people.</a:t>
-            </a:r>
-            <a:endParaRPr lang="en-US" sz="4000" dirty="0"/>
+              <a:t>Illustration: three sampling methods</a:t>
+            </a:r>
+            <a:endParaRPr lang="en-US" sz="1600" dirty="0"/>
           </a:p>
         </p:txBody>
       </p:sp>
@@ -15945,48 +16787,9 @@
           </a:p>
         </p:txBody>
       </p:sp>
-      <p:sp>
-        <p:nvSpPr>
-          <p:cNvPr id="3" name="Text 1"/>
-          <p:cNvSpPr/>
-          <p:nvPr/>
-        </p:nvSpPr>
-        <p:spPr>
-          <a:xfrm>
-            <a:off x="457200" y="1005840"/>
-            <a:ext cx="11277295" cy="731520"/>
-          </a:xfrm>
-          <a:prstGeom prst="rect">
-            <a:avLst/>
-          </a:prstGeom>
-          <a:noFill/>
-          <a:ln/>
-        </p:spPr>
-        <p:txBody>
-          <a:bodyPr wrap="square" lIns="0" tIns="0" rIns="0" bIns="0" rtlCol="0" anchor="ctr"/>
-          <a:lstStyle/>
-          <a:p>
-            <a:pPr algn="ctr" indent="0" marL="0">
-              <a:buNone/>
-            </a:pPr>
-            <a:r>
-              <a:rPr lang="en-US" sz="3600" b="1" dirty="0">
-                <a:solidFill>
-                  <a:srgbClr val="990011"/>
-                </a:solidFill>
-                <a:latin typeface="Times New Roman" pitchFamily="34" charset="0"/>
-                <a:ea typeface="Times New Roman" pitchFamily="34" charset="-122"/>
-                <a:cs typeface="Times New Roman" pitchFamily="34" charset="-120"/>
-              </a:rPr>
-              <a:t>3. Field Techniques</a:t>
-            </a:r>
-            <a:endParaRPr lang="en-US" sz="3600" dirty="0"/>
-          </a:p>
-        </p:txBody>
-      </p:sp>
       <p:pic>
         <p:nvPicPr>
-          <p:cNvPr id="4" name="Image 0" descr="/home/claude/f4/img/v2/questionnaire_big.png">    </p:cNvPr>
+          <p:cNvPr id="3" name="Image 0" descr="/home/claude/f4/img/minesec_sheet.png">    </p:cNvPr>
           <p:cNvPicPr>
             <a:picLocks noChangeAspect="1"/>
           </p:cNvPicPr>
@@ -16000,8 +16803,8 @@
         </p:blipFill>
         <p:spPr>
           <a:xfrm>
-            <a:off x="629930" y="1783080"/>
-            <a:ext cx="10931835" cy="4270248"/>
+            <a:off x="0" y="658368"/>
+            <a:ext cx="5120640" cy="5833872"/>
           </a:xfrm>
           <a:prstGeom prst="rect">
             <a:avLst/>
@@ -16010,14 +16813,14 @@
       </p:pic>
       <p:sp>
         <p:nvSpPr>
-          <p:cNvPr id="5" name="Text 2"/>
+          <p:cNvPr id="4" name="Text 1"/>
           <p:cNvSpPr/>
           <p:nvPr/>
         </p:nvSpPr>
         <p:spPr>
           <a:xfrm>
-            <a:off x="457200" y="6089904"/>
-            <a:ext cx="11277295" cy="347472"/>
+            <a:off x="5349240" y="1005840"/>
+            <a:ext cx="6522415" cy="731520"/>
           </a:xfrm>
           <a:prstGeom prst="rect">
             <a:avLst/>
@@ -16026,24 +16829,85 @@
           <a:ln/>
         </p:spPr>
         <p:txBody>
-          <a:bodyPr wrap="square" lIns="0" tIns="0" rIns="0" bIns="0" rtlCol="0" anchor="ctr"/>
+          <a:bodyPr wrap="square" lIns="0" tIns="0" rIns="0" bIns="0" rtlCol="0" anchor="ctr">
+            <a:normAutofit/>
+          </a:bodyPr>
           <a:lstStyle/>
           <a:p>
             <a:pPr algn="ctr" indent="0" marL="0">
               <a:buNone/>
             </a:pPr>
             <a:r>
-              <a:rPr lang="en-US" sz="1800" i="1" dirty="0">
-                <a:solidFill>
-                  <a:srgbClr val="555555"/>
+              <a:rPr lang="en-US" sz="3600" b="1" dirty="0">
+                <a:solidFill>
+                  <a:srgbClr val="990011"/>
                 </a:solidFill>
                 <a:latin typeface="Times New Roman" pitchFamily="34" charset="0"/>
                 <a:ea typeface="Times New Roman" pitchFamily="34" charset="-122"/>
                 <a:cs typeface="Times New Roman" pitchFamily="34" charset="-120"/>
               </a:rPr>
-              <a:t>Illustration: good and bad questions</a:t>
-            </a:r>
-            <a:endParaRPr lang="en-US" sz="1800" dirty="0"/>
+              <a:t>2. Basic Sampling Procedures</a:t>
+            </a:r>
+            <a:endParaRPr lang="en-US" sz="3600" dirty="0"/>
+          </a:p>
+        </p:txBody>
+      </p:sp>
+      <p:sp>
+        <p:nvSpPr>
+          <p:cNvPr id="5" name="Text 2"/>
+          <p:cNvSpPr/>
+          <p:nvPr/>
+        </p:nvSpPr>
+        <p:spPr>
+          <a:xfrm>
+            <a:off x="5349240" y="1783080"/>
+            <a:ext cx="6522415" cy="4663440"/>
+          </a:xfrm>
+          <a:prstGeom prst="rect">
+            <a:avLst/>
+          </a:prstGeom>
+          <a:noFill/>
+          <a:ln/>
+        </p:spPr>
+        <p:txBody>
+          <a:bodyPr wrap="square" lIns="0" tIns="0" rIns="0" bIns="0" rtlCol="0" anchor="t"/>
+          <a:lstStyle/>
+          <a:p>
+            <a:pPr algn="l" indent="0" marL="0">
+              <a:spcAft>
+                <a:spcPts val="800"/>
+              </a:spcAft>
+              <a:buNone/>
+            </a:pPr>
+            <a:r>
+              <a:rPr lang="en-US" sz="4000" b="1" dirty="0">
+                <a:solidFill>
+                  <a:srgbClr val="111111"/>
+                </a:solidFill>
+                <a:latin typeface="Times New Roman" pitchFamily="34" charset="0"/>
+                <a:ea typeface="Times New Roman" pitchFamily="34" charset="-122"/>
+                <a:cs typeface="Times New Roman" pitchFamily="34" charset="-120"/>
+              </a:rPr>
+              <a:t>Random sampling: </a:t>
+            </a:r>
+            <a:pPr algn="l" indent="0" marL="0">
+              <a:spcAft>
+                <a:spcPts val="800"/>
+              </a:spcAft>
+              <a:buNone/>
+            </a:pPr>
+            <a:r>
+              <a:rPr lang="en-US" sz="4000" dirty="0">
+                <a:solidFill>
+                  <a:srgbClr val="111111"/>
+                </a:solidFill>
+                <a:latin typeface="Times New Roman" pitchFamily="34" charset="0"/>
+                <a:ea typeface="Times New Roman" pitchFamily="34" charset="-122"/>
+                <a:cs typeface="Times New Roman" pitchFamily="34" charset="-120"/>
+              </a:rPr>
+              <a:t>Every member has an equal chance of being chosen, by drawing names from a box or using random numbers; it is unbiased.</a:t>
+            </a:r>
+            <a:endParaRPr lang="en-US" sz="4000" dirty="0"/>
           </a:p>
         </p:txBody>
       </p:sp>
@@ -16153,15 +17017,115 @@
                 <a:ea typeface="Calibri" pitchFamily="34" charset="-122"/>
                 <a:cs typeface="Calibri" pitchFamily="34" charset="-120"/>
               </a:rPr>
-              <a:t>FORMATIVE EVALUATION</a:t>
+              <a:t>BOARD SUMMARY</a:t>
             </a:r>
             <a:endParaRPr lang="en-US" sz="1400" dirty="0"/>
+          </a:p>
+        </p:txBody>
+      </p:sp>
+      <p:sp>
+        <p:nvSpPr>
+          <p:cNvPr id="3" name="Text 1"/>
+          <p:cNvSpPr/>
+          <p:nvPr/>
+        </p:nvSpPr>
+        <p:spPr>
+          <a:xfrm>
+            <a:off x="365760" y="1005840"/>
+            <a:ext cx="11460175" cy="731520"/>
+          </a:xfrm>
+          <a:prstGeom prst="rect">
+            <a:avLst/>
+          </a:prstGeom>
+          <a:noFill/>
+          <a:ln/>
+        </p:spPr>
+        <p:txBody>
+          <a:bodyPr wrap="square" lIns="0" tIns="0" rIns="0" bIns="0" rtlCol="0" anchor="ctr">
+            <a:normAutofit/>
+          </a:bodyPr>
+          <a:lstStyle/>
+          <a:p>
+            <a:pPr algn="ctr" indent="0" marL="0">
+              <a:buNone/>
+            </a:pPr>
+            <a:r>
+              <a:rPr lang="en-US" sz="3600" b="1" dirty="0">
+                <a:solidFill>
+                  <a:srgbClr val="990011"/>
+                </a:solidFill>
+                <a:latin typeface="Times New Roman" pitchFamily="34" charset="0"/>
+                <a:ea typeface="Times New Roman" pitchFamily="34" charset="-122"/>
+                <a:cs typeface="Times New Roman" pitchFamily="34" charset="-120"/>
+              </a:rPr>
+              <a:t>2. Basic Sampling Procedures</a:t>
+            </a:r>
+            <a:endParaRPr lang="en-US" sz="3600" dirty="0"/>
+          </a:p>
+        </p:txBody>
+      </p:sp>
+      <p:sp>
+        <p:nvSpPr>
+          <p:cNvPr id="4" name="Text 2"/>
+          <p:cNvSpPr/>
+          <p:nvPr/>
+        </p:nvSpPr>
+        <p:spPr>
+          <a:xfrm>
+            <a:off x="365760" y="1783080"/>
+            <a:ext cx="4846320" cy="4617720"/>
+          </a:xfrm>
+          <a:prstGeom prst="rect">
+            <a:avLst/>
+          </a:prstGeom>
+          <a:noFill/>
+          <a:ln/>
+        </p:spPr>
+        <p:txBody>
+          <a:bodyPr wrap="square" lIns="0" tIns="0" rIns="0" bIns="0" rtlCol="0" anchor="t"/>
+          <a:lstStyle/>
+          <a:p>
+            <a:pPr algn="l" indent="0" marL="0">
+              <a:spcAft>
+                <a:spcPts val="800"/>
+              </a:spcAft>
+              <a:buNone/>
+            </a:pPr>
+            <a:r>
+              <a:rPr lang="en-US" sz="3400" b="1" dirty="0">
+                <a:solidFill>
+                  <a:srgbClr val="111111"/>
+                </a:solidFill>
+                <a:latin typeface="Times New Roman" pitchFamily="34" charset="0"/>
+                <a:ea typeface="Times New Roman" pitchFamily="34" charset="-122"/>
+                <a:cs typeface="Times New Roman" pitchFamily="34" charset="-120"/>
+              </a:rPr>
+              <a:t>Systematic sampling: </a:t>
+            </a:r>
+            <a:pPr algn="l" indent="0" marL="0">
+              <a:spcAft>
+                <a:spcPts val="800"/>
+              </a:spcAft>
+              <a:buNone/>
+            </a:pPr>
+            <a:r>
+              <a:rPr lang="en-US" sz="3400" dirty="0">
+                <a:solidFill>
+                  <a:srgbClr val="111111"/>
+                </a:solidFill>
+                <a:latin typeface="Times New Roman" pitchFamily="34" charset="0"/>
+                <a:ea typeface="Times New Roman" pitchFamily="34" charset="-122"/>
+                <a:cs typeface="Times New Roman" pitchFamily="34" charset="-120"/>
+              </a:rPr>
+              <a:t>Members are chosen at a regular interval k = population ÷ sample size, from a random start: for 20 out of 200, k = 10, so the 7th, 17th, 27th and so on.</a:t>
+            </a:r>
+            <a:endParaRPr lang="en-US" sz="3400" dirty="0"/>
           </a:p>
         </p:txBody>
       </p:sp>
       <p:pic>
         <p:nvPicPr>
-          <p:cNvPr id="3" name="Image 0" descr="/home/claude/f4/img/minesec_sheet.png">    </p:cNvPr>
+          <p:cNvPr id="5" name="Image 0" descr="/home/claude/f4/img/v2/stat2_systematic.png">    </p:cNvPr>
           <p:cNvPicPr>
             <a:picLocks noChangeAspect="1"/>
           </p:cNvPicPr>
@@ -16175,8 +17139,8 @@
         </p:blipFill>
         <p:spPr>
           <a:xfrm>
-            <a:off x="0" y="658368"/>
-            <a:ext cx="5120640" cy="5833872"/>
+            <a:off x="5349240" y="2617506"/>
+            <a:ext cx="6659575" cy="2601397"/>
           </a:xfrm>
           <a:prstGeom prst="rect">
             <a:avLst/>
@@ -16185,14 +17149,14 @@
       </p:pic>
       <p:sp>
         <p:nvSpPr>
-          <p:cNvPr id="4" name="Text 1"/>
+          <p:cNvPr id="6" name="Text 3"/>
           <p:cNvSpPr/>
           <p:nvPr/>
         </p:nvSpPr>
         <p:spPr>
           <a:xfrm>
-            <a:off x="5349240" y="1005840"/>
-            <a:ext cx="6522415" cy="731520"/>
+            <a:off x="5349240" y="6089904"/>
+            <a:ext cx="6659575" cy="347472"/>
           </a:xfrm>
           <a:prstGeom prst="rect">
             <a:avLst/>
@@ -16201,68 +17165,24 @@
           <a:ln/>
         </p:spPr>
         <p:txBody>
-          <a:bodyPr wrap="square" lIns="0" tIns="0" rIns="0" bIns="0" rtlCol="0" anchor="ctr">
-            <a:normAutofit/>
-          </a:bodyPr>
+          <a:bodyPr wrap="square" lIns="0" tIns="0" rIns="0" bIns="0" rtlCol="0" anchor="ctr"/>
           <a:lstStyle/>
           <a:p>
             <a:pPr algn="ctr" indent="0" marL="0">
               <a:buNone/>
             </a:pPr>
             <a:r>
-              <a:rPr lang="en-US" sz="3600" b="1" dirty="0">
-                <a:solidFill>
-                  <a:srgbClr val="990011"/>
+              <a:rPr lang="en-US" sz="1600" i="1" dirty="0">
+                <a:solidFill>
+                  <a:srgbClr val="555555"/>
                 </a:solidFill>
                 <a:latin typeface="Times New Roman" pitchFamily="34" charset="0"/>
                 <a:ea typeface="Times New Roman" pitchFamily="34" charset="-122"/>
                 <a:cs typeface="Times New Roman" pitchFamily="34" charset="-120"/>
               </a:rPr>
-              <a:t>Evaluation 1</a:t>
-            </a:r>
-            <a:endParaRPr lang="en-US" sz="3600" dirty="0"/>
-          </a:p>
-        </p:txBody>
-      </p:sp>
-      <p:sp>
-        <p:nvSpPr>
-          <p:cNvPr id="5" name="Text 2"/>
-          <p:cNvSpPr/>
-          <p:nvPr/>
-        </p:nvSpPr>
-        <p:spPr>
-          <a:xfrm>
-            <a:off x="5349240" y="1783080"/>
-            <a:ext cx="6522415" cy="4663440"/>
-          </a:xfrm>
-          <a:prstGeom prst="rect">
-            <a:avLst/>
-          </a:prstGeom>
-          <a:noFill/>
-          <a:ln/>
-        </p:spPr>
-        <p:txBody>
-          <a:bodyPr wrap="square" lIns="0" tIns="0" rIns="0" bIns="0" rtlCol="0" anchor="t"/>
-          <a:lstStyle/>
-          <a:p>
-            <a:pPr algn="l" indent="0" marL="0">
-              <a:spcAft>
-                <a:spcPts val="800"/>
-              </a:spcAft>
-              <a:buNone/>
-            </a:pPr>
-            <a:r>
-              <a:rPr lang="en-US" sz="4000" dirty="0">
-                <a:solidFill>
-                  <a:srgbClr val="111111"/>
-                </a:solidFill>
-                <a:latin typeface="Times New Roman" pitchFamily="34" charset="0"/>
-                <a:ea typeface="Times New Roman" pitchFamily="34" charset="-122"/>
-                <a:cs typeface="Times New Roman" pitchFamily="34" charset="-120"/>
-              </a:rPr>
-              <a:t>Give one advantage of each sampling method.</a:t>
-            </a:r>
-            <a:endParaRPr lang="en-US" sz="4000" dirty="0"/>
+              <a:t>Illustration: systematic sampling</a:t>
+            </a:r>
+            <a:endParaRPr lang="en-US" sz="1600" dirty="0"/>
           </a:p>
         </p:txBody>
       </p:sp>
@@ -16372,7 +17292,7 @@
                 <a:ea typeface="Calibri" pitchFamily="34" charset="-122"/>
                 <a:cs typeface="Calibri" pitchFamily="34" charset="-120"/>
               </a:rPr>
-              <a:t>FORMATIVE EVALUATION</a:t>
+              <a:t>BOARD SUMMARY</a:t>
             </a:r>
             <a:endParaRPr lang="en-US" sz="1400" dirty="0"/>
           </a:p>
@@ -16437,7 +17357,7 @@
                 <a:ea typeface="Times New Roman" pitchFamily="34" charset="-122"/>
                 <a:cs typeface="Times New Roman" pitchFamily="34" charset="-120"/>
               </a:rPr>
-              <a:t>Expected Answer</a:t>
+              <a:t>2. Basic Sampling Procedures</a:t>
             </a:r>
             <a:endParaRPr lang="en-US" sz="3600" dirty="0"/>
           </a:p>
@@ -16471,7 +17391,7 @@
               <a:buNone/>
             </a:pPr>
             <a:r>
-              <a:rPr lang="en-US" sz="4000" dirty="0">
+              <a:rPr lang="en-US" sz="4000" b="1" dirty="0">
                 <a:solidFill>
                   <a:srgbClr val="111111"/>
                 </a:solidFill>
@@ -16479,7 +17399,24 @@
                 <a:ea typeface="Times New Roman" pitchFamily="34" charset="-122"/>
                 <a:cs typeface="Times New Roman" pitchFamily="34" charset="-120"/>
               </a:rPr>
-              <a:t>Random: no bias. Systematic: easy. Stratified: represents all groups.</a:t>
+              <a:t>Stratified sampling: </a:t>
+            </a:r>
+            <a:pPr algn="l" indent="0" marL="0">
+              <a:spcAft>
+                <a:spcPts val="800"/>
+              </a:spcAft>
+              <a:buNone/>
+            </a:pPr>
+            <a:r>
+              <a:rPr lang="en-US" sz="4000" dirty="0">
+                <a:solidFill>
+                  <a:srgbClr val="111111"/>
+                </a:solidFill>
+                <a:latin typeface="Times New Roman" pitchFamily="34" charset="0"/>
+                <a:ea typeface="Times New Roman" pitchFamily="34" charset="-122"/>
+                <a:cs typeface="Times New Roman" pitchFamily="34" charset="-120"/>
+              </a:rPr>
+              <a:t>The population is divided into groups (strata), such as forms in a school, and each group is sampled in proportion to its size; it is very representative.</a:t>
             </a:r>
             <a:endParaRPr lang="en-US" sz="4000" dirty="0"/>
           </a:p>
@@ -16591,15 +17528,135 @@
                 <a:ea typeface="Calibri" pitchFamily="34" charset="-122"/>
                 <a:cs typeface="Calibri" pitchFamily="34" charset="-120"/>
               </a:rPr>
-              <a:t>FORMATIVE EVALUATION</a:t>
+              <a:t>BOARD SUMMARY</a:t>
             </a:r>
             <a:endParaRPr lang="en-US" sz="1400" dirty="0"/>
+          </a:p>
+        </p:txBody>
+      </p:sp>
+      <p:sp>
+        <p:nvSpPr>
+          <p:cNvPr id="3" name="Text 1"/>
+          <p:cNvSpPr/>
+          <p:nvPr/>
+        </p:nvSpPr>
+        <p:spPr>
+          <a:xfrm>
+            <a:off x="365760" y="1005840"/>
+            <a:ext cx="11460175" cy="731520"/>
+          </a:xfrm>
+          <a:prstGeom prst="rect">
+            <a:avLst/>
+          </a:prstGeom>
+          <a:noFill/>
+          <a:ln/>
+        </p:spPr>
+        <p:txBody>
+          <a:bodyPr wrap="square" lIns="0" tIns="0" rIns="0" bIns="0" rtlCol="0" anchor="ctr">
+            <a:normAutofit/>
+          </a:bodyPr>
+          <a:lstStyle/>
+          <a:p>
+            <a:pPr algn="ctr" indent="0" marL="0">
+              <a:buNone/>
+            </a:pPr>
+            <a:r>
+              <a:rPr lang="en-US" sz="3600" b="1" dirty="0">
+                <a:solidFill>
+                  <a:srgbClr val="990011"/>
+                </a:solidFill>
+                <a:latin typeface="Times New Roman" pitchFamily="34" charset="0"/>
+                <a:ea typeface="Times New Roman" pitchFamily="34" charset="-122"/>
+                <a:cs typeface="Times New Roman" pitchFamily="34" charset="-120"/>
+              </a:rPr>
+              <a:t>3. Primary Data Collection Techniques</a:t>
+            </a:r>
+            <a:endParaRPr lang="en-US" sz="3600" dirty="0"/>
+          </a:p>
+        </p:txBody>
+      </p:sp>
+      <p:sp>
+        <p:nvSpPr>
+          <p:cNvPr id="4" name="Text 2"/>
+          <p:cNvSpPr/>
+          <p:nvPr/>
+        </p:nvSpPr>
+        <p:spPr>
+          <a:xfrm>
+            <a:off x="365760" y="1783080"/>
+            <a:ext cx="4846320" cy="4617720"/>
+          </a:xfrm>
+          <a:prstGeom prst="rect">
+            <a:avLst/>
+          </a:prstGeom>
+          <a:noFill/>
+          <a:ln/>
+        </p:spPr>
+        <p:txBody>
+          <a:bodyPr wrap="square" lIns="0" tIns="0" rIns="0" bIns="0" rtlCol="0" anchor="t"/>
+          <a:lstStyle/>
+          <a:p>
+            <a:pPr algn="l" indent="0" marL="0">
+              <a:spcAft>
+                <a:spcPts val="800"/>
+              </a:spcAft>
+              <a:buNone/>
+            </a:pPr>
+            <a:r>
+              <a:rPr lang="en-US" sz="3200" i="1" dirty="0">
+                <a:solidFill>
+                  <a:srgbClr val="111111"/>
+                </a:solidFill>
+                <a:latin typeface="Times New Roman" pitchFamily="34" charset="0"/>
+                <a:ea typeface="Times New Roman" pitchFamily="34" charset="-122"/>
+                <a:cs typeface="Times New Roman" pitchFamily="34" charset="-120"/>
+              </a:rPr>
+              <a:t>The main techniques of primary data collection are the following:</a:t>
+            </a:r>
+            <a:endParaRPr lang="en-US" sz="3200" dirty="0"/>
+          </a:p>
+          <a:p>
+            <a:pPr algn="l" indent="0" marL="0">
+              <a:spcAft>
+                <a:spcPts val="800"/>
+              </a:spcAft>
+              <a:buNone/>
+            </a:pPr>
+            <a:r>
+              <a:rPr lang="en-US" sz="3200" b="1" dirty="0">
+                <a:solidFill>
+                  <a:srgbClr val="111111"/>
+                </a:solidFill>
+                <a:latin typeface="Times New Roman" pitchFamily="34" charset="0"/>
+                <a:ea typeface="Times New Roman" pitchFamily="34" charset="-122"/>
+                <a:cs typeface="Times New Roman" pitchFamily="34" charset="-120"/>
+              </a:rPr>
+              <a:t>Observation, counting and recording: </a:t>
+            </a:r>
+            <a:pPr algn="l" indent="0" marL="0">
+              <a:spcAft>
+                <a:spcPts val="800"/>
+              </a:spcAft>
+              <a:buNone/>
+            </a:pPr>
+            <a:r>
+              <a:rPr lang="en-US" sz="3200" dirty="0">
+                <a:solidFill>
+                  <a:srgbClr val="111111"/>
+                </a:solidFill>
+                <a:latin typeface="Times New Roman" pitchFamily="34" charset="0"/>
+                <a:ea typeface="Times New Roman" pitchFamily="34" charset="-122"/>
+                <a:cs typeface="Times New Roman" pitchFamily="34" charset="-120"/>
+              </a:rPr>
+              <a:t>Counting cars, motos and lorries on the Pont Neuf in one hour, or photographing house types in Yelwa.</a:t>
+            </a:r>
+            <a:endParaRPr lang="en-US" sz="3200" dirty="0"/>
           </a:p>
         </p:txBody>
       </p:sp>
       <p:pic>
         <p:nvPicPr>
-          <p:cNvPr id="3" name="Image 0" descr="/home/claude/f4/img/minesec_sheet.png">    </p:cNvPr>
+          <p:cNvPr id="5" name="Image 0" descr="/home/claude/f4/img/v2/stat2_techniques.png">    </p:cNvPr>
           <p:cNvPicPr>
             <a:picLocks noChangeAspect="1"/>
           </p:cNvPicPr>
@@ -16613,8 +17670,8 @@
         </p:blipFill>
         <p:spPr>
           <a:xfrm>
-            <a:off x="0" y="658368"/>
-            <a:ext cx="5120640" cy="5833872"/>
+            <a:off x="5349240" y="2617506"/>
+            <a:ext cx="6659575" cy="2601397"/>
           </a:xfrm>
           <a:prstGeom prst="rect">
             <a:avLst/>
@@ -16623,14 +17680,14 @@
       </p:pic>
       <p:sp>
         <p:nvSpPr>
-          <p:cNvPr id="4" name="Text 1"/>
+          <p:cNvPr id="6" name="Text 3"/>
           <p:cNvSpPr/>
           <p:nvPr/>
         </p:nvSpPr>
         <p:spPr>
           <a:xfrm>
-            <a:off x="5349240" y="1005840"/>
-            <a:ext cx="6522415" cy="731520"/>
+            <a:off x="5349240" y="6089904"/>
+            <a:ext cx="6659575" cy="347472"/>
           </a:xfrm>
           <a:prstGeom prst="rect">
             <a:avLst/>
@@ -16639,68 +17696,24 @@
           <a:ln/>
         </p:spPr>
         <p:txBody>
-          <a:bodyPr wrap="square" lIns="0" tIns="0" rIns="0" bIns="0" rtlCol="0" anchor="ctr">
-            <a:normAutofit/>
-          </a:bodyPr>
+          <a:bodyPr wrap="square" lIns="0" tIns="0" rIns="0" bIns="0" rtlCol="0" anchor="ctr"/>
           <a:lstStyle/>
           <a:p>
             <a:pPr algn="ctr" indent="0" marL="0">
               <a:buNone/>
             </a:pPr>
             <a:r>
-              <a:rPr lang="en-US" sz="3600" b="1" dirty="0">
-                <a:solidFill>
-                  <a:srgbClr val="990011"/>
+              <a:rPr lang="en-US" sz="1600" i="1" dirty="0">
+                <a:solidFill>
+                  <a:srgbClr val="555555"/>
                 </a:solidFill>
                 <a:latin typeface="Times New Roman" pitchFamily="34" charset="0"/>
                 <a:ea typeface="Times New Roman" pitchFamily="34" charset="-122"/>
                 <a:cs typeface="Times New Roman" pitchFamily="34" charset="-120"/>
               </a:rPr>
-              <a:t>Evaluation 2</a:t>
-            </a:r>
-            <a:endParaRPr lang="en-US" sz="3600" dirty="0"/>
-          </a:p>
-        </p:txBody>
-      </p:sp>
-      <p:sp>
-        <p:nvSpPr>
-          <p:cNvPr id="5" name="Text 2"/>
-          <p:cNvSpPr/>
-          <p:nvPr/>
-        </p:nvSpPr>
-        <p:spPr>
-          <a:xfrm>
-            <a:off x="5349240" y="1783080"/>
-            <a:ext cx="6522415" cy="4663440"/>
-          </a:xfrm>
-          <a:prstGeom prst="rect">
-            <a:avLst/>
-          </a:prstGeom>
-          <a:noFill/>
-          <a:ln/>
-        </p:spPr>
-        <p:txBody>
-          <a:bodyPr wrap="square" lIns="0" tIns="0" rIns="0" bIns="0" rtlCol="0" anchor="t"/>
-          <a:lstStyle/>
-          <a:p>
-            <a:pPr algn="l" indent="0" marL="0">
-              <a:spcAft>
-                <a:spcPts val="800"/>
-              </a:spcAft>
-              <a:buNone/>
-            </a:pPr>
-            <a:r>
-              <a:rPr lang="en-US" sz="4000" dirty="0">
-                <a:solidFill>
-                  <a:srgbClr val="111111"/>
-                </a:solidFill>
-                <a:latin typeface="Times New Roman" pitchFamily="34" charset="0"/>
-                <a:ea typeface="Times New Roman" pitchFamily="34" charset="-122"/>
-                <a:cs typeface="Times New Roman" pitchFamily="34" charset="-120"/>
-              </a:rPr>
-              <a:t>Give two primary and two secondary sources.</a:t>
-            </a:r>
-            <a:endParaRPr lang="en-US" sz="4000" dirty="0"/>
+              <a:t>Illustration: collection techniques</a:t>
+            </a:r>
+            <a:endParaRPr lang="en-US" sz="1600" dirty="0"/>
           </a:p>
         </p:txBody>
       </p:sp>
@@ -16810,7 +17823,7 @@
                 <a:ea typeface="Calibri" pitchFamily="34" charset="-122"/>
                 <a:cs typeface="Calibri" pitchFamily="34" charset="-120"/>
               </a:rPr>
-              <a:t>FORMATIVE EVALUATION</a:t>
+              <a:t>BOARD SUMMARY</a:t>
             </a:r>
             <a:endParaRPr lang="en-US" sz="1400" dirty="0"/>
           </a:p>
@@ -16875,7 +17888,7 @@
                 <a:ea typeface="Times New Roman" pitchFamily="34" charset="-122"/>
                 <a:cs typeface="Times New Roman" pitchFamily="34" charset="-120"/>
               </a:rPr>
-              <a:t>Expected Answer</a:t>
+              <a:t>3. Primary Data Collection Techniques</a:t>
             </a:r>
             <a:endParaRPr lang="en-US" sz="3600" dirty="0"/>
           </a:p>
@@ -16909,7 +17922,7 @@
               <a:buNone/>
             </a:pPr>
             <a:r>
-              <a:rPr lang="en-US" sz="4000" dirty="0">
+              <a:rPr lang="en-US" sz="4000" b="1" dirty="0">
                 <a:solidFill>
                   <a:srgbClr val="111111"/>
                 </a:solidFill>
@@ -16917,7 +17930,24 @@
                 <a:ea typeface="Times New Roman" pitchFamily="34" charset="-122"/>
                 <a:cs typeface="Times New Roman" pitchFamily="34" charset="-120"/>
               </a:rPr>
-              <a:t>Primary: counts, questionnaires. Secondary: census, maps.</a:t>
+              <a:t>Measurement: </a:t>
+            </a:r>
+            <a:pPr algn="l" indent="0" marL="0">
+              <a:spcAft>
+                <a:spcPts val="800"/>
+              </a:spcAft>
+              <a:buNone/>
+            </a:pPr>
+            <a:r>
+              <a:rPr lang="en-US" sz="4000" dirty="0">
+                <a:solidFill>
+                  <a:srgbClr val="111111"/>
+                </a:solidFill>
+                <a:latin typeface="Times New Roman" pitchFamily="34" charset="0"/>
+                <a:ea typeface="Times New Roman" pitchFamily="34" charset="-122"/>
+                <a:cs typeface="Times New Roman" pitchFamily="34" charset="-120"/>
+              </a:rPr>
+              <a:t>Instruments give precise figures: thermometer, rain gauge, measuring tape (river width), clinometer (slope angle).</a:t>
             </a:r>
             <a:endParaRPr lang="en-US" sz="4000" dirty="0"/>
           </a:p>
@@ -17029,15 +18059,115 @@
                 <a:ea typeface="Calibri" pitchFamily="34" charset="-122"/>
                 <a:cs typeface="Calibri" pitchFamily="34" charset="-120"/>
               </a:rPr>
-              <a:t>REMEDIATION</a:t>
+              <a:t>BOARD SUMMARY</a:t>
             </a:r>
             <a:endParaRPr lang="en-US" sz="1400" dirty="0"/>
+          </a:p>
+        </p:txBody>
+      </p:sp>
+      <p:sp>
+        <p:nvSpPr>
+          <p:cNvPr id="3" name="Text 1"/>
+          <p:cNvSpPr/>
+          <p:nvPr/>
+        </p:nvSpPr>
+        <p:spPr>
+          <a:xfrm>
+            <a:off x="365760" y="1005840"/>
+            <a:ext cx="11460175" cy="731520"/>
+          </a:xfrm>
+          <a:prstGeom prst="rect">
+            <a:avLst/>
+          </a:prstGeom>
+          <a:noFill/>
+          <a:ln/>
+        </p:spPr>
+        <p:txBody>
+          <a:bodyPr wrap="square" lIns="0" tIns="0" rIns="0" bIns="0" rtlCol="0" anchor="ctr">
+            <a:normAutofit/>
+          </a:bodyPr>
+          <a:lstStyle/>
+          <a:p>
+            <a:pPr algn="ctr" indent="0" marL="0">
+              <a:buNone/>
+            </a:pPr>
+            <a:r>
+              <a:rPr lang="en-US" sz="3600" b="1" dirty="0">
+                <a:solidFill>
+                  <a:srgbClr val="990011"/>
+                </a:solidFill>
+                <a:latin typeface="Times New Roman" pitchFamily="34" charset="0"/>
+                <a:ea typeface="Times New Roman" pitchFamily="34" charset="-122"/>
+                <a:cs typeface="Times New Roman" pitchFamily="34" charset="-120"/>
+              </a:rPr>
+              <a:t>3. Primary Data Collection Techniques</a:t>
+            </a:r>
+            <a:endParaRPr lang="en-US" sz="3600" dirty="0"/>
+          </a:p>
+        </p:txBody>
+      </p:sp>
+      <p:sp>
+        <p:nvSpPr>
+          <p:cNvPr id="4" name="Text 2"/>
+          <p:cNvSpPr/>
+          <p:nvPr/>
+        </p:nvSpPr>
+        <p:spPr>
+          <a:xfrm>
+            <a:off x="365760" y="1783080"/>
+            <a:ext cx="4846320" cy="4617720"/>
+          </a:xfrm>
+          <a:prstGeom prst="rect">
+            <a:avLst/>
+          </a:prstGeom>
+          <a:noFill/>
+          <a:ln/>
+        </p:spPr>
+        <p:txBody>
+          <a:bodyPr wrap="square" lIns="0" tIns="0" rIns="0" bIns="0" rtlCol="0" anchor="t"/>
+          <a:lstStyle/>
+          <a:p>
+            <a:pPr algn="l" indent="0" marL="0">
+              <a:spcAft>
+                <a:spcPts val="800"/>
+              </a:spcAft>
+              <a:buNone/>
+            </a:pPr>
+            <a:r>
+              <a:rPr lang="en-US" sz="3600" b="1" dirty="0">
+                <a:solidFill>
+                  <a:srgbClr val="111111"/>
+                </a:solidFill>
+                <a:latin typeface="Times New Roman" pitchFamily="34" charset="0"/>
+                <a:ea typeface="Times New Roman" pitchFamily="34" charset="-122"/>
+                <a:cs typeface="Times New Roman" pitchFamily="34" charset="-120"/>
+              </a:rPr>
+              <a:t>Questionnaires: </a:t>
+            </a:r>
+            <a:pPr algn="l" indent="0" marL="0">
+              <a:spcAft>
+                <a:spcPts val="800"/>
+              </a:spcAft>
+              <a:buNone/>
+            </a:pPr>
+            <a:r>
+              <a:rPr lang="en-US" sz="3600" dirty="0">
+                <a:solidFill>
+                  <a:srgbClr val="111111"/>
+                </a:solidFill>
+                <a:latin typeface="Times New Roman" pitchFamily="34" charset="0"/>
+                <a:ea typeface="Times New Roman" pitchFamily="34" charset="-122"/>
+                <a:cs typeface="Times New Roman" pitchFamily="34" charset="-120"/>
+              </a:rPr>
+              <a:t>Written questions answered by respondents, with closed (yes/no, choices) or open questions.</a:t>
+            </a:r>
+            <a:endParaRPr lang="en-US" sz="3600" dirty="0"/>
           </a:p>
         </p:txBody>
       </p:sp>
       <p:pic>
         <p:nvPicPr>
-          <p:cNvPr id="3" name="Image 0" descr="/home/claude/f4/img/minesec_sheet.png">    </p:cNvPr>
+          <p:cNvPr id="5" name="Image 0" descr="/home/claude/f4/img/v2/questionnaire_big.png">    </p:cNvPr>
           <p:cNvPicPr>
             <a:picLocks noChangeAspect="1"/>
           </p:cNvPicPr>
@@ -17051,8 +18181,8 @@
         </p:blipFill>
         <p:spPr>
           <a:xfrm>
-            <a:off x="0" y="658368"/>
-            <a:ext cx="2468880" cy="5833872"/>
+            <a:off x="5349240" y="2617506"/>
+            <a:ext cx="6659575" cy="2601397"/>
           </a:xfrm>
           <a:prstGeom prst="rect">
             <a:avLst/>
@@ -17061,14 +18191,14 @@
       </p:pic>
       <p:sp>
         <p:nvSpPr>
-          <p:cNvPr id="4" name="Text 1"/>
+          <p:cNvPr id="6" name="Text 3"/>
           <p:cNvSpPr/>
           <p:nvPr/>
         </p:nvSpPr>
         <p:spPr>
           <a:xfrm>
-            <a:off x="2697480" y="1005840"/>
-            <a:ext cx="9174175" cy="731520"/>
+            <a:off x="5349240" y="6089904"/>
+            <a:ext cx="6659575" cy="347472"/>
           </a:xfrm>
           <a:prstGeom prst="rect">
             <a:avLst/>
@@ -17077,134 +18207,24 @@
           <a:ln/>
         </p:spPr>
         <p:txBody>
-          <a:bodyPr wrap="square" lIns="0" tIns="0" rIns="0" bIns="0" rtlCol="0" anchor="ctr">
-            <a:normAutofit/>
-          </a:bodyPr>
+          <a:bodyPr wrap="square" lIns="0" tIns="0" rIns="0" bIns="0" rtlCol="0" anchor="ctr"/>
           <a:lstStyle/>
           <a:p>
             <a:pPr algn="ctr" indent="0" marL="0">
               <a:buNone/>
             </a:pPr>
             <a:r>
-              <a:rPr lang="en-US" sz="3600" b="1" dirty="0">
-                <a:solidFill>
-                  <a:srgbClr val="990011"/>
+              <a:rPr lang="en-US" sz="1600" i="1" dirty="0">
+                <a:solidFill>
+                  <a:srgbClr val="555555"/>
                 </a:solidFill>
                 <a:latin typeface="Times New Roman" pitchFamily="34" charset="0"/>
                 <a:ea typeface="Times New Roman" pitchFamily="34" charset="-122"/>
                 <a:cs typeface="Times New Roman" pitchFamily="34" charset="-120"/>
               </a:rPr>
-              <a:t>Remediation</a:t>
-            </a:r>
-            <a:endParaRPr lang="en-US" sz="3600" dirty="0"/>
-          </a:p>
-        </p:txBody>
-      </p:sp>
-      <p:sp>
-        <p:nvSpPr>
-          <p:cNvPr id="5" name="Text 2"/>
-          <p:cNvSpPr/>
-          <p:nvPr/>
-        </p:nvSpPr>
-        <p:spPr>
-          <a:xfrm>
-            <a:off x="2697480" y="1783080"/>
-            <a:ext cx="9174175" cy="4663440"/>
-          </a:xfrm>
-          <a:prstGeom prst="rect">
-            <a:avLst/>
-          </a:prstGeom>
-          <a:noFill/>
-          <a:ln/>
-        </p:spPr>
-        <p:txBody>
-          <a:bodyPr wrap="square" lIns="0" tIns="0" rIns="0" bIns="0" rtlCol="0" anchor="t"/>
-          <a:lstStyle/>
-          <a:p>
-            <a:pPr algn="l" indent="0" marL="0">
-              <a:spcAft>
-                <a:spcPts val="800"/>
-              </a:spcAft>
-              <a:buNone/>
-            </a:pPr>
-            <a:r>
-              <a:rPr lang="en-US" sz="4000" b="1" dirty="0">
-                <a:solidFill>
-                  <a:srgbClr val="111111"/>
-                </a:solidFill>
-                <a:latin typeface="Times New Roman" pitchFamily="34" charset="0"/>
-                <a:ea typeface="Times New Roman" pitchFamily="34" charset="-122"/>
-                <a:cs typeface="Times New Roman" pitchFamily="34" charset="-120"/>
-              </a:rPr>
-              <a:t>Fill in the blanks:</a:t>
-            </a:r>
-            <a:endParaRPr lang="en-US" sz="4000" dirty="0"/>
-          </a:p>
-          <a:p>
-            <a:pPr algn="l" marL="342900" indent="-342900">
-              <a:spcAft>
-                <a:spcPts val="800"/>
-              </a:spcAft>
-              <a:buSzPct val="100000"/>
-              <a:buFont typeface="+mj-lt"/>
-              <a:buAutoNum type="arabicPeriod" startAt="1"/>
-            </a:pPr>
-            <a:r>
-              <a:rPr lang="en-US" sz="4000" dirty="0">
-                <a:solidFill>
-                  <a:srgbClr val="111111"/>
-                </a:solidFill>
-                <a:latin typeface="Times New Roman" pitchFamily="34" charset="0"/>
-                <a:ea typeface="Times New Roman" pitchFamily="34" charset="-122"/>
-                <a:cs typeface="Times New Roman" pitchFamily="34" charset="-120"/>
-              </a:rPr>
-              <a:t>Data you collect yourself are ______ data.</a:t>
-            </a:r>
-            <a:endParaRPr lang="en-US" sz="4000" dirty="0"/>
-          </a:p>
-          <a:p>
-            <a:pPr algn="l" marL="342900" indent="-342900">
-              <a:spcAft>
-                <a:spcPts val="800"/>
-              </a:spcAft>
-              <a:buSzPct val="100000"/>
-              <a:buFont typeface="+mj-lt"/>
-              <a:buAutoNum type="arabicPeriod" startAt="1"/>
-            </a:pPr>
-            <a:r>
-              <a:rPr lang="en-US" sz="4000" dirty="0">
-                <a:solidFill>
-                  <a:srgbClr val="111111"/>
-                </a:solidFill>
-                <a:latin typeface="Times New Roman" pitchFamily="34" charset="0"/>
-                <a:ea typeface="Times New Roman" pitchFamily="34" charset="-122"/>
-                <a:cs typeface="Times New Roman" pitchFamily="34" charset="-120"/>
-              </a:rPr>
-              <a:t>Every 10th house is ______ sampling.</a:t>
-            </a:r>
-            <a:endParaRPr lang="en-US" sz="4000" dirty="0"/>
-          </a:p>
-          <a:p>
-            <a:pPr algn="l" marL="342900" indent="-342900">
-              <a:spcAft>
-                <a:spcPts val="800"/>
-              </a:spcAft>
-              <a:buSzPct val="100000"/>
-              <a:buFont typeface="+mj-lt"/>
-              <a:buAutoNum type="arabicPeriod" startAt="1"/>
-            </a:pPr>
-            <a:r>
-              <a:rPr lang="en-US" sz="4000" dirty="0">
-                <a:solidFill>
-                  <a:srgbClr val="111111"/>
-                </a:solidFill>
-                <a:latin typeface="Times New Roman" pitchFamily="34" charset="0"/>
-                <a:ea typeface="Times New Roman" pitchFamily="34" charset="-122"/>
-                <a:cs typeface="Times New Roman" pitchFamily="34" charset="-120"/>
-              </a:rPr>
-              <a:t>A group discussion is a ______ group.</a:t>
-            </a:r>
-            <a:endParaRPr lang="en-US" sz="4000" dirty="0"/>
+              <a:t>Illustration: good and bad questions</a:t>
+            </a:r>
+            <a:endParaRPr lang="en-US" sz="1600" dirty="0"/>
           </a:p>
         </p:txBody>
       </p:sp>
@@ -17314,7 +18334,7 @@
                 <a:ea typeface="Calibri" pitchFamily="34" charset="-122"/>
                 <a:cs typeface="Calibri" pitchFamily="34" charset="-120"/>
               </a:rPr>
-              <a:t>HOMEWORK</a:t>
+              <a:t>BOARD SUMMARY</a:t>
             </a:r>
             <a:endParaRPr lang="en-US" sz="1400" dirty="0"/>
           </a:p>
@@ -17337,7 +18357,7 @@
         <p:spPr>
           <a:xfrm>
             <a:off x="0" y="658368"/>
-            <a:ext cx="5120640" cy="5833872"/>
+            <a:ext cx="2468880" cy="5833872"/>
           </a:xfrm>
           <a:prstGeom prst="rect">
             <a:avLst/>
@@ -17352,8 +18372,8 @@
         </p:nvSpPr>
         <p:spPr>
           <a:xfrm>
-            <a:off x="5349240" y="1005840"/>
-            <a:ext cx="6522415" cy="731520"/>
+            <a:off x="2697480" y="1005840"/>
+            <a:ext cx="9174175" cy="731520"/>
           </a:xfrm>
           <a:prstGeom prst="rect">
             <a:avLst/>
@@ -17379,7 +18399,7 @@
                 <a:ea typeface="Times New Roman" pitchFamily="34" charset="-122"/>
                 <a:cs typeface="Times New Roman" pitchFamily="34" charset="-120"/>
               </a:rPr>
-              <a:t>Homework</a:t>
+              <a:t>3. Primary Data Collection Techniques</a:t>
             </a:r>
             <a:endParaRPr lang="en-US" sz="3600" dirty="0"/>
           </a:p>
@@ -17393,8 +18413,8 @@
         </p:nvSpPr>
         <p:spPr>
           <a:xfrm>
-            <a:off x="5349240" y="1783080"/>
-            <a:ext cx="6522415" cy="4663440"/>
+            <a:off x="2697480" y="1783080"/>
+            <a:ext cx="9174175" cy="4663440"/>
           </a:xfrm>
           <a:prstGeom prst="rect">
             <a:avLst/>
@@ -17413,7 +18433,7 @@
               <a:buNone/>
             </a:pPr>
             <a:r>
-              <a:rPr lang="en-US" sz="4000" dirty="0">
+              <a:rPr lang="en-US" sz="4000" b="1" dirty="0">
                 <a:solidFill>
                   <a:srgbClr val="111111"/>
                 </a:solidFill>
@@ -17421,7 +18441,61 @@
                 <a:ea typeface="Times New Roman" pitchFamily="34" charset="-122"/>
                 <a:cs typeface="Times New Roman" pitchFamily="34" charset="-120"/>
               </a:rPr>
-              <a:t>Prepare a questionnaire of five questions about how students travel to school.</a:t>
+              <a:t>Interviews: </a:t>
+            </a:r>
+            <a:pPr algn="l" indent="0" marL="0">
+              <a:spcAft>
+                <a:spcPts val="800"/>
+              </a:spcAft>
+              <a:buNone/>
+            </a:pPr>
+            <a:r>
+              <a:rPr lang="en-US" sz="4000" dirty="0">
+                <a:solidFill>
+                  <a:srgbClr val="111111"/>
+                </a:solidFill>
+                <a:latin typeface="Times New Roman" pitchFamily="34" charset="0"/>
+                <a:ea typeface="Times New Roman" pitchFamily="34" charset="-122"/>
+                <a:cs typeface="Times New Roman" pitchFamily="34" charset="-120"/>
+              </a:rPr>
+              <a:t>Face-to-face or telephone conversations, structured (fixed questions) or unstructured.</a:t>
+            </a:r>
+            <a:endParaRPr lang="en-US" sz="4000" dirty="0"/>
+          </a:p>
+          <a:p>
+            <a:pPr algn="l" indent="0" marL="0">
+              <a:spcAft>
+                <a:spcPts val="800"/>
+              </a:spcAft>
+              <a:buNone/>
+            </a:pPr>
+            <a:r>
+              <a:rPr lang="en-US" sz="4000" b="1" dirty="0">
+                <a:solidFill>
+                  <a:srgbClr val="111111"/>
+                </a:solidFill>
+                <a:latin typeface="Times New Roman" pitchFamily="34" charset="0"/>
+                <a:ea typeface="Times New Roman" pitchFamily="34" charset="-122"/>
+                <a:cs typeface="Times New Roman" pitchFamily="34" charset="-120"/>
+              </a:rPr>
+              <a:t>Focus group discussions: </a:t>
+            </a:r>
+            <a:pPr algn="l" indent="0" marL="0">
+              <a:spcAft>
+                <a:spcPts val="800"/>
+              </a:spcAft>
+              <a:buNone/>
+            </a:pPr>
+            <a:r>
+              <a:rPr lang="en-US" sz="4000" dirty="0">
+                <a:solidFill>
+                  <a:srgbClr val="111111"/>
+                </a:solidFill>
+                <a:latin typeface="Times New Roman" pitchFamily="34" charset="0"/>
+                <a:ea typeface="Times New Roman" pitchFamily="34" charset="-122"/>
+                <a:cs typeface="Times New Roman" pitchFamily="34" charset="-120"/>
+              </a:rPr>
+              <a:t>A guided discussion with 6–10 people sharing a characteristic, such as cotton farmers near Garoua discussing climate change.</a:t>
             </a:r>
             <a:endParaRPr lang="en-US" sz="4000" dirty="0"/>
           </a:p>
@@ -17640,7 +18714,7 @@
                 <a:ea typeface="Times New Roman" pitchFamily="34" charset="-122"/>
                 <a:cs typeface="Times New Roman" pitchFamily="34" charset="-120"/>
               </a:rPr>
-              <a:t>Group the densities into 4–5 classes (e.g. &lt;25, 25–50, 50–100, &gt;100 per km²), shade from light to dark, and add a key. The Littoral and West appear darkest, the East and Adamawa lightest.</a:t>
+              <a:t>Census reports (BUCREP), statistical yearbooks (INS), books, maps, newspapers or websites (any two).</a:t>
             </a:r>
             <a:endParaRPr lang="en-US" sz="4000" dirty="0"/>
           </a:p>
@@ -17752,7 +18826,7 @@
                 <a:ea typeface="Calibri" pitchFamily="34" charset="-122"/>
                 <a:cs typeface="Calibri" pitchFamily="34" charset="-120"/>
               </a:rPr>
-              <a:t>NEXT LESSON</a:t>
+              <a:t>FORMATIVE EVALUATION</a:t>
             </a:r>
             <a:endParaRPr lang="en-US" sz="1400" dirty="0"/>
           </a:p>
@@ -17817,7 +18891,7 @@
                 <a:ea typeface="Times New Roman" pitchFamily="34" charset="-122"/>
                 <a:cs typeface="Times New Roman" pitchFamily="34" charset="-120"/>
               </a:rPr>
-              <a:t>Next Lesson</a:t>
+              <a:t>Evaluation 1</a:t>
             </a:r>
             <a:endParaRPr lang="en-US" sz="3600" dirty="0"/>
           </a:p>
@@ -17841,17 +18915,17 @@
           <a:ln/>
         </p:spPr>
         <p:txBody>
-          <a:bodyPr wrap="square" lIns="0" tIns="0" rIns="0" bIns="0" rtlCol="0" anchor="ctr"/>
-          <a:lstStyle/>
-          <a:p>
-            <a:pPr algn="ctr" indent="0" marL="0">
+          <a:bodyPr wrap="square" lIns="0" tIns="0" rIns="0" bIns="0" rtlCol="0" anchor="t"/>
+          <a:lstStyle/>
+          <a:p>
+            <a:pPr algn="l" indent="0" marL="0">
               <a:spcAft>
                 <a:spcPts val="800"/>
               </a:spcAft>
               <a:buNone/>
             </a:pPr>
             <a:r>
-              <a:rPr lang="en-US" sz="4000" b="1" dirty="0">
+              <a:rPr lang="en-US" sz="4000" dirty="0">
                 <a:solidFill>
                   <a:srgbClr val="111111"/>
                 </a:solidFill>
@@ -17859,27 +18933,7 @@
                 <a:ea typeface="Times New Roman" pitchFamily="34" charset="-122"/>
                 <a:cs typeface="Times New Roman" pitchFamily="34" charset="-120"/>
               </a:rPr>
-              <a:t>Our next lesson will be on:</a:t>
-            </a:r>
-            <a:endParaRPr lang="en-US" sz="4000" dirty="0"/>
-          </a:p>
-          <a:p>
-            <a:pPr algn="ctr" indent="0" marL="0">
-              <a:spcAft>
-                <a:spcPts val="800"/>
-              </a:spcAft>
-              <a:buNone/>
-            </a:pPr>
-            <a:r>
-              <a:rPr lang="en-US" sz="4000" b="1" dirty="0">
-                <a:solidFill>
-                  <a:srgbClr val="990011"/>
-                </a:solidFill>
-                <a:latin typeface="Times New Roman" pitchFamily="34" charset="0"/>
-                <a:ea typeface="Times New Roman" pitchFamily="34" charset="-122"/>
-                <a:cs typeface="Times New Roman" pitchFamily="34" charset="-120"/>
-              </a:rPr>
-              <a:t>Quantitative Techniques 3: Basic Tools of Data Analysis</a:t>
+              <a:t>Distinguish primary data from secondary data, with one example from Garoua for each.</a:t>
             </a:r>
             <a:endParaRPr lang="en-US" sz="4000" dirty="0"/>
           </a:p>
@@ -17991,6 +19045,1605 @@
                 <a:ea typeface="Calibri" pitchFamily="34" charset="-122"/>
                 <a:cs typeface="Calibri" pitchFamily="34" charset="-120"/>
               </a:rPr>
+              <a:t>FORMATIVE EVALUATION</a:t>
+            </a:r>
+            <a:endParaRPr lang="en-US" sz="1400" dirty="0"/>
+          </a:p>
+        </p:txBody>
+      </p:sp>
+      <p:pic>
+        <p:nvPicPr>
+          <p:cNvPr id="3" name="Image 0" descr="/home/claude/f4/img/minesec_sheet.png">    </p:cNvPr>
+          <p:cNvPicPr>
+            <a:picLocks noChangeAspect="1"/>
+          </p:cNvPicPr>
+          <p:nvPr/>
+        </p:nvPicPr>
+        <p:blipFill>
+          <a:blip r:embed="rId1"/>
+          <a:stretch>
+            <a:fillRect/>
+          </a:stretch>
+        </p:blipFill>
+        <p:spPr>
+          <a:xfrm>
+            <a:off x="0" y="658368"/>
+            <a:ext cx="5120640" cy="5833872"/>
+          </a:xfrm>
+          <a:prstGeom prst="rect">
+            <a:avLst/>
+          </a:prstGeom>
+        </p:spPr>
+      </p:pic>
+      <p:sp>
+        <p:nvSpPr>
+          <p:cNvPr id="4" name="Text 1"/>
+          <p:cNvSpPr/>
+          <p:nvPr/>
+        </p:nvSpPr>
+        <p:spPr>
+          <a:xfrm>
+            <a:off x="5349240" y="1005840"/>
+            <a:ext cx="6522415" cy="731520"/>
+          </a:xfrm>
+          <a:prstGeom prst="rect">
+            <a:avLst/>
+          </a:prstGeom>
+          <a:noFill/>
+          <a:ln/>
+        </p:spPr>
+        <p:txBody>
+          <a:bodyPr wrap="square" lIns="0" tIns="0" rIns="0" bIns="0" rtlCol="0" anchor="ctr">
+            <a:normAutofit/>
+          </a:bodyPr>
+          <a:lstStyle/>
+          <a:p>
+            <a:pPr algn="ctr" indent="0" marL="0">
+              <a:buNone/>
+            </a:pPr>
+            <a:r>
+              <a:rPr lang="en-US" sz="3600" b="1" dirty="0">
+                <a:solidFill>
+                  <a:srgbClr val="990011"/>
+                </a:solidFill>
+                <a:latin typeface="Times New Roman" pitchFamily="34" charset="0"/>
+                <a:ea typeface="Times New Roman" pitchFamily="34" charset="-122"/>
+                <a:cs typeface="Times New Roman" pitchFamily="34" charset="-120"/>
+              </a:rPr>
+              <a:t>Expected Answer</a:t>
+            </a:r>
+            <a:endParaRPr lang="en-US" sz="3600" dirty="0"/>
+          </a:p>
+        </p:txBody>
+      </p:sp>
+      <p:sp>
+        <p:nvSpPr>
+          <p:cNvPr id="5" name="Text 2"/>
+          <p:cNvSpPr/>
+          <p:nvPr/>
+        </p:nvSpPr>
+        <p:spPr>
+          <a:xfrm>
+            <a:off x="5349240" y="1783080"/>
+            <a:ext cx="6522415" cy="4663440"/>
+          </a:xfrm>
+          <a:prstGeom prst="rect">
+            <a:avLst/>
+          </a:prstGeom>
+          <a:noFill/>
+          <a:ln/>
+        </p:spPr>
+        <p:txBody>
+          <a:bodyPr wrap="square" lIns="0" tIns="0" rIns="0" bIns="0" rtlCol="0" anchor="t"/>
+          <a:lstStyle/>
+          <a:p>
+            <a:pPr algn="l" indent="0" marL="0">
+              <a:spcAft>
+                <a:spcPts val="800"/>
+              </a:spcAft>
+              <a:buNone/>
+            </a:pPr>
+            <a:r>
+              <a:rPr lang="en-US" sz="4000" dirty="0">
+                <a:solidFill>
+                  <a:srgbClr val="111111"/>
+                </a:solidFill>
+                <a:latin typeface="Times New Roman" pitchFamily="34" charset="0"/>
+                <a:ea typeface="Times New Roman" pitchFamily="34" charset="-122"/>
+                <a:cs typeface="Times New Roman" pitchFamily="34" charset="-120"/>
+              </a:rPr>
+              <a:t>Primary: collected by the researcher (counting motos at a crossroads); secondary: already published (BUCREP census figures).</a:t>
+            </a:r>
+            <a:endParaRPr lang="en-US" sz="4000" dirty="0"/>
+          </a:p>
+        </p:txBody>
+      </p:sp>
+      <p:sp>
+        <p:nvSpPr>
+          <p:cNvPr id="25" name="Slide Number Placeholder 0"/>
+          <p:cNvSpPr>
+            <a:spLocks noGrp="1"/>
+          </p:cNvSpPr>
+          <p:nvPr>
+            <p:ph type="sldNum" sz="quarter" idx="4294967295"/>
+          </p:nvPr>
+        </p:nvSpPr>
+        <p:spPr>
+          <a:xfrm>
+            <a:off x="27432" y="91440"/>
+            <a:ext cx="585216" cy="475488"/>
+          </a:xfrm>
+          <a:prstGeom prst="rect">
+            <a:avLst/>
+          </a:prstGeom>
+          <a:extLst>
+            <a:ext uri="{C572A759-6A51-4108-AA02-DFA0A04FC94B}">
+              <ma14:wrappingTextBoxFlag xmlns:ma14="http://schemas.microsoft.com/office/mac/drawingml/2011/main" val="0"/>
+            </a:ext>
+          </a:extLst>
+        </p:spPr>
+        <p:txBody>
+          <a:bodyPr/>
+          <a:lstStyle>
+            <a:lvl1pPr>
+              <a:defRPr sz="2000">
+                <a:solidFill>
+                  <a:srgbClr val="FFFFFF"/>
+                </a:solidFill>
+                <a:latin typeface="Calibri"/>
+                <a:ea typeface="Calibri"/>
+                <a:cs typeface="Calibri"/>
+              </a:defRPr>
+            </a:lvl1pPr>
+          </a:lstStyle>
+          <a:p>
+            <a:pPr algn="ctr"/>
+            <a:fld id="{F7021451-1387-4CA6-816F-3879F97B5CBC}" type="slidenum">
+              <a:rPr b="1" lang="en-US"/>
+              <a:t>51</a:t>
+            </a:fld>
+            <a:endParaRPr lang="en-US"/>
+          </a:p>
+        </p:txBody>
+      </p:sp>
+    </p:spTree>
+  </p:cSld>
+  <p:clrMapOvr>
+    <a:masterClrMapping/>
+  </p:clrMapOvr>
+</p:sld>
+</file>
+
+<file path=ppt/slides/slide52.xml><?xml version="1.0" encoding="utf-8"?>
+<p:sld xmlns:a="http://schemas.openxmlformats.org/drawingml/2006/main" xmlns:r="http://schemas.openxmlformats.org/officeDocument/2006/relationships" xmlns:p="http://schemas.openxmlformats.org/presentationml/2006/main">
+  <p:cSld name="Slide 52">
+    <p:spTree>
+      <p:nvGrpSpPr>
+        <p:cNvPr id="1" name=""/>
+        <p:cNvGrpSpPr/>
+        <p:nvPr/>
+      </p:nvGrpSpPr>
+      <p:grpSpPr>
+        <a:xfrm>
+          <a:off x="0" y="0"/>
+          <a:ext cx="0" cy="0"/>
+          <a:chOff x="0" y="0"/>
+          <a:chExt cx="0" cy="0"/>
+        </a:xfrm>
+      </p:grpSpPr>
+      <p:sp>
+        <p:nvSpPr>
+          <p:cNvPr id="2" name="Text 0"/>
+          <p:cNvSpPr/>
+          <p:nvPr/>
+        </p:nvSpPr>
+        <p:spPr>
+          <a:xfrm>
+            <a:off x="457200" y="713232"/>
+            <a:ext cx="11368735" cy="274320"/>
+          </a:xfrm>
+          <a:prstGeom prst="rect">
+            <a:avLst/>
+          </a:prstGeom>
+          <a:noFill/>
+          <a:ln/>
+        </p:spPr>
+        <p:txBody>
+          <a:bodyPr wrap="square" lIns="0" tIns="0" rIns="0" bIns="0" rtlCol="0" anchor="ctr"/>
+          <a:lstStyle/>
+          <a:p>
+            <a:pPr algn="r" indent="0" marL="0">
+              <a:buNone/>
+            </a:pPr>
+            <a:r>
+              <a:rPr lang="en-US" sz="1400" b="1" dirty="0">
+                <a:solidFill>
+                  <a:srgbClr val="1C3F6E"/>
+                </a:solidFill>
+                <a:latin typeface="Calibri" pitchFamily="34" charset="0"/>
+                <a:ea typeface="Calibri" pitchFamily="34" charset="-122"/>
+                <a:cs typeface="Calibri" pitchFamily="34" charset="-120"/>
+              </a:rPr>
+              <a:t>FORMATIVE EVALUATION</a:t>
+            </a:r>
+            <a:endParaRPr lang="en-US" sz="1400" dirty="0"/>
+          </a:p>
+        </p:txBody>
+      </p:sp>
+      <p:pic>
+        <p:nvPicPr>
+          <p:cNvPr id="3" name="Image 0" descr="/home/claude/f4/img/minesec_sheet.png">    </p:cNvPr>
+          <p:cNvPicPr>
+            <a:picLocks noChangeAspect="1"/>
+          </p:cNvPicPr>
+          <p:nvPr/>
+        </p:nvPicPr>
+        <p:blipFill>
+          <a:blip r:embed="rId1"/>
+          <a:stretch>
+            <a:fillRect/>
+          </a:stretch>
+        </p:blipFill>
+        <p:spPr>
+          <a:xfrm>
+            <a:off x="0" y="658368"/>
+            <a:ext cx="5120640" cy="5833872"/>
+          </a:xfrm>
+          <a:prstGeom prst="rect">
+            <a:avLst/>
+          </a:prstGeom>
+        </p:spPr>
+      </p:pic>
+      <p:sp>
+        <p:nvSpPr>
+          <p:cNvPr id="4" name="Text 1"/>
+          <p:cNvSpPr/>
+          <p:nvPr/>
+        </p:nvSpPr>
+        <p:spPr>
+          <a:xfrm>
+            <a:off x="5349240" y="1005840"/>
+            <a:ext cx="6522415" cy="731520"/>
+          </a:xfrm>
+          <a:prstGeom prst="rect">
+            <a:avLst/>
+          </a:prstGeom>
+          <a:noFill/>
+          <a:ln/>
+        </p:spPr>
+        <p:txBody>
+          <a:bodyPr wrap="square" lIns="0" tIns="0" rIns="0" bIns="0" rtlCol="0" anchor="ctr">
+            <a:normAutofit/>
+          </a:bodyPr>
+          <a:lstStyle/>
+          <a:p>
+            <a:pPr algn="ctr" indent="0" marL="0">
+              <a:buNone/>
+            </a:pPr>
+            <a:r>
+              <a:rPr lang="en-US" sz="3600" b="1" dirty="0">
+                <a:solidFill>
+                  <a:srgbClr val="990011"/>
+                </a:solidFill>
+                <a:latin typeface="Times New Roman" pitchFamily="34" charset="0"/>
+                <a:ea typeface="Times New Roman" pitchFamily="34" charset="-122"/>
+                <a:cs typeface="Times New Roman" pitchFamily="34" charset="-120"/>
+              </a:rPr>
+              <a:t>Evaluation 2</a:t>
+            </a:r>
+            <a:endParaRPr lang="en-US" sz="3600" dirty="0"/>
+          </a:p>
+        </p:txBody>
+      </p:sp>
+      <p:sp>
+        <p:nvSpPr>
+          <p:cNvPr id="5" name="Text 2"/>
+          <p:cNvSpPr/>
+          <p:nvPr/>
+        </p:nvSpPr>
+        <p:spPr>
+          <a:xfrm>
+            <a:off x="5349240" y="1783080"/>
+            <a:ext cx="6522415" cy="4663440"/>
+          </a:xfrm>
+          <a:prstGeom prst="rect">
+            <a:avLst/>
+          </a:prstGeom>
+          <a:noFill/>
+          <a:ln/>
+        </p:spPr>
+        <p:txBody>
+          <a:bodyPr wrap="square" lIns="0" tIns="0" rIns="0" bIns="0" rtlCol="0" anchor="t"/>
+          <a:lstStyle/>
+          <a:p>
+            <a:pPr algn="l" indent="0" marL="0">
+              <a:spcAft>
+                <a:spcPts val="800"/>
+              </a:spcAft>
+              <a:buNone/>
+            </a:pPr>
+            <a:r>
+              <a:rPr lang="en-US" sz="4000" dirty="0">
+                <a:solidFill>
+                  <a:srgbClr val="111111"/>
+                </a:solidFill>
+                <a:latin typeface="Times New Roman" pitchFamily="34" charset="0"/>
+                <a:ea typeface="Times New Roman" pitchFamily="34" charset="-122"/>
+                <a:cs typeface="Times New Roman" pitchFamily="34" charset="-120"/>
+              </a:rPr>
+              <a:t>Explain how to select 30 people from a list of 600 by systematic sampling.</a:t>
+            </a:r>
+            <a:endParaRPr lang="en-US" sz="4000" dirty="0"/>
+          </a:p>
+        </p:txBody>
+      </p:sp>
+      <p:sp>
+        <p:nvSpPr>
+          <p:cNvPr id="25" name="Slide Number Placeholder 0"/>
+          <p:cNvSpPr>
+            <a:spLocks noGrp="1"/>
+          </p:cNvSpPr>
+          <p:nvPr>
+            <p:ph type="sldNum" sz="quarter" idx="4294967295"/>
+          </p:nvPr>
+        </p:nvSpPr>
+        <p:spPr>
+          <a:xfrm>
+            <a:off x="27432" y="91440"/>
+            <a:ext cx="585216" cy="475488"/>
+          </a:xfrm>
+          <a:prstGeom prst="rect">
+            <a:avLst/>
+          </a:prstGeom>
+          <a:extLst>
+            <a:ext uri="{C572A759-6A51-4108-AA02-DFA0A04FC94B}">
+              <ma14:wrappingTextBoxFlag xmlns:ma14="http://schemas.microsoft.com/office/mac/drawingml/2011/main" val="0"/>
+            </a:ext>
+          </a:extLst>
+        </p:spPr>
+        <p:txBody>
+          <a:bodyPr/>
+          <a:lstStyle>
+            <a:lvl1pPr>
+              <a:defRPr sz="2000">
+                <a:solidFill>
+                  <a:srgbClr val="FFFFFF"/>
+                </a:solidFill>
+                <a:latin typeface="Calibri"/>
+                <a:ea typeface="Calibri"/>
+                <a:cs typeface="Calibri"/>
+              </a:defRPr>
+            </a:lvl1pPr>
+          </a:lstStyle>
+          <a:p>
+            <a:pPr algn="ctr"/>
+            <a:fld id="{F7021451-1387-4CA6-816F-3879F97B5CBC}" type="slidenum">
+              <a:rPr b="1" lang="en-US"/>
+              <a:t>52</a:t>
+            </a:fld>
+            <a:endParaRPr lang="en-US"/>
+          </a:p>
+        </p:txBody>
+      </p:sp>
+    </p:spTree>
+  </p:cSld>
+  <p:clrMapOvr>
+    <a:masterClrMapping/>
+  </p:clrMapOvr>
+</p:sld>
+</file>
+
+<file path=ppt/slides/slide53.xml><?xml version="1.0" encoding="utf-8"?>
+<p:sld xmlns:a="http://schemas.openxmlformats.org/drawingml/2006/main" xmlns:r="http://schemas.openxmlformats.org/officeDocument/2006/relationships" xmlns:p="http://schemas.openxmlformats.org/presentationml/2006/main">
+  <p:cSld name="Slide 53">
+    <p:spTree>
+      <p:nvGrpSpPr>
+        <p:cNvPr id="1" name=""/>
+        <p:cNvGrpSpPr/>
+        <p:nvPr/>
+      </p:nvGrpSpPr>
+      <p:grpSpPr>
+        <a:xfrm>
+          <a:off x="0" y="0"/>
+          <a:ext cx="0" cy="0"/>
+          <a:chOff x="0" y="0"/>
+          <a:chExt cx="0" cy="0"/>
+        </a:xfrm>
+      </p:grpSpPr>
+      <p:sp>
+        <p:nvSpPr>
+          <p:cNvPr id="2" name="Text 0"/>
+          <p:cNvSpPr/>
+          <p:nvPr/>
+        </p:nvSpPr>
+        <p:spPr>
+          <a:xfrm>
+            <a:off x="457200" y="713232"/>
+            <a:ext cx="11368735" cy="274320"/>
+          </a:xfrm>
+          <a:prstGeom prst="rect">
+            <a:avLst/>
+          </a:prstGeom>
+          <a:noFill/>
+          <a:ln/>
+        </p:spPr>
+        <p:txBody>
+          <a:bodyPr wrap="square" lIns="0" tIns="0" rIns="0" bIns="0" rtlCol="0" anchor="ctr"/>
+          <a:lstStyle/>
+          <a:p>
+            <a:pPr algn="r" indent="0" marL="0">
+              <a:buNone/>
+            </a:pPr>
+            <a:r>
+              <a:rPr lang="en-US" sz="1400" b="1" dirty="0">
+                <a:solidFill>
+                  <a:srgbClr val="1C3F6E"/>
+                </a:solidFill>
+                <a:latin typeface="Calibri" pitchFamily="34" charset="0"/>
+                <a:ea typeface="Calibri" pitchFamily="34" charset="-122"/>
+                <a:cs typeface="Calibri" pitchFamily="34" charset="-120"/>
+              </a:rPr>
+              <a:t>FORMATIVE EVALUATION</a:t>
+            </a:r>
+            <a:endParaRPr lang="en-US" sz="1400" dirty="0"/>
+          </a:p>
+        </p:txBody>
+      </p:sp>
+      <p:pic>
+        <p:nvPicPr>
+          <p:cNvPr id="3" name="Image 0" descr="/home/claude/f4/img/minesec_sheet.png">    </p:cNvPr>
+          <p:cNvPicPr>
+            <a:picLocks noChangeAspect="1"/>
+          </p:cNvPicPr>
+          <p:nvPr/>
+        </p:nvPicPr>
+        <p:blipFill>
+          <a:blip r:embed="rId1"/>
+          <a:stretch>
+            <a:fillRect/>
+          </a:stretch>
+        </p:blipFill>
+        <p:spPr>
+          <a:xfrm>
+            <a:off x="0" y="658368"/>
+            <a:ext cx="5120640" cy="5833872"/>
+          </a:xfrm>
+          <a:prstGeom prst="rect">
+            <a:avLst/>
+          </a:prstGeom>
+        </p:spPr>
+      </p:pic>
+      <p:sp>
+        <p:nvSpPr>
+          <p:cNvPr id="4" name="Text 1"/>
+          <p:cNvSpPr/>
+          <p:nvPr/>
+        </p:nvSpPr>
+        <p:spPr>
+          <a:xfrm>
+            <a:off x="5349240" y="1005840"/>
+            <a:ext cx="6522415" cy="731520"/>
+          </a:xfrm>
+          <a:prstGeom prst="rect">
+            <a:avLst/>
+          </a:prstGeom>
+          <a:noFill/>
+          <a:ln/>
+        </p:spPr>
+        <p:txBody>
+          <a:bodyPr wrap="square" lIns="0" tIns="0" rIns="0" bIns="0" rtlCol="0" anchor="ctr">
+            <a:normAutofit/>
+          </a:bodyPr>
+          <a:lstStyle/>
+          <a:p>
+            <a:pPr algn="ctr" indent="0" marL="0">
+              <a:buNone/>
+            </a:pPr>
+            <a:r>
+              <a:rPr lang="en-US" sz="3600" b="1" dirty="0">
+                <a:solidFill>
+                  <a:srgbClr val="990011"/>
+                </a:solidFill>
+                <a:latin typeface="Times New Roman" pitchFamily="34" charset="0"/>
+                <a:ea typeface="Times New Roman" pitchFamily="34" charset="-122"/>
+                <a:cs typeface="Times New Roman" pitchFamily="34" charset="-120"/>
+              </a:rPr>
+              <a:t>Expected Answer</a:t>
+            </a:r>
+            <a:endParaRPr lang="en-US" sz="3600" dirty="0"/>
+          </a:p>
+        </p:txBody>
+      </p:sp>
+      <p:sp>
+        <p:nvSpPr>
+          <p:cNvPr id="5" name="Text 2"/>
+          <p:cNvSpPr/>
+          <p:nvPr/>
+        </p:nvSpPr>
+        <p:spPr>
+          <a:xfrm>
+            <a:off x="5349240" y="1783080"/>
+            <a:ext cx="6522415" cy="4663440"/>
+          </a:xfrm>
+          <a:prstGeom prst="rect">
+            <a:avLst/>
+          </a:prstGeom>
+          <a:noFill/>
+          <a:ln/>
+        </p:spPr>
+        <p:txBody>
+          <a:bodyPr wrap="square" lIns="0" tIns="0" rIns="0" bIns="0" rtlCol="0" anchor="t"/>
+          <a:lstStyle/>
+          <a:p>
+            <a:pPr algn="l" indent="0" marL="0">
+              <a:spcAft>
+                <a:spcPts val="800"/>
+              </a:spcAft>
+              <a:buNone/>
+            </a:pPr>
+            <a:r>
+              <a:rPr lang="en-US" sz="4000" dirty="0">
+                <a:solidFill>
+                  <a:srgbClr val="111111"/>
+                </a:solidFill>
+                <a:latin typeface="Times New Roman" pitchFamily="34" charset="0"/>
+                <a:ea typeface="Times New Roman" pitchFamily="34" charset="-122"/>
+                <a:cs typeface="Times New Roman" pitchFamily="34" charset="-120"/>
+              </a:rPr>
+              <a:t>k = 600 ÷ 30 = 20; choose a random start between 1 and 20, then every 20th person.</a:t>
+            </a:r>
+            <a:endParaRPr lang="en-US" sz="4000" dirty="0"/>
+          </a:p>
+        </p:txBody>
+      </p:sp>
+      <p:sp>
+        <p:nvSpPr>
+          <p:cNvPr id="25" name="Slide Number Placeholder 0"/>
+          <p:cNvSpPr>
+            <a:spLocks noGrp="1"/>
+          </p:cNvSpPr>
+          <p:nvPr>
+            <p:ph type="sldNum" sz="quarter" idx="4294967295"/>
+          </p:nvPr>
+        </p:nvSpPr>
+        <p:spPr>
+          <a:xfrm>
+            <a:off x="27432" y="91440"/>
+            <a:ext cx="585216" cy="475488"/>
+          </a:xfrm>
+          <a:prstGeom prst="rect">
+            <a:avLst/>
+          </a:prstGeom>
+          <a:extLst>
+            <a:ext uri="{C572A759-6A51-4108-AA02-DFA0A04FC94B}">
+              <ma14:wrappingTextBoxFlag xmlns:ma14="http://schemas.microsoft.com/office/mac/drawingml/2011/main" val="0"/>
+            </a:ext>
+          </a:extLst>
+        </p:spPr>
+        <p:txBody>
+          <a:bodyPr/>
+          <a:lstStyle>
+            <a:lvl1pPr>
+              <a:defRPr sz="2000">
+                <a:solidFill>
+                  <a:srgbClr val="FFFFFF"/>
+                </a:solidFill>
+                <a:latin typeface="Calibri"/>
+                <a:ea typeface="Calibri"/>
+                <a:cs typeface="Calibri"/>
+              </a:defRPr>
+            </a:lvl1pPr>
+          </a:lstStyle>
+          <a:p>
+            <a:pPr algn="ctr"/>
+            <a:fld id="{F7021451-1387-4CA6-816F-3879F97B5CBC}" type="slidenum">
+              <a:rPr b="1" lang="en-US"/>
+              <a:t>53</a:t>
+            </a:fld>
+            <a:endParaRPr lang="en-US"/>
+          </a:p>
+        </p:txBody>
+      </p:sp>
+    </p:spTree>
+  </p:cSld>
+  <p:clrMapOvr>
+    <a:masterClrMapping/>
+  </p:clrMapOvr>
+</p:sld>
+</file>
+
+<file path=ppt/slides/slide54.xml><?xml version="1.0" encoding="utf-8"?>
+<p:sld xmlns:a="http://schemas.openxmlformats.org/drawingml/2006/main" xmlns:r="http://schemas.openxmlformats.org/officeDocument/2006/relationships" xmlns:p="http://schemas.openxmlformats.org/presentationml/2006/main">
+  <p:cSld name="Slide 54">
+    <p:spTree>
+      <p:nvGrpSpPr>
+        <p:cNvPr id="1" name=""/>
+        <p:cNvGrpSpPr/>
+        <p:nvPr/>
+      </p:nvGrpSpPr>
+      <p:grpSpPr>
+        <a:xfrm>
+          <a:off x="0" y="0"/>
+          <a:ext cx="0" cy="0"/>
+          <a:chOff x="0" y="0"/>
+          <a:chExt cx="0" cy="0"/>
+        </a:xfrm>
+      </p:grpSpPr>
+      <p:sp>
+        <p:nvSpPr>
+          <p:cNvPr id="2" name="Text 0"/>
+          <p:cNvSpPr/>
+          <p:nvPr/>
+        </p:nvSpPr>
+        <p:spPr>
+          <a:xfrm>
+            <a:off x="457200" y="713232"/>
+            <a:ext cx="11368735" cy="274320"/>
+          </a:xfrm>
+          <a:prstGeom prst="rect">
+            <a:avLst/>
+          </a:prstGeom>
+          <a:noFill/>
+          <a:ln/>
+        </p:spPr>
+        <p:txBody>
+          <a:bodyPr wrap="square" lIns="0" tIns="0" rIns="0" bIns="0" rtlCol="0" anchor="ctr"/>
+          <a:lstStyle/>
+          <a:p>
+            <a:pPr algn="r" indent="0" marL="0">
+              <a:buNone/>
+            </a:pPr>
+            <a:r>
+              <a:rPr lang="en-US" sz="1400" b="1" dirty="0">
+                <a:solidFill>
+                  <a:srgbClr val="1C3F6E"/>
+                </a:solidFill>
+                <a:latin typeface="Calibri" pitchFamily="34" charset="0"/>
+                <a:ea typeface="Calibri" pitchFamily="34" charset="-122"/>
+                <a:cs typeface="Calibri" pitchFamily="34" charset="-120"/>
+              </a:rPr>
+              <a:t>REMEDIATION</a:t>
+            </a:r>
+            <a:endParaRPr lang="en-US" sz="1400" dirty="0"/>
+          </a:p>
+        </p:txBody>
+      </p:sp>
+      <p:pic>
+        <p:nvPicPr>
+          <p:cNvPr id="3" name="Image 0" descr="/home/claude/f4/img/minesec_sheet.png">    </p:cNvPr>
+          <p:cNvPicPr>
+            <a:picLocks noChangeAspect="1"/>
+          </p:cNvPicPr>
+          <p:nvPr/>
+        </p:nvPicPr>
+        <p:blipFill>
+          <a:blip r:embed="rId1"/>
+          <a:stretch>
+            <a:fillRect/>
+          </a:stretch>
+        </p:blipFill>
+        <p:spPr>
+          <a:xfrm>
+            <a:off x="0" y="658368"/>
+            <a:ext cx="5120640" cy="5833872"/>
+          </a:xfrm>
+          <a:prstGeom prst="rect">
+            <a:avLst/>
+          </a:prstGeom>
+        </p:spPr>
+      </p:pic>
+      <p:sp>
+        <p:nvSpPr>
+          <p:cNvPr id="4" name="Text 1"/>
+          <p:cNvSpPr/>
+          <p:nvPr/>
+        </p:nvSpPr>
+        <p:spPr>
+          <a:xfrm>
+            <a:off x="5349240" y="1005840"/>
+            <a:ext cx="6522415" cy="731520"/>
+          </a:xfrm>
+          <a:prstGeom prst="rect">
+            <a:avLst/>
+          </a:prstGeom>
+          <a:noFill/>
+          <a:ln/>
+        </p:spPr>
+        <p:txBody>
+          <a:bodyPr wrap="square" lIns="0" tIns="0" rIns="0" bIns="0" rtlCol="0" anchor="ctr">
+            <a:normAutofit/>
+          </a:bodyPr>
+          <a:lstStyle/>
+          <a:p>
+            <a:pPr algn="ctr" indent="0" marL="0">
+              <a:buNone/>
+            </a:pPr>
+            <a:r>
+              <a:rPr lang="en-US" sz="3600" b="1" dirty="0">
+                <a:solidFill>
+                  <a:srgbClr val="990011"/>
+                </a:solidFill>
+                <a:latin typeface="Times New Roman" pitchFamily="34" charset="0"/>
+                <a:ea typeface="Times New Roman" pitchFamily="34" charset="-122"/>
+                <a:cs typeface="Times New Roman" pitchFamily="34" charset="-120"/>
+              </a:rPr>
+              <a:t>Remediation</a:t>
+            </a:r>
+            <a:endParaRPr lang="en-US" sz="3600" dirty="0"/>
+          </a:p>
+        </p:txBody>
+      </p:sp>
+      <p:sp>
+        <p:nvSpPr>
+          <p:cNvPr id="5" name="Text 2"/>
+          <p:cNvSpPr/>
+          <p:nvPr/>
+        </p:nvSpPr>
+        <p:spPr>
+          <a:xfrm>
+            <a:off x="5349240" y="1783080"/>
+            <a:ext cx="6522415" cy="4663440"/>
+          </a:xfrm>
+          <a:prstGeom prst="rect">
+            <a:avLst/>
+          </a:prstGeom>
+          <a:noFill/>
+          <a:ln/>
+        </p:spPr>
+        <p:txBody>
+          <a:bodyPr wrap="square" lIns="0" tIns="0" rIns="0" bIns="0" rtlCol="0" anchor="t"/>
+          <a:lstStyle/>
+          <a:p>
+            <a:pPr algn="l" indent="0" marL="0">
+              <a:spcAft>
+                <a:spcPts val="800"/>
+              </a:spcAft>
+              <a:buNone/>
+            </a:pPr>
+            <a:r>
+              <a:rPr lang="en-US" sz="4000" b="1" dirty="0">
+                <a:solidFill>
+                  <a:srgbClr val="111111"/>
+                </a:solidFill>
+                <a:latin typeface="Times New Roman" pitchFamily="34" charset="0"/>
+                <a:ea typeface="Times New Roman" pitchFamily="34" charset="-122"/>
+                <a:cs typeface="Times New Roman" pitchFamily="34" charset="-120"/>
+              </a:rPr>
+              <a:t>Fill in the blanks:</a:t>
+            </a:r>
+            <a:endParaRPr lang="en-US" sz="4000" dirty="0"/>
+          </a:p>
+          <a:p>
+            <a:pPr algn="l" marL="342900" indent="-342900">
+              <a:spcAft>
+                <a:spcPts val="800"/>
+              </a:spcAft>
+              <a:buSzPct val="100000"/>
+              <a:buFont typeface="+mj-lt"/>
+              <a:buAutoNum type="arabicPeriod" startAt="1"/>
+            </a:pPr>
+            <a:r>
+              <a:rPr lang="en-US" sz="4000" dirty="0">
+                <a:solidFill>
+                  <a:srgbClr val="111111"/>
+                </a:solidFill>
+                <a:latin typeface="Times New Roman" pitchFamily="34" charset="0"/>
+                <a:ea typeface="Times New Roman" pitchFamily="34" charset="-122"/>
+                <a:cs typeface="Times New Roman" pitchFamily="34" charset="-120"/>
+              </a:rPr>
+              <a:t>Data collected by the researcher are ______ data.</a:t>
+            </a:r>
+            <a:endParaRPr lang="en-US" sz="4000" dirty="0"/>
+          </a:p>
+          <a:p>
+            <a:pPr algn="l" marL="342900" indent="-342900">
+              <a:spcAft>
+                <a:spcPts val="800"/>
+              </a:spcAft>
+              <a:buSzPct val="100000"/>
+              <a:buFont typeface="+mj-lt"/>
+              <a:buAutoNum type="arabicPeriod" startAt="1"/>
+            </a:pPr>
+            <a:r>
+              <a:rPr lang="en-US" sz="4000" dirty="0">
+                <a:solidFill>
+                  <a:srgbClr val="111111"/>
+                </a:solidFill>
+                <a:latin typeface="Times New Roman" pitchFamily="34" charset="0"/>
+                <a:ea typeface="Times New Roman" pitchFamily="34" charset="-122"/>
+                <a:cs typeface="Times New Roman" pitchFamily="34" charset="-120"/>
+              </a:rPr>
+              <a:t>Choosing every 10th house is ______ sampling.</a:t>
+            </a:r>
+            <a:endParaRPr lang="en-US" sz="4000" dirty="0"/>
+          </a:p>
+        </p:txBody>
+      </p:sp>
+      <p:sp>
+        <p:nvSpPr>
+          <p:cNvPr id="25" name="Slide Number Placeholder 0"/>
+          <p:cNvSpPr>
+            <a:spLocks noGrp="1"/>
+          </p:cNvSpPr>
+          <p:nvPr>
+            <p:ph type="sldNum" sz="quarter" idx="4294967295"/>
+          </p:nvPr>
+        </p:nvSpPr>
+        <p:spPr>
+          <a:xfrm>
+            <a:off x="27432" y="91440"/>
+            <a:ext cx="585216" cy="475488"/>
+          </a:xfrm>
+          <a:prstGeom prst="rect">
+            <a:avLst/>
+          </a:prstGeom>
+          <a:extLst>
+            <a:ext uri="{C572A759-6A51-4108-AA02-DFA0A04FC94B}">
+              <ma14:wrappingTextBoxFlag xmlns:ma14="http://schemas.microsoft.com/office/mac/drawingml/2011/main" val="0"/>
+            </a:ext>
+          </a:extLst>
+        </p:spPr>
+        <p:txBody>
+          <a:bodyPr/>
+          <a:lstStyle>
+            <a:lvl1pPr>
+              <a:defRPr sz="2000">
+                <a:solidFill>
+                  <a:srgbClr val="FFFFFF"/>
+                </a:solidFill>
+                <a:latin typeface="Calibri"/>
+                <a:ea typeface="Calibri"/>
+                <a:cs typeface="Calibri"/>
+              </a:defRPr>
+            </a:lvl1pPr>
+          </a:lstStyle>
+          <a:p>
+            <a:pPr algn="ctr"/>
+            <a:fld id="{F7021451-1387-4CA6-816F-3879F97B5CBC}" type="slidenum">
+              <a:rPr b="1" lang="en-US"/>
+              <a:t>54</a:t>
+            </a:fld>
+            <a:endParaRPr lang="en-US"/>
+          </a:p>
+        </p:txBody>
+      </p:sp>
+    </p:spTree>
+  </p:cSld>
+  <p:clrMapOvr>
+    <a:masterClrMapping/>
+  </p:clrMapOvr>
+</p:sld>
+</file>
+
+<file path=ppt/slides/slide55.xml><?xml version="1.0" encoding="utf-8"?>
+<p:sld xmlns:a="http://schemas.openxmlformats.org/drawingml/2006/main" xmlns:r="http://schemas.openxmlformats.org/officeDocument/2006/relationships" xmlns:p="http://schemas.openxmlformats.org/presentationml/2006/main">
+  <p:cSld name="Slide 55">
+    <p:spTree>
+      <p:nvGrpSpPr>
+        <p:cNvPr id="1" name=""/>
+        <p:cNvGrpSpPr/>
+        <p:nvPr/>
+      </p:nvGrpSpPr>
+      <p:grpSpPr>
+        <a:xfrm>
+          <a:off x="0" y="0"/>
+          <a:ext cx="0" cy="0"/>
+          <a:chOff x="0" y="0"/>
+          <a:chExt cx="0" cy="0"/>
+        </a:xfrm>
+      </p:grpSpPr>
+      <p:sp>
+        <p:nvSpPr>
+          <p:cNvPr id="2" name="Text 0"/>
+          <p:cNvSpPr/>
+          <p:nvPr/>
+        </p:nvSpPr>
+        <p:spPr>
+          <a:xfrm>
+            <a:off x="457200" y="713232"/>
+            <a:ext cx="11368735" cy="274320"/>
+          </a:xfrm>
+          <a:prstGeom prst="rect">
+            <a:avLst/>
+          </a:prstGeom>
+          <a:noFill/>
+          <a:ln/>
+        </p:spPr>
+        <p:txBody>
+          <a:bodyPr wrap="square" lIns="0" tIns="0" rIns="0" bIns="0" rtlCol="0" anchor="ctr"/>
+          <a:lstStyle/>
+          <a:p>
+            <a:pPr algn="r" indent="0" marL="0">
+              <a:buNone/>
+            </a:pPr>
+            <a:r>
+              <a:rPr lang="en-US" sz="1400" b="1" dirty="0">
+                <a:solidFill>
+                  <a:srgbClr val="1C3F6E"/>
+                </a:solidFill>
+                <a:latin typeface="Calibri" pitchFamily="34" charset="0"/>
+                <a:ea typeface="Calibri" pitchFamily="34" charset="-122"/>
+                <a:cs typeface="Calibri" pitchFamily="34" charset="-120"/>
+              </a:rPr>
+              <a:t>REMEDIATION</a:t>
+            </a:r>
+            <a:endParaRPr lang="en-US" sz="1400" dirty="0"/>
+          </a:p>
+        </p:txBody>
+      </p:sp>
+      <p:pic>
+        <p:nvPicPr>
+          <p:cNvPr id="3" name="Image 0" descr="/home/claude/f4/img/minesec_sheet.png">    </p:cNvPr>
+          <p:cNvPicPr>
+            <a:picLocks noChangeAspect="1"/>
+          </p:cNvPicPr>
+          <p:nvPr/>
+        </p:nvPicPr>
+        <p:blipFill>
+          <a:blip r:embed="rId1"/>
+          <a:stretch>
+            <a:fillRect/>
+          </a:stretch>
+        </p:blipFill>
+        <p:spPr>
+          <a:xfrm>
+            <a:off x="0" y="658368"/>
+            <a:ext cx="5120640" cy="5833872"/>
+          </a:xfrm>
+          <a:prstGeom prst="rect">
+            <a:avLst/>
+          </a:prstGeom>
+        </p:spPr>
+      </p:pic>
+      <p:sp>
+        <p:nvSpPr>
+          <p:cNvPr id="4" name="Text 1"/>
+          <p:cNvSpPr/>
+          <p:nvPr/>
+        </p:nvSpPr>
+        <p:spPr>
+          <a:xfrm>
+            <a:off x="5349240" y="1005840"/>
+            <a:ext cx="6522415" cy="731520"/>
+          </a:xfrm>
+          <a:prstGeom prst="rect">
+            <a:avLst/>
+          </a:prstGeom>
+          <a:noFill/>
+          <a:ln/>
+        </p:spPr>
+        <p:txBody>
+          <a:bodyPr wrap="square" lIns="0" tIns="0" rIns="0" bIns="0" rtlCol="0" anchor="ctr">
+            <a:normAutofit/>
+          </a:bodyPr>
+          <a:lstStyle/>
+          <a:p>
+            <a:pPr algn="ctr" indent="0" marL="0">
+              <a:buNone/>
+            </a:pPr>
+            <a:r>
+              <a:rPr lang="en-US" sz="3600" b="1" dirty="0">
+                <a:solidFill>
+                  <a:srgbClr val="990011"/>
+                </a:solidFill>
+                <a:latin typeface="Times New Roman" pitchFamily="34" charset="0"/>
+                <a:ea typeface="Times New Roman" pitchFamily="34" charset="-122"/>
+                <a:cs typeface="Times New Roman" pitchFamily="34" charset="-120"/>
+              </a:rPr>
+              <a:t>Remediation (continued)</a:t>
+            </a:r>
+            <a:endParaRPr lang="en-US" sz="3600" dirty="0"/>
+          </a:p>
+        </p:txBody>
+      </p:sp>
+      <p:sp>
+        <p:nvSpPr>
+          <p:cNvPr id="5" name="Text 2"/>
+          <p:cNvSpPr/>
+          <p:nvPr/>
+        </p:nvSpPr>
+        <p:spPr>
+          <a:xfrm>
+            <a:off x="5349240" y="1783080"/>
+            <a:ext cx="6522415" cy="4663440"/>
+          </a:xfrm>
+          <a:prstGeom prst="rect">
+            <a:avLst/>
+          </a:prstGeom>
+          <a:noFill/>
+          <a:ln/>
+        </p:spPr>
+        <p:txBody>
+          <a:bodyPr wrap="square" lIns="0" tIns="0" rIns="0" bIns="0" rtlCol="0" anchor="t"/>
+          <a:lstStyle/>
+          <a:p>
+            <a:pPr algn="l" marL="342900" indent="-342900">
+              <a:spcAft>
+                <a:spcPts val="800"/>
+              </a:spcAft>
+              <a:buSzPct val="100000"/>
+              <a:buFont typeface="+mj-lt"/>
+              <a:buAutoNum type="arabicPeriod" startAt="1"/>
+            </a:pPr>
+            <a:r>
+              <a:rPr lang="en-US" sz="4000" dirty="0">
+                <a:solidFill>
+                  <a:srgbClr val="111111"/>
+                </a:solidFill>
+                <a:latin typeface="Times New Roman" pitchFamily="34" charset="0"/>
+                <a:ea typeface="Times New Roman" pitchFamily="34" charset="-122"/>
+                <a:cs typeface="Times New Roman" pitchFamily="34" charset="-120"/>
+              </a:rPr>
+              <a:t>Dividing the population into groups first is ______ sampling.</a:t>
+            </a:r>
+            <a:endParaRPr lang="en-US" sz="4000" dirty="0"/>
+          </a:p>
+        </p:txBody>
+      </p:sp>
+      <p:sp>
+        <p:nvSpPr>
+          <p:cNvPr id="25" name="Slide Number Placeholder 0"/>
+          <p:cNvSpPr>
+            <a:spLocks noGrp="1"/>
+          </p:cNvSpPr>
+          <p:nvPr>
+            <p:ph type="sldNum" sz="quarter" idx="4294967295"/>
+          </p:nvPr>
+        </p:nvSpPr>
+        <p:spPr>
+          <a:xfrm>
+            <a:off x="27432" y="91440"/>
+            <a:ext cx="585216" cy="475488"/>
+          </a:xfrm>
+          <a:prstGeom prst="rect">
+            <a:avLst/>
+          </a:prstGeom>
+          <a:extLst>
+            <a:ext uri="{C572A759-6A51-4108-AA02-DFA0A04FC94B}">
+              <ma14:wrappingTextBoxFlag xmlns:ma14="http://schemas.microsoft.com/office/mac/drawingml/2011/main" val="0"/>
+            </a:ext>
+          </a:extLst>
+        </p:spPr>
+        <p:txBody>
+          <a:bodyPr/>
+          <a:lstStyle>
+            <a:lvl1pPr>
+              <a:defRPr sz="2000">
+                <a:solidFill>
+                  <a:srgbClr val="FFFFFF"/>
+                </a:solidFill>
+                <a:latin typeface="Calibri"/>
+                <a:ea typeface="Calibri"/>
+                <a:cs typeface="Calibri"/>
+              </a:defRPr>
+            </a:lvl1pPr>
+          </a:lstStyle>
+          <a:p>
+            <a:pPr algn="ctr"/>
+            <a:fld id="{F7021451-1387-4CA6-816F-3879F97B5CBC}" type="slidenum">
+              <a:rPr b="1" lang="en-US"/>
+              <a:t>55</a:t>
+            </a:fld>
+            <a:endParaRPr lang="en-US"/>
+          </a:p>
+        </p:txBody>
+      </p:sp>
+    </p:spTree>
+  </p:cSld>
+  <p:clrMapOvr>
+    <a:masterClrMapping/>
+  </p:clrMapOvr>
+</p:sld>
+</file>
+
+<file path=ppt/slides/slide56.xml><?xml version="1.0" encoding="utf-8"?>
+<p:sld xmlns:a="http://schemas.openxmlformats.org/drawingml/2006/main" xmlns:r="http://schemas.openxmlformats.org/officeDocument/2006/relationships" xmlns:p="http://schemas.openxmlformats.org/presentationml/2006/main">
+  <p:cSld name="Slide 56">
+    <p:spTree>
+      <p:nvGrpSpPr>
+        <p:cNvPr id="1" name=""/>
+        <p:cNvGrpSpPr/>
+        <p:nvPr/>
+      </p:nvGrpSpPr>
+      <p:grpSpPr>
+        <a:xfrm>
+          <a:off x="0" y="0"/>
+          <a:ext cx="0" cy="0"/>
+          <a:chOff x="0" y="0"/>
+          <a:chExt cx="0" cy="0"/>
+        </a:xfrm>
+      </p:grpSpPr>
+      <p:sp>
+        <p:nvSpPr>
+          <p:cNvPr id="2" name="Text 0"/>
+          <p:cNvSpPr/>
+          <p:nvPr/>
+        </p:nvSpPr>
+        <p:spPr>
+          <a:xfrm>
+            <a:off x="457200" y="713232"/>
+            <a:ext cx="11368735" cy="274320"/>
+          </a:xfrm>
+          <a:prstGeom prst="rect">
+            <a:avLst/>
+          </a:prstGeom>
+          <a:noFill/>
+          <a:ln/>
+        </p:spPr>
+        <p:txBody>
+          <a:bodyPr wrap="square" lIns="0" tIns="0" rIns="0" bIns="0" rtlCol="0" anchor="ctr"/>
+          <a:lstStyle/>
+          <a:p>
+            <a:pPr algn="r" indent="0" marL="0">
+              <a:buNone/>
+            </a:pPr>
+            <a:r>
+              <a:rPr lang="en-US" sz="1400" b="1" dirty="0">
+                <a:solidFill>
+                  <a:srgbClr val="1C3F6E"/>
+                </a:solidFill>
+                <a:latin typeface="Calibri" pitchFamily="34" charset="0"/>
+                <a:ea typeface="Calibri" pitchFamily="34" charset="-122"/>
+                <a:cs typeface="Calibri" pitchFamily="34" charset="-120"/>
+              </a:rPr>
+              <a:t>HOMEWORK</a:t>
+            </a:r>
+            <a:endParaRPr lang="en-US" sz="1400" dirty="0"/>
+          </a:p>
+        </p:txBody>
+      </p:sp>
+      <p:pic>
+        <p:nvPicPr>
+          <p:cNvPr id="3" name="Image 0" descr="/home/claude/f4/img/minesec_sheet.png">    </p:cNvPr>
+          <p:cNvPicPr>
+            <a:picLocks noChangeAspect="1"/>
+          </p:cNvPicPr>
+          <p:nvPr/>
+        </p:nvPicPr>
+        <p:blipFill>
+          <a:blip r:embed="rId1"/>
+          <a:stretch>
+            <a:fillRect/>
+          </a:stretch>
+        </p:blipFill>
+        <p:spPr>
+          <a:xfrm>
+            <a:off x="0" y="658368"/>
+            <a:ext cx="5120640" cy="5833872"/>
+          </a:xfrm>
+          <a:prstGeom prst="rect">
+            <a:avLst/>
+          </a:prstGeom>
+        </p:spPr>
+      </p:pic>
+      <p:sp>
+        <p:nvSpPr>
+          <p:cNvPr id="4" name="Text 1"/>
+          <p:cNvSpPr/>
+          <p:nvPr/>
+        </p:nvSpPr>
+        <p:spPr>
+          <a:xfrm>
+            <a:off x="5349240" y="1005840"/>
+            <a:ext cx="6522415" cy="731520"/>
+          </a:xfrm>
+          <a:prstGeom prst="rect">
+            <a:avLst/>
+          </a:prstGeom>
+          <a:noFill/>
+          <a:ln/>
+        </p:spPr>
+        <p:txBody>
+          <a:bodyPr wrap="square" lIns="0" tIns="0" rIns="0" bIns="0" rtlCol="0" anchor="ctr">
+            <a:normAutofit/>
+          </a:bodyPr>
+          <a:lstStyle/>
+          <a:p>
+            <a:pPr algn="ctr" indent="0" marL="0">
+              <a:buNone/>
+            </a:pPr>
+            <a:r>
+              <a:rPr lang="en-US" sz="3600" b="1" dirty="0">
+                <a:solidFill>
+                  <a:srgbClr val="990011"/>
+                </a:solidFill>
+                <a:latin typeface="Times New Roman" pitchFamily="34" charset="0"/>
+                <a:ea typeface="Times New Roman" pitchFamily="34" charset="-122"/>
+                <a:cs typeface="Times New Roman" pitchFamily="34" charset="-120"/>
+              </a:rPr>
+              <a:t>Homework</a:t>
+            </a:r>
+            <a:endParaRPr lang="en-US" sz="3600" dirty="0"/>
+          </a:p>
+        </p:txBody>
+      </p:sp>
+      <p:sp>
+        <p:nvSpPr>
+          <p:cNvPr id="5" name="Text 2"/>
+          <p:cNvSpPr/>
+          <p:nvPr/>
+        </p:nvSpPr>
+        <p:spPr>
+          <a:xfrm>
+            <a:off x="5349240" y="1783080"/>
+            <a:ext cx="6522415" cy="4663440"/>
+          </a:xfrm>
+          <a:prstGeom prst="rect">
+            <a:avLst/>
+          </a:prstGeom>
+          <a:noFill/>
+          <a:ln/>
+        </p:spPr>
+        <p:txBody>
+          <a:bodyPr wrap="square" lIns="0" tIns="0" rIns="0" bIns="0" rtlCol="0" anchor="t"/>
+          <a:lstStyle/>
+          <a:p>
+            <a:pPr algn="l" indent="0" marL="0">
+              <a:spcAft>
+                <a:spcPts val="800"/>
+              </a:spcAft>
+              <a:buNone/>
+            </a:pPr>
+            <a:r>
+              <a:rPr lang="en-US" sz="4000" dirty="0">
+                <a:solidFill>
+                  <a:srgbClr val="111111"/>
+                </a:solidFill>
+                <a:latin typeface="Times New Roman" pitchFamily="34" charset="0"/>
+                <a:ea typeface="Times New Roman" pitchFamily="34" charset="-122"/>
+                <a:cs typeface="Times New Roman" pitchFamily="34" charset="-120"/>
+              </a:rPr>
+              <a:t>Define the arithmetic mean.</a:t>
+            </a:r>
+            <a:endParaRPr lang="en-US" sz="4000" dirty="0"/>
+          </a:p>
+        </p:txBody>
+      </p:sp>
+      <p:sp>
+        <p:nvSpPr>
+          <p:cNvPr id="25" name="Slide Number Placeholder 0"/>
+          <p:cNvSpPr>
+            <a:spLocks noGrp="1"/>
+          </p:cNvSpPr>
+          <p:nvPr>
+            <p:ph type="sldNum" sz="quarter" idx="4294967295"/>
+          </p:nvPr>
+        </p:nvSpPr>
+        <p:spPr>
+          <a:xfrm>
+            <a:off x="27432" y="91440"/>
+            <a:ext cx="585216" cy="475488"/>
+          </a:xfrm>
+          <a:prstGeom prst="rect">
+            <a:avLst/>
+          </a:prstGeom>
+          <a:extLst>
+            <a:ext uri="{C572A759-6A51-4108-AA02-DFA0A04FC94B}">
+              <ma14:wrappingTextBoxFlag xmlns:ma14="http://schemas.microsoft.com/office/mac/drawingml/2011/main" val="0"/>
+            </a:ext>
+          </a:extLst>
+        </p:spPr>
+        <p:txBody>
+          <a:bodyPr/>
+          <a:lstStyle>
+            <a:lvl1pPr>
+              <a:defRPr sz="2000">
+                <a:solidFill>
+                  <a:srgbClr val="FFFFFF"/>
+                </a:solidFill>
+                <a:latin typeface="Calibri"/>
+                <a:ea typeface="Calibri"/>
+                <a:cs typeface="Calibri"/>
+              </a:defRPr>
+            </a:lvl1pPr>
+          </a:lstStyle>
+          <a:p>
+            <a:pPr algn="ctr"/>
+            <a:fld id="{F7021451-1387-4CA6-816F-3879F97B5CBC}" type="slidenum">
+              <a:rPr b="1" lang="en-US"/>
+              <a:t>56</a:t>
+            </a:fld>
+            <a:endParaRPr lang="en-US"/>
+          </a:p>
+        </p:txBody>
+      </p:sp>
+    </p:spTree>
+  </p:cSld>
+  <p:clrMapOvr>
+    <a:masterClrMapping/>
+  </p:clrMapOvr>
+</p:sld>
+</file>
+
+<file path=ppt/slides/slide57.xml><?xml version="1.0" encoding="utf-8"?>
+<p:sld xmlns:a="http://schemas.openxmlformats.org/drawingml/2006/main" xmlns:r="http://schemas.openxmlformats.org/officeDocument/2006/relationships" xmlns:p="http://schemas.openxmlformats.org/presentationml/2006/main">
+  <p:cSld name="Slide 57">
+    <p:spTree>
+      <p:nvGrpSpPr>
+        <p:cNvPr id="1" name=""/>
+        <p:cNvGrpSpPr/>
+        <p:nvPr/>
+      </p:nvGrpSpPr>
+      <p:grpSpPr>
+        <a:xfrm>
+          <a:off x="0" y="0"/>
+          <a:ext cx="0" cy="0"/>
+          <a:chOff x="0" y="0"/>
+          <a:chExt cx="0" cy="0"/>
+        </a:xfrm>
+      </p:grpSpPr>
+      <p:sp>
+        <p:nvSpPr>
+          <p:cNvPr id="2" name="Text 0"/>
+          <p:cNvSpPr/>
+          <p:nvPr/>
+        </p:nvSpPr>
+        <p:spPr>
+          <a:xfrm>
+            <a:off x="457200" y="713232"/>
+            <a:ext cx="11368735" cy="274320"/>
+          </a:xfrm>
+          <a:prstGeom prst="rect">
+            <a:avLst/>
+          </a:prstGeom>
+          <a:noFill/>
+          <a:ln/>
+        </p:spPr>
+        <p:txBody>
+          <a:bodyPr wrap="square" lIns="0" tIns="0" rIns="0" bIns="0" rtlCol="0" anchor="ctr"/>
+          <a:lstStyle/>
+          <a:p>
+            <a:pPr algn="r" indent="0" marL="0">
+              <a:buNone/>
+            </a:pPr>
+            <a:r>
+              <a:rPr lang="en-US" sz="1400" b="1" dirty="0">
+                <a:solidFill>
+                  <a:srgbClr val="1C3F6E"/>
+                </a:solidFill>
+                <a:latin typeface="Calibri" pitchFamily="34" charset="0"/>
+                <a:ea typeface="Calibri" pitchFamily="34" charset="-122"/>
+                <a:cs typeface="Calibri" pitchFamily="34" charset="-120"/>
+              </a:rPr>
+              <a:t>NEXT LESSON</a:t>
+            </a:r>
+            <a:endParaRPr lang="en-US" sz="1400" dirty="0"/>
+          </a:p>
+        </p:txBody>
+      </p:sp>
+      <p:pic>
+        <p:nvPicPr>
+          <p:cNvPr id="3" name="Image 0" descr="/home/claude/f4/img/minesec_sheet.png">    </p:cNvPr>
+          <p:cNvPicPr>
+            <a:picLocks noChangeAspect="1"/>
+          </p:cNvPicPr>
+          <p:nvPr/>
+        </p:nvPicPr>
+        <p:blipFill>
+          <a:blip r:embed="rId1"/>
+          <a:stretch>
+            <a:fillRect/>
+          </a:stretch>
+        </p:blipFill>
+        <p:spPr>
+          <a:xfrm>
+            <a:off x="0" y="658368"/>
+            <a:ext cx="5120640" cy="5833872"/>
+          </a:xfrm>
+          <a:prstGeom prst="rect">
+            <a:avLst/>
+          </a:prstGeom>
+        </p:spPr>
+      </p:pic>
+      <p:sp>
+        <p:nvSpPr>
+          <p:cNvPr id="4" name="Text 1"/>
+          <p:cNvSpPr/>
+          <p:nvPr/>
+        </p:nvSpPr>
+        <p:spPr>
+          <a:xfrm>
+            <a:off x="5349240" y="1005840"/>
+            <a:ext cx="6522415" cy="731520"/>
+          </a:xfrm>
+          <a:prstGeom prst="rect">
+            <a:avLst/>
+          </a:prstGeom>
+          <a:noFill/>
+          <a:ln/>
+        </p:spPr>
+        <p:txBody>
+          <a:bodyPr wrap="square" lIns="0" tIns="0" rIns="0" bIns="0" rtlCol="0" anchor="ctr">
+            <a:normAutofit/>
+          </a:bodyPr>
+          <a:lstStyle/>
+          <a:p>
+            <a:pPr algn="ctr" indent="0" marL="0">
+              <a:buNone/>
+            </a:pPr>
+            <a:r>
+              <a:rPr lang="en-US" sz="3600" b="1" dirty="0">
+                <a:solidFill>
+                  <a:srgbClr val="990011"/>
+                </a:solidFill>
+                <a:latin typeface="Times New Roman" pitchFamily="34" charset="0"/>
+                <a:ea typeface="Times New Roman" pitchFamily="34" charset="-122"/>
+                <a:cs typeface="Times New Roman" pitchFamily="34" charset="-120"/>
+              </a:rPr>
+              <a:t>Next Lesson</a:t>
+            </a:r>
+            <a:endParaRPr lang="en-US" sz="3600" dirty="0"/>
+          </a:p>
+        </p:txBody>
+      </p:sp>
+      <p:sp>
+        <p:nvSpPr>
+          <p:cNvPr id="5" name="Text 2"/>
+          <p:cNvSpPr/>
+          <p:nvPr/>
+        </p:nvSpPr>
+        <p:spPr>
+          <a:xfrm>
+            <a:off x="5349240" y="1783080"/>
+            <a:ext cx="6522415" cy="4663440"/>
+          </a:xfrm>
+          <a:prstGeom prst="rect">
+            <a:avLst/>
+          </a:prstGeom>
+          <a:noFill/>
+          <a:ln/>
+        </p:spPr>
+        <p:txBody>
+          <a:bodyPr wrap="square" lIns="0" tIns="0" rIns="0" bIns="0" rtlCol="0" anchor="ctr"/>
+          <a:lstStyle/>
+          <a:p>
+            <a:pPr algn="ctr" indent="0" marL="0">
+              <a:spcAft>
+                <a:spcPts val="800"/>
+              </a:spcAft>
+              <a:buNone/>
+            </a:pPr>
+            <a:r>
+              <a:rPr lang="en-US" sz="4000" b="1" dirty="0">
+                <a:solidFill>
+                  <a:srgbClr val="111111"/>
+                </a:solidFill>
+                <a:latin typeface="Times New Roman" pitchFamily="34" charset="0"/>
+                <a:ea typeface="Times New Roman" pitchFamily="34" charset="-122"/>
+                <a:cs typeface="Times New Roman" pitchFamily="34" charset="-120"/>
+              </a:rPr>
+              <a:t>Our next lesson will be on:</a:t>
+            </a:r>
+            <a:endParaRPr lang="en-US" sz="4000" dirty="0"/>
+          </a:p>
+          <a:p>
+            <a:pPr algn="ctr" indent="0" marL="0">
+              <a:spcAft>
+                <a:spcPts val="800"/>
+              </a:spcAft>
+              <a:buNone/>
+            </a:pPr>
+            <a:r>
+              <a:rPr lang="en-US" sz="4000" b="1" dirty="0">
+                <a:solidFill>
+                  <a:srgbClr val="990011"/>
+                </a:solidFill>
+                <a:latin typeface="Times New Roman" pitchFamily="34" charset="0"/>
+                <a:ea typeface="Times New Roman" pitchFamily="34" charset="-122"/>
+                <a:cs typeface="Times New Roman" pitchFamily="34" charset="-120"/>
+              </a:rPr>
+              <a:t>Quantitative Techniques 3 (Part 1): Measures of Central Tendency, Range and Quartiles</a:t>
+            </a:r>
+            <a:endParaRPr lang="en-US" sz="4000" dirty="0"/>
+          </a:p>
+        </p:txBody>
+      </p:sp>
+      <p:sp>
+        <p:nvSpPr>
+          <p:cNvPr id="25" name="Slide Number Placeholder 0"/>
+          <p:cNvSpPr>
+            <a:spLocks noGrp="1"/>
+          </p:cNvSpPr>
+          <p:nvPr>
+            <p:ph type="sldNum" sz="quarter" idx="4294967295"/>
+          </p:nvPr>
+        </p:nvSpPr>
+        <p:spPr>
+          <a:xfrm>
+            <a:off x="27432" y="91440"/>
+            <a:ext cx="585216" cy="475488"/>
+          </a:xfrm>
+          <a:prstGeom prst="rect">
+            <a:avLst/>
+          </a:prstGeom>
+          <a:extLst>
+            <a:ext uri="{C572A759-6A51-4108-AA02-DFA0A04FC94B}">
+              <ma14:wrappingTextBoxFlag xmlns:ma14="http://schemas.microsoft.com/office/mac/drawingml/2011/main" val="0"/>
+            </a:ext>
+          </a:extLst>
+        </p:spPr>
+        <p:txBody>
+          <a:bodyPr/>
+          <a:lstStyle>
+            <a:lvl1pPr>
+              <a:defRPr sz="2000">
+                <a:solidFill>
+                  <a:srgbClr val="FFFFFF"/>
+                </a:solidFill>
+                <a:latin typeface="Calibri"/>
+                <a:ea typeface="Calibri"/>
+                <a:cs typeface="Calibri"/>
+              </a:defRPr>
+            </a:lvl1pPr>
+          </a:lstStyle>
+          <a:p>
+            <a:pPr algn="ctr"/>
+            <a:fld id="{F7021451-1387-4CA6-816F-3879F97B5CBC}" type="slidenum">
+              <a:rPr b="1" lang="en-US"/>
+              <a:t>57</a:t>
+            </a:fld>
+            <a:endParaRPr lang="en-US"/>
+          </a:p>
+        </p:txBody>
+      </p:sp>
+    </p:spTree>
+  </p:cSld>
+  <p:clrMapOvr>
+    <a:masterClrMapping/>
+  </p:clrMapOvr>
+</p:sld>
+</file>
+
+<file path=ppt/slides/slide58.xml><?xml version="1.0" encoding="utf-8"?>
+<p:sld xmlns:a="http://schemas.openxmlformats.org/drawingml/2006/main" xmlns:r="http://schemas.openxmlformats.org/officeDocument/2006/relationships" xmlns:p="http://schemas.openxmlformats.org/presentationml/2006/main">
+  <p:cSld name="Slide 58">
+    <p:spTree>
+      <p:nvGrpSpPr>
+        <p:cNvPr id="1" name=""/>
+        <p:cNvGrpSpPr/>
+        <p:nvPr/>
+      </p:nvGrpSpPr>
+      <p:grpSpPr>
+        <a:xfrm>
+          <a:off x="0" y="0"/>
+          <a:ext cx="0" cy="0"/>
+          <a:chOff x="0" y="0"/>
+          <a:chExt cx="0" cy="0"/>
+        </a:xfrm>
+      </p:grpSpPr>
+      <p:sp>
+        <p:nvSpPr>
+          <p:cNvPr id="2" name="Text 0"/>
+          <p:cNvSpPr/>
+          <p:nvPr/>
+        </p:nvSpPr>
+        <p:spPr>
+          <a:xfrm>
+            <a:off x="457200" y="713232"/>
+            <a:ext cx="11368735" cy="274320"/>
+          </a:xfrm>
+          <a:prstGeom prst="rect">
+            <a:avLst/>
+          </a:prstGeom>
+          <a:noFill/>
+          <a:ln/>
+        </p:spPr>
+        <p:txBody>
+          <a:bodyPr wrap="square" lIns="0" tIns="0" rIns="0" bIns="0" rtlCol="0" anchor="ctr"/>
+          <a:lstStyle/>
+          <a:p>
+            <a:pPr algn="r" indent="0" marL="0">
+              <a:buNone/>
+            </a:pPr>
+            <a:r>
+              <a:rPr lang="en-US" sz="1400" b="1" dirty="0">
+                <a:solidFill>
+                  <a:srgbClr val="1C3F6E"/>
+                </a:solidFill>
+                <a:latin typeface="Calibri" pitchFamily="34" charset="0"/>
+                <a:ea typeface="Calibri" pitchFamily="34" charset="-122"/>
+                <a:cs typeface="Calibri" pitchFamily="34" charset="-120"/>
+              </a:rPr>
               <a:t>BILINGUAL GAME</a:t>
             </a:r>
             <a:endParaRPr lang="en-US" sz="1400" dirty="0"/>
@@ -18038,7 +20691,7 @@
       </p:sp>
       <p:graphicFrame>
         <p:nvGraphicFramePr>
-          <p:cNvPr id="52" name="Table 0"/>
+          <p:cNvPr id="59" name="Table 0"/>
           <p:cNvGraphicFramePr>
             <a:graphicFrameLocks noGrp="1"/>
           </p:cNvGraphicFramePr>
@@ -18494,7 +21147,7 @@
                           <a:ea typeface="Calibri" pitchFamily="34" charset="-122"/>
                           <a:cs typeface="Calibri" pitchFamily="34" charset="-120"/>
                         </a:rPr>
-                        <a:t>Questionnaire</a:t>
+                        <a:t>Observation</a:t>
                       </a:r>
                       <a:endParaRPr lang="en-US" sz="2200" dirty="0">
                         <a:latin typeface="Calibri" charset="0"/>
@@ -18562,7 +21215,7 @@
                           <a:ea typeface="Calibri" pitchFamily="34" charset="-122"/>
                           <a:cs typeface="Calibri" pitchFamily="34" charset="-120"/>
                         </a:rPr>
-                        <a:t>Le questionnaire</a:t>
+                        <a:t>L'observation</a:t>
                       </a:r>
                       <a:endParaRPr lang="en-US" sz="2200" dirty="0">
                         <a:latin typeface="Calibri" charset="0"/>
@@ -18632,7 +21285,7 @@
                           <a:ea typeface="Calibri" pitchFamily="34" charset="-122"/>
                           <a:cs typeface="Calibri" pitchFamily="34" charset="-120"/>
                         </a:rPr>
-                        <a:t>Interview</a:t>
+                        <a:t>Questionnaire</a:t>
                       </a:r>
                       <a:endParaRPr lang="en-US" sz="2200" dirty="0">
                         <a:latin typeface="Calibri" charset="0"/>
@@ -18700,7 +21353,7 @@
                           <a:ea typeface="Calibri" pitchFamily="34" charset="-122"/>
                           <a:cs typeface="Calibri" pitchFamily="34" charset="-120"/>
                         </a:rPr>
-                        <a:t>L'entretien</a:t>
+                        <a:t>Le questionnaire</a:t>
                       </a:r>
                       <a:endParaRPr lang="en-US" sz="2200" dirty="0">
                         <a:latin typeface="Calibri" charset="0"/>
@@ -18770,7 +21423,7 @@
                           <a:ea typeface="Calibri" pitchFamily="34" charset="-122"/>
                           <a:cs typeface="Calibri" pitchFamily="34" charset="-120"/>
                         </a:rPr>
-                        <a:t>Survey</a:t>
+                        <a:t>Interview</a:t>
                       </a:r>
                       <a:endParaRPr lang="en-US" sz="2200" dirty="0">
                         <a:latin typeface="Calibri" charset="0"/>
@@ -18838,7 +21491,7 @@
                           <a:ea typeface="Calibri" pitchFamily="34" charset="-122"/>
                           <a:cs typeface="Calibri" pitchFamily="34" charset="-120"/>
                         </a:rPr>
-                        <a:t>L'enquête</a:t>
+                        <a:t>L'entretien</a:t>
                       </a:r>
                       <a:endParaRPr lang="en-US" sz="2200" dirty="0">
                         <a:latin typeface="Calibri" charset="0"/>
@@ -18908,7 +21561,7 @@
                           <a:ea typeface="Calibri" pitchFamily="34" charset="-122"/>
                           <a:cs typeface="Calibri" pitchFamily="34" charset="-120"/>
                         </a:rPr>
-                        <a:t>Census</a:t>
+                        <a:t>Sampling</a:t>
                       </a:r>
                       <a:endParaRPr lang="en-US" sz="2200" dirty="0">
                         <a:latin typeface="Calibri" charset="0"/>
@@ -18976,7 +21629,7 @@
                           <a:ea typeface="Calibri" pitchFamily="34" charset="-122"/>
                           <a:cs typeface="Calibri" pitchFamily="34" charset="-120"/>
                         </a:rPr>
-                        <a:t>Le recensement</a:t>
+                        <a:t>L'échantillonnage</a:t>
                       </a:r>
                       <a:endParaRPr lang="en-US" sz="2200" dirty="0">
                         <a:latin typeface="Calibri" charset="0"/>
@@ -19074,7 +21727,7 @@
             <a:pPr algn="ctr"/>
             <a:fld id="{F7021451-1387-4CA6-816F-3879F97B5CBC}" type="slidenum">
               <a:rPr b="1" lang="en-US"/>
-              <a:t>51</a:t>
+              <a:t>58</a:t>
             </a:fld>
             <a:endParaRPr lang="en-US"/>
           </a:p>
@@ -19088,9 +21741,9 @@
 </p:sld>
 </file>
 
-<file path=ppt/slides/slide52.xml><?xml version="1.0" encoding="utf-8"?>
+<file path=ppt/slides/slide59.xml><?xml version="1.0" encoding="utf-8"?>
 <p:sld xmlns:a="http://schemas.openxmlformats.org/drawingml/2006/main" xmlns:r="http://schemas.openxmlformats.org/officeDocument/2006/relationships" xmlns:p="http://schemas.openxmlformats.org/presentationml/2006/main">
-  <p:cSld name="Slide 52">
+  <p:cSld name="Slide 59">
     <p:spTree>
       <p:nvGrpSpPr>
         <p:cNvPr id="1" name=""/>
@@ -19185,7 +21838,7 @@
       </p:sp>
       <p:graphicFrame>
         <p:nvGraphicFramePr>
-          <p:cNvPr id="53" name="Table 0"/>
+          <p:cNvPr id="60" name="Table 0"/>
           <p:cNvGraphicFramePr>
             <a:graphicFrameLocks noGrp="1"/>
           </p:cNvGraphicFramePr>
@@ -19571,7 +22224,7 @@
                           <a:ea typeface="Calibri" pitchFamily="34" charset="-122"/>
                           <a:cs typeface="Calibri" pitchFamily="34" charset="-120"/>
                         </a:rPr>
-                        <a:t>Distinguish primary and secondary data. Describe random, systematic and stratified sampling. Design a simple questionnaire and plan an interview.</a:t>
+                        <a:t>Distinguish primary and secondary data with examples. Explain why sampling is used. Describe random, systematic and stratified sampling. Describe the main primary data collection techniques.</a:t>
                       </a:r>
                       <a:endParaRPr lang="en-US" sz="1600" dirty="0">
                         <a:latin typeface="Calibri" charset="0"/>
@@ -19709,7 +22362,7 @@
                           <a:ea typeface="Calibri" pitchFamily="34" charset="-122"/>
                           <a:cs typeface="Calibri" pitchFamily="34" charset="-120"/>
                         </a:rPr>
-                        <a:t>Learners are able to choose data sources, select samples and design simple questionnaires.</a:t>
+                        <a:t>Learners are able to choose sources, sampling methods and techniques to collect data for a geographical investigation in Garoua.</a:t>
                       </a:r>
                       <a:endParaRPr lang="en-US" sz="1600" dirty="0">
                         <a:latin typeface="Calibri" charset="0"/>
@@ -19807,7 +22460,7 @@
             <a:pPr algn="ctr"/>
             <a:fld id="{F7021451-1387-4CA6-816F-3879F97B5CBC}" type="slidenum">
               <a:rPr b="1" lang="en-US"/>
-              <a:t>52</a:t>
+              <a:t>59</a:t>
             </a:fld>
             <a:endParaRPr lang="en-US"/>
           </a:p>
@@ -19821,9 +22474,9 @@
 </p:sld>
 </file>
 
-<file path=ppt/slides/slide53.xml><?xml version="1.0" encoding="utf-8"?>
+<file path=ppt/slides/slide6.xml><?xml version="1.0" encoding="utf-8"?>
 <p:sld xmlns:a="http://schemas.openxmlformats.org/drawingml/2006/main" xmlns:r="http://schemas.openxmlformats.org/officeDocument/2006/relationships" xmlns:p="http://schemas.openxmlformats.org/presentationml/2006/main">
-  <p:cSld name="Slide 53">
+  <p:cSld name="Slide 6">
     <p:spTree>
       <p:nvGrpSpPr>
         <p:cNvPr id="1" name=""/>
@@ -19871,6 +22524,337 @@
                 <a:ea typeface="Calibri" pitchFamily="34" charset="-122"/>
                 <a:cs typeface="Calibri" pitchFamily="34" charset="-120"/>
               </a:rPr>
+              <a:t>LESSON PLAN</a:t>
+            </a:r>
+            <a:endParaRPr lang="en-US" sz="1400" dirty="0"/>
+          </a:p>
+        </p:txBody>
+      </p:sp>
+      <p:pic>
+        <p:nvPicPr>
+          <p:cNvPr id="3" name="Image 0" descr="/home/claude/f4/img/minesec_sheet.png">    </p:cNvPr>
+          <p:cNvPicPr>
+            <a:picLocks noChangeAspect="1"/>
+          </p:cNvPicPr>
+          <p:nvPr/>
+        </p:nvPicPr>
+        <p:blipFill>
+          <a:blip r:embed="rId1"/>
+          <a:stretch>
+            <a:fillRect/>
+          </a:stretch>
+        </p:blipFill>
+        <p:spPr>
+          <a:xfrm>
+            <a:off x="0" y="658368"/>
+            <a:ext cx="2468880" cy="5833872"/>
+          </a:xfrm>
+          <a:prstGeom prst="rect">
+            <a:avLst/>
+          </a:prstGeom>
+        </p:spPr>
+      </p:pic>
+      <p:sp>
+        <p:nvSpPr>
+          <p:cNvPr id="4" name="Text 1"/>
+          <p:cNvSpPr/>
+          <p:nvPr/>
+        </p:nvSpPr>
+        <p:spPr>
+          <a:xfrm>
+            <a:off x="2697480" y="1005840"/>
+            <a:ext cx="9174175" cy="731520"/>
+          </a:xfrm>
+          <a:prstGeom prst="rect">
+            <a:avLst/>
+          </a:prstGeom>
+          <a:noFill/>
+          <a:ln/>
+        </p:spPr>
+        <p:txBody>
+          <a:bodyPr wrap="square" lIns="0" tIns="0" rIns="0" bIns="0" rtlCol="0" anchor="ctr">
+            <a:normAutofit/>
+          </a:bodyPr>
+          <a:lstStyle/>
+          <a:p>
+            <a:pPr algn="ctr" indent="0" marL="0">
+              <a:buNone/>
+            </a:pPr>
+            <a:r>
+              <a:rPr lang="en-US" sz="3600" b="1" dirty="0">
+                <a:solidFill>
+                  <a:srgbClr val="990011"/>
+                </a:solidFill>
+                <a:latin typeface="Times New Roman" pitchFamily="34" charset="0"/>
+                <a:ea typeface="Times New Roman" pitchFamily="34" charset="-122"/>
+                <a:cs typeface="Times New Roman" pitchFamily="34" charset="-120"/>
+              </a:rPr>
+              <a:t>Lesson Plan</a:t>
+            </a:r>
+            <a:endParaRPr lang="en-US" sz="3600" dirty="0"/>
+          </a:p>
+        </p:txBody>
+      </p:sp>
+      <p:sp>
+        <p:nvSpPr>
+          <p:cNvPr id="5" name="Text 2"/>
+          <p:cNvSpPr/>
+          <p:nvPr/>
+        </p:nvSpPr>
+        <p:spPr>
+          <a:xfrm>
+            <a:off x="2697480" y="1783080"/>
+            <a:ext cx="9174175" cy="4663440"/>
+          </a:xfrm>
+          <a:prstGeom prst="rect">
+            <a:avLst/>
+          </a:prstGeom>
+          <a:noFill/>
+          <a:ln/>
+        </p:spPr>
+        <p:txBody>
+          <a:bodyPr wrap="square" lIns="0" tIns="0" rIns="0" bIns="0" rtlCol="0" anchor="t"/>
+          <a:lstStyle/>
+          <a:p>
+            <a:pPr algn="l" marL="342900" indent="-342900">
+              <a:spcAft>
+                <a:spcPts val="800"/>
+              </a:spcAft>
+              <a:buSzPct val="100000"/>
+              <a:buFont typeface="+mj-lt"/>
+              <a:buAutoNum type="arabicPeriod" startAt="1"/>
+            </a:pPr>
+            <a:r>
+              <a:rPr lang="en-US" sz="4000" dirty="0">
+                <a:solidFill>
+                  <a:srgbClr val="111111"/>
+                </a:solidFill>
+                <a:latin typeface="Times New Roman" pitchFamily="34" charset="0"/>
+                <a:ea typeface="Times New Roman" pitchFamily="34" charset="-122"/>
+                <a:cs typeface="Times New Roman" pitchFamily="34" charset="-120"/>
+              </a:rPr>
+              <a:t>Correction of the homework</a:t>
+            </a:r>
+            <a:endParaRPr lang="en-US" sz="4000" dirty="0"/>
+          </a:p>
+          <a:p>
+            <a:pPr algn="l" marL="342900" indent="-342900">
+              <a:spcAft>
+                <a:spcPts val="800"/>
+              </a:spcAft>
+              <a:buSzPct val="100000"/>
+              <a:buFont typeface="+mj-lt"/>
+              <a:buAutoNum type="arabicPeriod" startAt="1"/>
+            </a:pPr>
+            <a:r>
+              <a:rPr lang="en-US" sz="4000" dirty="0">
+                <a:solidFill>
+                  <a:srgbClr val="111111"/>
+                </a:solidFill>
+                <a:latin typeface="Times New Roman" pitchFamily="34" charset="0"/>
+                <a:ea typeface="Times New Roman" pitchFamily="34" charset="-122"/>
+                <a:cs typeface="Times New Roman" pitchFamily="34" charset="-120"/>
+              </a:rPr>
+              <a:t>Objectives and recall</a:t>
+            </a:r>
+            <a:endParaRPr lang="en-US" sz="4000" dirty="0"/>
+          </a:p>
+          <a:p>
+            <a:pPr algn="l" marL="342900" indent="-342900">
+              <a:spcAft>
+                <a:spcPts val="800"/>
+              </a:spcAft>
+              <a:buSzPct val="100000"/>
+              <a:buFont typeface="+mj-lt"/>
+              <a:buAutoNum type="arabicPeriod" startAt="1"/>
+            </a:pPr>
+            <a:r>
+              <a:rPr lang="en-US" sz="4000" dirty="0">
+                <a:solidFill>
+                  <a:srgbClr val="111111"/>
+                </a:solidFill>
+                <a:latin typeface="Times New Roman" pitchFamily="34" charset="0"/>
+                <a:ea typeface="Times New Roman" pitchFamily="34" charset="-122"/>
+                <a:cs typeface="Times New Roman" pitchFamily="34" charset="-120"/>
+              </a:rPr>
+              <a:t>Real-life situation and action to take</a:t>
+            </a:r>
+            <a:endParaRPr lang="en-US" sz="4000" dirty="0"/>
+          </a:p>
+          <a:p>
+            <a:pPr algn="l" marL="342900" indent="-342900">
+              <a:spcAft>
+                <a:spcPts val="800"/>
+              </a:spcAft>
+              <a:buSzPct val="100000"/>
+              <a:buFont typeface="+mj-lt"/>
+              <a:buAutoNum type="arabicPeriod" startAt="1"/>
+            </a:pPr>
+            <a:r>
+              <a:rPr lang="en-US" sz="4000" dirty="0">
+                <a:solidFill>
+                  <a:srgbClr val="111111"/>
+                </a:solidFill>
+                <a:latin typeface="Times New Roman" pitchFamily="34" charset="0"/>
+                <a:ea typeface="Times New Roman" pitchFamily="34" charset="-122"/>
+                <a:cs typeface="Times New Roman" pitchFamily="34" charset="-120"/>
+              </a:rPr>
+              <a:t>Learning activities</a:t>
+            </a:r>
+            <a:endParaRPr lang="en-US" sz="4000" dirty="0"/>
+          </a:p>
+          <a:p>
+            <a:pPr algn="l" marL="342900" indent="-342900">
+              <a:spcAft>
+                <a:spcPts val="800"/>
+              </a:spcAft>
+              <a:buSzPct val="100000"/>
+              <a:buFont typeface="+mj-lt"/>
+              <a:buAutoNum type="arabicPeriod" startAt="1"/>
+            </a:pPr>
+            <a:r>
+              <a:rPr lang="en-US" sz="4000" dirty="0">
+                <a:solidFill>
+                  <a:srgbClr val="111111"/>
+                </a:solidFill>
+                <a:latin typeface="Times New Roman" pitchFamily="34" charset="0"/>
+                <a:ea typeface="Times New Roman" pitchFamily="34" charset="-122"/>
+                <a:cs typeface="Times New Roman" pitchFamily="34" charset="-120"/>
+              </a:rPr>
+              <a:t>Board summary</a:t>
+            </a:r>
+            <a:endParaRPr lang="en-US" sz="4000" dirty="0"/>
+          </a:p>
+          <a:p>
+            <a:pPr algn="l" marL="342900" indent="-342900">
+              <a:spcAft>
+                <a:spcPts val="800"/>
+              </a:spcAft>
+              <a:buSzPct val="100000"/>
+              <a:buFont typeface="+mj-lt"/>
+              <a:buAutoNum type="arabicPeriod" startAt="1"/>
+            </a:pPr>
+            <a:r>
+              <a:rPr lang="en-US" sz="4000" dirty="0">
+                <a:solidFill>
+                  <a:srgbClr val="111111"/>
+                </a:solidFill>
+                <a:latin typeface="Times New Roman" pitchFamily="34" charset="0"/>
+                <a:ea typeface="Times New Roman" pitchFamily="34" charset="-122"/>
+                <a:cs typeface="Times New Roman" pitchFamily="34" charset="-120"/>
+              </a:rPr>
+              <a:t>Evaluation, remediation and homework</a:t>
+            </a:r>
+            <a:endParaRPr lang="en-US" sz="4000" dirty="0"/>
+          </a:p>
+        </p:txBody>
+      </p:sp>
+      <p:sp>
+        <p:nvSpPr>
+          <p:cNvPr id="25" name="Slide Number Placeholder 0"/>
+          <p:cNvSpPr>
+            <a:spLocks noGrp="1"/>
+          </p:cNvSpPr>
+          <p:nvPr>
+            <p:ph type="sldNum" sz="quarter" idx="4294967295"/>
+          </p:nvPr>
+        </p:nvSpPr>
+        <p:spPr>
+          <a:xfrm>
+            <a:off x="27432" y="91440"/>
+            <a:ext cx="585216" cy="475488"/>
+          </a:xfrm>
+          <a:prstGeom prst="rect">
+            <a:avLst/>
+          </a:prstGeom>
+          <a:extLst>
+            <a:ext uri="{C572A759-6A51-4108-AA02-DFA0A04FC94B}">
+              <ma14:wrappingTextBoxFlag xmlns:ma14="http://schemas.microsoft.com/office/mac/drawingml/2011/main" val="0"/>
+            </a:ext>
+          </a:extLst>
+        </p:spPr>
+        <p:txBody>
+          <a:bodyPr/>
+          <a:lstStyle>
+            <a:lvl1pPr>
+              <a:defRPr sz="2000">
+                <a:solidFill>
+                  <a:srgbClr val="FFFFFF"/>
+                </a:solidFill>
+                <a:latin typeface="Calibri"/>
+                <a:ea typeface="Calibri"/>
+                <a:cs typeface="Calibri"/>
+              </a:defRPr>
+            </a:lvl1pPr>
+          </a:lstStyle>
+          <a:p>
+            <a:pPr algn="ctr"/>
+            <a:fld id="{F7021451-1387-4CA6-816F-3879F97B5CBC}" type="slidenum">
+              <a:rPr b="1" lang="en-US"/>
+              <a:t>6</a:t>
+            </a:fld>
+            <a:endParaRPr lang="en-US"/>
+          </a:p>
+        </p:txBody>
+      </p:sp>
+    </p:spTree>
+  </p:cSld>
+  <p:clrMapOvr>
+    <a:masterClrMapping/>
+  </p:clrMapOvr>
+</p:sld>
+</file>
+
+<file path=ppt/slides/slide60.xml><?xml version="1.0" encoding="utf-8"?>
+<p:sld xmlns:a="http://schemas.openxmlformats.org/drawingml/2006/main" xmlns:r="http://schemas.openxmlformats.org/officeDocument/2006/relationships" xmlns:p="http://schemas.openxmlformats.org/presentationml/2006/main">
+  <p:cSld name="Slide 60">
+    <p:spTree>
+      <p:nvGrpSpPr>
+        <p:cNvPr id="1" name=""/>
+        <p:cNvGrpSpPr/>
+        <p:nvPr/>
+      </p:nvGrpSpPr>
+      <p:grpSpPr>
+        <a:xfrm>
+          <a:off x="0" y="0"/>
+          <a:ext cx="0" cy="0"/>
+          <a:chOff x="0" y="0"/>
+          <a:chExt cx="0" cy="0"/>
+        </a:xfrm>
+      </p:grpSpPr>
+      <p:sp>
+        <p:nvSpPr>
+          <p:cNvPr id="2" name="Text 0"/>
+          <p:cNvSpPr/>
+          <p:nvPr/>
+        </p:nvSpPr>
+        <p:spPr>
+          <a:xfrm>
+            <a:off x="457200" y="713232"/>
+            <a:ext cx="11368735" cy="274320"/>
+          </a:xfrm>
+          <a:prstGeom prst="rect">
+            <a:avLst/>
+          </a:prstGeom>
+          <a:noFill/>
+          <a:ln/>
+        </p:spPr>
+        <p:txBody>
+          <a:bodyPr wrap="square" lIns="0" tIns="0" rIns="0" bIns="0" rtlCol="0" anchor="ctr"/>
+          <a:lstStyle/>
+          <a:p>
+            <a:pPr algn="r" indent="0" marL="0">
+              <a:buNone/>
+            </a:pPr>
+            <a:r>
+              <a:rPr lang="en-US" sz="1400" b="1" dirty="0">
+                <a:solidFill>
+                  <a:srgbClr val="1C3F6E"/>
+                </a:solidFill>
+                <a:latin typeface="Calibri" pitchFamily="34" charset="0"/>
+                <a:ea typeface="Calibri" pitchFamily="34" charset="-122"/>
+                <a:cs typeface="Calibri" pitchFamily="34" charset="-120"/>
+              </a:rPr>
               <a:t>LOGBOOK</a:t>
             </a:r>
             <a:endParaRPr lang="en-US" sz="1400" dirty="0"/>
@@ -19918,7 +22902,7 @@
       </p:sp>
       <p:graphicFrame>
         <p:nvGraphicFramePr>
-          <p:cNvPr id="54" name="Table 0"/>
+          <p:cNvPr id="61" name="Table 0"/>
           <p:cNvGraphicFramePr>
             <a:graphicFrameLocks noGrp="1"/>
           </p:cNvGraphicFramePr>
@@ -20028,7 +23012,7 @@
                           <a:ea typeface="Calibri" pitchFamily="34" charset="-122"/>
                           <a:cs typeface="Calibri" pitchFamily="34" charset="-120"/>
                         </a:rPr>
-                        <a:t>Sources of Geographical Data; Basic Sampling Procedures; Field Techniques.</a:t>
+                        <a:t>DEFINITIONS; Sources of Geographical Data; Basic Sampling Procedures; Primary Data Collection Techniques.</a:t>
                       </a:r>
                       <a:endParaRPr lang="en-US" sz="1600" dirty="0">
                         <a:latin typeface="Calibri" charset="0"/>
@@ -20304,7 +23288,7 @@
                           <a:ea typeface="Calibri" pitchFamily="34" charset="-122"/>
                           <a:cs typeface="Calibri" pitchFamily="34" charset="-120"/>
                         </a:rPr>
-                        <a:t>Prepare a questionnaire of five questions about how students travel to school.</a:t>
+                        <a:t>Define the arithmetic mean.</a:t>
                       </a:r>
                       <a:endParaRPr lang="en-US" sz="1600" dirty="0">
                         <a:latin typeface="Calibri" charset="0"/>
@@ -20678,7 +23662,7 @@
             <a:pPr algn="ctr"/>
             <a:fld id="{F7021451-1387-4CA6-816F-3879F97B5CBC}" type="slidenum">
               <a:rPr b="1" lang="en-US"/>
-              <a:t>53</a:t>
+              <a:t>60</a:t>
             </a:fld>
             <a:endParaRPr lang="en-US"/>
           </a:p>
@@ -20692,9 +23676,9 @@
 </p:sld>
 </file>
 
-<file path=ppt/slides/slide54.xml><?xml version="1.0" encoding="utf-8"?>
+<file path=ppt/slides/slide61.xml><?xml version="1.0" encoding="utf-8"?>
 <p:sld xmlns:a="http://schemas.openxmlformats.org/drawingml/2006/main" xmlns:r="http://schemas.openxmlformats.org/officeDocument/2006/relationships" xmlns:p="http://schemas.openxmlformats.org/presentationml/2006/main">
-  <p:cSld name="Slide 54">
+  <p:cSld name="Slide 61">
     <p:spTree>
       <p:nvGrpSpPr>
         <p:cNvPr id="1" name=""/>
@@ -20765,7 +23749,7 @@
         <p:spPr>
           <a:xfrm>
             <a:off x="0" y="658368"/>
-            <a:ext cx="5120640" cy="5833872"/>
+            <a:ext cx="3840480" cy="5833872"/>
           </a:xfrm>
           <a:prstGeom prst="rect">
             <a:avLst/>
@@ -20780,8 +23764,8 @@
         </p:nvSpPr>
         <p:spPr>
           <a:xfrm>
-            <a:off x="5349240" y="1005840"/>
-            <a:ext cx="6522415" cy="731520"/>
+            <a:off x="4069080" y="1005840"/>
+            <a:ext cx="7802575" cy="731520"/>
           </a:xfrm>
           <a:prstGeom prst="rect">
             <a:avLst/>
@@ -20821,8 +23805,8 @@
         </p:nvSpPr>
         <p:spPr>
           <a:xfrm>
-            <a:off x="5349240" y="1783080"/>
-            <a:ext cx="6522415" cy="4663440"/>
+            <a:off x="4069080" y="1783080"/>
+            <a:ext cx="7802575" cy="4663440"/>
           </a:xfrm>
           <a:prstGeom prst="rect">
             <a:avLst/>
@@ -20871,7 +23855,7 @@
                 <a:ea typeface="Calibri" pitchFamily="34" charset="-122"/>
                 <a:cs typeface="Calibri" pitchFamily="34" charset="-120"/>
               </a:rPr>
-              <a:t>Without the projector (Activity 1): list sources.</a:t>
+              <a:t>Without the projector (Activity 1): list sources in two columns.</a:t>
             </a:r>
             <a:endParaRPr lang="en-US" sz="2000" dirty="0"/>
           </a:p>
@@ -20892,7 +23876,7 @@
                 <a:ea typeface="Calibri" pitchFamily="34" charset="-122"/>
                 <a:cs typeface="Calibri" pitchFamily="34" charset="-120"/>
               </a:rPr>
-              <a:t>Without the projector (Activity 2): explain sampling.</a:t>
+              <a:t>Without the projector (Activity 2): pick names from a box.</a:t>
             </a:r>
             <a:endParaRPr lang="en-US" sz="2000" dirty="0"/>
           </a:p>
@@ -20913,7 +23897,7 @@
                 <a:ea typeface="Calibri" pitchFamily="34" charset="-122"/>
                 <a:cs typeface="Calibri" pitchFamily="34" charset="-120"/>
               </a:rPr>
-              <a:t>Without the projector (Activity 3): plan a sample.</a:t>
+              <a:t>Without the projector (Activity 3): select every 10th name on the class list.</a:t>
             </a:r>
             <a:endParaRPr lang="en-US" sz="2000" dirty="0"/>
           </a:p>
@@ -20934,7 +23918,7 @@
                 <a:ea typeface="Calibri" pitchFamily="34" charset="-122"/>
                 <a:cs typeface="Calibri" pitchFamily="34" charset="-120"/>
               </a:rPr>
-              <a:t>Without the projector (Activity 4): list tools.</a:t>
+              <a:t>Without the projector (Activity 4): prepare a tally sheet.</a:t>
             </a:r>
             <a:endParaRPr lang="en-US" sz="2000" dirty="0"/>
           </a:p>
@@ -20955,7 +23939,7 @@
                 <a:ea typeface="Calibri" pitchFamily="34" charset="-122"/>
                 <a:cs typeface="Calibri" pitchFamily="34" charset="-120"/>
               </a:rPr>
-              <a:t>Without the projector (Activity 5): write three questions.</a:t>
+              <a:t>Without the projector (Activity 5): write two closed questions.</a:t>
             </a:r>
             <a:endParaRPr lang="en-US" sz="2000" dirty="0"/>
           </a:p>
@@ -21003,7 +23987,7 @@
             <a:pPr algn="ctr"/>
             <a:fld id="{F7021451-1387-4CA6-816F-3879F97B5CBC}" type="slidenum">
               <a:rPr b="1" lang="en-US"/>
-              <a:t>54</a:t>
+              <a:t>61</a:t>
             </a:fld>
             <a:endParaRPr lang="en-US"/>
           </a:p>
@@ -21017,9 +24001,9 @@
 </p:sld>
 </file>
 
-<file path=ppt/slides/slide55.xml><?xml version="1.0" encoding="utf-8"?>
+<file path=ppt/slides/slide62.xml><?xml version="1.0" encoding="utf-8"?>
 <p:sld xmlns:a="http://schemas.openxmlformats.org/drawingml/2006/main" xmlns:r="http://schemas.openxmlformats.org/officeDocument/2006/relationships" xmlns:p="http://schemas.openxmlformats.org/presentationml/2006/main">
-  <p:cSld name="Slide 55">
+  <p:cSld name="Slide 62">
     <p:spTree>
       <p:nvGrpSpPr>
         <p:cNvPr id="1" name=""/>
@@ -21175,7 +24159,7 @@
                 <a:ea typeface="Calibri" pitchFamily="34" charset="-122"/>
                 <a:cs typeface="Calibri" pitchFamily="34" charset="-120"/>
               </a:rPr>
-              <a:t>National Geography Syllabus, MINESEC/IGE/IP-SS, 2019 — Module 8 (Practical Geography).</a:t>
+              <a:t>Geography Syllabus for Sixth Forms (Lower and Upper Sixth), MINESEC, 2019 — Module 8 (Practical Geography).</a:t>
             </a:r>
             <a:endParaRPr lang="en-US" sz="1800" dirty="0"/>
           </a:p>
@@ -21196,7 +24180,7 @@
                 <a:ea typeface="Calibri" pitchFamily="34" charset="-122"/>
                 <a:cs typeface="Calibri" pitchFamily="34" charset="-120"/>
               </a:rPr>
-              <a:t>Photo, Activity 4: “Farmers Use Ribbon Tape Measure a Crop Field” by IFPRI, CC BY-NC-ND 2.0, via Flickr (https://www.flickr.com/photos/49258007@N03/28439241155)</a:t>
+              <a:t>Teacher's course notes: Mr KAMDEM E., Statistical Techniques in Geographical Analysis (USA), GBHS Garoua, 2026.</a:t>
             </a:r>
             <a:endParaRPr lang="en-US" sz="1800" dirty="0"/>
           </a:p>
@@ -21265,338 +24249,7 @@
             <a:pPr algn="ctr"/>
             <a:fld id="{F7021451-1387-4CA6-816F-3879F97B5CBC}" type="slidenum">
               <a:rPr b="1" lang="en-US"/>
-              <a:t>55</a:t>
-            </a:fld>
-            <a:endParaRPr lang="en-US"/>
-          </a:p>
-        </p:txBody>
-      </p:sp>
-    </p:spTree>
-  </p:cSld>
-  <p:clrMapOvr>
-    <a:masterClrMapping/>
-  </p:clrMapOvr>
-</p:sld>
-</file>
-
-<file path=ppt/slides/slide6.xml><?xml version="1.0" encoding="utf-8"?>
-<p:sld xmlns:a="http://schemas.openxmlformats.org/drawingml/2006/main" xmlns:r="http://schemas.openxmlformats.org/officeDocument/2006/relationships" xmlns:p="http://schemas.openxmlformats.org/presentationml/2006/main">
-  <p:cSld name="Slide 6">
-    <p:spTree>
-      <p:nvGrpSpPr>
-        <p:cNvPr id="1" name=""/>
-        <p:cNvGrpSpPr/>
-        <p:nvPr/>
-      </p:nvGrpSpPr>
-      <p:grpSpPr>
-        <a:xfrm>
-          <a:off x="0" y="0"/>
-          <a:ext cx="0" cy="0"/>
-          <a:chOff x="0" y="0"/>
-          <a:chExt cx="0" cy="0"/>
-        </a:xfrm>
-      </p:grpSpPr>
-      <p:sp>
-        <p:nvSpPr>
-          <p:cNvPr id="2" name="Text 0"/>
-          <p:cNvSpPr/>
-          <p:nvPr/>
-        </p:nvSpPr>
-        <p:spPr>
-          <a:xfrm>
-            <a:off x="457200" y="713232"/>
-            <a:ext cx="11368735" cy="274320"/>
-          </a:xfrm>
-          <a:prstGeom prst="rect">
-            <a:avLst/>
-          </a:prstGeom>
-          <a:noFill/>
-          <a:ln/>
-        </p:spPr>
-        <p:txBody>
-          <a:bodyPr wrap="square" lIns="0" tIns="0" rIns="0" bIns="0" rtlCol="0" anchor="ctr"/>
-          <a:lstStyle/>
-          <a:p>
-            <a:pPr algn="r" indent="0" marL="0">
-              <a:buNone/>
-            </a:pPr>
-            <a:r>
-              <a:rPr lang="en-US" sz="1400" b="1" dirty="0">
-                <a:solidFill>
-                  <a:srgbClr val="1C3F6E"/>
-                </a:solidFill>
-                <a:latin typeface="Calibri" pitchFamily="34" charset="0"/>
-                <a:ea typeface="Calibri" pitchFamily="34" charset="-122"/>
-                <a:cs typeface="Calibri" pitchFamily="34" charset="-120"/>
-              </a:rPr>
-              <a:t>LESSON PLAN</a:t>
-            </a:r>
-            <a:endParaRPr lang="en-US" sz="1400" dirty="0"/>
-          </a:p>
-        </p:txBody>
-      </p:sp>
-      <p:pic>
-        <p:nvPicPr>
-          <p:cNvPr id="3" name="Image 0" descr="/home/claude/f4/img/minesec_sheet.png">    </p:cNvPr>
-          <p:cNvPicPr>
-            <a:picLocks noChangeAspect="1"/>
-          </p:cNvPicPr>
-          <p:nvPr/>
-        </p:nvPicPr>
-        <p:blipFill>
-          <a:blip r:embed="rId1"/>
-          <a:stretch>
-            <a:fillRect/>
-          </a:stretch>
-        </p:blipFill>
-        <p:spPr>
-          <a:xfrm>
-            <a:off x="0" y="658368"/>
-            <a:ext cx="2468880" cy="5833872"/>
-          </a:xfrm>
-          <a:prstGeom prst="rect">
-            <a:avLst/>
-          </a:prstGeom>
-        </p:spPr>
-      </p:pic>
-      <p:sp>
-        <p:nvSpPr>
-          <p:cNvPr id="4" name="Text 1"/>
-          <p:cNvSpPr/>
-          <p:nvPr/>
-        </p:nvSpPr>
-        <p:spPr>
-          <a:xfrm>
-            <a:off x="2697480" y="1005840"/>
-            <a:ext cx="9174175" cy="731520"/>
-          </a:xfrm>
-          <a:prstGeom prst="rect">
-            <a:avLst/>
-          </a:prstGeom>
-          <a:noFill/>
-          <a:ln/>
-        </p:spPr>
-        <p:txBody>
-          <a:bodyPr wrap="square" lIns="0" tIns="0" rIns="0" bIns="0" rtlCol="0" anchor="ctr">
-            <a:normAutofit/>
-          </a:bodyPr>
-          <a:lstStyle/>
-          <a:p>
-            <a:pPr algn="ctr" indent="0" marL="0">
-              <a:buNone/>
-            </a:pPr>
-            <a:r>
-              <a:rPr lang="en-US" sz="3600" b="1" dirty="0">
-                <a:solidFill>
-                  <a:srgbClr val="990011"/>
-                </a:solidFill>
-                <a:latin typeface="Times New Roman" pitchFamily="34" charset="0"/>
-                <a:ea typeface="Times New Roman" pitchFamily="34" charset="-122"/>
-                <a:cs typeface="Times New Roman" pitchFamily="34" charset="-120"/>
-              </a:rPr>
-              <a:t>Lesson Plan</a:t>
-            </a:r>
-            <a:endParaRPr lang="en-US" sz="3600" dirty="0"/>
-          </a:p>
-        </p:txBody>
-      </p:sp>
-      <p:sp>
-        <p:nvSpPr>
-          <p:cNvPr id="5" name="Text 2"/>
-          <p:cNvSpPr/>
-          <p:nvPr/>
-        </p:nvSpPr>
-        <p:spPr>
-          <a:xfrm>
-            <a:off x="2697480" y="1783080"/>
-            <a:ext cx="9174175" cy="4663440"/>
-          </a:xfrm>
-          <a:prstGeom prst="rect">
-            <a:avLst/>
-          </a:prstGeom>
-          <a:noFill/>
-          <a:ln/>
-        </p:spPr>
-        <p:txBody>
-          <a:bodyPr wrap="square" lIns="0" tIns="0" rIns="0" bIns="0" rtlCol="0" anchor="t"/>
-          <a:lstStyle/>
-          <a:p>
-            <a:pPr algn="l" marL="342900" indent="-342900">
-              <a:spcAft>
-                <a:spcPts val="800"/>
-              </a:spcAft>
-              <a:buSzPct val="100000"/>
-              <a:buFont typeface="+mj-lt"/>
-              <a:buAutoNum type="arabicPeriod" startAt="1"/>
-            </a:pPr>
-            <a:r>
-              <a:rPr lang="en-US" sz="4000" dirty="0">
-                <a:solidFill>
-                  <a:srgbClr val="111111"/>
-                </a:solidFill>
-                <a:latin typeface="Times New Roman" pitchFamily="34" charset="0"/>
-                <a:ea typeface="Times New Roman" pitchFamily="34" charset="-122"/>
-                <a:cs typeface="Times New Roman" pitchFamily="34" charset="-120"/>
-              </a:rPr>
-              <a:t>Correction of the homework</a:t>
-            </a:r>
-            <a:endParaRPr lang="en-US" sz="4000" dirty="0"/>
-          </a:p>
-          <a:p>
-            <a:pPr algn="l" marL="342900" indent="-342900">
-              <a:spcAft>
-                <a:spcPts val="800"/>
-              </a:spcAft>
-              <a:buSzPct val="100000"/>
-              <a:buFont typeface="+mj-lt"/>
-              <a:buAutoNum type="arabicPeriod" startAt="1"/>
-            </a:pPr>
-            <a:r>
-              <a:rPr lang="en-US" sz="4000" dirty="0">
-                <a:solidFill>
-                  <a:srgbClr val="111111"/>
-                </a:solidFill>
-                <a:latin typeface="Times New Roman" pitchFamily="34" charset="0"/>
-                <a:ea typeface="Times New Roman" pitchFamily="34" charset="-122"/>
-                <a:cs typeface="Times New Roman" pitchFamily="34" charset="-120"/>
-              </a:rPr>
-              <a:t>Objectives and recall</a:t>
-            </a:r>
-            <a:endParaRPr lang="en-US" sz="4000" dirty="0"/>
-          </a:p>
-          <a:p>
-            <a:pPr algn="l" marL="342900" indent="-342900">
-              <a:spcAft>
-                <a:spcPts val="800"/>
-              </a:spcAft>
-              <a:buSzPct val="100000"/>
-              <a:buFont typeface="+mj-lt"/>
-              <a:buAutoNum type="arabicPeriod" startAt="1"/>
-            </a:pPr>
-            <a:r>
-              <a:rPr lang="en-US" sz="4000" dirty="0">
-                <a:solidFill>
-                  <a:srgbClr val="111111"/>
-                </a:solidFill>
-                <a:latin typeface="Times New Roman" pitchFamily="34" charset="0"/>
-                <a:ea typeface="Times New Roman" pitchFamily="34" charset="-122"/>
-                <a:cs typeface="Times New Roman" pitchFamily="34" charset="-120"/>
-              </a:rPr>
-              <a:t>Real-life situation and action to take</a:t>
-            </a:r>
-            <a:endParaRPr lang="en-US" sz="4000" dirty="0"/>
-          </a:p>
-          <a:p>
-            <a:pPr algn="l" marL="342900" indent="-342900">
-              <a:spcAft>
-                <a:spcPts val="800"/>
-              </a:spcAft>
-              <a:buSzPct val="100000"/>
-              <a:buFont typeface="+mj-lt"/>
-              <a:buAutoNum type="arabicPeriod" startAt="1"/>
-            </a:pPr>
-            <a:r>
-              <a:rPr lang="en-US" sz="4000" dirty="0">
-                <a:solidFill>
-                  <a:srgbClr val="111111"/>
-                </a:solidFill>
-                <a:latin typeface="Times New Roman" pitchFamily="34" charset="0"/>
-                <a:ea typeface="Times New Roman" pitchFamily="34" charset="-122"/>
-                <a:cs typeface="Times New Roman" pitchFamily="34" charset="-120"/>
-              </a:rPr>
-              <a:t>Learning activities</a:t>
-            </a:r>
-            <a:endParaRPr lang="en-US" sz="4000" dirty="0"/>
-          </a:p>
-          <a:p>
-            <a:pPr algn="l" marL="342900" indent="-342900">
-              <a:spcAft>
-                <a:spcPts val="800"/>
-              </a:spcAft>
-              <a:buSzPct val="100000"/>
-              <a:buFont typeface="+mj-lt"/>
-              <a:buAutoNum type="arabicPeriod" startAt="1"/>
-            </a:pPr>
-            <a:r>
-              <a:rPr lang="en-US" sz="4000" dirty="0">
-                <a:solidFill>
-                  <a:srgbClr val="111111"/>
-                </a:solidFill>
-                <a:latin typeface="Times New Roman" pitchFamily="34" charset="0"/>
-                <a:ea typeface="Times New Roman" pitchFamily="34" charset="-122"/>
-                <a:cs typeface="Times New Roman" pitchFamily="34" charset="-120"/>
-              </a:rPr>
-              <a:t>Board summary</a:t>
-            </a:r>
-            <a:endParaRPr lang="en-US" sz="4000" dirty="0"/>
-          </a:p>
-          <a:p>
-            <a:pPr algn="l" marL="342900" indent="-342900">
-              <a:spcAft>
-                <a:spcPts val="800"/>
-              </a:spcAft>
-              <a:buSzPct val="100000"/>
-              <a:buFont typeface="+mj-lt"/>
-              <a:buAutoNum type="arabicPeriod" startAt="1"/>
-            </a:pPr>
-            <a:r>
-              <a:rPr lang="en-US" sz="4000" dirty="0">
-                <a:solidFill>
-                  <a:srgbClr val="111111"/>
-                </a:solidFill>
-                <a:latin typeface="Times New Roman" pitchFamily="34" charset="0"/>
-                <a:ea typeface="Times New Roman" pitchFamily="34" charset="-122"/>
-                <a:cs typeface="Times New Roman" pitchFamily="34" charset="-120"/>
-              </a:rPr>
-              <a:t>Evaluation, remediation and homework</a:t>
-            </a:r>
-            <a:endParaRPr lang="en-US" sz="4000" dirty="0"/>
-          </a:p>
-        </p:txBody>
-      </p:sp>
-      <p:sp>
-        <p:nvSpPr>
-          <p:cNvPr id="25" name="Slide Number Placeholder 0"/>
-          <p:cNvSpPr>
-            <a:spLocks noGrp="1"/>
-          </p:cNvSpPr>
-          <p:nvPr>
-            <p:ph type="sldNum" sz="quarter" idx="4294967295"/>
-          </p:nvPr>
-        </p:nvSpPr>
-        <p:spPr>
-          <a:xfrm>
-            <a:off x="27432" y="91440"/>
-            <a:ext cx="585216" cy="475488"/>
-          </a:xfrm>
-          <a:prstGeom prst="rect">
-            <a:avLst/>
-          </a:prstGeom>
-          <a:extLst>
-            <a:ext uri="{C572A759-6A51-4108-AA02-DFA0A04FC94B}">
-              <ma14:wrappingTextBoxFlag xmlns:ma14="http://schemas.microsoft.com/office/mac/drawingml/2011/main" val="0"/>
-            </a:ext>
-          </a:extLst>
-        </p:spPr>
-        <p:txBody>
-          <a:bodyPr/>
-          <a:lstStyle>
-            <a:lvl1pPr>
-              <a:defRPr sz="2000">
-                <a:solidFill>
-                  <a:srgbClr val="FFFFFF"/>
-                </a:solidFill>
-                <a:latin typeface="Calibri"/>
-                <a:ea typeface="Calibri"/>
-                <a:cs typeface="Calibri"/>
-              </a:defRPr>
-            </a:lvl1pPr>
-          </a:lstStyle>
-          <a:p>
-            <a:pPr algn="ctr"/>
-            <a:fld id="{F7021451-1387-4CA6-816F-3879F97B5CBC}" type="slidenum">
-              <a:rPr b="1" lang="en-US"/>
-              <a:t>6</a:t>
+              <a:t>62</a:t>
             </a:fld>
             <a:endParaRPr lang="en-US"/>
           </a:p>
@@ -21789,7 +24442,7 @@
                 <a:ea typeface="Times New Roman" pitchFamily="34" charset="-122"/>
                 <a:cs typeface="Times New Roman" pitchFamily="34" charset="-120"/>
               </a:rPr>
-              <a:t>Distinguish primary and secondary data.</a:t>
+              <a:t>Distinguish primary and secondary data with examples.</a:t>
             </a:r>
             <a:endParaRPr lang="en-US" sz="4000" dirty="0"/>
           </a:p>
@@ -21811,7 +24464,7 @@
                 <a:ea typeface="Times New Roman" pitchFamily="34" charset="-122"/>
                 <a:cs typeface="Times New Roman" pitchFamily="34" charset="-120"/>
               </a:rPr>
-              <a:t>Describe random, systematic and stratified sampling.</a:t>
+              <a:t>Explain why sampling is used.</a:t>
             </a:r>
             <a:endParaRPr lang="en-US" sz="4000" dirty="0"/>
           </a:p>
@@ -22032,7 +24685,29 @@
                 <a:ea typeface="Times New Roman" pitchFamily="34" charset="-122"/>
                 <a:cs typeface="Times New Roman" pitchFamily="34" charset="-120"/>
               </a:rPr>
-              <a:t>Design a simple questionnaire and plan an interview.</a:t>
+              <a:t>Describe random, systematic and stratified sampling.</a:t>
+            </a:r>
+            <a:endParaRPr lang="en-US" sz="4000" dirty="0"/>
+          </a:p>
+          <a:p>
+            <a:pPr algn="l" marL="342900" indent="-342900">
+              <a:spcAft>
+                <a:spcPts val="800"/>
+              </a:spcAft>
+              <a:buSzPct val="100000"/>
+              <a:buFont typeface="+mj-lt"/>
+              <a:buAutoNum type="arabicPeriod" startAt="1"/>
+            </a:pPr>
+            <a:r>
+              <a:rPr lang="en-US" sz="4000" dirty="0">
+                <a:solidFill>
+                  <a:srgbClr val="111111"/>
+                </a:solidFill>
+                <a:latin typeface="Times New Roman" pitchFamily="34" charset="0"/>
+                <a:ea typeface="Times New Roman" pitchFamily="34" charset="-122"/>
+                <a:cs typeface="Times New Roman" pitchFamily="34" charset="-120"/>
+              </a:rPr>
+              <a:t>Describe the main primary data collection techniques.</a:t>
             </a:r>
             <a:endParaRPr lang="en-US" sz="4000" dirty="0"/>
           </a:p>
@@ -22252,7 +24927,7 @@
                 <a:ea typeface="Times New Roman" pitchFamily="34" charset="-122"/>
                 <a:cs typeface="Times New Roman" pitchFamily="34" charset="-120"/>
               </a:rPr>
-              <a:t>Geographers collect information in the field.</a:t>
+              <a:t>A census counts the whole population.</a:t>
             </a:r>
             <a:endParaRPr lang="en-US" sz="4000" dirty="0"/>
           </a:p>
@@ -22273,7 +24948,28 @@
                 <a:ea typeface="Times New Roman" pitchFamily="34" charset="-122"/>
                 <a:cs typeface="Times New Roman" pitchFamily="34" charset="-120"/>
               </a:rPr>
-              <a:t>A census counts people.</a:t>
+              <a:t>A sample is a part of the population.</a:t>
+            </a:r>
+            <a:endParaRPr lang="en-US" sz="4000" dirty="0"/>
+          </a:p>
+          <a:p>
+            <a:pPr algn="l" marL="342900" indent="-342900">
+              <a:spcAft>
+                <a:spcPts val="800"/>
+              </a:spcAft>
+              <a:buSzPct val="100000"/>
+              <a:buChar char="•"/>
+            </a:pPr>
+            <a:r>
+              <a:rPr lang="en-US" sz="4000" dirty="0">
+                <a:solidFill>
+                  <a:srgbClr val="111111"/>
+                </a:solidFill>
+                <a:latin typeface="Times New Roman" pitchFamily="34" charset="0"/>
+                <a:ea typeface="Times New Roman" pitchFamily="34" charset="-122"/>
+                <a:cs typeface="Times New Roman" pitchFamily="34" charset="-120"/>
+              </a:rPr>
+              <a:t>A rain gauge measures rainfall.</a:t>
             </a:r>
             <a:endParaRPr lang="en-US" sz="4000" dirty="0"/>
           </a:p>

--- a/lecons/USA/Practical Geography/11_USA_PRA_QT02_Data_Collection_Sources_and_Techniques.pptx
+++ b/lecons/USA/Practical Geography/11_USA_PRA_QT02_Data_Collection_Sources_and_Techniques.pptx
@@ -67,9 +67,12 @@
     <p:sldId id="315" r:id="rId61"/>
     <p:sldId id="316" r:id="rId62"/>
     <p:sldId id="317" r:id="rId63"/>
+    <p:sldId id="318" r:id="rId64"/>
+    <p:sldId id="319" r:id="rId65"/>
+    <p:sldId id="320" r:id="rId66"/>
   </p:sldIdLst>
   <p:notesMasterIdLst>
-    <p:notesMasterId r:id="rId64"/>
+    <p:notesMasterId r:id="rId67"/>
   </p:notesMasterIdLst>
   <p:sldSz cx="12192000" cy="6858000"/>
   <p:notesSz cx="6858000" cy="12192000"/>
@@ -3379,7 +3382,7 @@
           <a:p>
             <a:r>
               <a:rPr lang="en-US" dirty="0"/>
-              <a:t>Let us copy Sources of Geographical Data. Geographical data come from the following sources. Copy the point on Primary data on the left, then draw the diagram on the right: primary and secondary data. Give it a title and label it clearly.</a:t>
+              <a:t>Let us copy Sources of Geographical Data. Geographical data come from the following sources. Copy the point on Primary data on the left, then draw the diagram on the right: sources of data. Give it a title and label it clearly.</a:t>
             </a:r>
             <a:endParaRPr lang="en-US" dirty="0"/>
           </a:p>
@@ -3555,7 +3558,7 @@
           <a:p>
             <a:r>
               <a:rPr lang="en-US" dirty="0"/>
-              <a:t>We continue with Sources of Geographical Data. On this slide we have Example of primary data and Secondary data. Write each point on a new line, with the key term first, and explain it in your own words when we revise. When you finish, we go to the next slide.</a:t>
+              <a:t>We continue with Sources of Geographical Data. Copy the point on Value of primary data: write the key term first, then its explanation.</a:t>
             </a:r>
             <a:endParaRPr lang="en-US" dirty="0"/>
           </a:p>
@@ -3643,7 +3646,7 @@
           <a:p>
             <a:r>
               <a:rPr lang="en-US" dirty="0"/>
-              <a:t>We continue with Sources of Geographical Data. On this slide we have Sources of secondary data. Write each point on a new line, with the key term first, and explain it in your own words when we revise.</a:t>
+              <a:t>We continue with Sources of Geographical Data. Copy the point on Secondary data: write the key term first, then its explanation.</a:t>
             </a:r>
             <a:endParaRPr lang="en-US" dirty="0"/>
           </a:p>
@@ -3731,7 +3734,7 @@
           <a:p>
             <a:r>
               <a:rPr lang="en-US" dirty="0"/>
-              <a:t>Let us copy Basic Sampling Procedures. The basic sampling procedures are the following. Copy the point on Why sample on the left, then draw the diagram on the right: three sampling methods. Give it a title and label it clearly.</a:t>
+              <a:t>We continue with Sources of Geographical Data. Copy the point on Value of secondary data: write the key term first, then its explanation.</a:t>
             </a:r>
             <a:endParaRPr lang="en-US" dirty="0"/>
           </a:p>
@@ -3819,7 +3822,7 @@
           <a:p>
             <a:r>
               <a:rPr lang="en-US" dirty="0"/>
-              <a:t>We continue with Basic Sampling Procedures. On this slide we have Random sampling. Write each point on a new line, with the key term first, and explain it in your own words when we revise.</a:t>
+              <a:t>Let us copy Basic Sampling Procedures. Samples are chosen by the following procedures. Copy the point on Why sample on the left, then draw the diagram on the right: sampling methods. Give it a title and label it clearly.</a:t>
             </a:r>
             <a:endParaRPr lang="en-US" dirty="0"/>
           </a:p>
@@ -3907,7 +3910,7 @@
           <a:p>
             <a:r>
               <a:rPr lang="en-US" dirty="0"/>
-              <a:t>Copy the point on Systematic sampling on the left, then draw the diagram on the right: systematic sampling. Give it a title and label it clearly.</a:t>
+              <a:t>We continue with Basic Sampling Procedures. Copy the point on Random sampling: write the key term first, then its explanation.</a:t>
             </a:r>
             <a:endParaRPr lang="en-US" dirty="0"/>
           </a:p>
@@ -3995,7 +3998,7 @@
           <a:p>
             <a:r>
               <a:rPr lang="en-US" dirty="0"/>
-              <a:t>We continue with Basic Sampling Procedures. On this slide we have Stratified sampling. Write each point on a new line, with the key term first, and explain it in your own words when we revise.</a:t>
+              <a:t>Copy the point on Systematic sampling on the left, then draw the diagram on the right: systematic sampling. Give it a title and label it clearly.</a:t>
             </a:r>
             <a:endParaRPr lang="en-US" dirty="0"/>
           </a:p>
@@ -4083,7 +4086,7 @@
           <a:p>
             <a:r>
               <a:rPr lang="en-US" dirty="0"/>
-              <a:t>Let us copy Primary Data Collection Techniques. The main techniques of primary data collection are the following. Copy the point on Observation, counting and recording on the left, then draw the diagram on the right: collection techniques. Give it a title and label it clearly.</a:t>
+              <a:t>We continue with Basic Sampling Procedures. Copy the point on Stratified sampling: write the key term first, then its explanation.</a:t>
             </a:r>
             <a:endParaRPr lang="en-US" dirty="0"/>
           </a:p>
@@ -4171,7 +4174,7 @@
           <a:p>
             <a:r>
               <a:rPr lang="en-US" dirty="0"/>
-              <a:t>We continue with Primary Data Collection Techniques. On this slide we have Measurement. Write each point on a new line, with the key term first, and explain it in your own words when we revise.</a:t>
+              <a:t>Let us copy Observation, Recording and Measurement. Data are collected in the field with the following techniques. Copy the point on Observation, counting and recording of frequencies on the left, then draw the diagram on the right: data collection techniques. Give it a title and label it clearly.</a:t>
             </a:r>
             <a:endParaRPr lang="en-US" dirty="0"/>
           </a:p>
@@ -4259,7 +4262,7 @@
           <a:p>
             <a:r>
               <a:rPr lang="en-US" dirty="0"/>
-              <a:t>Copy the point on Questionnaires on the left, then draw the diagram on the right: good and bad questions. Give it a title and label it clearly.</a:t>
+              <a:t>We continue with Observation, Recording and Measurement. Copy the point on Pictures, filming and video recording: write the key term first, then its explanation.</a:t>
             </a:r>
             <a:endParaRPr lang="en-US" dirty="0"/>
           </a:p>
@@ -4347,7 +4350,7 @@
           <a:p>
             <a:r>
               <a:rPr lang="en-US" dirty="0"/>
-              <a:t>We continue with Primary Data Collection Techniques. On this slide we have Interviews and Focus group discussions. Write each point on a new line, with the key term first, and explain it in your own words when we revise.</a:t>
+              <a:t>We continue with Observation, Recording and Measurement. Copy the point on Measurement: write the key term first, then its explanation.</a:t>
             </a:r>
             <a:endParaRPr lang="en-US" dirty="0"/>
           </a:p>
@@ -4523,7 +4526,7 @@
           <a:p>
             <a:r>
               <a:rPr lang="en-US" dirty="0"/>
-              <a:t>Now let us check what you have understood. Question 1: Distinguish primary data from secondary data, with one example from Garoua for each. Answer in your exercise book.</a:t>
+              <a:t>Let us copy Questionnaires, Interviews and Focus Groups. Data are collected from people with the following techniques. Copy the point on Questionnaires on the left, then draw the diagram on the right: a questionnaire. Give it a title and label it clearly.</a:t>
             </a:r>
             <a:endParaRPr lang="en-US" dirty="0"/>
           </a:p>
@@ -4611,7 +4614,7 @@
           <a:p>
             <a:r>
               <a:rPr lang="en-US" dirty="0"/>
-              <a:t>The expected answer is: primary: collected by the researcher (counting motos at a crossroads); secondary: already published (BUCREP census figures). If you got it right, well done.</a:t>
+              <a:t>We continue with Questionnaires, Interviews and Focus Groups. Copy the point on Interviews: write the key term first, then its explanation.</a:t>
             </a:r>
             <a:endParaRPr lang="en-US" dirty="0"/>
           </a:p>
@@ -4699,7 +4702,7 @@
           <a:p>
             <a:r>
               <a:rPr lang="en-US" dirty="0"/>
-              <a:t>Now let us check what you have understood. Question 2: Explain how to select 30 people from a list of 600 by systematic sampling. Answer in your exercise book.</a:t>
+              <a:t>We continue with Questionnaires, Interviews and Focus Groups. Copy the point on Focus group discussions: write the key term first, then its explanation.</a:t>
             </a:r>
             <a:endParaRPr lang="en-US" dirty="0"/>
           </a:p>
@@ -4787,7 +4790,7 @@
           <a:p>
             <a:r>
               <a:rPr lang="en-US" dirty="0"/>
-              <a:t>The expected answer is: k = 600 ÷ 30 = 20; choose a random start between 1 and 20, then every 20th person. If you got it right, well done.</a:t>
+              <a:t>Now let us check what you have understood. Question 1: Distinguish primary data from secondary data, with one example from Garoua for each. Answer in your exercise book.</a:t>
             </a:r>
             <a:endParaRPr lang="en-US" dirty="0"/>
           </a:p>
@@ -4875,7 +4878,7 @@
           <a:p>
             <a:r>
               <a:rPr lang="en-US" dirty="0"/>
-              <a:t>Take your time to copy this part; we will continue together.</a:t>
+              <a:t>The expected answer is: primary: collected by the researcher (counting motos at a crossroads); secondary: already published (BUCREP census figures). If you got it right, well done.</a:t>
             </a:r>
             <a:endParaRPr lang="en-US" dirty="0"/>
           </a:p>
@@ -4963,7 +4966,7 @@
           <a:p>
             <a:r>
               <a:rPr lang="en-US" dirty="0"/>
-              <a:t>For those who need more practice, fill in the blanks in your exercise book. The answers are: number 1, primary; number 2, systematic; number 3, stratified.</a:t>
+              <a:t>Now let us check what you have understood. Question 2: Explain how to select 30 people from a list of 600 by systematic sampling. Answer in your exercise book.</a:t>
             </a:r>
             <a:endParaRPr lang="en-US" dirty="0"/>
           </a:p>
@@ -5051,7 +5054,7 @@
           <a:p>
             <a:r>
               <a:rPr lang="en-US" dirty="0"/>
-              <a:t>For your homework: Define the arithmetic mean. We shall correct it at the beginning of our next lesson.</a:t>
+              <a:t>The expected answer is: k = 600 ÷ 30 = 20; choose a random start between 1 and 20, then every 20th person. If you got it right, well done.</a:t>
             </a:r>
             <a:endParaRPr lang="en-US" dirty="0"/>
           </a:p>
@@ -5139,7 +5142,7 @@
           <a:p>
             <a:r>
               <a:rPr lang="en-US" dirty="0"/>
-              <a:t>Our next lesson will be on Quantitative Techniques 3 (Part 1): Measures of Central Tendency, Range and Quartiles. Thank you for your attention, and see you next time.</a:t>
+              <a:t>Take your time to copy this part; we will continue together.</a:t>
             </a:r>
             <a:endParaRPr lang="en-US" dirty="0"/>
           </a:p>
@@ -5227,7 +5230,7 @@
           <a:p>
             <a:r>
               <a:rPr lang="en-US" dirty="0"/>
-              <a:t>Let us play the bilingual game. I say a word in English, and you give me the French word. Then we do the reverse.</a:t>
+              <a:t>For those who need more practice, fill in the blanks in your exercise book. The answers are: number 1, primary; number 2, systematic; number 3, stratified.</a:t>
             </a:r>
             <a:endParaRPr lang="en-US" dirty="0"/>
           </a:p>
@@ -5315,7 +5318,7 @@
           <a:p>
             <a:r>
               <a:rPr lang="en-US" dirty="0"/>
-              <a:t>I record this information in the official logbook of the class after the lesson.</a:t>
+              <a:t>For your homework: Define the arithmetic mean. We shall correct it at the beginning of our next lesson.</a:t>
             </a:r>
             <a:endParaRPr lang="en-US" dirty="0"/>
           </a:p>
@@ -5491,7 +5494,7 @@
           <a:p>
             <a:r>
               <a:rPr lang="en-US" dirty="0"/>
-              <a:t>I complete the second page of the logbook: the matter taught, the evaluation, the homework and the attendance.</a:t>
+              <a:t>Our next lesson will be on Quantitative Techniques 3 (Part 1): Measures of Central Tendency, Range and Quartiles. Thank you for your attention, and see you next time.</a:t>
             </a:r>
             <a:endParaRPr lang="en-US" dirty="0"/>
           </a:p>
@@ -5579,7 +5582,7 @@
           <a:p>
             <a:r>
               <a:rPr lang="en-US" dirty="0"/>
-              <a:t>This slide is for me, the teacher: it gives the timing of the lesson and what to do if the projector is not available.</a:t>
+              <a:t>Let us play the bilingual game. I say a word in English, and you give me the French word. Then we do the reverse.</a:t>
             </a:r>
             <a:endParaRPr lang="en-US" dirty="0"/>
           </a:p>
@@ -5667,7 +5670,7 @@
           <a:p>
             <a:r>
               <a:rPr lang="en-US" dirty="0"/>
-              <a:t>These are the references and picture credits used to prepare this lesson.</a:t>
+              <a:t>I record this information in the official logbook of the class after the lesson.</a:t>
             </a:r>
             <a:endParaRPr lang="en-US" dirty="0"/>
           </a:p>
@@ -5691,6 +5694,270 @@
             <a:fld id="{F7021451-1387-4CA6-816F-3879F97B5CBC}" type="slidenum">
               <a:rPr lang="en-US"/>
               <a:t>62</a:t>
+            </a:fld>
+            <a:endParaRPr lang="en-US"/>
+          </a:p>
+        </p:txBody>
+      </p:sp>
+    </p:spTree>
+    <p:extLst>
+      <p:ext uri="{BB962C8B-B14F-4D97-AF65-F5344CB8AC3E}">
+        <p14:creationId xmlns:p14="http://schemas.microsoft.com/office/powerpoint/2010/main" val="1024086991"/>
+      </p:ext>
+    </p:extLst>
+  </p:cSld>
+  <p:clrMapOvr>
+    <a:masterClrMapping/>
+  </p:clrMapOvr>
+</p:notes>
+</file>
+
+<file path=ppt/notesSlides/notesSlide63.xml><?xml version="1.0" encoding="utf-8"?>
+<p:notes xmlns:a="http://schemas.openxmlformats.org/drawingml/2006/main" xmlns:r="http://schemas.openxmlformats.org/officeDocument/2006/relationships" xmlns:p="http://schemas.openxmlformats.org/presentationml/2006/main">
+  <p:cSld>
+    <p:spTree>
+      <p:nvGrpSpPr>
+        <p:cNvPr id="1" name=""/>
+        <p:cNvGrpSpPr/>
+        <p:nvPr/>
+      </p:nvGrpSpPr>
+      <p:grpSpPr>
+        <a:xfrm>
+          <a:off x="0" y="0"/>
+          <a:ext cx="0" cy="0"/>
+          <a:chOff x="0" y="0"/>
+          <a:chExt cx="0" cy="0"/>
+        </a:xfrm>
+      </p:grpSpPr>
+      <p:sp>
+        <p:nvSpPr>
+          <p:cNvPr id="2" name="Slide Image Placeholder 1"/>
+          <p:cNvSpPr>
+            <a:spLocks noGrp="1" noRot="1" noChangeAspect="1"/>
+          </p:cNvSpPr>
+          <p:nvPr>
+            <p:ph type="sldImg"/>
+          </p:nvPr>
+        </p:nvSpPr>
+        <p:spPr/>
+      </p:sp>
+      <p:sp>
+        <p:nvSpPr>
+          <p:cNvPr id="3" name="Notes Placeholder 2"/>
+          <p:cNvSpPr>
+            <a:spLocks noGrp="1"/>
+          </p:cNvSpPr>
+          <p:nvPr>
+            <p:ph type="body" idx="1"/>
+          </p:nvPr>
+        </p:nvSpPr>
+        <p:spPr/>
+        <p:txBody>
+          <a:bodyPr/>
+          <a:lstStyle/>
+          <a:p>
+            <a:r>
+              <a:rPr lang="en-US" dirty="0"/>
+              <a:t>I complete the second page of the logbook: the matter taught, the evaluation, the homework and the attendance.</a:t>
+            </a:r>
+            <a:endParaRPr lang="en-US" dirty="0"/>
+          </a:p>
+        </p:txBody>
+      </p:sp>
+      <p:sp>
+        <p:nvSpPr>
+          <p:cNvPr id="4" name="Slide Number Placeholder 3"/>
+          <p:cNvSpPr>
+            <a:spLocks noGrp="1"/>
+          </p:cNvSpPr>
+          <p:nvPr>
+            <p:ph type="sldNum" sz="quarter" idx="10"/>
+          </p:nvPr>
+        </p:nvSpPr>
+        <p:spPr/>
+        <p:txBody>
+          <a:bodyPr/>
+          <a:lstStyle/>
+          <a:p>
+            <a:fld id="{F7021451-1387-4CA6-816F-3879F97B5CBC}" type="slidenum">
+              <a:rPr lang="en-US"/>
+              <a:t>63</a:t>
+            </a:fld>
+            <a:endParaRPr lang="en-US"/>
+          </a:p>
+        </p:txBody>
+      </p:sp>
+    </p:spTree>
+    <p:extLst>
+      <p:ext uri="{BB962C8B-B14F-4D97-AF65-F5344CB8AC3E}">
+        <p14:creationId xmlns:p14="http://schemas.microsoft.com/office/powerpoint/2010/main" val="1024086991"/>
+      </p:ext>
+    </p:extLst>
+  </p:cSld>
+  <p:clrMapOvr>
+    <a:masterClrMapping/>
+  </p:clrMapOvr>
+</p:notes>
+</file>
+
+<file path=ppt/notesSlides/notesSlide64.xml><?xml version="1.0" encoding="utf-8"?>
+<p:notes xmlns:a="http://schemas.openxmlformats.org/drawingml/2006/main" xmlns:r="http://schemas.openxmlformats.org/officeDocument/2006/relationships" xmlns:p="http://schemas.openxmlformats.org/presentationml/2006/main">
+  <p:cSld>
+    <p:spTree>
+      <p:nvGrpSpPr>
+        <p:cNvPr id="1" name=""/>
+        <p:cNvGrpSpPr/>
+        <p:nvPr/>
+      </p:nvGrpSpPr>
+      <p:grpSpPr>
+        <a:xfrm>
+          <a:off x="0" y="0"/>
+          <a:ext cx="0" cy="0"/>
+          <a:chOff x="0" y="0"/>
+          <a:chExt cx="0" cy="0"/>
+        </a:xfrm>
+      </p:grpSpPr>
+      <p:sp>
+        <p:nvSpPr>
+          <p:cNvPr id="2" name="Slide Image Placeholder 1"/>
+          <p:cNvSpPr>
+            <a:spLocks noGrp="1" noRot="1" noChangeAspect="1"/>
+          </p:cNvSpPr>
+          <p:nvPr>
+            <p:ph type="sldImg"/>
+          </p:nvPr>
+        </p:nvSpPr>
+        <p:spPr/>
+      </p:sp>
+      <p:sp>
+        <p:nvSpPr>
+          <p:cNvPr id="3" name="Notes Placeholder 2"/>
+          <p:cNvSpPr>
+            <a:spLocks noGrp="1"/>
+          </p:cNvSpPr>
+          <p:nvPr>
+            <p:ph type="body" idx="1"/>
+          </p:nvPr>
+        </p:nvSpPr>
+        <p:spPr/>
+        <p:txBody>
+          <a:bodyPr/>
+          <a:lstStyle/>
+          <a:p>
+            <a:r>
+              <a:rPr lang="en-US" dirty="0"/>
+              <a:t>This slide is for me, the teacher: it gives the timing of the lesson and what to do if the projector is not available.</a:t>
+            </a:r>
+            <a:endParaRPr lang="en-US" dirty="0"/>
+          </a:p>
+        </p:txBody>
+      </p:sp>
+      <p:sp>
+        <p:nvSpPr>
+          <p:cNvPr id="4" name="Slide Number Placeholder 3"/>
+          <p:cNvSpPr>
+            <a:spLocks noGrp="1"/>
+          </p:cNvSpPr>
+          <p:nvPr>
+            <p:ph type="sldNum" sz="quarter" idx="10"/>
+          </p:nvPr>
+        </p:nvSpPr>
+        <p:spPr/>
+        <p:txBody>
+          <a:bodyPr/>
+          <a:lstStyle/>
+          <a:p>
+            <a:fld id="{F7021451-1387-4CA6-816F-3879F97B5CBC}" type="slidenum">
+              <a:rPr lang="en-US"/>
+              <a:t>64</a:t>
+            </a:fld>
+            <a:endParaRPr lang="en-US"/>
+          </a:p>
+        </p:txBody>
+      </p:sp>
+    </p:spTree>
+    <p:extLst>
+      <p:ext uri="{BB962C8B-B14F-4D97-AF65-F5344CB8AC3E}">
+        <p14:creationId xmlns:p14="http://schemas.microsoft.com/office/powerpoint/2010/main" val="1024086991"/>
+      </p:ext>
+    </p:extLst>
+  </p:cSld>
+  <p:clrMapOvr>
+    <a:masterClrMapping/>
+  </p:clrMapOvr>
+</p:notes>
+</file>
+
+<file path=ppt/notesSlides/notesSlide65.xml><?xml version="1.0" encoding="utf-8"?>
+<p:notes xmlns:a="http://schemas.openxmlformats.org/drawingml/2006/main" xmlns:r="http://schemas.openxmlformats.org/officeDocument/2006/relationships" xmlns:p="http://schemas.openxmlformats.org/presentationml/2006/main">
+  <p:cSld>
+    <p:spTree>
+      <p:nvGrpSpPr>
+        <p:cNvPr id="1" name=""/>
+        <p:cNvGrpSpPr/>
+        <p:nvPr/>
+      </p:nvGrpSpPr>
+      <p:grpSpPr>
+        <a:xfrm>
+          <a:off x="0" y="0"/>
+          <a:ext cx="0" cy="0"/>
+          <a:chOff x="0" y="0"/>
+          <a:chExt cx="0" cy="0"/>
+        </a:xfrm>
+      </p:grpSpPr>
+      <p:sp>
+        <p:nvSpPr>
+          <p:cNvPr id="2" name="Slide Image Placeholder 1"/>
+          <p:cNvSpPr>
+            <a:spLocks noGrp="1" noRot="1" noChangeAspect="1"/>
+          </p:cNvSpPr>
+          <p:nvPr>
+            <p:ph type="sldImg"/>
+          </p:nvPr>
+        </p:nvSpPr>
+        <p:spPr/>
+      </p:sp>
+      <p:sp>
+        <p:nvSpPr>
+          <p:cNvPr id="3" name="Notes Placeholder 2"/>
+          <p:cNvSpPr>
+            <a:spLocks noGrp="1"/>
+          </p:cNvSpPr>
+          <p:nvPr>
+            <p:ph type="body" idx="1"/>
+          </p:nvPr>
+        </p:nvSpPr>
+        <p:spPr/>
+        <p:txBody>
+          <a:bodyPr/>
+          <a:lstStyle/>
+          <a:p>
+            <a:r>
+              <a:rPr lang="en-US" dirty="0"/>
+              <a:t>These are the references and picture credits used to prepare this lesson.</a:t>
+            </a:r>
+            <a:endParaRPr lang="en-US" dirty="0"/>
+          </a:p>
+        </p:txBody>
+      </p:sp>
+      <p:sp>
+        <p:nvSpPr>
+          <p:cNvPr id="4" name="Slide Number Placeholder 3"/>
+          <p:cNvSpPr>
+            <a:spLocks noGrp="1"/>
+          </p:cNvSpPr>
+          <p:nvPr>
+            <p:ph type="sldNum" sz="quarter" idx="10"/>
+          </p:nvPr>
+        </p:nvSpPr>
+        <p:spPr/>
+        <p:txBody>
+          <a:bodyPr/>
+          <a:lstStyle/>
+          <a:p>
+            <a:fld id="{F7021451-1387-4CA6-816F-3879F97B5CBC}" type="slidenum">
+              <a:rPr lang="en-US"/>
+              <a:t>65</a:t>
             </a:fld>
             <a:endParaRPr lang="en-US"/>
           </a:p>
@@ -15499,7 +15766,7 @@
         <p:spPr>
           <a:xfrm>
             <a:off x="365760" y="1783080"/>
-            <a:ext cx="4846320" cy="4617720"/>
+            <a:ext cx="6035040" cy="4617720"/>
           </a:xfrm>
           <a:prstGeom prst="rect">
             <a:avLst/>
@@ -15518,7 +15785,7 @@
               <a:buNone/>
             </a:pPr>
             <a:r>
-              <a:rPr lang="en-US" sz="3200" i="1" dirty="0">
+              <a:rPr lang="en-US" sz="3000" i="1" dirty="0">
                 <a:solidFill>
                   <a:srgbClr val="111111"/>
                 </a:solidFill>
@@ -15528,7 +15795,7 @@
               </a:rPr>
               <a:t>Geographical data come from the following sources:</a:t>
             </a:r>
-            <a:endParaRPr lang="en-US" sz="3200" dirty="0"/>
+            <a:endParaRPr lang="en-US" sz="3000" dirty="0"/>
           </a:p>
           <a:p>
             <a:pPr algn="l" indent="0" marL="0">
@@ -15538,7 +15805,7 @@
               <a:buNone/>
             </a:pPr>
             <a:r>
-              <a:rPr lang="en-US" sz="3200" b="1" dirty="0">
+              <a:rPr lang="en-US" sz="3000" b="1" dirty="0">
                 <a:solidFill>
                   <a:srgbClr val="111111"/>
                 </a:solidFill>
@@ -15555,7 +15822,7 @@
               <a:buNone/>
             </a:pPr>
             <a:r>
-              <a:rPr lang="en-US" sz="3200" dirty="0">
+              <a:rPr lang="en-US" sz="3000" dirty="0">
                 <a:solidFill>
                   <a:srgbClr val="111111"/>
                 </a:solidFill>
@@ -15563,9 +15830,9 @@
                 <a:ea typeface="Times New Roman" pitchFamily="34" charset="-122"/>
                 <a:cs typeface="Times New Roman" pitchFamily="34" charset="-120"/>
               </a:rPr>
-              <a:t>They are original, up to date and specific, collected by fieldwork, observation, measurement, interviews and questionnaires.</a:t>
-            </a:r>
-            <a:endParaRPr lang="en-US" sz="3200" dirty="0"/>
+              <a:t>Primary data are collected by the researcher himself through fieldwork, observation, measurement, interviews and questionnaires. For example, a student measures the temperature of the Benue with a thermometer.</a:t>
+            </a:r>
+            <a:endParaRPr lang="en-US" sz="3000" dirty="0"/>
           </a:p>
         </p:txBody>
       </p:sp>
@@ -15585,8 +15852,8 @@
         </p:blipFill>
         <p:spPr>
           <a:xfrm>
-            <a:off x="5349240" y="2617506"/>
-            <a:ext cx="6659575" cy="2601397"/>
+            <a:off x="6537960" y="2849678"/>
+            <a:ext cx="5470855" cy="2137053"/>
           </a:xfrm>
           <a:prstGeom prst="rect">
             <a:avLst/>
@@ -15601,8 +15868,8 @@
         </p:nvSpPr>
         <p:spPr>
           <a:xfrm>
-            <a:off x="5349240" y="6089904"/>
-            <a:ext cx="6659575" cy="347472"/>
+            <a:off x="6537960" y="6089904"/>
+            <a:ext cx="5470855" cy="347472"/>
           </a:xfrm>
           <a:prstGeom prst="rect">
             <a:avLst/>
@@ -15626,7 +15893,7 @@
                 <a:ea typeface="Times New Roman" pitchFamily="34" charset="-122"/>
                 <a:cs typeface="Times New Roman" pitchFamily="34" charset="-120"/>
               </a:rPr>
-              <a:t>Illustration: primary and secondary data</a:t>
+              <a:t>Illustration: sources of data</a:t>
             </a:r>
             <a:endParaRPr lang="en-US" sz="1600" dirty="0"/>
           </a:p>
@@ -16000,7 +16267,7 @@
         <p:spPr>
           <a:xfrm>
             <a:off x="0" y="658368"/>
-            <a:ext cx="3840480" cy="5833872"/>
+            <a:ext cx="5120640" cy="5833872"/>
           </a:xfrm>
           <a:prstGeom prst="rect">
             <a:avLst/>
@@ -16015,8 +16282,8 @@
         </p:nvSpPr>
         <p:spPr>
           <a:xfrm>
-            <a:off x="4069080" y="1005840"/>
-            <a:ext cx="7802575" cy="731520"/>
+            <a:off x="5349240" y="1005840"/>
+            <a:ext cx="6522415" cy="731520"/>
           </a:xfrm>
           <a:prstGeom prst="rect">
             <a:avLst/>
@@ -16056,8 +16323,8 @@
         </p:nvSpPr>
         <p:spPr>
           <a:xfrm>
-            <a:off x="4069080" y="1783080"/>
-            <a:ext cx="7802575" cy="4663440"/>
+            <a:off x="5349240" y="1783080"/>
+            <a:ext cx="6522415" cy="4663440"/>
           </a:xfrm>
           <a:prstGeom prst="rect">
             <a:avLst/>
@@ -16084,7 +16351,7 @@
                 <a:ea typeface="Times New Roman" pitchFamily="34" charset="-122"/>
                 <a:cs typeface="Times New Roman" pitchFamily="34" charset="-120"/>
               </a:rPr>
-              <a:t>Example of primary data: </a:t>
+              <a:t>Value of primary data: </a:t>
             </a:r>
             <a:pPr algn="l" indent="0" marL="0">
               <a:spcAft>
@@ -16101,44 +16368,7 @@
                 <a:ea typeface="Times New Roman" pitchFamily="34" charset="-122"/>
                 <a:cs typeface="Times New Roman" pitchFamily="34" charset="-120"/>
               </a:rPr>
-              <a:t>Measuring the temperature of the Benue with a thermometer.</a:t>
-            </a:r>
-            <a:endParaRPr lang="en-US" sz="4000" dirty="0"/>
-          </a:p>
-          <a:p>
-            <a:pPr algn="l" indent="0" marL="0">
-              <a:spcAft>
-                <a:spcPts val="800"/>
-              </a:spcAft>
-              <a:buNone/>
-            </a:pPr>
-            <a:r>
-              <a:rPr lang="en-US" sz="4000" b="1" dirty="0">
-                <a:solidFill>
-                  <a:srgbClr val="111111"/>
-                </a:solidFill>
-                <a:latin typeface="Times New Roman" pitchFamily="34" charset="0"/>
-                <a:ea typeface="Times New Roman" pitchFamily="34" charset="-122"/>
-                <a:cs typeface="Times New Roman" pitchFamily="34" charset="-120"/>
-              </a:rPr>
-              <a:t>Secondary data: </a:t>
-            </a:r>
-            <a:pPr algn="l" indent="0" marL="0">
-              <a:spcAft>
-                <a:spcPts val="800"/>
-              </a:spcAft>
-              <a:buNone/>
-            </a:pPr>
-            <a:r>
-              <a:rPr lang="en-US" sz="4000" dirty="0">
-                <a:solidFill>
-                  <a:srgbClr val="111111"/>
-                </a:solidFill>
-                <a:latin typeface="Times New Roman" pitchFamily="34" charset="0"/>
-                <a:ea typeface="Times New Roman" pitchFamily="34" charset="-122"/>
-                <a:cs typeface="Times New Roman" pitchFamily="34" charset="-120"/>
-              </a:rPr>
-              <a:t>They already exist and are cheap and quick to obtain, but may be outdated or not fit the study.</a:t>
+              <a:t>They are original, up to date and fit the purpose of the study exactly. However, they take time and money to collect.</a:t>
             </a:r>
             <a:endParaRPr lang="en-US" sz="4000" dirty="0"/>
           </a:p>
@@ -16273,7 +16503,7 @@
         <p:spPr>
           <a:xfrm>
             <a:off x="0" y="658368"/>
-            <a:ext cx="5120640" cy="5833872"/>
+            <a:ext cx="2468880" cy="5833872"/>
           </a:xfrm>
           <a:prstGeom prst="rect">
             <a:avLst/>
@@ -16288,8 +16518,8 @@
         </p:nvSpPr>
         <p:spPr>
           <a:xfrm>
-            <a:off x="5349240" y="1005840"/>
-            <a:ext cx="6522415" cy="731520"/>
+            <a:off x="2697480" y="1005840"/>
+            <a:ext cx="9174175" cy="731520"/>
           </a:xfrm>
           <a:prstGeom prst="rect">
             <a:avLst/>
@@ -16315,7 +16545,7 @@
                 <a:ea typeface="Times New Roman" pitchFamily="34" charset="-122"/>
                 <a:cs typeface="Times New Roman" pitchFamily="34" charset="-120"/>
               </a:rPr>
-              <a:t>1. Sources of Geographical Data (continued)</a:t>
+              <a:t>1. Sources of Geographical Data</a:t>
             </a:r>
             <a:endParaRPr lang="en-US" sz="3600" dirty="0"/>
           </a:p>
@@ -16329,8 +16559,8 @@
         </p:nvSpPr>
         <p:spPr>
           <a:xfrm>
-            <a:off x="5349240" y="1783080"/>
-            <a:ext cx="6522415" cy="4663440"/>
+            <a:off x="2697480" y="1783080"/>
+            <a:ext cx="9174175" cy="4663440"/>
           </a:xfrm>
           <a:prstGeom prst="rect">
             <a:avLst/>
@@ -16357,7 +16587,7 @@
                 <a:ea typeface="Times New Roman" pitchFamily="34" charset="-122"/>
                 <a:cs typeface="Times New Roman" pitchFamily="34" charset="-120"/>
               </a:rPr>
-              <a:t>Sources of secondary data: </a:t>
+              <a:t>Secondary data: </a:t>
             </a:r>
             <a:pPr algn="l" indent="0" marL="0">
               <a:spcAft>
@@ -16374,7 +16604,7 @@
                 <a:ea typeface="Times New Roman" pitchFamily="34" charset="-122"/>
                 <a:cs typeface="Times New Roman" pitchFamily="34" charset="-120"/>
               </a:rPr>
-              <a:t>Books, BUCREP census reports, INS statistics, Cameroon Tribune, maps, websites and reports of the Ministry of Agriculture on cotton production.</a:t>
+              <a:t>Secondary data already exist in books, BUCREP census reports, INS statistics, newspapers such as Cameroon Tribune, maps and websites. Reports of the Ministry of Agriculture on cotton production are an example.</a:t>
             </a:r>
             <a:endParaRPr lang="en-US" sz="4000" dirty="0"/>
           </a:p>
@@ -16492,129 +16722,9 @@
           </a:p>
         </p:txBody>
       </p:sp>
-      <p:sp>
-        <p:nvSpPr>
-          <p:cNvPr id="3" name="Text 1"/>
-          <p:cNvSpPr/>
-          <p:nvPr/>
-        </p:nvSpPr>
-        <p:spPr>
-          <a:xfrm>
-            <a:off x="365760" y="1005840"/>
-            <a:ext cx="11460175" cy="731520"/>
-          </a:xfrm>
-          <a:prstGeom prst="rect">
-            <a:avLst/>
-          </a:prstGeom>
-          <a:noFill/>
-          <a:ln/>
-        </p:spPr>
-        <p:txBody>
-          <a:bodyPr wrap="square" lIns="0" tIns="0" rIns="0" bIns="0" rtlCol="0" anchor="ctr">
-            <a:normAutofit/>
-          </a:bodyPr>
-          <a:lstStyle/>
-          <a:p>
-            <a:pPr algn="ctr" indent="0" marL="0">
-              <a:buNone/>
-            </a:pPr>
-            <a:r>
-              <a:rPr lang="en-US" sz="3600" b="1" dirty="0">
-                <a:solidFill>
-                  <a:srgbClr val="990011"/>
-                </a:solidFill>
-                <a:latin typeface="Times New Roman" pitchFamily="34" charset="0"/>
-                <a:ea typeface="Times New Roman" pitchFamily="34" charset="-122"/>
-                <a:cs typeface="Times New Roman" pitchFamily="34" charset="-120"/>
-              </a:rPr>
-              <a:t>2. Basic Sampling Procedures</a:t>
-            </a:r>
-            <a:endParaRPr lang="en-US" sz="3600" dirty="0"/>
-          </a:p>
-        </p:txBody>
-      </p:sp>
-      <p:sp>
-        <p:nvSpPr>
-          <p:cNvPr id="4" name="Text 2"/>
-          <p:cNvSpPr/>
-          <p:nvPr/>
-        </p:nvSpPr>
-        <p:spPr>
-          <a:xfrm>
-            <a:off x="365760" y="1783080"/>
-            <a:ext cx="4846320" cy="4617720"/>
-          </a:xfrm>
-          <a:prstGeom prst="rect">
-            <a:avLst/>
-          </a:prstGeom>
-          <a:noFill/>
-          <a:ln/>
-        </p:spPr>
-        <p:txBody>
-          <a:bodyPr wrap="square" lIns="0" tIns="0" rIns="0" bIns="0" rtlCol="0" anchor="t"/>
-          <a:lstStyle/>
-          <a:p>
-            <a:pPr algn="l" indent="0" marL="0">
-              <a:spcAft>
-                <a:spcPts val="800"/>
-              </a:spcAft>
-              <a:buNone/>
-            </a:pPr>
-            <a:r>
-              <a:rPr lang="en-US" sz="3600" i="1" dirty="0">
-                <a:solidFill>
-                  <a:srgbClr val="111111"/>
-                </a:solidFill>
-                <a:latin typeface="Times New Roman" pitchFamily="34" charset="0"/>
-                <a:ea typeface="Times New Roman" pitchFamily="34" charset="-122"/>
-                <a:cs typeface="Times New Roman" pitchFamily="34" charset="-120"/>
-              </a:rPr>
-              <a:t>The basic sampling procedures are the following:</a:t>
-            </a:r>
-            <a:endParaRPr lang="en-US" sz="3600" dirty="0"/>
-          </a:p>
-          <a:p>
-            <a:pPr algn="l" indent="0" marL="0">
-              <a:spcAft>
-                <a:spcPts val="800"/>
-              </a:spcAft>
-              <a:buNone/>
-            </a:pPr>
-            <a:r>
-              <a:rPr lang="en-US" sz="3600" b="1" dirty="0">
-                <a:solidFill>
-                  <a:srgbClr val="111111"/>
-                </a:solidFill>
-                <a:latin typeface="Times New Roman" pitchFamily="34" charset="0"/>
-                <a:ea typeface="Times New Roman" pitchFamily="34" charset="-122"/>
-                <a:cs typeface="Times New Roman" pitchFamily="34" charset="-120"/>
-              </a:rPr>
-              <a:t>Why sample: </a:t>
-            </a:r>
-            <a:pPr algn="l" indent="0" marL="0">
-              <a:spcAft>
-                <a:spcPts val="800"/>
-              </a:spcAft>
-              <a:buNone/>
-            </a:pPr>
-            <a:r>
-              <a:rPr lang="en-US" sz="3600" dirty="0">
-                <a:solidFill>
-                  <a:srgbClr val="111111"/>
-                </a:solidFill>
-                <a:latin typeface="Times New Roman" pitchFamily="34" charset="0"/>
-                <a:ea typeface="Times New Roman" pitchFamily="34" charset="-122"/>
-                <a:cs typeface="Times New Roman" pitchFamily="34" charset="-120"/>
-              </a:rPr>
-              <a:t>It is often impossible, too slow or too costly to study the whole population.</a:t>
-            </a:r>
-            <a:endParaRPr lang="en-US" sz="3600" dirty="0"/>
-          </a:p>
-        </p:txBody>
-      </p:sp>
       <p:pic>
         <p:nvPicPr>
-          <p:cNvPr id="5" name="Image 0" descr="/home/claude/f4/img/v2/sampling_big.png">    </p:cNvPr>
+          <p:cNvPr id="3" name="Image 0" descr="/home/claude/f4/img/minesec_sheet.png">    </p:cNvPr>
           <p:cNvPicPr>
             <a:picLocks noChangeAspect="1"/>
           </p:cNvPicPr>
@@ -16628,8 +16738,8 @@
         </p:blipFill>
         <p:spPr>
           <a:xfrm>
-            <a:off x="5349240" y="2617506"/>
-            <a:ext cx="6659575" cy="2601397"/>
+            <a:off x="0" y="658368"/>
+            <a:ext cx="5120640" cy="5833872"/>
           </a:xfrm>
           <a:prstGeom prst="rect">
             <a:avLst/>
@@ -16638,14 +16748,14 @@
       </p:pic>
       <p:sp>
         <p:nvSpPr>
-          <p:cNvPr id="6" name="Text 3"/>
+          <p:cNvPr id="4" name="Text 1"/>
           <p:cNvSpPr/>
           <p:nvPr/>
         </p:nvSpPr>
         <p:spPr>
           <a:xfrm>
-            <a:off x="5349240" y="6089904"/>
-            <a:ext cx="6659575" cy="347472"/>
+            <a:off x="5349240" y="1005840"/>
+            <a:ext cx="6522415" cy="731520"/>
           </a:xfrm>
           <a:prstGeom prst="rect">
             <a:avLst/>
@@ -16654,24 +16764,85 @@
           <a:ln/>
         </p:spPr>
         <p:txBody>
-          <a:bodyPr wrap="square" lIns="0" tIns="0" rIns="0" bIns="0" rtlCol="0" anchor="ctr"/>
+          <a:bodyPr wrap="square" lIns="0" tIns="0" rIns="0" bIns="0" rtlCol="0" anchor="ctr">
+            <a:normAutofit/>
+          </a:bodyPr>
           <a:lstStyle/>
           <a:p>
             <a:pPr algn="ctr" indent="0" marL="0">
               <a:buNone/>
             </a:pPr>
             <a:r>
-              <a:rPr lang="en-US" sz="1600" i="1" dirty="0">
-                <a:solidFill>
-                  <a:srgbClr val="555555"/>
+              <a:rPr lang="en-US" sz="3600" b="1" dirty="0">
+                <a:solidFill>
+                  <a:srgbClr val="990011"/>
                 </a:solidFill>
                 <a:latin typeface="Times New Roman" pitchFamily="34" charset="0"/>
                 <a:ea typeface="Times New Roman" pitchFamily="34" charset="-122"/>
                 <a:cs typeface="Times New Roman" pitchFamily="34" charset="-120"/>
               </a:rPr>
-              <a:t>Illustration: three sampling methods</a:t>
-            </a:r>
-            <a:endParaRPr lang="en-US" sz="1600" dirty="0"/>
+              <a:t>1. Sources of Geographical Data</a:t>
+            </a:r>
+            <a:endParaRPr lang="en-US" sz="3600" dirty="0"/>
+          </a:p>
+        </p:txBody>
+      </p:sp>
+      <p:sp>
+        <p:nvSpPr>
+          <p:cNvPr id="5" name="Text 2"/>
+          <p:cNvSpPr/>
+          <p:nvPr/>
+        </p:nvSpPr>
+        <p:spPr>
+          <a:xfrm>
+            <a:off x="5349240" y="1783080"/>
+            <a:ext cx="6522415" cy="4663440"/>
+          </a:xfrm>
+          <a:prstGeom prst="rect">
+            <a:avLst/>
+          </a:prstGeom>
+          <a:noFill/>
+          <a:ln/>
+        </p:spPr>
+        <p:txBody>
+          <a:bodyPr wrap="square" lIns="0" tIns="0" rIns="0" bIns="0" rtlCol="0" anchor="t"/>
+          <a:lstStyle/>
+          <a:p>
+            <a:pPr algn="l" indent="0" marL="0">
+              <a:spcAft>
+                <a:spcPts val="800"/>
+              </a:spcAft>
+              <a:buNone/>
+            </a:pPr>
+            <a:r>
+              <a:rPr lang="en-US" sz="4000" b="1" dirty="0">
+                <a:solidFill>
+                  <a:srgbClr val="111111"/>
+                </a:solidFill>
+                <a:latin typeface="Times New Roman" pitchFamily="34" charset="0"/>
+                <a:ea typeface="Times New Roman" pitchFamily="34" charset="-122"/>
+                <a:cs typeface="Times New Roman" pitchFamily="34" charset="-120"/>
+              </a:rPr>
+              <a:t>Value of secondary data: </a:t>
+            </a:r>
+            <a:pPr algn="l" indent="0" marL="0">
+              <a:spcAft>
+                <a:spcPts val="800"/>
+              </a:spcAft>
+              <a:buNone/>
+            </a:pPr>
+            <a:r>
+              <a:rPr lang="en-US" sz="4000" dirty="0">
+                <a:solidFill>
+                  <a:srgbClr val="111111"/>
+                </a:solidFill>
+                <a:latin typeface="Times New Roman" pitchFamily="34" charset="0"/>
+                <a:ea typeface="Times New Roman" pitchFamily="34" charset="-122"/>
+                <a:cs typeface="Times New Roman" pitchFamily="34" charset="-120"/>
+              </a:rPr>
+              <a:t>They are cheap and quick to obtain and often cover large areas and long periods. However, they may be outdated or collected for another purpose.</a:t>
+            </a:r>
+            <a:endParaRPr lang="en-US" sz="4000" dirty="0"/>
           </a:p>
         </p:txBody>
       </p:sp>
@@ -16787,9 +16958,129 @@
           </a:p>
         </p:txBody>
       </p:sp>
+      <p:sp>
+        <p:nvSpPr>
+          <p:cNvPr id="3" name="Text 1"/>
+          <p:cNvSpPr/>
+          <p:nvPr/>
+        </p:nvSpPr>
+        <p:spPr>
+          <a:xfrm>
+            <a:off x="365760" y="1005840"/>
+            <a:ext cx="11460175" cy="731520"/>
+          </a:xfrm>
+          <a:prstGeom prst="rect">
+            <a:avLst/>
+          </a:prstGeom>
+          <a:noFill/>
+          <a:ln/>
+        </p:spPr>
+        <p:txBody>
+          <a:bodyPr wrap="square" lIns="0" tIns="0" rIns="0" bIns="0" rtlCol="0" anchor="ctr">
+            <a:normAutofit/>
+          </a:bodyPr>
+          <a:lstStyle/>
+          <a:p>
+            <a:pPr algn="ctr" indent="0" marL="0">
+              <a:buNone/>
+            </a:pPr>
+            <a:r>
+              <a:rPr lang="en-US" sz="3600" b="1" dirty="0">
+                <a:solidFill>
+                  <a:srgbClr val="990011"/>
+                </a:solidFill>
+                <a:latin typeface="Times New Roman" pitchFamily="34" charset="0"/>
+                <a:ea typeface="Times New Roman" pitchFamily="34" charset="-122"/>
+                <a:cs typeface="Times New Roman" pitchFamily="34" charset="-120"/>
+              </a:rPr>
+              <a:t>2. Basic Sampling Procedures</a:t>
+            </a:r>
+            <a:endParaRPr lang="en-US" sz="3600" dirty="0"/>
+          </a:p>
+        </p:txBody>
+      </p:sp>
+      <p:sp>
+        <p:nvSpPr>
+          <p:cNvPr id="4" name="Text 2"/>
+          <p:cNvSpPr/>
+          <p:nvPr/>
+        </p:nvSpPr>
+        <p:spPr>
+          <a:xfrm>
+            <a:off x="365760" y="1783080"/>
+            <a:ext cx="6035040" cy="4617720"/>
+          </a:xfrm>
+          <a:prstGeom prst="rect">
+            <a:avLst/>
+          </a:prstGeom>
+          <a:noFill/>
+          <a:ln/>
+        </p:spPr>
+        <p:txBody>
+          <a:bodyPr wrap="square" lIns="0" tIns="0" rIns="0" bIns="0" rtlCol="0" anchor="t"/>
+          <a:lstStyle/>
+          <a:p>
+            <a:pPr algn="l" indent="0" marL="0">
+              <a:spcAft>
+                <a:spcPts val="800"/>
+              </a:spcAft>
+              <a:buNone/>
+            </a:pPr>
+            <a:r>
+              <a:rPr lang="en-US" sz="3400" i="1" dirty="0">
+                <a:solidFill>
+                  <a:srgbClr val="111111"/>
+                </a:solidFill>
+                <a:latin typeface="Times New Roman" pitchFamily="34" charset="0"/>
+                <a:ea typeface="Times New Roman" pitchFamily="34" charset="-122"/>
+                <a:cs typeface="Times New Roman" pitchFamily="34" charset="-120"/>
+              </a:rPr>
+              <a:t>Samples are chosen by the following procedures:</a:t>
+            </a:r>
+            <a:endParaRPr lang="en-US" sz="3400" dirty="0"/>
+          </a:p>
+          <a:p>
+            <a:pPr algn="l" indent="0" marL="0">
+              <a:spcAft>
+                <a:spcPts val="800"/>
+              </a:spcAft>
+              <a:buNone/>
+            </a:pPr>
+            <a:r>
+              <a:rPr lang="en-US" sz="3400" b="1" dirty="0">
+                <a:solidFill>
+                  <a:srgbClr val="111111"/>
+                </a:solidFill>
+                <a:latin typeface="Times New Roman" pitchFamily="34" charset="0"/>
+                <a:ea typeface="Times New Roman" pitchFamily="34" charset="-122"/>
+                <a:cs typeface="Times New Roman" pitchFamily="34" charset="-120"/>
+              </a:rPr>
+              <a:t>Why sample: </a:t>
+            </a:r>
+            <a:pPr algn="l" indent="0" marL="0">
+              <a:spcAft>
+                <a:spcPts val="800"/>
+              </a:spcAft>
+              <a:buNone/>
+            </a:pPr>
+            <a:r>
+              <a:rPr lang="en-US" sz="3400" dirty="0">
+                <a:solidFill>
+                  <a:srgbClr val="111111"/>
+                </a:solidFill>
+                <a:latin typeface="Times New Roman" pitchFamily="34" charset="0"/>
+                <a:ea typeface="Times New Roman" pitchFamily="34" charset="-122"/>
+                <a:cs typeface="Times New Roman" pitchFamily="34" charset="-120"/>
+              </a:rPr>
+              <a:t>It is often impossible, too slow or too costly to study every member of a population. A well-chosen sample gives reliable results for the whole group.</a:t>
+            </a:r>
+            <a:endParaRPr lang="en-US" sz="3400" dirty="0"/>
+          </a:p>
+        </p:txBody>
+      </p:sp>
       <p:pic>
         <p:nvPicPr>
-          <p:cNvPr id="3" name="Image 0" descr="/home/claude/f4/img/minesec_sheet.png">    </p:cNvPr>
+          <p:cNvPr id="5" name="Image 0" descr="/home/claude/f4/img/v2/sampling_big.png">    </p:cNvPr>
           <p:cNvPicPr>
             <a:picLocks noChangeAspect="1"/>
           </p:cNvPicPr>
@@ -16803,8 +17094,8 @@
         </p:blipFill>
         <p:spPr>
           <a:xfrm>
-            <a:off x="0" y="658368"/>
-            <a:ext cx="5120640" cy="5833872"/>
+            <a:off x="6537960" y="2849678"/>
+            <a:ext cx="5470855" cy="2137053"/>
           </a:xfrm>
           <a:prstGeom prst="rect">
             <a:avLst/>
@@ -16813,14 +17104,14 @@
       </p:pic>
       <p:sp>
         <p:nvSpPr>
-          <p:cNvPr id="4" name="Text 1"/>
+          <p:cNvPr id="6" name="Text 3"/>
           <p:cNvSpPr/>
           <p:nvPr/>
         </p:nvSpPr>
         <p:spPr>
           <a:xfrm>
-            <a:off x="5349240" y="1005840"/>
-            <a:ext cx="6522415" cy="731520"/>
+            <a:off x="6537960" y="6089904"/>
+            <a:ext cx="5470855" cy="347472"/>
           </a:xfrm>
           <a:prstGeom prst="rect">
             <a:avLst/>
@@ -16829,85 +17120,24 @@
           <a:ln/>
         </p:spPr>
         <p:txBody>
-          <a:bodyPr wrap="square" lIns="0" tIns="0" rIns="0" bIns="0" rtlCol="0" anchor="ctr">
-            <a:normAutofit/>
-          </a:bodyPr>
+          <a:bodyPr wrap="square" lIns="0" tIns="0" rIns="0" bIns="0" rtlCol="0" anchor="ctr"/>
           <a:lstStyle/>
           <a:p>
             <a:pPr algn="ctr" indent="0" marL="0">
               <a:buNone/>
             </a:pPr>
             <a:r>
-              <a:rPr lang="en-US" sz="3600" b="1" dirty="0">
-                <a:solidFill>
-                  <a:srgbClr val="990011"/>
+              <a:rPr lang="en-US" sz="1600" i="1" dirty="0">
+                <a:solidFill>
+                  <a:srgbClr val="555555"/>
                 </a:solidFill>
                 <a:latin typeface="Times New Roman" pitchFamily="34" charset="0"/>
                 <a:ea typeface="Times New Roman" pitchFamily="34" charset="-122"/>
                 <a:cs typeface="Times New Roman" pitchFamily="34" charset="-120"/>
               </a:rPr>
-              <a:t>2. Basic Sampling Procedures</a:t>
-            </a:r>
-            <a:endParaRPr lang="en-US" sz="3600" dirty="0"/>
-          </a:p>
-        </p:txBody>
-      </p:sp>
-      <p:sp>
-        <p:nvSpPr>
-          <p:cNvPr id="5" name="Text 2"/>
-          <p:cNvSpPr/>
-          <p:nvPr/>
-        </p:nvSpPr>
-        <p:spPr>
-          <a:xfrm>
-            <a:off x="5349240" y="1783080"/>
-            <a:ext cx="6522415" cy="4663440"/>
-          </a:xfrm>
-          <a:prstGeom prst="rect">
-            <a:avLst/>
-          </a:prstGeom>
-          <a:noFill/>
-          <a:ln/>
-        </p:spPr>
-        <p:txBody>
-          <a:bodyPr wrap="square" lIns="0" tIns="0" rIns="0" bIns="0" rtlCol="0" anchor="t"/>
-          <a:lstStyle/>
-          <a:p>
-            <a:pPr algn="l" indent="0" marL="0">
-              <a:spcAft>
-                <a:spcPts val="800"/>
-              </a:spcAft>
-              <a:buNone/>
-            </a:pPr>
-            <a:r>
-              <a:rPr lang="en-US" sz="4000" b="1" dirty="0">
-                <a:solidFill>
-                  <a:srgbClr val="111111"/>
-                </a:solidFill>
-                <a:latin typeface="Times New Roman" pitchFamily="34" charset="0"/>
-                <a:ea typeface="Times New Roman" pitchFamily="34" charset="-122"/>
-                <a:cs typeface="Times New Roman" pitchFamily="34" charset="-120"/>
-              </a:rPr>
-              <a:t>Random sampling: </a:t>
-            </a:r>
-            <a:pPr algn="l" indent="0" marL="0">
-              <a:spcAft>
-                <a:spcPts val="800"/>
-              </a:spcAft>
-              <a:buNone/>
-            </a:pPr>
-            <a:r>
-              <a:rPr lang="en-US" sz="4000" dirty="0">
-                <a:solidFill>
-                  <a:srgbClr val="111111"/>
-                </a:solidFill>
-                <a:latin typeface="Times New Roman" pitchFamily="34" charset="0"/>
-                <a:ea typeface="Times New Roman" pitchFamily="34" charset="-122"/>
-                <a:cs typeface="Times New Roman" pitchFamily="34" charset="-120"/>
-              </a:rPr>
-              <a:t>Every member has an equal chance of being chosen, by drawing names from a box or using random numbers; it is unbiased.</a:t>
-            </a:r>
-            <a:endParaRPr lang="en-US" sz="4000" dirty="0"/>
+              <a:t>Illustration: sampling methods</a:t>
+            </a:r>
+            <a:endParaRPr lang="en-US" sz="1600" dirty="0"/>
           </a:p>
         </p:txBody>
       </p:sp>
@@ -17023,109 +17253,9 @@
           </a:p>
         </p:txBody>
       </p:sp>
-      <p:sp>
-        <p:nvSpPr>
-          <p:cNvPr id="3" name="Text 1"/>
-          <p:cNvSpPr/>
-          <p:nvPr/>
-        </p:nvSpPr>
-        <p:spPr>
-          <a:xfrm>
-            <a:off x="365760" y="1005840"/>
-            <a:ext cx="11460175" cy="731520"/>
-          </a:xfrm>
-          <a:prstGeom prst="rect">
-            <a:avLst/>
-          </a:prstGeom>
-          <a:noFill/>
-          <a:ln/>
-        </p:spPr>
-        <p:txBody>
-          <a:bodyPr wrap="square" lIns="0" tIns="0" rIns="0" bIns="0" rtlCol="0" anchor="ctr">
-            <a:normAutofit/>
-          </a:bodyPr>
-          <a:lstStyle/>
-          <a:p>
-            <a:pPr algn="ctr" indent="0" marL="0">
-              <a:buNone/>
-            </a:pPr>
-            <a:r>
-              <a:rPr lang="en-US" sz="3600" b="1" dirty="0">
-                <a:solidFill>
-                  <a:srgbClr val="990011"/>
-                </a:solidFill>
-                <a:latin typeface="Times New Roman" pitchFamily="34" charset="0"/>
-                <a:ea typeface="Times New Roman" pitchFamily="34" charset="-122"/>
-                <a:cs typeface="Times New Roman" pitchFamily="34" charset="-120"/>
-              </a:rPr>
-              <a:t>2. Basic Sampling Procedures</a:t>
-            </a:r>
-            <a:endParaRPr lang="en-US" sz="3600" dirty="0"/>
-          </a:p>
-        </p:txBody>
-      </p:sp>
-      <p:sp>
-        <p:nvSpPr>
-          <p:cNvPr id="4" name="Text 2"/>
-          <p:cNvSpPr/>
-          <p:nvPr/>
-        </p:nvSpPr>
-        <p:spPr>
-          <a:xfrm>
-            <a:off x="365760" y="1783080"/>
-            <a:ext cx="4846320" cy="4617720"/>
-          </a:xfrm>
-          <a:prstGeom prst="rect">
-            <a:avLst/>
-          </a:prstGeom>
-          <a:noFill/>
-          <a:ln/>
-        </p:spPr>
-        <p:txBody>
-          <a:bodyPr wrap="square" lIns="0" tIns="0" rIns="0" bIns="0" rtlCol="0" anchor="t"/>
-          <a:lstStyle/>
-          <a:p>
-            <a:pPr algn="l" indent="0" marL="0">
-              <a:spcAft>
-                <a:spcPts val="800"/>
-              </a:spcAft>
-              <a:buNone/>
-            </a:pPr>
-            <a:r>
-              <a:rPr lang="en-US" sz="3400" b="1" dirty="0">
-                <a:solidFill>
-                  <a:srgbClr val="111111"/>
-                </a:solidFill>
-                <a:latin typeface="Times New Roman" pitchFamily="34" charset="0"/>
-                <a:ea typeface="Times New Roman" pitchFamily="34" charset="-122"/>
-                <a:cs typeface="Times New Roman" pitchFamily="34" charset="-120"/>
-              </a:rPr>
-              <a:t>Systematic sampling: </a:t>
-            </a:r>
-            <a:pPr algn="l" indent="0" marL="0">
-              <a:spcAft>
-                <a:spcPts val="800"/>
-              </a:spcAft>
-              <a:buNone/>
-            </a:pPr>
-            <a:r>
-              <a:rPr lang="en-US" sz="3400" dirty="0">
-                <a:solidFill>
-                  <a:srgbClr val="111111"/>
-                </a:solidFill>
-                <a:latin typeface="Times New Roman" pitchFamily="34" charset="0"/>
-                <a:ea typeface="Times New Roman" pitchFamily="34" charset="-122"/>
-                <a:cs typeface="Times New Roman" pitchFamily="34" charset="-120"/>
-              </a:rPr>
-              <a:t>Members are chosen at a regular interval k = population ÷ sample size, from a random start: for 20 out of 200, k = 10, so the 7th, 17th, 27th and so on.</a:t>
-            </a:r>
-            <a:endParaRPr lang="en-US" sz="3400" dirty="0"/>
-          </a:p>
-        </p:txBody>
-      </p:sp>
       <p:pic>
         <p:nvPicPr>
-          <p:cNvPr id="5" name="Image 0" descr="/home/claude/f4/img/v2/stat2_systematic.png">    </p:cNvPr>
+          <p:cNvPr id="3" name="Image 0" descr="/home/claude/f4/img/minesec_sheet.png">    </p:cNvPr>
           <p:cNvPicPr>
             <a:picLocks noChangeAspect="1"/>
           </p:cNvPicPr>
@@ -17139,8 +17269,8 @@
         </p:blipFill>
         <p:spPr>
           <a:xfrm>
-            <a:off x="5349240" y="2617506"/>
-            <a:ext cx="6659575" cy="2601397"/>
+            <a:off x="0" y="658368"/>
+            <a:ext cx="5120640" cy="5833872"/>
           </a:xfrm>
           <a:prstGeom prst="rect">
             <a:avLst/>
@@ -17149,14 +17279,14 @@
       </p:pic>
       <p:sp>
         <p:nvSpPr>
-          <p:cNvPr id="6" name="Text 3"/>
+          <p:cNvPr id="4" name="Text 1"/>
           <p:cNvSpPr/>
           <p:nvPr/>
         </p:nvSpPr>
         <p:spPr>
           <a:xfrm>
-            <a:off x="5349240" y="6089904"/>
-            <a:ext cx="6659575" cy="347472"/>
+            <a:off x="5349240" y="1005840"/>
+            <a:ext cx="6522415" cy="731520"/>
           </a:xfrm>
           <a:prstGeom prst="rect">
             <a:avLst/>
@@ -17165,24 +17295,85 @@
           <a:ln/>
         </p:spPr>
         <p:txBody>
-          <a:bodyPr wrap="square" lIns="0" tIns="0" rIns="0" bIns="0" rtlCol="0" anchor="ctr"/>
+          <a:bodyPr wrap="square" lIns="0" tIns="0" rIns="0" bIns="0" rtlCol="0" anchor="ctr">
+            <a:normAutofit/>
+          </a:bodyPr>
           <a:lstStyle/>
           <a:p>
             <a:pPr algn="ctr" indent="0" marL="0">
               <a:buNone/>
             </a:pPr>
             <a:r>
-              <a:rPr lang="en-US" sz="1600" i="1" dirty="0">
-                <a:solidFill>
-                  <a:srgbClr val="555555"/>
+              <a:rPr lang="en-US" sz="3600" b="1" dirty="0">
+                <a:solidFill>
+                  <a:srgbClr val="990011"/>
                 </a:solidFill>
                 <a:latin typeface="Times New Roman" pitchFamily="34" charset="0"/>
                 <a:ea typeface="Times New Roman" pitchFamily="34" charset="-122"/>
                 <a:cs typeface="Times New Roman" pitchFamily="34" charset="-120"/>
               </a:rPr>
-              <a:t>Illustration: systematic sampling</a:t>
-            </a:r>
-            <a:endParaRPr lang="en-US" sz="1600" dirty="0"/>
+              <a:t>2. Basic Sampling Procedures</a:t>
+            </a:r>
+            <a:endParaRPr lang="en-US" sz="3600" dirty="0"/>
+          </a:p>
+        </p:txBody>
+      </p:sp>
+      <p:sp>
+        <p:nvSpPr>
+          <p:cNvPr id="5" name="Text 2"/>
+          <p:cNvSpPr/>
+          <p:nvPr/>
+        </p:nvSpPr>
+        <p:spPr>
+          <a:xfrm>
+            <a:off x="5349240" y="1783080"/>
+            <a:ext cx="6522415" cy="4663440"/>
+          </a:xfrm>
+          <a:prstGeom prst="rect">
+            <a:avLst/>
+          </a:prstGeom>
+          <a:noFill/>
+          <a:ln/>
+        </p:spPr>
+        <p:txBody>
+          <a:bodyPr wrap="square" lIns="0" tIns="0" rIns="0" bIns="0" rtlCol="0" anchor="t"/>
+          <a:lstStyle/>
+          <a:p>
+            <a:pPr algn="l" indent="0" marL="0">
+              <a:spcAft>
+                <a:spcPts val="800"/>
+              </a:spcAft>
+              <a:buNone/>
+            </a:pPr>
+            <a:r>
+              <a:rPr lang="en-US" sz="4000" b="1" dirty="0">
+                <a:solidFill>
+                  <a:srgbClr val="111111"/>
+                </a:solidFill>
+                <a:latin typeface="Times New Roman" pitchFamily="34" charset="0"/>
+                <a:ea typeface="Times New Roman" pitchFamily="34" charset="-122"/>
+                <a:cs typeface="Times New Roman" pitchFamily="34" charset="-120"/>
+              </a:rPr>
+              <a:t>Random sampling: </a:t>
+            </a:r>
+            <a:pPr algn="l" indent="0" marL="0">
+              <a:spcAft>
+                <a:spcPts val="800"/>
+              </a:spcAft>
+              <a:buNone/>
+            </a:pPr>
+            <a:r>
+              <a:rPr lang="en-US" sz="4000" dirty="0">
+                <a:solidFill>
+                  <a:srgbClr val="111111"/>
+                </a:solidFill>
+                <a:latin typeface="Times New Roman" pitchFamily="34" charset="0"/>
+                <a:ea typeface="Times New Roman" pitchFamily="34" charset="-122"/>
+                <a:cs typeface="Times New Roman" pitchFamily="34" charset="-120"/>
+              </a:rPr>
+              <a:t>Every member has an equal chance of being chosen, for example by drawing names from a box or using random numbers. This method avoids bias.</a:t>
+            </a:r>
+            <a:endParaRPr lang="en-US" sz="4000" dirty="0"/>
           </a:p>
         </p:txBody>
       </p:sp>
@@ -17298,9 +17489,109 @@
           </a:p>
         </p:txBody>
       </p:sp>
+      <p:sp>
+        <p:nvSpPr>
+          <p:cNvPr id="3" name="Text 1"/>
+          <p:cNvSpPr/>
+          <p:nvPr/>
+        </p:nvSpPr>
+        <p:spPr>
+          <a:xfrm>
+            <a:off x="365760" y="1005840"/>
+            <a:ext cx="11460175" cy="731520"/>
+          </a:xfrm>
+          <a:prstGeom prst="rect">
+            <a:avLst/>
+          </a:prstGeom>
+          <a:noFill/>
+          <a:ln/>
+        </p:spPr>
+        <p:txBody>
+          <a:bodyPr wrap="square" lIns="0" tIns="0" rIns="0" bIns="0" rtlCol="0" anchor="ctr">
+            <a:normAutofit/>
+          </a:bodyPr>
+          <a:lstStyle/>
+          <a:p>
+            <a:pPr algn="ctr" indent="0" marL="0">
+              <a:buNone/>
+            </a:pPr>
+            <a:r>
+              <a:rPr lang="en-US" sz="3600" b="1" dirty="0">
+                <a:solidFill>
+                  <a:srgbClr val="990011"/>
+                </a:solidFill>
+                <a:latin typeface="Times New Roman" pitchFamily="34" charset="0"/>
+                <a:ea typeface="Times New Roman" pitchFamily="34" charset="-122"/>
+                <a:cs typeface="Times New Roman" pitchFamily="34" charset="-120"/>
+              </a:rPr>
+              <a:t>2. Basic Sampling Procedures</a:t>
+            </a:r>
+            <a:endParaRPr lang="en-US" sz="3600" dirty="0"/>
+          </a:p>
+        </p:txBody>
+      </p:sp>
+      <p:sp>
+        <p:nvSpPr>
+          <p:cNvPr id="4" name="Text 2"/>
+          <p:cNvSpPr/>
+          <p:nvPr/>
+        </p:nvSpPr>
+        <p:spPr>
+          <a:xfrm>
+            <a:off x="365760" y="1783080"/>
+            <a:ext cx="6035040" cy="4617720"/>
+          </a:xfrm>
+          <a:prstGeom prst="rect">
+            <a:avLst/>
+          </a:prstGeom>
+          <a:noFill/>
+          <a:ln/>
+        </p:spPr>
+        <p:txBody>
+          <a:bodyPr wrap="square" lIns="0" tIns="0" rIns="0" bIns="0" rtlCol="0" anchor="t"/>
+          <a:lstStyle/>
+          <a:p>
+            <a:pPr algn="l" indent="0" marL="0">
+              <a:spcAft>
+                <a:spcPts val="800"/>
+              </a:spcAft>
+              <a:buNone/>
+            </a:pPr>
+            <a:r>
+              <a:rPr lang="en-US" sz="3600" b="1" dirty="0">
+                <a:solidFill>
+                  <a:srgbClr val="111111"/>
+                </a:solidFill>
+                <a:latin typeface="Times New Roman" pitchFamily="34" charset="0"/>
+                <a:ea typeface="Times New Roman" pitchFamily="34" charset="-122"/>
+                <a:cs typeface="Times New Roman" pitchFamily="34" charset="-120"/>
+              </a:rPr>
+              <a:t>Systematic sampling: </a:t>
+            </a:r>
+            <a:pPr algn="l" indent="0" marL="0">
+              <a:spcAft>
+                <a:spcPts val="800"/>
+              </a:spcAft>
+              <a:buNone/>
+            </a:pPr>
+            <a:r>
+              <a:rPr lang="en-US" sz="3600" dirty="0">
+                <a:solidFill>
+                  <a:srgbClr val="111111"/>
+                </a:solidFill>
+                <a:latin typeface="Times New Roman" pitchFamily="34" charset="0"/>
+                <a:ea typeface="Times New Roman" pitchFamily="34" charset="-122"/>
+                <a:cs typeface="Times New Roman" pitchFamily="34" charset="-120"/>
+              </a:rPr>
+              <a:t>Members are chosen at a regular interval k = population ÷ sample size, starting from a random point. To choose 20 out of 200, k = 10, so the 7th, 17th, 27th and so on are chosen.</a:t>
+            </a:r>
+            <a:endParaRPr lang="en-US" sz="3600" dirty="0"/>
+          </a:p>
+        </p:txBody>
+      </p:sp>
       <p:pic>
         <p:nvPicPr>
-          <p:cNvPr id="3" name="Image 0" descr="/home/claude/f4/img/minesec_sheet.png">    </p:cNvPr>
+          <p:cNvPr id="5" name="Image 0" descr="/home/claude/f4/img/v2/stat2_systematic.png">    </p:cNvPr>
           <p:cNvPicPr>
             <a:picLocks noChangeAspect="1"/>
           </p:cNvPicPr>
@@ -17314,8 +17605,8 @@
         </p:blipFill>
         <p:spPr>
           <a:xfrm>
-            <a:off x="0" y="658368"/>
-            <a:ext cx="5120640" cy="5833872"/>
+            <a:off x="6537960" y="2849678"/>
+            <a:ext cx="5470855" cy="2137053"/>
           </a:xfrm>
           <a:prstGeom prst="rect">
             <a:avLst/>
@@ -17324,14 +17615,14 @@
       </p:pic>
       <p:sp>
         <p:nvSpPr>
-          <p:cNvPr id="4" name="Text 1"/>
+          <p:cNvPr id="6" name="Text 3"/>
           <p:cNvSpPr/>
           <p:nvPr/>
         </p:nvSpPr>
         <p:spPr>
           <a:xfrm>
-            <a:off x="5349240" y="1005840"/>
-            <a:ext cx="6522415" cy="731520"/>
+            <a:off x="6537960" y="6089904"/>
+            <a:ext cx="5470855" cy="347472"/>
           </a:xfrm>
           <a:prstGeom prst="rect">
             <a:avLst/>
@@ -17340,85 +17631,24 @@
           <a:ln/>
         </p:spPr>
         <p:txBody>
-          <a:bodyPr wrap="square" lIns="0" tIns="0" rIns="0" bIns="0" rtlCol="0" anchor="ctr">
-            <a:normAutofit/>
-          </a:bodyPr>
+          <a:bodyPr wrap="square" lIns="0" tIns="0" rIns="0" bIns="0" rtlCol="0" anchor="ctr"/>
           <a:lstStyle/>
           <a:p>
             <a:pPr algn="ctr" indent="0" marL="0">
               <a:buNone/>
             </a:pPr>
             <a:r>
-              <a:rPr lang="en-US" sz="3600" b="1" dirty="0">
-                <a:solidFill>
-                  <a:srgbClr val="990011"/>
+              <a:rPr lang="en-US" sz="1600" i="1" dirty="0">
+                <a:solidFill>
+                  <a:srgbClr val="555555"/>
                 </a:solidFill>
                 <a:latin typeface="Times New Roman" pitchFamily="34" charset="0"/>
                 <a:ea typeface="Times New Roman" pitchFamily="34" charset="-122"/>
                 <a:cs typeface="Times New Roman" pitchFamily="34" charset="-120"/>
               </a:rPr>
-              <a:t>2. Basic Sampling Procedures</a:t>
-            </a:r>
-            <a:endParaRPr lang="en-US" sz="3600" dirty="0"/>
-          </a:p>
-        </p:txBody>
-      </p:sp>
-      <p:sp>
-        <p:nvSpPr>
-          <p:cNvPr id="5" name="Text 2"/>
-          <p:cNvSpPr/>
-          <p:nvPr/>
-        </p:nvSpPr>
-        <p:spPr>
-          <a:xfrm>
-            <a:off x="5349240" y="1783080"/>
-            <a:ext cx="6522415" cy="4663440"/>
-          </a:xfrm>
-          <a:prstGeom prst="rect">
-            <a:avLst/>
-          </a:prstGeom>
-          <a:noFill/>
-          <a:ln/>
-        </p:spPr>
-        <p:txBody>
-          <a:bodyPr wrap="square" lIns="0" tIns="0" rIns="0" bIns="0" rtlCol="0" anchor="t"/>
-          <a:lstStyle/>
-          <a:p>
-            <a:pPr algn="l" indent="0" marL="0">
-              <a:spcAft>
-                <a:spcPts val="800"/>
-              </a:spcAft>
-              <a:buNone/>
-            </a:pPr>
-            <a:r>
-              <a:rPr lang="en-US" sz="4000" b="1" dirty="0">
-                <a:solidFill>
-                  <a:srgbClr val="111111"/>
-                </a:solidFill>
-                <a:latin typeface="Times New Roman" pitchFamily="34" charset="0"/>
-                <a:ea typeface="Times New Roman" pitchFamily="34" charset="-122"/>
-                <a:cs typeface="Times New Roman" pitchFamily="34" charset="-120"/>
-              </a:rPr>
-              <a:t>Stratified sampling: </a:t>
-            </a:r>
-            <a:pPr algn="l" indent="0" marL="0">
-              <a:spcAft>
-                <a:spcPts val="800"/>
-              </a:spcAft>
-              <a:buNone/>
-            </a:pPr>
-            <a:r>
-              <a:rPr lang="en-US" sz="4000" dirty="0">
-                <a:solidFill>
-                  <a:srgbClr val="111111"/>
-                </a:solidFill>
-                <a:latin typeface="Times New Roman" pitchFamily="34" charset="0"/>
-                <a:ea typeface="Times New Roman" pitchFamily="34" charset="-122"/>
-                <a:cs typeface="Times New Roman" pitchFamily="34" charset="-120"/>
-              </a:rPr>
-              <a:t>The population is divided into groups (strata), such as forms in a school, and each group is sampled in proportion to its size; it is very representative.</a:t>
-            </a:r>
-            <a:endParaRPr lang="en-US" sz="4000" dirty="0"/>
+              <a:t>Illustration: systematic sampling</a:t>
+            </a:r>
+            <a:endParaRPr lang="en-US" sz="1600" dirty="0"/>
           </a:p>
         </p:txBody>
       </p:sp>
@@ -17534,129 +17764,9 @@
           </a:p>
         </p:txBody>
       </p:sp>
-      <p:sp>
-        <p:nvSpPr>
-          <p:cNvPr id="3" name="Text 1"/>
-          <p:cNvSpPr/>
-          <p:nvPr/>
-        </p:nvSpPr>
-        <p:spPr>
-          <a:xfrm>
-            <a:off x="365760" y="1005840"/>
-            <a:ext cx="11460175" cy="731520"/>
-          </a:xfrm>
-          <a:prstGeom prst="rect">
-            <a:avLst/>
-          </a:prstGeom>
-          <a:noFill/>
-          <a:ln/>
-        </p:spPr>
-        <p:txBody>
-          <a:bodyPr wrap="square" lIns="0" tIns="0" rIns="0" bIns="0" rtlCol="0" anchor="ctr">
-            <a:normAutofit/>
-          </a:bodyPr>
-          <a:lstStyle/>
-          <a:p>
-            <a:pPr algn="ctr" indent="0" marL="0">
-              <a:buNone/>
-            </a:pPr>
-            <a:r>
-              <a:rPr lang="en-US" sz="3600" b="1" dirty="0">
-                <a:solidFill>
-                  <a:srgbClr val="990011"/>
-                </a:solidFill>
-                <a:latin typeface="Times New Roman" pitchFamily="34" charset="0"/>
-                <a:ea typeface="Times New Roman" pitchFamily="34" charset="-122"/>
-                <a:cs typeface="Times New Roman" pitchFamily="34" charset="-120"/>
-              </a:rPr>
-              <a:t>3. Primary Data Collection Techniques</a:t>
-            </a:r>
-            <a:endParaRPr lang="en-US" sz="3600" dirty="0"/>
-          </a:p>
-        </p:txBody>
-      </p:sp>
-      <p:sp>
-        <p:nvSpPr>
-          <p:cNvPr id="4" name="Text 2"/>
-          <p:cNvSpPr/>
-          <p:nvPr/>
-        </p:nvSpPr>
-        <p:spPr>
-          <a:xfrm>
-            <a:off x="365760" y="1783080"/>
-            <a:ext cx="4846320" cy="4617720"/>
-          </a:xfrm>
-          <a:prstGeom prst="rect">
-            <a:avLst/>
-          </a:prstGeom>
-          <a:noFill/>
-          <a:ln/>
-        </p:spPr>
-        <p:txBody>
-          <a:bodyPr wrap="square" lIns="0" tIns="0" rIns="0" bIns="0" rtlCol="0" anchor="t"/>
-          <a:lstStyle/>
-          <a:p>
-            <a:pPr algn="l" indent="0" marL="0">
-              <a:spcAft>
-                <a:spcPts val="800"/>
-              </a:spcAft>
-              <a:buNone/>
-            </a:pPr>
-            <a:r>
-              <a:rPr lang="en-US" sz="3200" i="1" dirty="0">
-                <a:solidFill>
-                  <a:srgbClr val="111111"/>
-                </a:solidFill>
-                <a:latin typeface="Times New Roman" pitchFamily="34" charset="0"/>
-                <a:ea typeface="Times New Roman" pitchFamily="34" charset="-122"/>
-                <a:cs typeface="Times New Roman" pitchFamily="34" charset="-120"/>
-              </a:rPr>
-              <a:t>The main techniques of primary data collection are the following:</a:t>
-            </a:r>
-            <a:endParaRPr lang="en-US" sz="3200" dirty="0"/>
-          </a:p>
-          <a:p>
-            <a:pPr algn="l" indent="0" marL="0">
-              <a:spcAft>
-                <a:spcPts val="800"/>
-              </a:spcAft>
-              <a:buNone/>
-            </a:pPr>
-            <a:r>
-              <a:rPr lang="en-US" sz="3200" b="1" dirty="0">
-                <a:solidFill>
-                  <a:srgbClr val="111111"/>
-                </a:solidFill>
-                <a:latin typeface="Times New Roman" pitchFamily="34" charset="0"/>
-                <a:ea typeface="Times New Roman" pitchFamily="34" charset="-122"/>
-                <a:cs typeface="Times New Roman" pitchFamily="34" charset="-120"/>
-              </a:rPr>
-              <a:t>Observation, counting and recording: </a:t>
-            </a:r>
-            <a:pPr algn="l" indent="0" marL="0">
-              <a:spcAft>
-                <a:spcPts val="800"/>
-              </a:spcAft>
-              <a:buNone/>
-            </a:pPr>
-            <a:r>
-              <a:rPr lang="en-US" sz="3200" dirty="0">
-                <a:solidFill>
-                  <a:srgbClr val="111111"/>
-                </a:solidFill>
-                <a:latin typeface="Times New Roman" pitchFamily="34" charset="0"/>
-                <a:ea typeface="Times New Roman" pitchFamily="34" charset="-122"/>
-                <a:cs typeface="Times New Roman" pitchFamily="34" charset="-120"/>
-              </a:rPr>
-              <a:t>Counting cars, motos and lorries on the Pont Neuf in one hour, or photographing house types in Yelwa.</a:t>
-            </a:r>
-            <a:endParaRPr lang="en-US" sz="3200" dirty="0"/>
-          </a:p>
-        </p:txBody>
-      </p:sp>
       <p:pic>
         <p:nvPicPr>
-          <p:cNvPr id="5" name="Image 0" descr="/home/claude/f4/img/v2/stat2_techniques.png">    </p:cNvPr>
+          <p:cNvPr id="3" name="Image 0" descr="/home/claude/f4/img/minesec_sheet.png">    </p:cNvPr>
           <p:cNvPicPr>
             <a:picLocks noChangeAspect="1"/>
           </p:cNvPicPr>
@@ -17670,8 +17780,8 @@
         </p:blipFill>
         <p:spPr>
           <a:xfrm>
-            <a:off x="5349240" y="2617506"/>
-            <a:ext cx="6659575" cy="2601397"/>
+            <a:off x="0" y="658368"/>
+            <a:ext cx="3840480" cy="5833872"/>
           </a:xfrm>
           <a:prstGeom prst="rect">
             <a:avLst/>
@@ -17680,14 +17790,14 @@
       </p:pic>
       <p:sp>
         <p:nvSpPr>
-          <p:cNvPr id="6" name="Text 3"/>
+          <p:cNvPr id="4" name="Text 1"/>
           <p:cNvSpPr/>
           <p:nvPr/>
         </p:nvSpPr>
         <p:spPr>
           <a:xfrm>
-            <a:off x="5349240" y="6089904"/>
-            <a:ext cx="6659575" cy="347472"/>
+            <a:off x="4069080" y="1005840"/>
+            <a:ext cx="7802575" cy="731520"/>
           </a:xfrm>
           <a:prstGeom prst="rect">
             <a:avLst/>
@@ -17696,24 +17806,85 @@
           <a:ln/>
         </p:spPr>
         <p:txBody>
-          <a:bodyPr wrap="square" lIns="0" tIns="0" rIns="0" bIns="0" rtlCol="0" anchor="ctr"/>
+          <a:bodyPr wrap="square" lIns="0" tIns="0" rIns="0" bIns="0" rtlCol="0" anchor="ctr">
+            <a:normAutofit/>
+          </a:bodyPr>
           <a:lstStyle/>
           <a:p>
             <a:pPr algn="ctr" indent="0" marL="0">
               <a:buNone/>
             </a:pPr>
             <a:r>
-              <a:rPr lang="en-US" sz="1600" i="1" dirty="0">
-                <a:solidFill>
-                  <a:srgbClr val="555555"/>
+              <a:rPr lang="en-US" sz="3600" b="1" dirty="0">
+                <a:solidFill>
+                  <a:srgbClr val="990011"/>
                 </a:solidFill>
                 <a:latin typeface="Times New Roman" pitchFamily="34" charset="0"/>
                 <a:ea typeface="Times New Roman" pitchFamily="34" charset="-122"/>
                 <a:cs typeface="Times New Roman" pitchFamily="34" charset="-120"/>
               </a:rPr>
-              <a:t>Illustration: collection techniques</a:t>
-            </a:r>
-            <a:endParaRPr lang="en-US" sz="1600" dirty="0"/>
+              <a:t>2. Basic Sampling Procedures</a:t>
+            </a:r>
+            <a:endParaRPr lang="en-US" sz="3600" dirty="0"/>
+          </a:p>
+        </p:txBody>
+      </p:sp>
+      <p:sp>
+        <p:nvSpPr>
+          <p:cNvPr id="5" name="Text 2"/>
+          <p:cNvSpPr/>
+          <p:nvPr/>
+        </p:nvSpPr>
+        <p:spPr>
+          <a:xfrm>
+            <a:off x="4069080" y="1783080"/>
+            <a:ext cx="7802575" cy="4663440"/>
+          </a:xfrm>
+          <a:prstGeom prst="rect">
+            <a:avLst/>
+          </a:prstGeom>
+          <a:noFill/>
+          <a:ln/>
+        </p:spPr>
+        <p:txBody>
+          <a:bodyPr wrap="square" lIns="0" tIns="0" rIns="0" bIns="0" rtlCol="0" anchor="t"/>
+          <a:lstStyle/>
+          <a:p>
+            <a:pPr algn="l" indent="0" marL="0">
+              <a:spcAft>
+                <a:spcPts val="800"/>
+              </a:spcAft>
+              <a:buNone/>
+            </a:pPr>
+            <a:r>
+              <a:rPr lang="en-US" sz="4000" b="1" dirty="0">
+                <a:solidFill>
+                  <a:srgbClr val="111111"/>
+                </a:solidFill>
+                <a:latin typeface="Times New Roman" pitchFamily="34" charset="0"/>
+                <a:ea typeface="Times New Roman" pitchFamily="34" charset="-122"/>
+                <a:cs typeface="Times New Roman" pitchFamily="34" charset="-120"/>
+              </a:rPr>
+              <a:t>Stratified sampling: </a:t>
+            </a:r>
+            <a:pPr algn="l" indent="0" marL="0">
+              <a:spcAft>
+                <a:spcPts val="800"/>
+              </a:spcAft>
+              <a:buNone/>
+            </a:pPr>
+            <a:r>
+              <a:rPr lang="en-US" sz="4000" dirty="0">
+                <a:solidFill>
+                  <a:srgbClr val="111111"/>
+                </a:solidFill>
+                <a:latin typeface="Times New Roman" pitchFamily="34" charset="0"/>
+                <a:ea typeface="Times New Roman" pitchFamily="34" charset="-122"/>
+                <a:cs typeface="Times New Roman" pitchFamily="34" charset="-120"/>
+              </a:rPr>
+              <a:t>The population is divided into groups (strata), such as the forms of a school, and each group is sampled in proportion to its size. This makes the sample very representative.</a:t>
+            </a:r>
+            <a:endParaRPr lang="en-US" sz="4000" dirty="0"/>
           </a:p>
         </p:txBody>
       </p:sp>
@@ -17829,9 +18000,170 @@
           </a:p>
         </p:txBody>
       </p:sp>
+      <p:sp>
+        <p:nvSpPr>
+          <p:cNvPr id="3" name="Text 1"/>
+          <p:cNvSpPr/>
+          <p:nvPr/>
+        </p:nvSpPr>
+        <p:spPr>
+          <a:xfrm>
+            <a:off x="365760" y="1005840"/>
+            <a:ext cx="11460175" cy="731520"/>
+          </a:xfrm>
+          <a:prstGeom prst="rect">
+            <a:avLst/>
+          </a:prstGeom>
+          <a:noFill/>
+          <a:ln/>
+        </p:spPr>
+        <p:txBody>
+          <a:bodyPr wrap="square" lIns="0" tIns="0" rIns="0" bIns="0" rtlCol="0" anchor="ctr">
+            <a:normAutofit/>
+          </a:bodyPr>
+          <a:lstStyle/>
+          <a:p>
+            <a:pPr algn="ctr" indent="0" marL="0">
+              <a:buNone/>
+            </a:pPr>
+            <a:r>
+              <a:rPr lang="en-US" sz="3600" b="1" dirty="0">
+                <a:solidFill>
+                  <a:srgbClr val="990011"/>
+                </a:solidFill>
+                <a:latin typeface="Times New Roman" pitchFamily="34" charset="0"/>
+                <a:ea typeface="Times New Roman" pitchFamily="34" charset="-122"/>
+                <a:cs typeface="Times New Roman" pitchFamily="34" charset="-120"/>
+              </a:rPr>
+              <a:t>3. Primary Data Collection Techniques</a:t>
+            </a:r>
+            <a:endParaRPr lang="en-US" sz="3600" dirty="0"/>
+          </a:p>
+        </p:txBody>
+      </p:sp>
+      <p:sp>
+        <p:nvSpPr>
+          <p:cNvPr id="4" name="Text 2"/>
+          <p:cNvSpPr/>
+          <p:nvPr/>
+        </p:nvSpPr>
+        <p:spPr>
+          <a:xfrm>
+            <a:off x="365760" y="1737360"/>
+            <a:ext cx="6035040" cy="457200"/>
+          </a:xfrm>
+          <a:prstGeom prst="rect">
+            <a:avLst/>
+          </a:prstGeom>
+          <a:noFill/>
+          <a:ln/>
+        </p:spPr>
+        <p:txBody>
+          <a:bodyPr wrap="square" lIns="0" tIns="0" rIns="0" bIns="0" rtlCol="0" anchor="ctr">
+            <a:normAutofit/>
+          </a:bodyPr>
+          <a:lstStyle/>
+          <a:p>
+            <a:pPr algn="l" indent="0" marL="0">
+              <a:buNone/>
+            </a:pPr>
+            <a:r>
+              <a:rPr lang="en-US" sz="3000" b="1" dirty="0">
+                <a:solidFill>
+                  <a:srgbClr val="990011"/>
+                </a:solidFill>
+                <a:latin typeface="Times New Roman" pitchFamily="34" charset="0"/>
+                <a:ea typeface="Times New Roman" pitchFamily="34" charset="-122"/>
+                <a:cs typeface="Times New Roman" pitchFamily="34" charset="-120"/>
+              </a:rPr>
+              <a:t>A) Observation, Recording and Measurement</a:t>
+            </a:r>
+            <a:endParaRPr lang="en-US" sz="3000" dirty="0"/>
+          </a:p>
+        </p:txBody>
+      </p:sp>
+      <p:sp>
+        <p:nvSpPr>
+          <p:cNvPr id="5" name="Text 3"/>
+          <p:cNvSpPr/>
+          <p:nvPr/>
+        </p:nvSpPr>
+        <p:spPr>
+          <a:xfrm>
+            <a:off x="365760" y="2240280"/>
+            <a:ext cx="6035040" cy="4160520"/>
+          </a:xfrm>
+          <a:prstGeom prst="rect">
+            <a:avLst/>
+          </a:prstGeom>
+          <a:noFill/>
+          <a:ln/>
+        </p:spPr>
+        <p:txBody>
+          <a:bodyPr wrap="square" lIns="0" tIns="0" rIns="0" bIns="0" rtlCol="0" anchor="t"/>
+          <a:lstStyle/>
+          <a:p>
+            <a:pPr algn="l" indent="0" marL="0">
+              <a:spcAft>
+                <a:spcPts val="800"/>
+              </a:spcAft>
+              <a:buNone/>
+            </a:pPr>
+            <a:r>
+              <a:rPr lang="en-US" sz="2800" i="1" dirty="0">
+                <a:solidFill>
+                  <a:srgbClr val="111111"/>
+                </a:solidFill>
+                <a:latin typeface="Times New Roman" pitchFamily="34" charset="0"/>
+                <a:ea typeface="Times New Roman" pitchFamily="34" charset="-122"/>
+                <a:cs typeface="Times New Roman" pitchFamily="34" charset="-120"/>
+              </a:rPr>
+              <a:t>Data are collected in the field with the following techniques:</a:t>
+            </a:r>
+            <a:endParaRPr lang="en-US" sz="2800" dirty="0"/>
+          </a:p>
+          <a:p>
+            <a:pPr algn="l" indent="0" marL="0">
+              <a:spcAft>
+                <a:spcPts val="800"/>
+              </a:spcAft>
+              <a:buNone/>
+            </a:pPr>
+            <a:r>
+              <a:rPr lang="en-US" sz="2800" b="1" dirty="0">
+                <a:solidFill>
+                  <a:srgbClr val="111111"/>
+                </a:solidFill>
+                <a:latin typeface="Times New Roman" pitchFamily="34" charset="0"/>
+                <a:ea typeface="Times New Roman" pitchFamily="34" charset="-122"/>
+                <a:cs typeface="Times New Roman" pitchFamily="34" charset="-120"/>
+              </a:rPr>
+              <a:t>Observation, counting and recording of frequencies: </a:t>
+            </a:r>
+            <a:pPr algn="l" indent="0" marL="0">
+              <a:spcAft>
+                <a:spcPts val="800"/>
+              </a:spcAft>
+              <a:buNone/>
+            </a:pPr>
+            <a:r>
+              <a:rPr lang="en-US" sz="2800" dirty="0">
+                <a:solidFill>
+                  <a:srgbClr val="111111"/>
+                </a:solidFill>
+                <a:latin typeface="Times New Roman" pitchFamily="34" charset="0"/>
+                <a:ea typeface="Times New Roman" pitchFamily="34" charset="-122"/>
+                <a:cs typeface="Times New Roman" pitchFamily="34" charset="-120"/>
+              </a:rPr>
+              <a:t>The researcher watches and counts events and records them on a tally sheet. For example, he counts the cars, motorbikes and lorries crossing the Pont Neuf in Garoua in one hour.</a:t>
+            </a:r>
+            <a:endParaRPr lang="en-US" sz="2800" dirty="0"/>
+          </a:p>
+        </p:txBody>
+      </p:sp>
       <p:pic>
         <p:nvPicPr>
-          <p:cNvPr id="3" name="Image 0" descr="/home/claude/f4/img/minesec_sheet.png">    </p:cNvPr>
+          <p:cNvPr id="6" name="Image 0" descr="/home/claude/f4/img/v2/stat2_techniques.png">    </p:cNvPr>
           <p:cNvPicPr>
             <a:picLocks noChangeAspect="1"/>
           </p:cNvPicPr>
@@ -17845,8 +18177,8 @@
         </p:blipFill>
         <p:spPr>
           <a:xfrm>
-            <a:off x="0" y="658368"/>
-            <a:ext cx="5120640" cy="5833872"/>
+            <a:off x="6537960" y="2849678"/>
+            <a:ext cx="5470855" cy="2137053"/>
           </a:xfrm>
           <a:prstGeom prst="rect">
             <a:avLst/>
@@ -17855,14 +18187,14 @@
       </p:pic>
       <p:sp>
         <p:nvSpPr>
-          <p:cNvPr id="4" name="Text 1"/>
+          <p:cNvPr id="7" name="Text 4"/>
           <p:cNvSpPr/>
           <p:nvPr/>
         </p:nvSpPr>
         <p:spPr>
           <a:xfrm>
-            <a:off x="5349240" y="1005840"/>
-            <a:ext cx="6522415" cy="731520"/>
+            <a:off x="6537960" y="6089904"/>
+            <a:ext cx="5470855" cy="347472"/>
           </a:xfrm>
           <a:prstGeom prst="rect">
             <a:avLst/>
@@ -17871,85 +18203,24 @@
           <a:ln/>
         </p:spPr>
         <p:txBody>
-          <a:bodyPr wrap="square" lIns="0" tIns="0" rIns="0" bIns="0" rtlCol="0" anchor="ctr">
-            <a:normAutofit/>
-          </a:bodyPr>
+          <a:bodyPr wrap="square" lIns="0" tIns="0" rIns="0" bIns="0" rtlCol="0" anchor="ctr"/>
           <a:lstStyle/>
           <a:p>
             <a:pPr algn="ctr" indent="0" marL="0">
               <a:buNone/>
             </a:pPr>
             <a:r>
-              <a:rPr lang="en-US" sz="3600" b="1" dirty="0">
-                <a:solidFill>
-                  <a:srgbClr val="990011"/>
+              <a:rPr lang="en-US" sz="1600" i="1" dirty="0">
+                <a:solidFill>
+                  <a:srgbClr val="555555"/>
                 </a:solidFill>
                 <a:latin typeface="Times New Roman" pitchFamily="34" charset="0"/>
                 <a:ea typeface="Times New Roman" pitchFamily="34" charset="-122"/>
                 <a:cs typeface="Times New Roman" pitchFamily="34" charset="-120"/>
               </a:rPr>
-              <a:t>3. Primary Data Collection Techniques</a:t>
-            </a:r>
-            <a:endParaRPr lang="en-US" sz="3600" dirty="0"/>
-          </a:p>
-        </p:txBody>
-      </p:sp>
-      <p:sp>
-        <p:nvSpPr>
-          <p:cNvPr id="5" name="Text 2"/>
-          <p:cNvSpPr/>
-          <p:nvPr/>
-        </p:nvSpPr>
-        <p:spPr>
-          <a:xfrm>
-            <a:off x="5349240" y="1783080"/>
-            <a:ext cx="6522415" cy="4663440"/>
-          </a:xfrm>
-          <a:prstGeom prst="rect">
-            <a:avLst/>
-          </a:prstGeom>
-          <a:noFill/>
-          <a:ln/>
-        </p:spPr>
-        <p:txBody>
-          <a:bodyPr wrap="square" lIns="0" tIns="0" rIns="0" bIns="0" rtlCol="0" anchor="t"/>
-          <a:lstStyle/>
-          <a:p>
-            <a:pPr algn="l" indent="0" marL="0">
-              <a:spcAft>
-                <a:spcPts val="800"/>
-              </a:spcAft>
-              <a:buNone/>
-            </a:pPr>
-            <a:r>
-              <a:rPr lang="en-US" sz="4000" b="1" dirty="0">
-                <a:solidFill>
-                  <a:srgbClr val="111111"/>
-                </a:solidFill>
-                <a:latin typeface="Times New Roman" pitchFamily="34" charset="0"/>
-                <a:ea typeface="Times New Roman" pitchFamily="34" charset="-122"/>
-                <a:cs typeface="Times New Roman" pitchFamily="34" charset="-120"/>
-              </a:rPr>
-              <a:t>Measurement: </a:t>
-            </a:r>
-            <a:pPr algn="l" indent="0" marL="0">
-              <a:spcAft>
-                <a:spcPts val="800"/>
-              </a:spcAft>
-              <a:buNone/>
-            </a:pPr>
-            <a:r>
-              <a:rPr lang="en-US" sz="4000" dirty="0">
-                <a:solidFill>
-                  <a:srgbClr val="111111"/>
-                </a:solidFill>
-                <a:latin typeface="Times New Roman" pitchFamily="34" charset="0"/>
-                <a:ea typeface="Times New Roman" pitchFamily="34" charset="-122"/>
-                <a:cs typeface="Times New Roman" pitchFamily="34" charset="-120"/>
-              </a:rPr>
-              <a:t>Instruments give precise figures: thermometer, rain gauge, measuring tape (river width), clinometer (slope angle).</a:t>
-            </a:r>
-            <a:endParaRPr lang="en-US" sz="4000" dirty="0"/>
+              <a:t>Illustration: data collection techniques</a:t>
+            </a:r>
+            <a:endParaRPr lang="en-US" sz="1600" dirty="0"/>
           </a:p>
         </p:txBody>
       </p:sp>
@@ -18065,109 +18336,9 @@
           </a:p>
         </p:txBody>
       </p:sp>
-      <p:sp>
-        <p:nvSpPr>
-          <p:cNvPr id="3" name="Text 1"/>
-          <p:cNvSpPr/>
-          <p:nvPr/>
-        </p:nvSpPr>
-        <p:spPr>
-          <a:xfrm>
-            <a:off x="365760" y="1005840"/>
-            <a:ext cx="11460175" cy="731520"/>
-          </a:xfrm>
-          <a:prstGeom prst="rect">
-            <a:avLst/>
-          </a:prstGeom>
-          <a:noFill/>
-          <a:ln/>
-        </p:spPr>
-        <p:txBody>
-          <a:bodyPr wrap="square" lIns="0" tIns="0" rIns="0" bIns="0" rtlCol="0" anchor="ctr">
-            <a:normAutofit/>
-          </a:bodyPr>
-          <a:lstStyle/>
-          <a:p>
-            <a:pPr algn="ctr" indent="0" marL="0">
-              <a:buNone/>
-            </a:pPr>
-            <a:r>
-              <a:rPr lang="en-US" sz="3600" b="1" dirty="0">
-                <a:solidFill>
-                  <a:srgbClr val="990011"/>
-                </a:solidFill>
-                <a:latin typeface="Times New Roman" pitchFamily="34" charset="0"/>
-                <a:ea typeface="Times New Roman" pitchFamily="34" charset="-122"/>
-                <a:cs typeface="Times New Roman" pitchFamily="34" charset="-120"/>
-              </a:rPr>
-              <a:t>3. Primary Data Collection Techniques</a:t>
-            </a:r>
-            <a:endParaRPr lang="en-US" sz="3600" dirty="0"/>
-          </a:p>
-        </p:txBody>
-      </p:sp>
-      <p:sp>
-        <p:nvSpPr>
-          <p:cNvPr id="4" name="Text 2"/>
-          <p:cNvSpPr/>
-          <p:nvPr/>
-        </p:nvSpPr>
-        <p:spPr>
-          <a:xfrm>
-            <a:off x="365760" y="1783080"/>
-            <a:ext cx="4846320" cy="4617720"/>
-          </a:xfrm>
-          <a:prstGeom prst="rect">
-            <a:avLst/>
-          </a:prstGeom>
-          <a:noFill/>
-          <a:ln/>
-        </p:spPr>
-        <p:txBody>
-          <a:bodyPr wrap="square" lIns="0" tIns="0" rIns="0" bIns="0" rtlCol="0" anchor="t"/>
-          <a:lstStyle/>
-          <a:p>
-            <a:pPr algn="l" indent="0" marL="0">
-              <a:spcAft>
-                <a:spcPts val="800"/>
-              </a:spcAft>
-              <a:buNone/>
-            </a:pPr>
-            <a:r>
-              <a:rPr lang="en-US" sz="3600" b="1" dirty="0">
-                <a:solidFill>
-                  <a:srgbClr val="111111"/>
-                </a:solidFill>
-                <a:latin typeface="Times New Roman" pitchFamily="34" charset="0"/>
-                <a:ea typeface="Times New Roman" pitchFamily="34" charset="-122"/>
-                <a:cs typeface="Times New Roman" pitchFamily="34" charset="-120"/>
-              </a:rPr>
-              <a:t>Questionnaires: </a:t>
-            </a:r>
-            <a:pPr algn="l" indent="0" marL="0">
-              <a:spcAft>
-                <a:spcPts val="800"/>
-              </a:spcAft>
-              <a:buNone/>
-            </a:pPr>
-            <a:r>
-              <a:rPr lang="en-US" sz="3600" dirty="0">
-                <a:solidFill>
-                  <a:srgbClr val="111111"/>
-                </a:solidFill>
-                <a:latin typeface="Times New Roman" pitchFamily="34" charset="0"/>
-                <a:ea typeface="Times New Roman" pitchFamily="34" charset="-122"/>
-                <a:cs typeface="Times New Roman" pitchFamily="34" charset="-120"/>
-              </a:rPr>
-              <a:t>Written questions answered by respondents, with closed (yes/no, choices) or open questions.</a:t>
-            </a:r>
-            <a:endParaRPr lang="en-US" sz="3600" dirty="0"/>
-          </a:p>
-        </p:txBody>
-      </p:sp>
       <p:pic>
         <p:nvPicPr>
-          <p:cNvPr id="5" name="Image 0" descr="/home/claude/f4/img/v2/questionnaire_big.png">    </p:cNvPr>
+          <p:cNvPr id="3" name="Image 0" descr="/home/claude/f4/img/minesec_sheet.png">    </p:cNvPr>
           <p:cNvPicPr>
             <a:picLocks noChangeAspect="1"/>
           </p:cNvPicPr>
@@ -18181,8 +18352,8 @@
         </p:blipFill>
         <p:spPr>
           <a:xfrm>
-            <a:off x="5349240" y="2617506"/>
-            <a:ext cx="6659575" cy="2601397"/>
+            <a:off x="0" y="658368"/>
+            <a:ext cx="2468880" cy="5833872"/>
           </a:xfrm>
           <a:prstGeom prst="rect">
             <a:avLst/>
@@ -18191,14 +18362,14 @@
       </p:pic>
       <p:sp>
         <p:nvSpPr>
-          <p:cNvPr id="6" name="Text 3"/>
+          <p:cNvPr id="4" name="Text 1"/>
           <p:cNvSpPr/>
           <p:nvPr/>
         </p:nvSpPr>
         <p:spPr>
           <a:xfrm>
-            <a:off x="5349240" y="6089904"/>
-            <a:ext cx="6659575" cy="347472"/>
+            <a:off x="2697480" y="1005840"/>
+            <a:ext cx="9174175" cy="731520"/>
           </a:xfrm>
           <a:prstGeom prst="rect">
             <a:avLst/>
@@ -18207,24 +18378,124 @@
           <a:ln/>
         </p:spPr>
         <p:txBody>
-          <a:bodyPr wrap="square" lIns="0" tIns="0" rIns="0" bIns="0" rtlCol="0" anchor="ctr"/>
+          <a:bodyPr wrap="square" lIns="0" tIns="0" rIns="0" bIns="0" rtlCol="0" anchor="ctr">
+            <a:normAutofit/>
+          </a:bodyPr>
           <a:lstStyle/>
           <a:p>
             <a:pPr algn="ctr" indent="0" marL="0">
               <a:buNone/>
             </a:pPr>
             <a:r>
-              <a:rPr lang="en-US" sz="1600" i="1" dirty="0">
-                <a:solidFill>
-                  <a:srgbClr val="555555"/>
+              <a:rPr lang="en-US" sz="3600" b="1" dirty="0">
+                <a:solidFill>
+                  <a:srgbClr val="990011"/>
                 </a:solidFill>
                 <a:latin typeface="Times New Roman" pitchFamily="34" charset="0"/>
                 <a:ea typeface="Times New Roman" pitchFamily="34" charset="-122"/>
                 <a:cs typeface="Times New Roman" pitchFamily="34" charset="-120"/>
               </a:rPr>
-              <a:t>Illustration: good and bad questions</a:t>
-            </a:r>
-            <a:endParaRPr lang="en-US" sz="1600" dirty="0"/>
+              <a:t>3. Primary Data Collection Techniques</a:t>
+            </a:r>
+            <a:endParaRPr lang="en-US" sz="3600" dirty="0"/>
+          </a:p>
+        </p:txBody>
+      </p:sp>
+      <p:sp>
+        <p:nvSpPr>
+          <p:cNvPr id="5" name="Text 2"/>
+          <p:cNvSpPr/>
+          <p:nvPr/>
+        </p:nvSpPr>
+        <p:spPr>
+          <a:xfrm>
+            <a:off x="2697480" y="1737360"/>
+            <a:ext cx="9174175" cy="457200"/>
+          </a:xfrm>
+          <a:prstGeom prst="rect">
+            <a:avLst/>
+          </a:prstGeom>
+          <a:noFill/>
+          <a:ln/>
+        </p:spPr>
+        <p:txBody>
+          <a:bodyPr wrap="square" lIns="0" tIns="0" rIns="0" bIns="0" rtlCol="0" anchor="ctr"/>
+          <a:lstStyle/>
+          <a:p>
+            <a:pPr algn="l" indent="0" marL="0">
+              <a:buNone/>
+            </a:pPr>
+            <a:r>
+              <a:rPr lang="en-US" sz="3200" b="1" dirty="0">
+                <a:solidFill>
+                  <a:srgbClr val="990011"/>
+                </a:solidFill>
+                <a:latin typeface="Times New Roman" pitchFamily="34" charset="0"/>
+                <a:ea typeface="Times New Roman" pitchFamily="34" charset="-122"/>
+                <a:cs typeface="Times New Roman" pitchFamily="34" charset="-120"/>
+              </a:rPr>
+              <a:t>A) Observation, Recording and Measurement</a:t>
+            </a:r>
+            <a:endParaRPr lang="en-US" sz="3200" dirty="0"/>
+          </a:p>
+        </p:txBody>
+      </p:sp>
+      <p:sp>
+        <p:nvSpPr>
+          <p:cNvPr id="6" name="Text 3"/>
+          <p:cNvSpPr/>
+          <p:nvPr/>
+        </p:nvSpPr>
+        <p:spPr>
+          <a:xfrm>
+            <a:off x="2697480" y="2240280"/>
+            <a:ext cx="9174175" cy="4206240"/>
+          </a:xfrm>
+          <a:prstGeom prst="rect">
+            <a:avLst/>
+          </a:prstGeom>
+          <a:noFill/>
+          <a:ln/>
+        </p:spPr>
+        <p:txBody>
+          <a:bodyPr wrap="square" lIns="0" tIns="0" rIns="0" bIns="0" rtlCol="0" anchor="t"/>
+          <a:lstStyle/>
+          <a:p>
+            <a:pPr algn="l" indent="0" marL="0">
+              <a:spcAft>
+                <a:spcPts val="800"/>
+              </a:spcAft>
+              <a:buNone/>
+            </a:pPr>
+            <a:r>
+              <a:rPr lang="en-US" sz="4000" b="1" dirty="0">
+                <a:solidFill>
+                  <a:srgbClr val="111111"/>
+                </a:solidFill>
+                <a:latin typeface="Times New Roman" pitchFamily="34" charset="0"/>
+                <a:ea typeface="Times New Roman" pitchFamily="34" charset="-122"/>
+                <a:cs typeface="Times New Roman" pitchFamily="34" charset="-120"/>
+              </a:rPr>
+              <a:t>Pictures, filming and video recording: </a:t>
+            </a:r>
+            <a:pPr algn="l" indent="0" marL="0">
+              <a:spcAft>
+                <a:spcPts val="800"/>
+              </a:spcAft>
+              <a:buNone/>
+            </a:pPr>
+            <a:r>
+              <a:rPr lang="en-US" sz="4000" dirty="0">
+                <a:solidFill>
+                  <a:srgbClr val="111111"/>
+                </a:solidFill>
+                <a:latin typeface="Times New Roman" pitchFamily="34" charset="0"/>
+                <a:ea typeface="Times New Roman" pitchFamily="34" charset="-122"/>
+                <a:cs typeface="Times New Roman" pitchFamily="34" charset="-120"/>
+              </a:rPr>
+              <a:t>Photographs and videos record landscapes, house types or activities as evidence. For example, a student photographs the types of houses in the Yelwa quarter.</a:t>
+            </a:r>
+            <a:endParaRPr lang="en-US" sz="4000" dirty="0"/>
           </a:p>
         </p:txBody>
       </p:sp>
@@ -18413,8 +18684,47 @@
         </p:nvSpPr>
         <p:spPr>
           <a:xfrm>
-            <a:off x="2697480" y="1783080"/>
-            <a:ext cx="9174175" cy="4663440"/>
+            <a:off x="2697480" y="1737360"/>
+            <a:ext cx="9174175" cy="457200"/>
+          </a:xfrm>
+          <a:prstGeom prst="rect">
+            <a:avLst/>
+          </a:prstGeom>
+          <a:noFill/>
+          <a:ln/>
+        </p:spPr>
+        <p:txBody>
+          <a:bodyPr wrap="square" lIns="0" tIns="0" rIns="0" bIns="0" rtlCol="0" anchor="ctr"/>
+          <a:lstStyle/>
+          <a:p>
+            <a:pPr algn="l" indent="0" marL="0">
+              <a:buNone/>
+            </a:pPr>
+            <a:r>
+              <a:rPr lang="en-US" sz="3200" b="1" dirty="0">
+                <a:solidFill>
+                  <a:srgbClr val="990011"/>
+                </a:solidFill>
+                <a:latin typeface="Times New Roman" pitchFamily="34" charset="0"/>
+                <a:ea typeface="Times New Roman" pitchFamily="34" charset="-122"/>
+                <a:cs typeface="Times New Roman" pitchFamily="34" charset="-120"/>
+              </a:rPr>
+              <a:t>A) Observation, Recording and Measurement</a:t>
+            </a:r>
+            <a:endParaRPr lang="en-US" sz="3200" dirty="0"/>
+          </a:p>
+        </p:txBody>
+      </p:sp>
+      <p:sp>
+        <p:nvSpPr>
+          <p:cNvPr id="6" name="Text 3"/>
+          <p:cNvSpPr/>
+          <p:nvPr/>
+        </p:nvSpPr>
+        <p:spPr>
+          <a:xfrm>
+            <a:off x="2697480" y="2240280"/>
+            <a:ext cx="9174175" cy="4206240"/>
           </a:xfrm>
           <a:prstGeom prst="rect">
             <a:avLst/>
@@ -18441,7 +18751,7 @@
                 <a:ea typeface="Times New Roman" pitchFamily="34" charset="-122"/>
                 <a:cs typeface="Times New Roman" pitchFamily="34" charset="-120"/>
               </a:rPr>
-              <a:t>Interviews: </a:t>
+              <a:t>Measurement: </a:t>
             </a:r>
             <a:pPr algn="l" indent="0" marL="0">
               <a:spcAft>
@@ -18458,44 +18768,7 @@
                 <a:ea typeface="Times New Roman" pitchFamily="34" charset="-122"/>
                 <a:cs typeface="Times New Roman" pitchFamily="34" charset="-120"/>
               </a:rPr>
-              <a:t>Face-to-face or telephone conversations, structured (fixed questions) or unstructured.</a:t>
-            </a:r>
-            <a:endParaRPr lang="en-US" sz="4000" dirty="0"/>
-          </a:p>
-          <a:p>
-            <a:pPr algn="l" indent="0" marL="0">
-              <a:spcAft>
-                <a:spcPts val="800"/>
-              </a:spcAft>
-              <a:buNone/>
-            </a:pPr>
-            <a:r>
-              <a:rPr lang="en-US" sz="4000" b="1" dirty="0">
-                <a:solidFill>
-                  <a:srgbClr val="111111"/>
-                </a:solidFill>
-                <a:latin typeface="Times New Roman" pitchFamily="34" charset="0"/>
-                <a:ea typeface="Times New Roman" pitchFamily="34" charset="-122"/>
-                <a:cs typeface="Times New Roman" pitchFamily="34" charset="-120"/>
-              </a:rPr>
-              <a:t>Focus group discussions: </a:t>
-            </a:r>
-            <a:pPr algn="l" indent="0" marL="0">
-              <a:spcAft>
-                <a:spcPts val="800"/>
-              </a:spcAft>
-              <a:buNone/>
-            </a:pPr>
-            <a:r>
-              <a:rPr lang="en-US" sz="4000" dirty="0">
-                <a:solidFill>
-                  <a:srgbClr val="111111"/>
-                </a:solidFill>
-                <a:latin typeface="Times New Roman" pitchFamily="34" charset="0"/>
-                <a:ea typeface="Times New Roman" pitchFamily="34" charset="-122"/>
-                <a:cs typeface="Times New Roman" pitchFamily="34" charset="-120"/>
-              </a:rPr>
-              <a:t>A guided discussion with 6–10 people sharing a characteristic, such as cotton farmers near Garoua discussing climate change.</a:t>
+              <a:t>Instruments give precise figures, such as a thermometer for temperature, a rain gauge for rainfall and a measuring tape for the width of a river. A clinometer measures the angle of slopes.</a:t>
             </a:r>
             <a:endParaRPr lang="en-US" sz="4000" dirty="0"/>
           </a:p>
@@ -18826,15 +19099,176 @@
                 <a:ea typeface="Calibri" pitchFamily="34" charset="-122"/>
                 <a:cs typeface="Calibri" pitchFamily="34" charset="-120"/>
               </a:rPr>
-              <a:t>FORMATIVE EVALUATION</a:t>
+              <a:t>BOARD SUMMARY</a:t>
             </a:r>
             <a:endParaRPr lang="en-US" sz="1400" dirty="0"/>
+          </a:p>
+        </p:txBody>
+      </p:sp>
+      <p:sp>
+        <p:nvSpPr>
+          <p:cNvPr id="3" name="Text 1"/>
+          <p:cNvSpPr/>
+          <p:nvPr/>
+        </p:nvSpPr>
+        <p:spPr>
+          <a:xfrm>
+            <a:off x="365760" y="1005840"/>
+            <a:ext cx="11460175" cy="731520"/>
+          </a:xfrm>
+          <a:prstGeom prst="rect">
+            <a:avLst/>
+          </a:prstGeom>
+          <a:noFill/>
+          <a:ln/>
+        </p:spPr>
+        <p:txBody>
+          <a:bodyPr wrap="square" lIns="0" tIns="0" rIns="0" bIns="0" rtlCol="0" anchor="ctr">
+            <a:normAutofit/>
+          </a:bodyPr>
+          <a:lstStyle/>
+          <a:p>
+            <a:pPr algn="ctr" indent="0" marL="0">
+              <a:buNone/>
+            </a:pPr>
+            <a:r>
+              <a:rPr lang="en-US" sz="3600" b="1" dirty="0">
+                <a:solidFill>
+                  <a:srgbClr val="990011"/>
+                </a:solidFill>
+                <a:latin typeface="Times New Roman" pitchFamily="34" charset="0"/>
+                <a:ea typeface="Times New Roman" pitchFamily="34" charset="-122"/>
+                <a:cs typeface="Times New Roman" pitchFamily="34" charset="-120"/>
+              </a:rPr>
+              <a:t>3. Primary Data Collection Techniques</a:t>
+            </a:r>
+            <a:endParaRPr lang="en-US" sz="3600" dirty="0"/>
+          </a:p>
+        </p:txBody>
+      </p:sp>
+      <p:sp>
+        <p:nvSpPr>
+          <p:cNvPr id="4" name="Text 2"/>
+          <p:cNvSpPr/>
+          <p:nvPr/>
+        </p:nvSpPr>
+        <p:spPr>
+          <a:xfrm>
+            <a:off x="365760" y="1737360"/>
+            <a:ext cx="6035040" cy="457200"/>
+          </a:xfrm>
+          <a:prstGeom prst="rect">
+            <a:avLst/>
+          </a:prstGeom>
+          <a:noFill/>
+          <a:ln/>
+        </p:spPr>
+        <p:txBody>
+          <a:bodyPr wrap="square" lIns="0" tIns="0" rIns="0" bIns="0" rtlCol="0" anchor="ctr">
+            <a:normAutofit/>
+          </a:bodyPr>
+          <a:lstStyle/>
+          <a:p>
+            <a:pPr algn="l" indent="0" marL="0">
+              <a:buNone/>
+            </a:pPr>
+            <a:r>
+              <a:rPr lang="en-US" sz="3000" b="1" dirty="0">
+                <a:solidFill>
+                  <a:srgbClr val="990011"/>
+                </a:solidFill>
+                <a:latin typeface="Times New Roman" pitchFamily="34" charset="0"/>
+                <a:ea typeface="Times New Roman" pitchFamily="34" charset="-122"/>
+                <a:cs typeface="Times New Roman" pitchFamily="34" charset="-120"/>
+              </a:rPr>
+              <a:t>B) Questionnaires, Interviews and Focus Groups</a:t>
+            </a:r>
+            <a:endParaRPr lang="en-US" sz="3000" dirty="0"/>
+          </a:p>
+        </p:txBody>
+      </p:sp>
+      <p:sp>
+        <p:nvSpPr>
+          <p:cNvPr id="5" name="Text 3"/>
+          <p:cNvSpPr/>
+          <p:nvPr/>
+        </p:nvSpPr>
+        <p:spPr>
+          <a:xfrm>
+            <a:off x="365760" y="2240280"/>
+            <a:ext cx="6035040" cy="4160520"/>
+          </a:xfrm>
+          <a:prstGeom prst="rect">
+            <a:avLst/>
+          </a:prstGeom>
+          <a:noFill/>
+          <a:ln/>
+        </p:spPr>
+        <p:txBody>
+          <a:bodyPr wrap="square" lIns="0" tIns="0" rIns="0" bIns="0" rtlCol="0" anchor="t"/>
+          <a:lstStyle/>
+          <a:p>
+            <a:pPr algn="l" indent="0" marL="0">
+              <a:spcAft>
+                <a:spcPts val="800"/>
+              </a:spcAft>
+              <a:buNone/>
+            </a:pPr>
+            <a:r>
+              <a:rPr lang="en-US" sz="2800" i="1" dirty="0">
+                <a:solidFill>
+                  <a:srgbClr val="111111"/>
+                </a:solidFill>
+                <a:latin typeface="Times New Roman" pitchFamily="34" charset="0"/>
+                <a:ea typeface="Times New Roman" pitchFamily="34" charset="-122"/>
+                <a:cs typeface="Times New Roman" pitchFamily="34" charset="-120"/>
+              </a:rPr>
+              <a:t>Data are collected from people with the following techniques:</a:t>
+            </a:r>
+            <a:endParaRPr lang="en-US" sz="2800" dirty="0"/>
+          </a:p>
+          <a:p>
+            <a:pPr algn="l" indent="0" marL="0">
+              <a:spcAft>
+                <a:spcPts val="800"/>
+              </a:spcAft>
+              <a:buNone/>
+            </a:pPr>
+            <a:r>
+              <a:rPr lang="en-US" sz="2800" b="1" dirty="0">
+                <a:solidFill>
+                  <a:srgbClr val="111111"/>
+                </a:solidFill>
+                <a:latin typeface="Times New Roman" pitchFamily="34" charset="0"/>
+                <a:ea typeface="Times New Roman" pitchFamily="34" charset="-122"/>
+                <a:cs typeface="Times New Roman" pitchFamily="34" charset="-120"/>
+              </a:rPr>
+              <a:t>Questionnaires: </a:t>
+            </a:r>
+            <a:pPr algn="l" indent="0" marL="0">
+              <a:spcAft>
+                <a:spcPts val="800"/>
+              </a:spcAft>
+              <a:buNone/>
+            </a:pPr>
+            <a:r>
+              <a:rPr lang="en-US" sz="2800" dirty="0">
+                <a:solidFill>
+                  <a:srgbClr val="111111"/>
+                </a:solidFill>
+                <a:latin typeface="Times New Roman" pitchFamily="34" charset="0"/>
+                <a:ea typeface="Times New Roman" pitchFamily="34" charset="-122"/>
+                <a:cs typeface="Times New Roman" pitchFamily="34" charset="-120"/>
+              </a:rPr>
+              <a:t>They are written questions answered by respondents, with closed questions (yes or no, or choices) or open questions. Closed questions are easy to count, while open questions give more detail.</a:t>
+            </a:r>
+            <a:endParaRPr lang="en-US" sz="2800" dirty="0"/>
           </a:p>
         </p:txBody>
       </p:sp>
       <p:pic>
         <p:nvPicPr>
-          <p:cNvPr id="3" name="Image 0" descr="/home/claude/f4/img/minesec_sheet.png">    </p:cNvPr>
+          <p:cNvPr id="6" name="Image 0" descr="/home/claude/f4/img/v2/questionnaire_big.png">    </p:cNvPr>
           <p:cNvPicPr>
             <a:picLocks noChangeAspect="1"/>
           </p:cNvPicPr>
@@ -18848,8 +19282,8 @@
         </p:blipFill>
         <p:spPr>
           <a:xfrm>
-            <a:off x="0" y="658368"/>
-            <a:ext cx="5120640" cy="5833872"/>
+            <a:off x="6537960" y="2849678"/>
+            <a:ext cx="5470855" cy="2137053"/>
           </a:xfrm>
           <a:prstGeom prst="rect">
             <a:avLst/>
@@ -18858,14 +19292,14 @@
       </p:pic>
       <p:sp>
         <p:nvSpPr>
-          <p:cNvPr id="4" name="Text 1"/>
+          <p:cNvPr id="7" name="Text 4"/>
           <p:cNvSpPr/>
           <p:nvPr/>
         </p:nvSpPr>
         <p:spPr>
           <a:xfrm>
-            <a:off x="5349240" y="1005840"/>
-            <a:ext cx="6522415" cy="731520"/>
+            <a:off x="6537960" y="6089904"/>
+            <a:ext cx="5470855" cy="347472"/>
           </a:xfrm>
           <a:prstGeom prst="rect">
             <a:avLst/>
@@ -18874,68 +19308,24 @@
           <a:ln/>
         </p:spPr>
         <p:txBody>
-          <a:bodyPr wrap="square" lIns="0" tIns="0" rIns="0" bIns="0" rtlCol="0" anchor="ctr">
-            <a:normAutofit/>
-          </a:bodyPr>
+          <a:bodyPr wrap="square" lIns="0" tIns="0" rIns="0" bIns="0" rtlCol="0" anchor="ctr"/>
           <a:lstStyle/>
           <a:p>
             <a:pPr algn="ctr" indent="0" marL="0">
               <a:buNone/>
             </a:pPr>
             <a:r>
-              <a:rPr lang="en-US" sz="3600" b="1" dirty="0">
-                <a:solidFill>
-                  <a:srgbClr val="990011"/>
+              <a:rPr lang="en-US" sz="1600" i="1" dirty="0">
+                <a:solidFill>
+                  <a:srgbClr val="555555"/>
                 </a:solidFill>
                 <a:latin typeface="Times New Roman" pitchFamily="34" charset="0"/>
                 <a:ea typeface="Times New Roman" pitchFamily="34" charset="-122"/>
                 <a:cs typeface="Times New Roman" pitchFamily="34" charset="-120"/>
               </a:rPr>
-              <a:t>Evaluation 1</a:t>
-            </a:r>
-            <a:endParaRPr lang="en-US" sz="3600" dirty="0"/>
-          </a:p>
-        </p:txBody>
-      </p:sp>
-      <p:sp>
-        <p:nvSpPr>
-          <p:cNvPr id="5" name="Text 2"/>
-          <p:cNvSpPr/>
-          <p:nvPr/>
-        </p:nvSpPr>
-        <p:spPr>
-          <a:xfrm>
-            <a:off x="5349240" y="1783080"/>
-            <a:ext cx="6522415" cy="4663440"/>
-          </a:xfrm>
-          <a:prstGeom prst="rect">
-            <a:avLst/>
-          </a:prstGeom>
-          <a:noFill/>
-          <a:ln/>
-        </p:spPr>
-        <p:txBody>
-          <a:bodyPr wrap="square" lIns="0" tIns="0" rIns="0" bIns="0" rtlCol="0" anchor="t"/>
-          <a:lstStyle/>
-          <a:p>
-            <a:pPr algn="l" indent="0" marL="0">
-              <a:spcAft>
-                <a:spcPts val="800"/>
-              </a:spcAft>
-              <a:buNone/>
-            </a:pPr>
-            <a:r>
-              <a:rPr lang="en-US" sz="4000" dirty="0">
-                <a:solidFill>
-                  <a:srgbClr val="111111"/>
-                </a:solidFill>
-                <a:latin typeface="Times New Roman" pitchFamily="34" charset="0"/>
-                <a:ea typeface="Times New Roman" pitchFamily="34" charset="-122"/>
-                <a:cs typeface="Times New Roman" pitchFamily="34" charset="-120"/>
-              </a:rPr>
-              <a:t>Distinguish primary data from secondary data, with one example from Garoua for each.</a:t>
-            </a:r>
-            <a:endParaRPr lang="en-US" sz="4000" dirty="0"/>
+              <a:t>Illustration: a questionnaire</a:t>
+            </a:r>
+            <a:endParaRPr lang="en-US" sz="1600" dirty="0"/>
           </a:p>
         </p:txBody>
       </p:sp>
@@ -19045,7 +19435,7 @@
                 <a:ea typeface="Calibri" pitchFamily="34" charset="-122"/>
                 <a:cs typeface="Calibri" pitchFamily="34" charset="-120"/>
               </a:rPr>
-              <a:t>FORMATIVE EVALUATION</a:t>
+              <a:t>BOARD SUMMARY</a:t>
             </a:r>
             <a:endParaRPr lang="en-US" sz="1400" dirty="0"/>
           </a:p>
@@ -19068,7 +19458,7 @@
         <p:spPr>
           <a:xfrm>
             <a:off x="0" y="658368"/>
-            <a:ext cx="5120640" cy="5833872"/>
+            <a:ext cx="3840480" cy="5833872"/>
           </a:xfrm>
           <a:prstGeom prst="rect">
             <a:avLst/>
@@ -19083,8 +19473,8 @@
         </p:nvSpPr>
         <p:spPr>
           <a:xfrm>
-            <a:off x="5349240" y="1005840"/>
-            <a:ext cx="6522415" cy="731520"/>
+            <a:off x="4069080" y="1005840"/>
+            <a:ext cx="7802575" cy="731520"/>
           </a:xfrm>
           <a:prstGeom prst="rect">
             <a:avLst/>
@@ -19110,7 +19500,7 @@
                 <a:ea typeface="Times New Roman" pitchFamily="34" charset="-122"/>
                 <a:cs typeface="Times New Roman" pitchFamily="34" charset="-120"/>
               </a:rPr>
-              <a:t>Expected Answer</a:t>
+              <a:t>3. Primary Data Collection Techniques</a:t>
             </a:r>
             <a:endParaRPr lang="en-US" sz="3600" dirty="0"/>
           </a:p>
@@ -19124,8 +19514,47 @@
         </p:nvSpPr>
         <p:spPr>
           <a:xfrm>
-            <a:off x="5349240" y="1783080"/>
-            <a:ext cx="6522415" cy="4663440"/>
+            <a:off x="4069080" y="1737360"/>
+            <a:ext cx="7802575" cy="457200"/>
+          </a:xfrm>
+          <a:prstGeom prst="rect">
+            <a:avLst/>
+          </a:prstGeom>
+          <a:noFill/>
+          <a:ln/>
+        </p:spPr>
+        <p:txBody>
+          <a:bodyPr wrap="square" lIns="0" tIns="0" rIns="0" bIns="0" rtlCol="0" anchor="ctr"/>
+          <a:lstStyle/>
+          <a:p>
+            <a:pPr algn="l" indent="0" marL="0">
+              <a:buNone/>
+            </a:pPr>
+            <a:r>
+              <a:rPr lang="en-US" sz="2600" b="1" dirty="0">
+                <a:solidFill>
+                  <a:srgbClr val="990011"/>
+                </a:solidFill>
+                <a:latin typeface="Times New Roman" pitchFamily="34" charset="0"/>
+                <a:ea typeface="Times New Roman" pitchFamily="34" charset="-122"/>
+                <a:cs typeface="Times New Roman" pitchFamily="34" charset="-120"/>
+              </a:rPr>
+              <a:t>B) Questionnaires, Interviews and Focus Groups</a:t>
+            </a:r>
+            <a:endParaRPr lang="en-US" sz="2600" dirty="0"/>
+          </a:p>
+        </p:txBody>
+      </p:sp>
+      <p:sp>
+        <p:nvSpPr>
+          <p:cNvPr id="6" name="Text 3"/>
+          <p:cNvSpPr/>
+          <p:nvPr/>
+        </p:nvSpPr>
+        <p:spPr>
+          <a:xfrm>
+            <a:off x="4069080" y="2240280"/>
+            <a:ext cx="7802575" cy="4206240"/>
           </a:xfrm>
           <a:prstGeom prst="rect">
             <a:avLst/>
@@ -19144,7 +19573,7 @@
               <a:buNone/>
             </a:pPr>
             <a:r>
-              <a:rPr lang="en-US" sz="4000" dirty="0">
+              <a:rPr lang="en-US" sz="4000" b="1" dirty="0">
                 <a:solidFill>
                   <a:srgbClr val="111111"/>
                 </a:solidFill>
@@ -19152,7 +19581,24 @@
                 <a:ea typeface="Times New Roman" pitchFamily="34" charset="-122"/>
                 <a:cs typeface="Times New Roman" pitchFamily="34" charset="-120"/>
               </a:rPr>
-              <a:t>Primary: collected by the researcher (counting motos at a crossroads); secondary: already published (BUCREP census figures).</a:t>
+              <a:t>Interviews: </a:t>
+            </a:r>
+            <a:pPr algn="l" indent="0" marL="0">
+              <a:spcAft>
+                <a:spcPts val="800"/>
+              </a:spcAft>
+              <a:buNone/>
+            </a:pPr>
+            <a:r>
+              <a:rPr lang="en-US" sz="4000" dirty="0">
+                <a:solidFill>
+                  <a:srgbClr val="111111"/>
+                </a:solidFill>
+                <a:latin typeface="Times New Roman" pitchFamily="34" charset="0"/>
+                <a:ea typeface="Times New Roman" pitchFamily="34" charset="-122"/>
+                <a:cs typeface="Times New Roman" pitchFamily="34" charset="-120"/>
+              </a:rPr>
+              <a:t>They are face-to-face or telephone conversations with respondents. They can be structured, with fixed questions, or unstructured, like a free conversation.</a:t>
             </a:r>
             <a:endParaRPr lang="en-US" sz="4000" dirty="0"/>
           </a:p>
@@ -19264,7 +19710,7 @@
                 <a:ea typeface="Calibri" pitchFamily="34" charset="-122"/>
                 <a:cs typeface="Calibri" pitchFamily="34" charset="-120"/>
               </a:rPr>
-              <a:t>FORMATIVE EVALUATION</a:t>
+              <a:t>BOARD SUMMARY</a:t>
             </a:r>
             <a:endParaRPr lang="en-US" sz="1400" dirty="0"/>
           </a:p>
@@ -19287,7 +19733,7 @@
         <p:spPr>
           <a:xfrm>
             <a:off x="0" y="658368"/>
-            <a:ext cx="5120640" cy="5833872"/>
+            <a:ext cx="2468880" cy="5833872"/>
           </a:xfrm>
           <a:prstGeom prst="rect">
             <a:avLst/>
@@ -19302,8 +19748,8 @@
         </p:nvSpPr>
         <p:spPr>
           <a:xfrm>
-            <a:off x="5349240" y="1005840"/>
-            <a:ext cx="6522415" cy="731520"/>
+            <a:off x="2697480" y="1005840"/>
+            <a:ext cx="9174175" cy="731520"/>
           </a:xfrm>
           <a:prstGeom prst="rect">
             <a:avLst/>
@@ -19329,7 +19775,7 @@
                 <a:ea typeface="Times New Roman" pitchFamily="34" charset="-122"/>
                 <a:cs typeface="Times New Roman" pitchFamily="34" charset="-120"/>
               </a:rPr>
-              <a:t>Evaluation 2</a:t>
+              <a:t>3. Primary Data Collection Techniques</a:t>
             </a:r>
             <a:endParaRPr lang="en-US" sz="3600" dirty="0"/>
           </a:p>
@@ -19343,8 +19789,47 @@
         </p:nvSpPr>
         <p:spPr>
           <a:xfrm>
-            <a:off x="5349240" y="1783080"/>
-            <a:ext cx="6522415" cy="4663440"/>
+            <a:off x="2697480" y="1737360"/>
+            <a:ext cx="9174175" cy="457200"/>
+          </a:xfrm>
+          <a:prstGeom prst="rect">
+            <a:avLst/>
+          </a:prstGeom>
+          <a:noFill/>
+          <a:ln/>
+        </p:spPr>
+        <p:txBody>
+          <a:bodyPr wrap="square" lIns="0" tIns="0" rIns="0" bIns="0" rtlCol="0" anchor="ctr"/>
+          <a:lstStyle/>
+          <a:p>
+            <a:pPr algn="l" indent="0" marL="0">
+              <a:buNone/>
+            </a:pPr>
+            <a:r>
+              <a:rPr lang="en-US" sz="3100" b="1" dirty="0">
+                <a:solidFill>
+                  <a:srgbClr val="990011"/>
+                </a:solidFill>
+                <a:latin typeface="Times New Roman" pitchFamily="34" charset="0"/>
+                <a:ea typeface="Times New Roman" pitchFamily="34" charset="-122"/>
+                <a:cs typeface="Times New Roman" pitchFamily="34" charset="-120"/>
+              </a:rPr>
+              <a:t>B) Questionnaires, Interviews and Focus Groups</a:t>
+            </a:r>
+            <a:endParaRPr lang="en-US" sz="3100" dirty="0"/>
+          </a:p>
+        </p:txBody>
+      </p:sp>
+      <p:sp>
+        <p:nvSpPr>
+          <p:cNvPr id="6" name="Text 3"/>
+          <p:cNvSpPr/>
+          <p:nvPr/>
+        </p:nvSpPr>
+        <p:spPr>
+          <a:xfrm>
+            <a:off x="2697480" y="2240280"/>
+            <a:ext cx="9174175" cy="4206240"/>
           </a:xfrm>
           <a:prstGeom prst="rect">
             <a:avLst/>
@@ -19363,7 +19848,7 @@
               <a:buNone/>
             </a:pPr>
             <a:r>
-              <a:rPr lang="en-US" sz="4000" dirty="0">
+              <a:rPr lang="en-US" sz="4000" b="1" dirty="0">
                 <a:solidFill>
                   <a:srgbClr val="111111"/>
                 </a:solidFill>
@@ -19371,7 +19856,24 @@
                 <a:ea typeface="Times New Roman" pitchFamily="34" charset="-122"/>
                 <a:cs typeface="Times New Roman" pitchFamily="34" charset="-120"/>
               </a:rPr>
-              <a:t>Explain how to select 30 people from a list of 600 by systematic sampling.</a:t>
+              <a:t>Focus group discussions: </a:t>
+            </a:r>
+            <a:pPr algn="l" indent="0" marL="0">
+              <a:spcAft>
+                <a:spcPts val="800"/>
+              </a:spcAft>
+              <a:buNone/>
+            </a:pPr>
+            <a:r>
+              <a:rPr lang="en-US" sz="4000" dirty="0">
+                <a:solidFill>
+                  <a:srgbClr val="111111"/>
+                </a:solidFill>
+                <a:latin typeface="Times New Roman" pitchFamily="34" charset="0"/>
+                <a:ea typeface="Times New Roman" pitchFamily="34" charset="-122"/>
+                <a:cs typeface="Times New Roman" pitchFamily="34" charset="-120"/>
+              </a:rPr>
+              <a:t>A small group of 6 to 10 people who share a characteristic discusses a topic guided by the researcher. For example, cotton farmers near Garoua discuss the effects of climate change on their harvests.</a:t>
             </a:r>
             <a:endParaRPr lang="en-US" sz="4000" dirty="0"/>
           </a:p>
@@ -19548,7 +20050,7 @@
                 <a:ea typeface="Times New Roman" pitchFamily="34" charset="-122"/>
                 <a:cs typeface="Times New Roman" pitchFamily="34" charset="-120"/>
               </a:rPr>
-              <a:t>Expected Answer</a:t>
+              <a:t>Evaluation 1</a:t>
             </a:r>
             <a:endParaRPr lang="en-US" sz="3600" dirty="0"/>
           </a:p>
@@ -19590,7 +20092,7 @@
                 <a:ea typeface="Times New Roman" pitchFamily="34" charset="-122"/>
                 <a:cs typeface="Times New Roman" pitchFamily="34" charset="-120"/>
               </a:rPr>
-              <a:t>k = 600 ÷ 30 = 20; choose a random start between 1 and 20, then every 20th person.</a:t>
+              <a:t>Distinguish primary data from secondary data, with one example from Garoua for each.</a:t>
             </a:r>
             <a:endParaRPr lang="en-US" sz="4000" dirty="0"/>
           </a:p>
@@ -19702,7 +20204,7 @@
                 <a:ea typeface="Calibri" pitchFamily="34" charset="-122"/>
                 <a:cs typeface="Calibri" pitchFamily="34" charset="-120"/>
               </a:rPr>
-              <a:t>REMEDIATION</a:t>
+              <a:t>FORMATIVE EVALUATION</a:t>
             </a:r>
             <a:endParaRPr lang="en-US" sz="1400" dirty="0"/>
           </a:p>
@@ -19767,7 +20269,7 @@
                 <a:ea typeface="Times New Roman" pitchFamily="34" charset="-122"/>
                 <a:cs typeface="Times New Roman" pitchFamily="34" charset="-120"/>
               </a:rPr>
-              <a:t>Remediation</a:t>
+              <a:t>Expected Answer</a:t>
             </a:r>
             <a:endParaRPr lang="en-US" sz="3600" dirty="0"/>
           </a:p>
@@ -19801,7 +20303,7 @@
               <a:buNone/>
             </a:pPr>
             <a:r>
-              <a:rPr lang="en-US" sz="4000" b="1" dirty="0">
+              <a:rPr lang="en-US" sz="4000" dirty="0">
                 <a:solidFill>
                   <a:srgbClr val="111111"/>
                 </a:solidFill>
@@ -19809,51 +20311,7 @@
                 <a:ea typeface="Times New Roman" pitchFamily="34" charset="-122"/>
                 <a:cs typeface="Times New Roman" pitchFamily="34" charset="-120"/>
               </a:rPr>
-              <a:t>Fill in the blanks:</a:t>
-            </a:r>
-            <a:endParaRPr lang="en-US" sz="4000" dirty="0"/>
-          </a:p>
-          <a:p>
-            <a:pPr algn="l" marL="342900" indent="-342900">
-              <a:spcAft>
-                <a:spcPts val="800"/>
-              </a:spcAft>
-              <a:buSzPct val="100000"/>
-              <a:buFont typeface="+mj-lt"/>
-              <a:buAutoNum type="arabicPeriod" startAt="1"/>
-            </a:pPr>
-            <a:r>
-              <a:rPr lang="en-US" sz="4000" dirty="0">
-                <a:solidFill>
-                  <a:srgbClr val="111111"/>
-                </a:solidFill>
-                <a:latin typeface="Times New Roman" pitchFamily="34" charset="0"/>
-                <a:ea typeface="Times New Roman" pitchFamily="34" charset="-122"/>
-                <a:cs typeface="Times New Roman" pitchFamily="34" charset="-120"/>
-              </a:rPr>
-              <a:t>Data collected by the researcher are ______ data.</a:t>
-            </a:r>
-            <a:endParaRPr lang="en-US" sz="4000" dirty="0"/>
-          </a:p>
-          <a:p>
-            <a:pPr algn="l" marL="342900" indent="-342900">
-              <a:spcAft>
-                <a:spcPts val="800"/>
-              </a:spcAft>
-              <a:buSzPct val="100000"/>
-              <a:buFont typeface="+mj-lt"/>
-              <a:buAutoNum type="arabicPeriod" startAt="1"/>
-            </a:pPr>
-            <a:r>
-              <a:rPr lang="en-US" sz="4000" dirty="0">
-                <a:solidFill>
-                  <a:srgbClr val="111111"/>
-                </a:solidFill>
-                <a:latin typeface="Times New Roman" pitchFamily="34" charset="0"/>
-                <a:ea typeface="Times New Roman" pitchFamily="34" charset="-122"/>
-                <a:cs typeface="Times New Roman" pitchFamily="34" charset="-120"/>
-              </a:rPr>
-              <a:t>Choosing every 10th house is ______ sampling.</a:t>
+              <a:t>Primary: collected by the researcher (counting motos at a crossroads); secondary: already published (BUCREP census figures).</a:t>
             </a:r>
             <a:endParaRPr lang="en-US" sz="4000" dirty="0"/>
           </a:p>
@@ -19965,7 +20423,7 @@
                 <a:ea typeface="Calibri" pitchFamily="34" charset="-122"/>
                 <a:cs typeface="Calibri" pitchFamily="34" charset="-120"/>
               </a:rPr>
-              <a:t>REMEDIATION</a:t>
+              <a:t>FORMATIVE EVALUATION</a:t>
             </a:r>
             <a:endParaRPr lang="en-US" sz="1400" dirty="0"/>
           </a:p>
@@ -20030,7 +20488,7 @@
                 <a:ea typeface="Times New Roman" pitchFamily="34" charset="-122"/>
                 <a:cs typeface="Times New Roman" pitchFamily="34" charset="-120"/>
               </a:rPr>
-              <a:t>Remediation (continued)</a:t>
+              <a:t>Evaluation 2</a:t>
             </a:r>
             <a:endParaRPr lang="en-US" sz="3600" dirty="0"/>
           </a:p>
@@ -20057,13 +20515,11 @@
           <a:bodyPr wrap="square" lIns="0" tIns="0" rIns="0" bIns="0" rtlCol="0" anchor="t"/>
           <a:lstStyle/>
           <a:p>
-            <a:pPr algn="l" marL="342900" indent="-342900">
+            <a:pPr algn="l" indent="0" marL="0">
               <a:spcAft>
                 <a:spcPts val="800"/>
               </a:spcAft>
-              <a:buSzPct val="100000"/>
-              <a:buFont typeface="+mj-lt"/>
-              <a:buAutoNum type="arabicPeriod" startAt="1"/>
+              <a:buNone/>
             </a:pPr>
             <a:r>
               <a:rPr lang="en-US" sz="4000" dirty="0">
@@ -20074,7 +20530,7 @@
                 <a:ea typeface="Times New Roman" pitchFamily="34" charset="-122"/>
                 <a:cs typeface="Times New Roman" pitchFamily="34" charset="-120"/>
               </a:rPr>
-              <a:t>Dividing the population into groups first is ______ sampling.</a:t>
+              <a:t>Explain how to select 30 people from a list of 600 by systematic sampling.</a:t>
             </a:r>
             <a:endParaRPr lang="en-US" sz="4000" dirty="0"/>
           </a:p>
@@ -20186,7 +20642,7 @@
                 <a:ea typeface="Calibri" pitchFamily="34" charset="-122"/>
                 <a:cs typeface="Calibri" pitchFamily="34" charset="-120"/>
               </a:rPr>
-              <a:t>HOMEWORK</a:t>
+              <a:t>FORMATIVE EVALUATION</a:t>
             </a:r>
             <a:endParaRPr lang="en-US" sz="1400" dirty="0"/>
           </a:p>
@@ -20251,7 +20707,7 @@
                 <a:ea typeface="Times New Roman" pitchFamily="34" charset="-122"/>
                 <a:cs typeface="Times New Roman" pitchFamily="34" charset="-120"/>
               </a:rPr>
-              <a:t>Homework</a:t>
+              <a:t>Expected Answer</a:t>
             </a:r>
             <a:endParaRPr lang="en-US" sz="3600" dirty="0"/>
           </a:p>
@@ -20293,7 +20749,7 @@
                 <a:ea typeface="Times New Roman" pitchFamily="34" charset="-122"/>
                 <a:cs typeface="Times New Roman" pitchFamily="34" charset="-120"/>
               </a:rPr>
-              <a:t>Define the arithmetic mean.</a:t>
+              <a:t>k = 600 ÷ 30 = 20; choose a random start between 1 and 20, then every 20th person.</a:t>
             </a:r>
             <a:endParaRPr lang="en-US" sz="4000" dirty="0"/>
           </a:p>
@@ -20405,7 +20861,7 @@
                 <a:ea typeface="Calibri" pitchFamily="34" charset="-122"/>
                 <a:cs typeface="Calibri" pitchFamily="34" charset="-120"/>
               </a:rPr>
-              <a:t>NEXT LESSON</a:t>
+              <a:t>REMEDIATION</a:t>
             </a:r>
             <a:endParaRPr lang="en-US" sz="1400" dirty="0"/>
           </a:p>
@@ -20470,7 +20926,7 @@
                 <a:ea typeface="Times New Roman" pitchFamily="34" charset="-122"/>
                 <a:cs typeface="Times New Roman" pitchFamily="34" charset="-120"/>
               </a:rPr>
-              <a:t>Next Lesson</a:t>
+              <a:t>Remediation</a:t>
             </a:r>
             <a:endParaRPr lang="en-US" sz="3600" dirty="0"/>
           </a:p>
@@ -20494,10 +20950,10 @@
           <a:ln/>
         </p:spPr>
         <p:txBody>
-          <a:bodyPr wrap="square" lIns="0" tIns="0" rIns="0" bIns="0" rtlCol="0" anchor="ctr"/>
-          <a:lstStyle/>
-          <a:p>
-            <a:pPr algn="ctr" indent="0" marL="0">
+          <a:bodyPr wrap="square" lIns="0" tIns="0" rIns="0" bIns="0" rtlCol="0" anchor="t"/>
+          <a:lstStyle/>
+          <a:p>
+            <a:pPr algn="l" indent="0" marL="0">
               <a:spcAft>
                 <a:spcPts val="800"/>
               </a:spcAft>
@@ -20512,27 +20968,51 @@
                 <a:ea typeface="Times New Roman" pitchFamily="34" charset="-122"/>
                 <a:cs typeface="Times New Roman" pitchFamily="34" charset="-120"/>
               </a:rPr>
-              <a:t>Our next lesson will be on:</a:t>
+              <a:t>Fill in the blanks:</a:t>
             </a:r>
             <a:endParaRPr lang="en-US" sz="4000" dirty="0"/>
           </a:p>
           <a:p>
-            <a:pPr algn="ctr" indent="0" marL="0">
+            <a:pPr algn="l" marL="342900" indent="-342900">
               <a:spcAft>
                 <a:spcPts val="800"/>
               </a:spcAft>
-              <a:buNone/>
+              <a:buSzPct val="100000"/>
+              <a:buFont typeface="+mj-lt"/>
+              <a:buAutoNum type="arabicPeriod" startAt="1"/>
             </a:pPr>
             <a:r>
-              <a:rPr lang="en-US" sz="4000" b="1" dirty="0">
-                <a:solidFill>
-                  <a:srgbClr val="990011"/>
+              <a:rPr lang="en-US" sz="4000" dirty="0">
+                <a:solidFill>
+                  <a:srgbClr val="111111"/>
                 </a:solidFill>
                 <a:latin typeface="Times New Roman" pitchFamily="34" charset="0"/>
                 <a:ea typeface="Times New Roman" pitchFamily="34" charset="-122"/>
                 <a:cs typeface="Times New Roman" pitchFamily="34" charset="-120"/>
               </a:rPr>
-              <a:t>Quantitative Techniques 3 (Part 1): Measures of Central Tendency, Range and Quartiles</a:t>
+              <a:t>Data collected by the researcher are ______ data.</a:t>
+            </a:r>
+            <a:endParaRPr lang="en-US" sz="4000" dirty="0"/>
+          </a:p>
+          <a:p>
+            <a:pPr algn="l" marL="342900" indent="-342900">
+              <a:spcAft>
+                <a:spcPts val="800"/>
+              </a:spcAft>
+              <a:buSzPct val="100000"/>
+              <a:buFont typeface="+mj-lt"/>
+              <a:buAutoNum type="arabicPeriod" startAt="1"/>
+            </a:pPr>
+            <a:r>
+              <a:rPr lang="en-US" sz="4000" dirty="0">
+                <a:solidFill>
+                  <a:srgbClr val="111111"/>
+                </a:solidFill>
+                <a:latin typeface="Times New Roman" pitchFamily="34" charset="0"/>
+                <a:ea typeface="Times New Roman" pitchFamily="34" charset="-122"/>
+                <a:cs typeface="Times New Roman" pitchFamily="34" charset="-120"/>
+              </a:rPr>
+              <a:t>Choosing every 10th house is ______ sampling.</a:t>
             </a:r>
             <a:endParaRPr lang="en-US" sz="4000" dirty="0"/>
           </a:p>
@@ -20644,6 +21124,1016 @@
                 <a:ea typeface="Calibri" pitchFamily="34" charset="-122"/>
                 <a:cs typeface="Calibri" pitchFamily="34" charset="-120"/>
               </a:rPr>
+              <a:t>REMEDIATION</a:t>
+            </a:r>
+            <a:endParaRPr lang="en-US" sz="1400" dirty="0"/>
+          </a:p>
+        </p:txBody>
+      </p:sp>
+      <p:pic>
+        <p:nvPicPr>
+          <p:cNvPr id="3" name="Image 0" descr="/home/claude/f4/img/minesec_sheet.png">    </p:cNvPr>
+          <p:cNvPicPr>
+            <a:picLocks noChangeAspect="1"/>
+          </p:cNvPicPr>
+          <p:nvPr/>
+        </p:nvPicPr>
+        <p:blipFill>
+          <a:blip r:embed="rId1"/>
+          <a:stretch>
+            <a:fillRect/>
+          </a:stretch>
+        </p:blipFill>
+        <p:spPr>
+          <a:xfrm>
+            <a:off x="0" y="658368"/>
+            <a:ext cx="5120640" cy="5833872"/>
+          </a:xfrm>
+          <a:prstGeom prst="rect">
+            <a:avLst/>
+          </a:prstGeom>
+        </p:spPr>
+      </p:pic>
+      <p:sp>
+        <p:nvSpPr>
+          <p:cNvPr id="4" name="Text 1"/>
+          <p:cNvSpPr/>
+          <p:nvPr/>
+        </p:nvSpPr>
+        <p:spPr>
+          <a:xfrm>
+            <a:off x="5349240" y="1005840"/>
+            <a:ext cx="6522415" cy="731520"/>
+          </a:xfrm>
+          <a:prstGeom prst="rect">
+            <a:avLst/>
+          </a:prstGeom>
+          <a:noFill/>
+          <a:ln/>
+        </p:spPr>
+        <p:txBody>
+          <a:bodyPr wrap="square" lIns="0" tIns="0" rIns="0" bIns="0" rtlCol="0" anchor="ctr">
+            <a:normAutofit/>
+          </a:bodyPr>
+          <a:lstStyle/>
+          <a:p>
+            <a:pPr algn="ctr" indent="0" marL="0">
+              <a:buNone/>
+            </a:pPr>
+            <a:r>
+              <a:rPr lang="en-US" sz="3600" b="1" dirty="0">
+                <a:solidFill>
+                  <a:srgbClr val="990011"/>
+                </a:solidFill>
+                <a:latin typeface="Times New Roman" pitchFamily="34" charset="0"/>
+                <a:ea typeface="Times New Roman" pitchFamily="34" charset="-122"/>
+                <a:cs typeface="Times New Roman" pitchFamily="34" charset="-120"/>
+              </a:rPr>
+              <a:t>Remediation (continued)</a:t>
+            </a:r>
+            <a:endParaRPr lang="en-US" sz="3600" dirty="0"/>
+          </a:p>
+        </p:txBody>
+      </p:sp>
+      <p:sp>
+        <p:nvSpPr>
+          <p:cNvPr id="5" name="Text 2"/>
+          <p:cNvSpPr/>
+          <p:nvPr/>
+        </p:nvSpPr>
+        <p:spPr>
+          <a:xfrm>
+            <a:off x="5349240" y="1783080"/>
+            <a:ext cx="6522415" cy="4663440"/>
+          </a:xfrm>
+          <a:prstGeom prst="rect">
+            <a:avLst/>
+          </a:prstGeom>
+          <a:noFill/>
+          <a:ln/>
+        </p:spPr>
+        <p:txBody>
+          <a:bodyPr wrap="square" lIns="0" tIns="0" rIns="0" bIns="0" rtlCol="0" anchor="t"/>
+          <a:lstStyle/>
+          <a:p>
+            <a:pPr algn="l" marL="342900" indent="-342900">
+              <a:spcAft>
+                <a:spcPts val="800"/>
+              </a:spcAft>
+              <a:buSzPct val="100000"/>
+              <a:buFont typeface="+mj-lt"/>
+              <a:buAutoNum type="arabicPeriod" startAt="1"/>
+            </a:pPr>
+            <a:r>
+              <a:rPr lang="en-US" sz="4000" dirty="0">
+                <a:solidFill>
+                  <a:srgbClr val="111111"/>
+                </a:solidFill>
+                <a:latin typeface="Times New Roman" pitchFamily="34" charset="0"/>
+                <a:ea typeface="Times New Roman" pitchFamily="34" charset="-122"/>
+                <a:cs typeface="Times New Roman" pitchFamily="34" charset="-120"/>
+              </a:rPr>
+              <a:t>Dividing the population into groups first is ______ sampling.</a:t>
+            </a:r>
+            <a:endParaRPr lang="en-US" sz="4000" dirty="0"/>
+          </a:p>
+        </p:txBody>
+      </p:sp>
+      <p:sp>
+        <p:nvSpPr>
+          <p:cNvPr id="25" name="Slide Number Placeholder 0"/>
+          <p:cNvSpPr>
+            <a:spLocks noGrp="1"/>
+          </p:cNvSpPr>
+          <p:nvPr>
+            <p:ph type="sldNum" sz="quarter" idx="4294967295"/>
+          </p:nvPr>
+        </p:nvSpPr>
+        <p:spPr>
+          <a:xfrm>
+            <a:off x="27432" y="91440"/>
+            <a:ext cx="585216" cy="475488"/>
+          </a:xfrm>
+          <a:prstGeom prst="rect">
+            <a:avLst/>
+          </a:prstGeom>
+          <a:extLst>
+            <a:ext uri="{C572A759-6A51-4108-AA02-DFA0A04FC94B}">
+              <ma14:wrappingTextBoxFlag xmlns:ma14="http://schemas.microsoft.com/office/mac/drawingml/2011/main" val="0"/>
+            </a:ext>
+          </a:extLst>
+        </p:spPr>
+        <p:txBody>
+          <a:bodyPr/>
+          <a:lstStyle>
+            <a:lvl1pPr>
+              <a:defRPr sz="2000">
+                <a:solidFill>
+                  <a:srgbClr val="FFFFFF"/>
+                </a:solidFill>
+                <a:latin typeface="Calibri"/>
+                <a:ea typeface="Calibri"/>
+                <a:cs typeface="Calibri"/>
+              </a:defRPr>
+            </a:lvl1pPr>
+          </a:lstStyle>
+          <a:p>
+            <a:pPr algn="ctr"/>
+            <a:fld id="{F7021451-1387-4CA6-816F-3879F97B5CBC}" type="slidenum">
+              <a:rPr b="1" lang="en-US"/>
+              <a:t>58</a:t>
+            </a:fld>
+            <a:endParaRPr lang="en-US"/>
+          </a:p>
+        </p:txBody>
+      </p:sp>
+    </p:spTree>
+  </p:cSld>
+  <p:clrMapOvr>
+    <a:masterClrMapping/>
+  </p:clrMapOvr>
+</p:sld>
+</file>
+
+<file path=ppt/slides/slide59.xml><?xml version="1.0" encoding="utf-8"?>
+<p:sld xmlns:a="http://schemas.openxmlformats.org/drawingml/2006/main" xmlns:r="http://schemas.openxmlformats.org/officeDocument/2006/relationships" xmlns:p="http://schemas.openxmlformats.org/presentationml/2006/main">
+  <p:cSld name="Slide 59">
+    <p:spTree>
+      <p:nvGrpSpPr>
+        <p:cNvPr id="1" name=""/>
+        <p:cNvGrpSpPr/>
+        <p:nvPr/>
+      </p:nvGrpSpPr>
+      <p:grpSpPr>
+        <a:xfrm>
+          <a:off x="0" y="0"/>
+          <a:ext cx="0" cy="0"/>
+          <a:chOff x="0" y="0"/>
+          <a:chExt cx="0" cy="0"/>
+        </a:xfrm>
+      </p:grpSpPr>
+      <p:sp>
+        <p:nvSpPr>
+          <p:cNvPr id="2" name="Text 0"/>
+          <p:cNvSpPr/>
+          <p:nvPr/>
+        </p:nvSpPr>
+        <p:spPr>
+          <a:xfrm>
+            <a:off x="457200" y="713232"/>
+            <a:ext cx="11368735" cy="274320"/>
+          </a:xfrm>
+          <a:prstGeom prst="rect">
+            <a:avLst/>
+          </a:prstGeom>
+          <a:noFill/>
+          <a:ln/>
+        </p:spPr>
+        <p:txBody>
+          <a:bodyPr wrap="square" lIns="0" tIns="0" rIns="0" bIns="0" rtlCol="0" anchor="ctr"/>
+          <a:lstStyle/>
+          <a:p>
+            <a:pPr algn="r" indent="0" marL="0">
+              <a:buNone/>
+            </a:pPr>
+            <a:r>
+              <a:rPr lang="en-US" sz="1400" b="1" dirty="0">
+                <a:solidFill>
+                  <a:srgbClr val="1C3F6E"/>
+                </a:solidFill>
+                <a:latin typeface="Calibri" pitchFamily="34" charset="0"/>
+                <a:ea typeface="Calibri" pitchFamily="34" charset="-122"/>
+                <a:cs typeface="Calibri" pitchFamily="34" charset="-120"/>
+              </a:rPr>
+              <a:t>HOMEWORK</a:t>
+            </a:r>
+            <a:endParaRPr lang="en-US" sz="1400" dirty="0"/>
+          </a:p>
+        </p:txBody>
+      </p:sp>
+      <p:pic>
+        <p:nvPicPr>
+          <p:cNvPr id="3" name="Image 0" descr="/home/claude/f4/img/minesec_sheet.png">    </p:cNvPr>
+          <p:cNvPicPr>
+            <a:picLocks noChangeAspect="1"/>
+          </p:cNvPicPr>
+          <p:nvPr/>
+        </p:nvPicPr>
+        <p:blipFill>
+          <a:blip r:embed="rId1"/>
+          <a:stretch>
+            <a:fillRect/>
+          </a:stretch>
+        </p:blipFill>
+        <p:spPr>
+          <a:xfrm>
+            <a:off x="0" y="658368"/>
+            <a:ext cx="5120640" cy="5833872"/>
+          </a:xfrm>
+          <a:prstGeom prst="rect">
+            <a:avLst/>
+          </a:prstGeom>
+        </p:spPr>
+      </p:pic>
+      <p:sp>
+        <p:nvSpPr>
+          <p:cNvPr id="4" name="Text 1"/>
+          <p:cNvSpPr/>
+          <p:nvPr/>
+        </p:nvSpPr>
+        <p:spPr>
+          <a:xfrm>
+            <a:off x="5349240" y="1005840"/>
+            <a:ext cx="6522415" cy="731520"/>
+          </a:xfrm>
+          <a:prstGeom prst="rect">
+            <a:avLst/>
+          </a:prstGeom>
+          <a:noFill/>
+          <a:ln/>
+        </p:spPr>
+        <p:txBody>
+          <a:bodyPr wrap="square" lIns="0" tIns="0" rIns="0" bIns="0" rtlCol="0" anchor="ctr">
+            <a:normAutofit/>
+          </a:bodyPr>
+          <a:lstStyle/>
+          <a:p>
+            <a:pPr algn="ctr" indent="0" marL="0">
+              <a:buNone/>
+            </a:pPr>
+            <a:r>
+              <a:rPr lang="en-US" sz="3600" b="1" dirty="0">
+                <a:solidFill>
+                  <a:srgbClr val="990011"/>
+                </a:solidFill>
+                <a:latin typeface="Times New Roman" pitchFamily="34" charset="0"/>
+                <a:ea typeface="Times New Roman" pitchFamily="34" charset="-122"/>
+                <a:cs typeface="Times New Roman" pitchFamily="34" charset="-120"/>
+              </a:rPr>
+              <a:t>Homework</a:t>
+            </a:r>
+            <a:endParaRPr lang="en-US" sz="3600" dirty="0"/>
+          </a:p>
+        </p:txBody>
+      </p:sp>
+      <p:sp>
+        <p:nvSpPr>
+          <p:cNvPr id="5" name="Text 2"/>
+          <p:cNvSpPr/>
+          <p:nvPr/>
+        </p:nvSpPr>
+        <p:spPr>
+          <a:xfrm>
+            <a:off x="5349240" y="1783080"/>
+            <a:ext cx="6522415" cy="4663440"/>
+          </a:xfrm>
+          <a:prstGeom prst="rect">
+            <a:avLst/>
+          </a:prstGeom>
+          <a:noFill/>
+          <a:ln/>
+        </p:spPr>
+        <p:txBody>
+          <a:bodyPr wrap="square" lIns="0" tIns="0" rIns="0" bIns="0" rtlCol="0" anchor="t"/>
+          <a:lstStyle/>
+          <a:p>
+            <a:pPr algn="l" indent="0" marL="0">
+              <a:spcAft>
+                <a:spcPts val="800"/>
+              </a:spcAft>
+              <a:buNone/>
+            </a:pPr>
+            <a:r>
+              <a:rPr lang="en-US" sz="4000" dirty="0">
+                <a:solidFill>
+                  <a:srgbClr val="111111"/>
+                </a:solidFill>
+                <a:latin typeface="Times New Roman" pitchFamily="34" charset="0"/>
+                <a:ea typeface="Times New Roman" pitchFamily="34" charset="-122"/>
+                <a:cs typeface="Times New Roman" pitchFamily="34" charset="-120"/>
+              </a:rPr>
+              <a:t>Define the arithmetic mean.</a:t>
+            </a:r>
+            <a:endParaRPr lang="en-US" sz="4000" dirty="0"/>
+          </a:p>
+        </p:txBody>
+      </p:sp>
+      <p:sp>
+        <p:nvSpPr>
+          <p:cNvPr id="25" name="Slide Number Placeholder 0"/>
+          <p:cNvSpPr>
+            <a:spLocks noGrp="1"/>
+          </p:cNvSpPr>
+          <p:nvPr>
+            <p:ph type="sldNum" sz="quarter" idx="4294967295"/>
+          </p:nvPr>
+        </p:nvSpPr>
+        <p:spPr>
+          <a:xfrm>
+            <a:off x="27432" y="91440"/>
+            <a:ext cx="585216" cy="475488"/>
+          </a:xfrm>
+          <a:prstGeom prst="rect">
+            <a:avLst/>
+          </a:prstGeom>
+          <a:extLst>
+            <a:ext uri="{C572A759-6A51-4108-AA02-DFA0A04FC94B}">
+              <ma14:wrappingTextBoxFlag xmlns:ma14="http://schemas.microsoft.com/office/mac/drawingml/2011/main" val="0"/>
+            </a:ext>
+          </a:extLst>
+        </p:spPr>
+        <p:txBody>
+          <a:bodyPr/>
+          <a:lstStyle>
+            <a:lvl1pPr>
+              <a:defRPr sz="2000">
+                <a:solidFill>
+                  <a:srgbClr val="FFFFFF"/>
+                </a:solidFill>
+                <a:latin typeface="Calibri"/>
+                <a:ea typeface="Calibri"/>
+                <a:cs typeface="Calibri"/>
+              </a:defRPr>
+            </a:lvl1pPr>
+          </a:lstStyle>
+          <a:p>
+            <a:pPr algn="ctr"/>
+            <a:fld id="{F7021451-1387-4CA6-816F-3879F97B5CBC}" type="slidenum">
+              <a:rPr b="1" lang="en-US"/>
+              <a:t>59</a:t>
+            </a:fld>
+            <a:endParaRPr lang="en-US"/>
+          </a:p>
+        </p:txBody>
+      </p:sp>
+    </p:spTree>
+  </p:cSld>
+  <p:clrMapOvr>
+    <a:masterClrMapping/>
+  </p:clrMapOvr>
+</p:sld>
+</file>
+
+<file path=ppt/slides/slide6.xml><?xml version="1.0" encoding="utf-8"?>
+<p:sld xmlns:a="http://schemas.openxmlformats.org/drawingml/2006/main" xmlns:r="http://schemas.openxmlformats.org/officeDocument/2006/relationships" xmlns:p="http://schemas.openxmlformats.org/presentationml/2006/main">
+  <p:cSld name="Slide 6">
+    <p:spTree>
+      <p:nvGrpSpPr>
+        <p:cNvPr id="1" name=""/>
+        <p:cNvGrpSpPr/>
+        <p:nvPr/>
+      </p:nvGrpSpPr>
+      <p:grpSpPr>
+        <a:xfrm>
+          <a:off x="0" y="0"/>
+          <a:ext cx="0" cy="0"/>
+          <a:chOff x="0" y="0"/>
+          <a:chExt cx="0" cy="0"/>
+        </a:xfrm>
+      </p:grpSpPr>
+      <p:sp>
+        <p:nvSpPr>
+          <p:cNvPr id="2" name="Text 0"/>
+          <p:cNvSpPr/>
+          <p:nvPr/>
+        </p:nvSpPr>
+        <p:spPr>
+          <a:xfrm>
+            <a:off x="457200" y="713232"/>
+            <a:ext cx="11368735" cy="274320"/>
+          </a:xfrm>
+          <a:prstGeom prst="rect">
+            <a:avLst/>
+          </a:prstGeom>
+          <a:noFill/>
+          <a:ln/>
+        </p:spPr>
+        <p:txBody>
+          <a:bodyPr wrap="square" lIns="0" tIns="0" rIns="0" bIns="0" rtlCol="0" anchor="ctr"/>
+          <a:lstStyle/>
+          <a:p>
+            <a:pPr algn="r" indent="0" marL="0">
+              <a:buNone/>
+            </a:pPr>
+            <a:r>
+              <a:rPr lang="en-US" sz="1400" b="1" dirty="0">
+                <a:solidFill>
+                  <a:srgbClr val="1C3F6E"/>
+                </a:solidFill>
+                <a:latin typeface="Calibri" pitchFamily="34" charset="0"/>
+                <a:ea typeface="Calibri" pitchFamily="34" charset="-122"/>
+                <a:cs typeface="Calibri" pitchFamily="34" charset="-120"/>
+              </a:rPr>
+              <a:t>LESSON PLAN</a:t>
+            </a:r>
+            <a:endParaRPr lang="en-US" sz="1400" dirty="0"/>
+          </a:p>
+        </p:txBody>
+      </p:sp>
+      <p:pic>
+        <p:nvPicPr>
+          <p:cNvPr id="3" name="Image 0" descr="/home/claude/f4/img/minesec_sheet.png">    </p:cNvPr>
+          <p:cNvPicPr>
+            <a:picLocks noChangeAspect="1"/>
+          </p:cNvPicPr>
+          <p:nvPr/>
+        </p:nvPicPr>
+        <p:blipFill>
+          <a:blip r:embed="rId1"/>
+          <a:stretch>
+            <a:fillRect/>
+          </a:stretch>
+        </p:blipFill>
+        <p:spPr>
+          <a:xfrm>
+            <a:off x="0" y="658368"/>
+            <a:ext cx="2468880" cy="5833872"/>
+          </a:xfrm>
+          <a:prstGeom prst="rect">
+            <a:avLst/>
+          </a:prstGeom>
+        </p:spPr>
+      </p:pic>
+      <p:sp>
+        <p:nvSpPr>
+          <p:cNvPr id="4" name="Text 1"/>
+          <p:cNvSpPr/>
+          <p:nvPr/>
+        </p:nvSpPr>
+        <p:spPr>
+          <a:xfrm>
+            <a:off x="2697480" y="1005840"/>
+            <a:ext cx="9174175" cy="731520"/>
+          </a:xfrm>
+          <a:prstGeom prst="rect">
+            <a:avLst/>
+          </a:prstGeom>
+          <a:noFill/>
+          <a:ln/>
+        </p:spPr>
+        <p:txBody>
+          <a:bodyPr wrap="square" lIns="0" tIns="0" rIns="0" bIns="0" rtlCol="0" anchor="ctr">
+            <a:normAutofit/>
+          </a:bodyPr>
+          <a:lstStyle/>
+          <a:p>
+            <a:pPr algn="ctr" indent="0" marL="0">
+              <a:buNone/>
+            </a:pPr>
+            <a:r>
+              <a:rPr lang="en-US" sz="3600" b="1" dirty="0">
+                <a:solidFill>
+                  <a:srgbClr val="990011"/>
+                </a:solidFill>
+                <a:latin typeface="Times New Roman" pitchFamily="34" charset="0"/>
+                <a:ea typeface="Times New Roman" pitchFamily="34" charset="-122"/>
+                <a:cs typeface="Times New Roman" pitchFamily="34" charset="-120"/>
+              </a:rPr>
+              <a:t>Lesson Plan</a:t>
+            </a:r>
+            <a:endParaRPr lang="en-US" sz="3600" dirty="0"/>
+          </a:p>
+        </p:txBody>
+      </p:sp>
+      <p:sp>
+        <p:nvSpPr>
+          <p:cNvPr id="5" name="Text 2"/>
+          <p:cNvSpPr/>
+          <p:nvPr/>
+        </p:nvSpPr>
+        <p:spPr>
+          <a:xfrm>
+            <a:off x="2697480" y="1783080"/>
+            <a:ext cx="9174175" cy="4663440"/>
+          </a:xfrm>
+          <a:prstGeom prst="rect">
+            <a:avLst/>
+          </a:prstGeom>
+          <a:noFill/>
+          <a:ln/>
+        </p:spPr>
+        <p:txBody>
+          <a:bodyPr wrap="square" lIns="0" tIns="0" rIns="0" bIns="0" rtlCol="0" anchor="t"/>
+          <a:lstStyle/>
+          <a:p>
+            <a:pPr algn="l" marL="342900" indent="-342900">
+              <a:spcAft>
+                <a:spcPts val="800"/>
+              </a:spcAft>
+              <a:buSzPct val="100000"/>
+              <a:buFont typeface="+mj-lt"/>
+              <a:buAutoNum type="arabicPeriod" startAt="1"/>
+            </a:pPr>
+            <a:r>
+              <a:rPr lang="en-US" sz="4000" dirty="0">
+                <a:solidFill>
+                  <a:srgbClr val="111111"/>
+                </a:solidFill>
+                <a:latin typeface="Times New Roman" pitchFamily="34" charset="0"/>
+                <a:ea typeface="Times New Roman" pitchFamily="34" charset="-122"/>
+                <a:cs typeface="Times New Roman" pitchFamily="34" charset="-120"/>
+              </a:rPr>
+              <a:t>Correction of the homework</a:t>
+            </a:r>
+            <a:endParaRPr lang="en-US" sz="4000" dirty="0"/>
+          </a:p>
+          <a:p>
+            <a:pPr algn="l" marL="342900" indent="-342900">
+              <a:spcAft>
+                <a:spcPts val="800"/>
+              </a:spcAft>
+              <a:buSzPct val="100000"/>
+              <a:buFont typeface="+mj-lt"/>
+              <a:buAutoNum type="arabicPeriod" startAt="1"/>
+            </a:pPr>
+            <a:r>
+              <a:rPr lang="en-US" sz="4000" dirty="0">
+                <a:solidFill>
+                  <a:srgbClr val="111111"/>
+                </a:solidFill>
+                <a:latin typeface="Times New Roman" pitchFamily="34" charset="0"/>
+                <a:ea typeface="Times New Roman" pitchFamily="34" charset="-122"/>
+                <a:cs typeface="Times New Roman" pitchFamily="34" charset="-120"/>
+              </a:rPr>
+              <a:t>Objectives and recall</a:t>
+            </a:r>
+            <a:endParaRPr lang="en-US" sz="4000" dirty="0"/>
+          </a:p>
+          <a:p>
+            <a:pPr algn="l" marL="342900" indent="-342900">
+              <a:spcAft>
+                <a:spcPts val="800"/>
+              </a:spcAft>
+              <a:buSzPct val="100000"/>
+              <a:buFont typeface="+mj-lt"/>
+              <a:buAutoNum type="arabicPeriod" startAt="1"/>
+            </a:pPr>
+            <a:r>
+              <a:rPr lang="en-US" sz="4000" dirty="0">
+                <a:solidFill>
+                  <a:srgbClr val="111111"/>
+                </a:solidFill>
+                <a:latin typeface="Times New Roman" pitchFamily="34" charset="0"/>
+                <a:ea typeface="Times New Roman" pitchFamily="34" charset="-122"/>
+                <a:cs typeface="Times New Roman" pitchFamily="34" charset="-120"/>
+              </a:rPr>
+              <a:t>Real-life situation and action to take</a:t>
+            </a:r>
+            <a:endParaRPr lang="en-US" sz="4000" dirty="0"/>
+          </a:p>
+          <a:p>
+            <a:pPr algn="l" marL="342900" indent="-342900">
+              <a:spcAft>
+                <a:spcPts val="800"/>
+              </a:spcAft>
+              <a:buSzPct val="100000"/>
+              <a:buFont typeface="+mj-lt"/>
+              <a:buAutoNum type="arabicPeriod" startAt="1"/>
+            </a:pPr>
+            <a:r>
+              <a:rPr lang="en-US" sz="4000" dirty="0">
+                <a:solidFill>
+                  <a:srgbClr val="111111"/>
+                </a:solidFill>
+                <a:latin typeface="Times New Roman" pitchFamily="34" charset="0"/>
+                <a:ea typeface="Times New Roman" pitchFamily="34" charset="-122"/>
+                <a:cs typeface="Times New Roman" pitchFamily="34" charset="-120"/>
+              </a:rPr>
+              <a:t>Learning activities</a:t>
+            </a:r>
+            <a:endParaRPr lang="en-US" sz="4000" dirty="0"/>
+          </a:p>
+          <a:p>
+            <a:pPr algn="l" marL="342900" indent="-342900">
+              <a:spcAft>
+                <a:spcPts val="800"/>
+              </a:spcAft>
+              <a:buSzPct val="100000"/>
+              <a:buFont typeface="+mj-lt"/>
+              <a:buAutoNum type="arabicPeriod" startAt="1"/>
+            </a:pPr>
+            <a:r>
+              <a:rPr lang="en-US" sz="4000" dirty="0">
+                <a:solidFill>
+                  <a:srgbClr val="111111"/>
+                </a:solidFill>
+                <a:latin typeface="Times New Roman" pitchFamily="34" charset="0"/>
+                <a:ea typeface="Times New Roman" pitchFamily="34" charset="-122"/>
+                <a:cs typeface="Times New Roman" pitchFamily="34" charset="-120"/>
+              </a:rPr>
+              <a:t>Board summary</a:t>
+            </a:r>
+            <a:endParaRPr lang="en-US" sz="4000" dirty="0"/>
+          </a:p>
+          <a:p>
+            <a:pPr algn="l" marL="342900" indent="-342900">
+              <a:spcAft>
+                <a:spcPts val="800"/>
+              </a:spcAft>
+              <a:buSzPct val="100000"/>
+              <a:buFont typeface="+mj-lt"/>
+              <a:buAutoNum type="arabicPeriod" startAt="1"/>
+            </a:pPr>
+            <a:r>
+              <a:rPr lang="en-US" sz="4000" dirty="0">
+                <a:solidFill>
+                  <a:srgbClr val="111111"/>
+                </a:solidFill>
+                <a:latin typeface="Times New Roman" pitchFamily="34" charset="0"/>
+                <a:ea typeface="Times New Roman" pitchFamily="34" charset="-122"/>
+                <a:cs typeface="Times New Roman" pitchFamily="34" charset="-120"/>
+              </a:rPr>
+              <a:t>Evaluation, remediation and homework</a:t>
+            </a:r>
+            <a:endParaRPr lang="en-US" sz="4000" dirty="0"/>
+          </a:p>
+        </p:txBody>
+      </p:sp>
+      <p:sp>
+        <p:nvSpPr>
+          <p:cNvPr id="25" name="Slide Number Placeholder 0"/>
+          <p:cNvSpPr>
+            <a:spLocks noGrp="1"/>
+          </p:cNvSpPr>
+          <p:nvPr>
+            <p:ph type="sldNum" sz="quarter" idx="4294967295"/>
+          </p:nvPr>
+        </p:nvSpPr>
+        <p:spPr>
+          <a:xfrm>
+            <a:off x="27432" y="91440"/>
+            <a:ext cx="585216" cy="475488"/>
+          </a:xfrm>
+          <a:prstGeom prst="rect">
+            <a:avLst/>
+          </a:prstGeom>
+          <a:extLst>
+            <a:ext uri="{C572A759-6A51-4108-AA02-DFA0A04FC94B}">
+              <ma14:wrappingTextBoxFlag xmlns:ma14="http://schemas.microsoft.com/office/mac/drawingml/2011/main" val="0"/>
+            </a:ext>
+          </a:extLst>
+        </p:spPr>
+        <p:txBody>
+          <a:bodyPr/>
+          <a:lstStyle>
+            <a:lvl1pPr>
+              <a:defRPr sz="2000">
+                <a:solidFill>
+                  <a:srgbClr val="FFFFFF"/>
+                </a:solidFill>
+                <a:latin typeface="Calibri"/>
+                <a:ea typeface="Calibri"/>
+                <a:cs typeface="Calibri"/>
+              </a:defRPr>
+            </a:lvl1pPr>
+          </a:lstStyle>
+          <a:p>
+            <a:pPr algn="ctr"/>
+            <a:fld id="{F7021451-1387-4CA6-816F-3879F97B5CBC}" type="slidenum">
+              <a:rPr b="1" lang="en-US"/>
+              <a:t>6</a:t>
+            </a:fld>
+            <a:endParaRPr lang="en-US"/>
+          </a:p>
+        </p:txBody>
+      </p:sp>
+    </p:spTree>
+  </p:cSld>
+  <p:clrMapOvr>
+    <a:masterClrMapping/>
+  </p:clrMapOvr>
+</p:sld>
+</file>
+
+<file path=ppt/slides/slide60.xml><?xml version="1.0" encoding="utf-8"?>
+<p:sld xmlns:a="http://schemas.openxmlformats.org/drawingml/2006/main" xmlns:r="http://schemas.openxmlformats.org/officeDocument/2006/relationships" xmlns:p="http://schemas.openxmlformats.org/presentationml/2006/main">
+  <p:cSld name="Slide 60">
+    <p:spTree>
+      <p:nvGrpSpPr>
+        <p:cNvPr id="1" name=""/>
+        <p:cNvGrpSpPr/>
+        <p:nvPr/>
+      </p:nvGrpSpPr>
+      <p:grpSpPr>
+        <a:xfrm>
+          <a:off x="0" y="0"/>
+          <a:ext cx="0" cy="0"/>
+          <a:chOff x="0" y="0"/>
+          <a:chExt cx="0" cy="0"/>
+        </a:xfrm>
+      </p:grpSpPr>
+      <p:sp>
+        <p:nvSpPr>
+          <p:cNvPr id="2" name="Text 0"/>
+          <p:cNvSpPr/>
+          <p:nvPr/>
+        </p:nvSpPr>
+        <p:spPr>
+          <a:xfrm>
+            <a:off x="457200" y="713232"/>
+            <a:ext cx="11368735" cy="274320"/>
+          </a:xfrm>
+          <a:prstGeom prst="rect">
+            <a:avLst/>
+          </a:prstGeom>
+          <a:noFill/>
+          <a:ln/>
+        </p:spPr>
+        <p:txBody>
+          <a:bodyPr wrap="square" lIns="0" tIns="0" rIns="0" bIns="0" rtlCol="0" anchor="ctr"/>
+          <a:lstStyle/>
+          <a:p>
+            <a:pPr algn="r" indent="0" marL="0">
+              <a:buNone/>
+            </a:pPr>
+            <a:r>
+              <a:rPr lang="en-US" sz="1400" b="1" dirty="0">
+                <a:solidFill>
+                  <a:srgbClr val="1C3F6E"/>
+                </a:solidFill>
+                <a:latin typeface="Calibri" pitchFamily="34" charset="0"/>
+                <a:ea typeface="Calibri" pitchFamily="34" charset="-122"/>
+                <a:cs typeface="Calibri" pitchFamily="34" charset="-120"/>
+              </a:rPr>
+              <a:t>NEXT LESSON</a:t>
+            </a:r>
+            <a:endParaRPr lang="en-US" sz="1400" dirty="0"/>
+          </a:p>
+        </p:txBody>
+      </p:sp>
+      <p:pic>
+        <p:nvPicPr>
+          <p:cNvPr id="3" name="Image 0" descr="/home/claude/f4/img/minesec_sheet.png">    </p:cNvPr>
+          <p:cNvPicPr>
+            <a:picLocks noChangeAspect="1"/>
+          </p:cNvPicPr>
+          <p:nvPr/>
+        </p:nvPicPr>
+        <p:blipFill>
+          <a:blip r:embed="rId1"/>
+          <a:stretch>
+            <a:fillRect/>
+          </a:stretch>
+        </p:blipFill>
+        <p:spPr>
+          <a:xfrm>
+            <a:off x="0" y="658368"/>
+            <a:ext cx="5120640" cy="5833872"/>
+          </a:xfrm>
+          <a:prstGeom prst="rect">
+            <a:avLst/>
+          </a:prstGeom>
+        </p:spPr>
+      </p:pic>
+      <p:sp>
+        <p:nvSpPr>
+          <p:cNvPr id="4" name="Text 1"/>
+          <p:cNvSpPr/>
+          <p:nvPr/>
+        </p:nvSpPr>
+        <p:spPr>
+          <a:xfrm>
+            <a:off x="5349240" y="1005840"/>
+            <a:ext cx="6522415" cy="731520"/>
+          </a:xfrm>
+          <a:prstGeom prst="rect">
+            <a:avLst/>
+          </a:prstGeom>
+          <a:noFill/>
+          <a:ln/>
+        </p:spPr>
+        <p:txBody>
+          <a:bodyPr wrap="square" lIns="0" tIns="0" rIns="0" bIns="0" rtlCol="0" anchor="ctr">
+            <a:normAutofit/>
+          </a:bodyPr>
+          <a:lstStyle/>
+          <a:p>
+            <a:pPr algn="ctr" indent="0" marL="0">
+              <a:buNone/>
+            </a:pPr>
+            <a:r>
+              <a:rPr lang="en-US" sz="3600" b="1" dirty="0">
+                <a:solidFill>
+                  <a:srgbClr val="990011"/>
+                </a:solidFill>
+                <a:latin typeface="Times New Roman" pitchFamily="34" charset="0"/>
+                <a:ea typeface="Times New Roman" pitchFamily="34" charset="-122"/>
+                <a:cs typeface="Times New Roman" pitchFamily="34" charset="-120"/>
+              </a:rPr>
+              <a:t>Next Lesson</a:t>
+            </a:r>
+            <a:endParaRPr lang="en-US" sz="3600" dirty="0"/>
+          </a:p>
+        </p:txBody>
+      </p:sp>
+      <p:sp>
+        <p:nvSpPr>
+          <p:cNvPr id="5" name="Text 2"/>
+          <p:cNvSpPr/>
+          <p:nvPr/>
+        </p:nvSpPr>
+        <p:spPr>
+          <a:xfrm>
+            <a:off x="5349240" y="1783080"/>
+            <a:ext cx="6522415" cy="4663440"/>
+          </a:xfrm>
+          <a:prstGeom prst="rect">
+            <a:avLst/>
+          </a:prstGeom>
+          <a:noFill/>
+          <a:ln/>
+        </p:spPr>
+        <p:txBody>
+          <a:bodyPr wrap="square" lIns="0" tIns="0" rIns="0" bIns="0" rtlCol="0" anchor="ctr"/>
+          <a:lstStyle/>
+          <a:p>
+            <a:pPr algn="ctr" indent="0" marL="0">
+              <a:spcAft>
+                <a:spcPts val="800"/>
+              </a:spcAft>
+              <a:buNone/>
+            </a:pPr>
+            <a:r>
+              <a:rPr lang="en-US" sz="4000" b="1" dirty="0">
+                <a:solidFill>
+                  <a:srgbClr val="111111"/>
+                </a:solidFill>
+                <a:latin typeface="Times New Roman" pitchFamily="34" charset="0"/>
+                <a:ea typeface="Times New Roman" pitchFamily="34" charset="-122"/>
+                <a:cs typeface="Times New Roman" pitchFamily="34" charset="-120"/>
+              </a:rPr>
+              <a:t>Our next lesson will be on:</a:t>
+            </a:r>
+            <a:endParaRPr lang="en-US" sz="4000" dirty="0"/>
+          </a:p>
+          <a:p>
+            <a:pPr algn="ctr" indent="0" marL="0">
+              <a:spcAft>
+                <a:spcPts val="800"/>
+              </a:spcAft>
+              <a:buNone/>
+            </a:pPr>
+            <a:r>
+              <a:rPr lang="en-US" sz="4000" b="1" dirty="0">
+                <a:solidFill>
+                  <a:srgbClr val="990011"/>
+                </a:solidFill>
+                <a:latin typeface="Times New Roman" pitchFamily="34" charset="0"/>
+                <a:ea typeface="Times New Roman" pitchFamily="34" charset="-122"/>
+                <a:cs typeface="Times New Roman" pitchFamily="34" charset="-120"/>
+              </a:rPr>
+              <a:t>Quantitative Techniques 3 (Part 1): Measures of Central Tendency, Range and Quartiles</a:t>
+            </a:r>
+            <a:endParaRPr lang="en-US" sz="4000" dirty="0"/>
+          </a:p>
+        </p:txBody>
+      </p:sp>
+      <p:sp>
+        <p:nvSpPr>
+          <p:cNvPr id="25" name="Slide Number Placeholder 0"/>
+          <p:cNvSpPr>
+            <a:spLocks noGrp="1"/>
+          </p:cNvSpPr>
+          <p:nvPr>
+            <p:ph type="sldNum" sz="quarter" idx="4294967295"/>
+          </p:nvPr>
+        </p:nvSpPr>
+        <p:spPr>
+          <a:xfrm>
+            <a:off x="27432" y="91440"/>
+            <a:ext cx="585216" cy="475488"/>
+          </a:xfrm>
+          <a:prstGeom prst="rect">
+            <a:avLst/>
+          </a:prstGeom>
+          <a:extLst>
+            <a:ext uri="{C572A759-6A51-4108-AA02-DFA0A04FC94B}">
+              <ma14:wrappingTextBoxFlag xmlns:ma14="http://schemas.microsoft.com/office/mac/drawingml/2011/main" val="0"/>
+            </a:ext>
+          </a:extLst>
+        </p:spPr>
+        <p:txBody>
+          <a:bodyPr/>
+          <a:lstStyle>
+            <a:lvl1pPr>
+              <a:defRPr sz="2000">
+                <a:solidFill>
+                  <a:srgbClr val="FFFFFF"/>
+                </a:solidFill>
+                <a:latin typeface="Calibri"/>
+                <a:ea typeface="Calibri"/>
+                <a:cs typeface="Calibri"/>
+              </a:defRPr>
+            </a:lvl1pPr>
+          </a:lstStyle>
+          <a:p>
+            <a:pPr algn="ctr"/>
+            <a:fld id="{F7021451-1387-4CA6-816F-3879F97B5CBC}" type="slidenum">
+              <a:rPr b="1" lang="en-US"/>
+              <a:t>60</a:t>
+            </a:fld>
+            <a:endParaRPr lang="en-US"/>
+          </a:p>
+        </p:txBody>
+      </p:sp>
+    </p:spTree>
+  </p:cSld>
+  <p:clrMapOvr>
+    <a:masterClrMapping/>
+  </p:clrMapOvr>
+</p:sld>
+</file>
+
+<file path=ppt/slides/slide61.xml><?xml version="1.0" encoding="utf-8"?>
+<p:sld xmlns:a="http://schemas.openxmlformats.org/drawingml/2006/main" xmlns:r="http://schemas.openxmlformats.org/officeDocument/2006/relationships" xmlns:p="http://schemas.openxmlformats.org/presentationml/2006/main">
+  <p:cSld name="Slide 61">
+    <p:spTree>
+      <p:nvGrpSpPr>
+        <p:cNvPr id="1" name=""/>
+        <p:cNvGrpSpPr/>
+        <p:nvPr/>
+      </p:nvGrpSpPr>
+      <p:grpSpPr>
+        <a:xfrm>
+          <a:off x="0" y="0"/>
+          <a:ext cx="0" cy="0"/>
+          <a:chOff x="0" y="0"/>
+          <a:chExt cx="0" cy="0"/>
+        </a:xfrm>
+      </p:grpSpPr>
+      <p:sp>
+        <p:nvSpPr>
+          <p:cNvPr id="2" name="Text 0"/>
+          <p:cNvSpPr/>
+          <p:nvPr/>
+        </p:nvSpPr>
+        <p:spPr>
+          <a:xfrm>
+            <a:off x="457200" y="713232"/>
+            <a:ext cx="11368735" cy="274320"/>
+          </a:xfrm>
+          <a:prstGeom prst="rect">
+            <a:avLst/>
+          </a:prstGeom>
+          <a:noFill/>
+          <a:ln/>
+        </p:spPr>
+        <p:txBody>
+          <a:bodyPr wrap="square" lIns="0" tIns="0" rIns="0" bIns="0" rtlCol="0" anchor="ctr"/>
+          <a:lstStyle/>
+          <a:p>
+            <a:pPr algn="r" indent="0" marL="0">
+              <a:buNone/>
+            </a:pPr>
+            <a:r>
+              <a:rPr lang="en-US" sz="1400" b="1" dirty="0">
+                <a:solidFill>
+                  <a:srgbClr val="1C3F6E"/>
+                </a:solidFill>
+                <a:latin typeface="Calibri" pitchFamily="34" charset="0"/>
+                <a:ea typeface="Calibri" pitchFamily="34" charset="-122"/>
+                <a:cs typeface="Calibri" pitchFamily="34" charset="-120"/>
+              </a:rPr>
               <a:t>BILINGUAL GAME</a:t>
             </a:r>
             <a:endParaRPr lang="en-US" sz="1400" dirty="0"/>
@@ -20691,7 +22181,7 @@
       </p:sp>
       <p:graphicFrame>
         <p:nvGraphicFramePr>
-          <p:cNvPr id="59" name="Table 0"/>
+          <p:cNvPr id="62" name="Table 0"/>
           <p:cNvGraphicFramePr>
             <a:graphicFrameLocks noGrp="1"/>
           </p:cNvGraphicFramePr>
@@ -21727,7 +23217,7 @@
             <a:pPr algn="ctr"/>
             <a:fld id="{F7021451-1387-4CA6-816F-3879F97B5CBC}" type="slidenum">
               <a:rPr b="1" lang="en-US"/>
-              <a:t>58</a:t>
+              <a:t>61</a:t>
             </a:fld>
             <a:endParaRPr lang="en-US"/>
           </a:p>
@@ -21741,9 +23231,9 @@
 </p:sld>
 </file>
 
-<file path=ppt/slides/slide59.xml><?xml version="1.0" encoding="utf-8"?>
+<file path=ppt/slides/slide62.xml><?xml version="1.0" encoding="utf-8"?>
 <p:sld xmlns:a="http://schemas.openxmlformats.org/drawingml/2006/main" xmlns:r="http://schemas.openxmlformats.org/officeDocument/2006/relationships" xmlns:p="http://schemas.openxmlformats.org/presentationml/2006/main">
-  <p:cSld name="Slide 59">
+  <p:cSld name="Slide 62">
     <p:spTree>
       <p:nvGrpSpPr>
         <p:cNvPr id="1" name=""/>
@@ -21838,7 +23328,7 @@
       </p:sp>
       <p:graphicFrame>
         <p:nvGraphicFramePr>
-          <p:cNvPr id="60" name="Table 0"/>
+          <p:cNvPr id="63" name="Table 0"/>
           <p:cNvGraphicFramePr>
             <a:graphicFrameLocks noGrp="1"/>
           </p:cNvGraphicFramePr>
@@ -22460,7 +23950,7 @@
             <a:pPr algn="ctr"/>
             <a:fld id="{F7021451-1387-4CA6-816F-3879F97B5CBC}" type="slidenum">
               <a:rPr b="1" lang="en-US"/>
-              <a:t>59</a:t>
+              <a:t>62</a:t>
             </a:fld>
             <a:endParaRPr lang="en-US"/>
           </a:p>
@@ -22474,9 +23964,9 @@
 </p:sld>
 </file>
 
-<file path=ppt/slides/slide6.xml><?xml version="1.0" encoding="utf-8"?>
+<file path=ppt/slides/slide63.xml><?xml version="1.0" encoding="utf-8"?>
 <p:sld xmlns:a="http://schemas.openxmlformats.org/drawingml/2006/main" xmlns:r="http://schemas.openxmlformats.org/officeDocument/2006/relationships" xmlns:p="http://schemas.openxmlformats.org/presentationml/2006/main">
-  <p:cSld name="Slide 6">
+  <p:cSld name="Slide 63">
     <p:spTree>
       <p:nvGrpSpPr>
         <p:cNvPr id="1" name=""/>
@@ -22524,337 +24014,6 @@
                 <a:ea typeface="Calibri" pitchFamily="34" charset="-122"/>
                 <a:cs typeface="Calibri" pitchFamily="34" charset="-120"/>
               </a:rPr>
-              <a:t>LESSON PLAN</a:t>
-            </a:r>
-            <a:endParaRPr lang="en-US" sz="1400" dirty="0"/>
-          </a:p>
-        </p:txBody>
-      </p:sp>
-      <p:pic>
-        <p:nvPicPr>
-          <p:cNvPr id="3" name="Image 0" descr="/home/claude/f4/img/minesec_sheet.png">    </p:cNvPr>
-          <p:cNvPicPr>
-            <a:picLocks noChangeAspect="1"/>
-          </p:cNvPicPr>
-          <p:nvPr/>
-        </p:nvPicPr>
-        <p:blipFill>
-          <a:blip r:embed="rId1"/>
-          <a:stretch>
-            <a:fillRect/>
-          </a:stretch>
-        </p:blipFill>
-        <p:spPr>
-          <a:xfrm>
-            <a:off x="0" y="658368"/>
-            <a:ext cx="2468880" cy="5833872"/>
-          </a:xfrm>
-          <a:prstGeom prst="rect">
-            <a:avLst/>
-          </a:prstGeom>
-        </p:spPr>
-      </p:pic>
-      <p:sp>
-        <p:nvSpPr>
-          <p:cNvPr id="4" name="Text 1"/>
-          <p:cNvSpPr/>
-          <p:nvPr/>
-        </p:nvSpPr>
-        <p:spPr>
-          <a:xfrm>
-            <a:off x="2697480" y="1005840"/>
-            <a:ext cx="9174175" cy="731520"/>
-          </a:xfrm>
-          <a:prstGeom prst="rect">
-            <a:avLst/>
-          </a:prstGeom>
-          <a:noFill/>
-          <a:ln/>
-        </p:spPr>
-        <p:txBody>
-          <a:bodyPr wrap="square" lIns="0" tIns="0" rIns="0" bIns="0" rtlCol="0" anchor="ctr">
-            <a:normAutofit/>
-          </a:bodyPr>
-          <a:lstStyle/>
-          <a:p>
-            <a:pPr algn="ctr" indent="0" marL="0">
-              <a:buNone/>
-            </a:pPr>
-            <a:r>
-              <a:rPr lang="en-US" sz="3600" b="1" dirty="0">
-                <a:solidFill>
-                  <a:srgbClr val="990011"/>
-                </a:solidFill>
-                <a:latin typeface="Times New Roman" pitchFamily="34" charset="0"/>
-                <a:ea typeface="Times New Roman" pitchFamily="34" charset="-122"/>
-                <a:cs typeface="Times New Roman" pitchFamily="34" charset="-120"/>
-              </a:rPr>
-              <a:t>Lesson Plan</a:t>
-            </a:r>
-            <a:endParaRPr lang="en-US" sz="3600" dirty="0"/>
-          </a:p>
-        </p:txBody>
-      </p:sp>
-      <p:sp>
-        <p:nvSpPr>
-          <p:cNvPr id="5" name="Text 2"/>
-          <p:cNvSpPr/>
-          <p:nvPr/>
-        </p:nvSpPr>
-        <p:spPr>
-          <a:xfrm>
-            <a:off x="2697480" y="1783080"/>
-            <a:ext cx="9174175" cy="4663440"/>
-          </a:xfrm>
-          <a:prstGeom prst="rect">
-            <a:avLst/>
-          </a:prstGeom>
-          <a:noFill/>
-          <a:ln/>
-        </p:spPr>
-        <p:txBody>
-          <a:bodyPr wrap="square" lIns="0" tIns="0" rIns="0" bIns="0" rtlCol="0" anchor="t"/>
-          <a:lstStyle/>
-          <a:p>
-            <a:pPr algn="l" marL="342900" indent="-342900">
-              <a:spcAft>
-                <a:spcPts val="800"/>
-              </a:spcAft>
-              <a:buSzPct val="100000"/>
-              <a:buFont typeface="+mj-lt"/>
-              <a:buAutoNum type="arabicPeriod" startAt="1"/>
-            </a:pPr>
-            <a:r>
-              <a:rPr lang="en-US" sz="4000" dirty="0">
-                <a:solidFill>
-                  <a:srgbClr val="111111"/>
-                </a:solidFill>
-                <a:latin typeface="Times New Roman" pitchFamily="34" charset="0"/>
-                <a:ea typeface="Times New Roman" pitchFamily="34" charset="-122"/>
-                <a:cs typeface="Times New Roman" pitchFamily="34" charset="-120"/>
-              </a:rPr>
-              <a:t>Correction of the homework</a:t>
-            </a:r>
-            <a:endParaRPr lang="en-US" sz="4000" dirty="0"/>
-          </a:p>
-          <a:p>
-            <a:pPr algn="l" marL="342900" indent="-342900">
-              <a:spcAft>
-                <a:spcPts val="800"/>
-              </a:spcAft>
-              <a:buSzPct val="100000"/>
-              <a:buFont typeface="+mj-lt"/>
-              <a:buAutoNum type="arabicPeriod" startAt="1"/>
-            </a:pPr>
-            <a:r>
-              <a:rPr lang="en-US" sz="4000" dirty="0">
-                <a:solidFill>
-                  <a:srgbClr val="111111"/>
-                </a:solidFill>
-                <a:latin typeface="Times New Roman" pitchFamily="34" charset="0"/>
-                <a:ea typeface="Times New Roman" pitchFamily="34" charset="-122"/>
-                <a:cs typeface="Times New Roman" pitchFamily="34" charset="-120"/>
-              </a:rPr>
-              <a:t>Objectives and recall</a:t>
-            </a:r>
-            <a:endParaRPr lang="en-US" sz="4000" dirty="0"/>
-          </a:p>
-          <a:p>
-            <a:pPr algn="l" marL="342900" indent="-342900">
-              <a:spcAft>
-                <a:spcPts val="800"/>
-              </a:spcAft>
-              <a:buSzPct val="100000"/>
-              <a:buFont typeface="+mj-lt"/>
-              <a:buAutoNum type="arabicPeriod" startAt="1"/>
-            </a:pPr>
-            <a:r>
-              <a:rPr lang="en-US" sz="4000" dirty="0">
-                <a:solidFill>
-                  <a:srgbClr val="111111"/>
-                </a:solidFill>
-                <a:latin typeface="Times New Roman" pitchFamily="34" charset="0"/>
-                <a:ea typeface="Times New Roman" pitchFamily="34" charset="-122"/>
-                <a:cs typeface="Times New Roman" pitchFamily="34" charset="-120"/>
-              </a:rPr>
-              <a:t>Real-life situation and action to take</a:t>
-            </a:r>
-            <a:endParaRPr lang="en-US" sz="4000" dirty="0"/>
-          </a:p>
-          <a:p>
-            <a:pPr algn="l" marL="342900" indent="-342900">
-              <a:spcAft>
-                <a:spcPts val="800"/>
-              </a:spcAft>
-              <a:buSzPct val="100000"/>
-              <a:buFont typeface="+mj-lt"/>
-              <a:buAutoNum type="arabicPeriod" startAt="1"/>
-            </a:pPr>
-            <a:r>
-              <a:rPr lang="en-US" sz="4000" dirty="0">
-                <a:solidFill>
-                  <a:srgbClr val="111111"/>
-                </a:solidFill>
-                <a:latin typeface="Times New Roman" pitchFamily="34" charset="0"/>
-                <a:ea typeface="Times New Roman" pitchFamily="34" charset="-122"/>
-                <a:cs typeface="Times New Roman" pitchFamily="34" charset="-120"/>
-              </a:rPr>
-              <a:t>Learning activities</a:t>
-            </a:r>
-            <a:endParaRPr lang="en-US" sz="4000" dirty="0"/>
-          </a:p>
-          <a:p>
-            <a:pPr algn="l" marL="342900" indent="-342900">
-              <a:spcAft>
-                <a:spcPts val="800"/>
-              </a:spcAft>
-              <a:buSzPct val="100000"/>
-              <a:buFont typeface="+mj-lt"/>
-              <a:buAutoNum type="arabicPeriod" startAt="1"/>
-            </a:pPr>
-            <a:r>
-              <a:rPr lang="en-US" sz="4000" dirty="0">
-                <a:solidFill>
-                  <a:srgbClr val="111111"/>
-                </a:solidFill>
-                <a:latin typeface="Times New Roman" pitchFamily="34" charset="0"/>
-                <a:ea typeface="Times New Roman" pitchFamily="34" charset="-122"/>
-                <a:cs typeface="Times New Roman" pitchFamily="34" charset="-120"/>
-              </a:rPr>
-              <a:t>Board summary</a:t>
-            </a:r>
-            <a:endParaRPr lang="en-US" sz="4000" dirty="0"/>
-          </a:p>
-          <a:p>
-            <a:pPr algn="l" marL="342900" indent="-342900">
-              <a:spcAft>
-                <a:spcPts val="800"/>
-              </a:spcAft>
-              <a:buSzPct val="100000"/>
-              <a:buFont typeface="+mj-lt"/>
-              <a:buAutoNum type="arabicPeriod" startAt="1"/>
-            </a:pPr>
-            <a:r>
-              <a:rPr lang="en-US" sz="4000" dirty="0">
-                <a:solidFill>
-                  <a:srgbClr val="111111"/>
-                </a:solidFill>
-                <a:latin typeface="Times New Roman" pitchFamily="34" charset="0"/>
-                <a:ea typeface="Times New Roman" pitchFamily="34" charset="-122"/>
-                <a:cs typeface="Times New Roman" pitchFamily="34" charset="-120"/>
-              </a:rPr>
-              <a:t>Evaluation, remediation and homework</a:t>
-            </a:r>
-            <a:endParaRPr lang="en-US" sz="4000" dirty="0"/>
-          </a:p>
-        </p:txBody>
-      </p:sp>
-      <p:sp>
-        <p:nvSpPr>
-          <p:cNvPr id="25" name="Slide Number Placeholder 0"/>
-          <p:cNvSpPr>
-            <a:spLocks noGrp="1"/>
-          </p:cNvSpPr>
-          <p:nvPr>
-            <p:ph type="sldNum" sz="quarter" idx="4294967295"/>
-          </p:nvPr>
-        </p:nvSpPr>
-        <p:spPr>
-          <a:xfrm>
-            <a:off x="27432" y="91440"/>
-            <a:ext cx="585216" cy="475488"/>
-          </a:xfrm>
-          <a:prstGeom prst="rect">
-            <a:avLst/>
-          </a:prstGeom>
-          <a:extLst>
-            <a:ext uri="{C572A759-6A51-4108-AA02-DFA0A04FC94B}">
-              <ma14:wrappingTextBoxFlag xmlns:ma14="http://schemas.microsoft.com/office/mac/drawingml/2011/main" val="0"/>
-            </a:ext>
-          </a:extLst>
-        </p:spPr>
-        <p:txBody>
-          <a:bodyPr/>
-          <a:lstStyle>
-            <a:lvl1pPr>
-              <a:defRPr sz="2000">
-                <a:solidFill>
-                  <a:srgbClr val="FFFFFF"/>
-                </a:solidFill>
-                <a:latin typeface="Calibri"/>
-                <a:ea typeface="Calibri"/>
-                <a:cs typeface="Calibri"/>
-              </a:defRPr>
-            </a:lvl1pPr>
-          </a:lstStyle>
-          <a:p>
-            <a:pPr algn="ctr"/>
-            <a:fld id="{F7021451-1387-4CA6-816F-3879F97B5CBC}" type="slidenum">
-              <a:rPr b="1" lang="en-US"/>
-              <a:t>6</a:t>
-            </a:fld>
-            <a:endParaRPr lang="en-US"/>
-          </a:p>
-        </p:txBody>
-      </p:sp>
-    </p:spTree>
-  </p:cSld>
-  <p:clrMapOvr>
-    <a:masterClrMapping/>
-  </p:clrMapOvr>
-</p:sld>
-</file>
-
-<file path=ppt/slides/slide60.xml><?xml version="1.0" encoding="utf-8"?>
-<p:sld xmlns:a="http://schemas.openxmlformats.org/drawingml/2006/main" xmlns:r="http://schemas.openxmlformats.org/officeDocument/2006/relationships" xmlns:p="http://schemas.openxmlformats.org/presentationml/2006/main">
-  <p:cSld name="Slide 60">
-    <p:spTree>
-      <p:nvGrpSpPr>
-        <p:cNvPr id="1" name=""/>
-        <p:cNvGrpSpPr/>
-        <p:nvPr/>
-      </p:nvGrpSpPr>
-      <p:grpSpPr>
-        <a:xfrm>
-          <a:off x="0" y="0"/>
-          <a:ext cx="0" cy="0"/>
-          <a:chOff x="0" y="0"/>
-          <a:chExt cx="0" cy="0"/>
-        </a:xfrm>
-      </p:grpSpPr>
-      <p:sp>
-        <p:nvSpPr>
-          <p:cNvPr id="2" name="Text 0"/>
-          <p:cNvSpPr/>
-          <p:nvPr/>
-        </p:nvSpPr>
-        <p:spPr>
-          <a:xfrm>
-            <a:off x="457200" y="713232"/>
-            <a:ext cx="11368735" cy="274320"/>
-          </a:xfrm>
-          <a:prstGeom prst="rect">
-            <a:avLst/>
-          </a:prstGeom>
-          <a:noFill/>
-          <a:ln/>
-        </p:spPr>
-        <p:txBody>
-          <a:bodyPr wrap="square" lIns="0" tIns="0" rIns="0" bIns="0" rtlCol="0" anchor="ctr"/>
-          <a:lstStyle/>
-          <a:p>
-            <a:pPr algn="r" indent="0" marL="0">
-              <a:buNone/>
-            </a:pPr>
-            <a:r>
-              <a:rPr lang="en-US" sz="1400" b="1" dirty="0">
-                <a:solidFill>
-                  <a:srgbClr val="1C3F6E"/>
-                </a:solidFill>
-                <a:latin typeface="Calibri" pitchFamily="34" charset="0"/>
-                <a:ea typeface="Calibri" pitchFamily="34" charset="-122"/>
-                <a:cs typeface="Calibri" pitchFamily="34" charset="-120"/>
-              </a:rPr>
               <a:t>LOGBOOK</a:t>
             </a:r>
             <a:endParaRPr lang="en-US" sz="1400" dirty="0"/>
@@ -22902,7 +24061,7 @@
       </p:sp>
       <p:graphicFrame>
         <p:nvGraphicFramePr>
-          <p:cNvPr id="61" name="Table 0"/>
+          <p:cNvPr id="64" name="Table 0"/>
           <p:cNvGraphicFramePr>
             <a:graphicFrameLocks noGrp="1"/>
           </p:cNvGraphicFramePr>
@@ -23012,7 +24171,7 @@
                           <a:ea typeface="Calibri" pitchFamily="34" charset="-122"/>
                           <a:cs typeface="Calibri" pitchFamily="34" charset="-120"/>
                         </a:rPr>
-                        <a:t>DEFINITIONS; Sources of Geographical Data; Basic Sampling Procedures; Primary Data Collection Techniques.</a:t>
+                        <a:t>DEFINITIONS; Sources of Geographical Data; Basic Sampling Procedures; Observation, Recording and Measurement; Questionnaires, Interviews and Focus Groups.</a:t>
                       </a:r>
                       <a:endParaRPr lang="en-US" sz="1600" dirty="0">
                         <a:latin typeface="Calibri" charset="0"/>
@@ -23662,7 +24821,7 @@
             <a:pPr algn="ctr"/>
             <a:fld id="{F7021451-1387-4CA6-816F-3879F97B5CBC}" type="slidenum">
               <a:rPr b="1" lang="en-US"/>
-              <a:t>60</a:t>
+              <a:t>63</a:t>
             </a:fld>
             <a:endParaRPr lang="en-US"/>
           </a:p>
@@ -23676,9 +24835,9 @@
 </p:sld>
 </file>
 
-<file path=ppt/slides/slide61.xml><?xml version="1.0" encoding="utf-8"?>
+<file path=ppt/slides/slide64.xml><?xml version="1.0" encoding="utf-8"?>
 <p:sld xmlns:a="http://schemas.openxmlformats.org/drawingml/2006/main" xmlns:r="http://schemas.openxmlformats.org/officeDocument/2006/relationships" xmlns:p="http://schemas.openxmlformats.org/presentationml/2006/main">
-  <p:cSld name="Slide 61">
+  <p:cSld name="Slide 64">
     <p:spTree>
       <p:nvGrpSpPr>
         <p:cNvPr id="1" name=""/>
@@ -23987,7 +25146,7 @@
             <a:pPr algn="ctr"/>
             <a:fld id="{F7021451-1387-4CA6-816F-3879F97B5CBC}" type="slidenum">
               <a:rPr b="1" lang="en-US"/>
-              <a:t>61</a:t>
+              <a:t>64</a:t>
             </a:fld>
             <a:endParaRPr lang="en-US"/>
           </a:p>
@@ -24001,9 +25160,9 @@
 </p:sld>
 </file>
 
-<file path=ppt/slides/slide62.xml><?xml version="1.0" encoding="utf-8"?>
+<file path=ppt/slides/slide65.xml><?xml version="1.0" encoding="utf-8"?>
 <p:sld xmlns:a="http://schemas.openxmlformats.org/drawingml/2006/main" xmlns:r="http://schemas.openxmlformats.org/officeDocument/2006/relationships" xmlns:p="http://schemas.openxmlformats.org/presentationml/2006/main">
-  <p:cSld name="Slide 62">
+  <p:cSld name="Slide 65">
     <p:spTree>
       <p:nvGrpSpPr>
         <p:cNvPr id="1" name=""/>
@@ -24249,7 +25408,7 @@
             <a:pPr algn="ctr"/>
             <a:fld id="{F7021451-1387-4CA6-816F-3879F97B5CBC}" type="slidenum">
               <a:rPr b="1" lang="en-US"/>
-              <a:t>62</a:t>
+              <a:t>65</a:t>
             </a:fld>
             <a:endParaRPr lang="en-US"/>
           </a:p>

--- a/lecons/USA/Practical Geography/11_USA_PRA_QT02_Data_Collection_Sources_and_Techniques.pptx
+++ b/lecons/USA/Practical Geography/11_USA_PRA_QT02_Data_Collection_Sources_and_Techniques.pptx
@@ -70,9 +70,11 @@
     <p:sldId id="318" r:id="rId64"/>
     <p:sldId id="319" r:id="rId65"/>
     <p:sldId id="320" r:id="rId66"/>
+    <p:sldId id="321" r:id="rId67"/>
+    <p:sldId id="322" r:id="rId68"/>
   </p:sldIdLst>
   <p:notesMasterIdLst>
-    <p:notesMasterId r:id="rId67"/>
+    <p:notesMasterId r:id="rId69"/>
   </p:notesMasterIdLst>
   <p:sldSz cx="12192000" cy="6858000"/>
   <p:notesSz cx="6858000" cy="12192000"/>
@@ -3382,7 +3384,7 @@
           <a:p>
             <a:r>
               <a:rPr lang="en-US" dirty="0"/>
-              <a:t>Let us copy Sources of Geographical Data. Geographical data come from the following sources. Copy the point on Primary data on the left, then draw the diagram on the right: sources of data. Give it a title and label it clearly.</a:t>
+              <a:t>Let us copy Primary Data. Primary data are presented as follows. Copy the point on Meaning on the left, then draw the diagram on the right: sources of data. Give it a title and label it clearly.</a:t>
             </a:r>
             <a:endParaRPr lang="en-US" dirty="0"/>
           </a:p>
@@ -3558,7 +3560,7 @@
           <a:p>
             <a:r>
               <a:rPr lang="en-US" dirty="0"/>
-              <a:t>We continue with Sources of Geographical Data. Copy the point on Value of primary data: write the key term first, then its explanation.</a:t>
+              <a:t>We continue with Primary Data. Copy the point on Original and suited to the study: write the key term first, then its explanation.</a:t>
             </a:r>
             <a:endParaRPr lang="en-US" dirty="0"/>
           </a:p>
@@ -3646,7 +3648,7 @@
           <a:p>
             <a:r>
               <a:rPr lang="en-US" dirty="0"/>
-              <a:t>We continue with Sources of Geographical Data. Copy the point on Secondary data: write the key term first, then its explanation.</a:t>
+              <a:t>We continue with Primary Data. Copy the point on Slow and costly to collect: write the key term first, then its explanation.</a:t>
             </a:r>
             <a:endParaRPr lang="en-US" dirty="0"/>
           </a:p>
@@ -3734,7 +3736,7 @@
           <a:p>
             <a:r>
               <a:rPr lang="en-US" dirty="0"/>
-              <a:t>We continue with Sources of Geographical Data. Copy the point on Value of secondary data: write the key term first, then its explanation.</a:t>
+              <a:t>Let us copy Secondary Data. Secondary data are presented as follows. Copy the point on Meaning: write the key term first, then its explanation.</a:t>
             </a:r>
             <a:endParaRPr lang="en-US" dirty="0"/>
           </a:p>
@@ -3822,7 +3824,7 @@
           <a:p>
             <a:r>
               <a:rPr lang="en-US" dirty="0"/>
-              <a:t>Let us copy Basic Sampling Procedures. Samples are chosen by the following procedures. Copy the point on Why sample on the left, then draw the diagram on the right: sampling methods. Give it a title and label it clearly.</a:t>
+              <a:t>We continue with Secondary Data. Copy the point on Cheap and quick to obtain: write the key term first, then its explanation.</a:t>
             </a:r>
             <a:endParaRPr lang="en-US" dirty="0"/>
           </a:p>
@@ -3910,7 +3912,7 @@
           <a:p>
             <a:r>
               <a:rPr lang="en-US" dirty="0"/>
-              <a:t>We continue with Basic Sampling Procedures. Copy the point on Random sampling: write the key term first, then its explanation.</a:t>
+              <a:t>We continue with Secondary Data. Copy the point on Possibly outdated or unsuited: write the key term first, then its explanation.</a:t>
             </a:r>
             <a:endParaRPr lang="en-US" dirty="0"/>
           </a:p>
@@ -3998,7 +4000,7 @@
           <a:p>
             <a:r>
               <a:rPr lang="en-US" dirty="0"/>
-              <a:t>Copy the point on Systematic sampling on the left, then draw the diagram on the right: systematic sampling. Give it a title and label it clearly.</a:t>
+              <a:t>Let us copy Basic Sampling Procedures. Samples are chosen by the following procedures. Copy the point on Why sample on the left, then draw the diagram on the right: sampling methods. Give it a title and label it clearly.</a:t>
             </a:r>
             <a:endParaRPr lang="en-US" dirty="0"/>
           </a:p>
@@ -4086,7 +4088,7 @@
           <a:p>
             <a:r>
               <a:rPr lang="en-US" dirty="0"/>
-              <a:t>We continue with Basic Sampling Procedures. Copy the point on Stratified sampling: write the key term first, then its explanation.</a:t>
+              <a:t>We continue with Basic Sampling Procedures. Copy the point on Random sampling: write the key term first, then its explanation.</a:t>
             </a:r>
             <a:endParaRPr lang="en-US" dirty="0"/>
           </a:p>
@@ -4174,7 +4176,7 @@
           <a:p>
             <a:r>
               <a:rPr lang="en-US" dirty="0"/>
-              <a:t>Let us copy Observation, Recording and Measurement. Data are collected in the field with the following techniques. Copy the point on Observation, counting and recording of frequencies on the left, then draw the diagram on the right: data collection techniques. Give it a title and label it clearly.</a:t>
+              <a:t>Copy the point on Systematic sampling on the left, then draw the diagram on the right: systematic sampling. Give it a title and label it clearly.</a:t>
             </a:r>
             <a:endParaRPr lang="en-US" dirty="0"/>
           </a:p>
@@ -4262,7 +4264,7 @@
           <a:p>
             <a:r>
               <a:rPr lang="en-US" dirty="0"/>
-              <a:t>We continue with Observation, Recording and Measurement. Copy the point on Pictures, filming and video recording: write the key term first, then its explanation.</a:t>
+              <a:t>We continue with Basic Sampling Procedures. Copy the point on Stratified sampling: write the key term first, then its explanation.</a:t>
             </a:r>
             <a:endParaRPr lang="en-US" dirty="0"/>
           </a:p>
@@ -4350,7 +4352,7 @@
           <a:p>
             <a:r>
               <a:rPr lang="en-US" dirty="0"/>
-              <a:t>We continue with Observation, Recording and Measurement. Copy the point on Measurement: write the key term first, then its explanation.</a:t>
+              <a:t>Let us copy Observation, Recording and Measurement. Data are collected in the field with the following techniques. Copy the point on Observation, counting and recording of frequencies on the left, then draw the diagram on the right: data collection techniques. Give it a title and label it clearly.</a:t>
             </a:r>
             <a:endParaRPr lang="en-US" dirty="0"/>
           </a:p>
@@ -4526,7 +4528,7 @@
           <a:p>
             <a:r>
               <a:rPr lang="en-US" dirty="0"/>
-              <a:t>Let us copy Questionnaires, Interviews and Focus Groups. Data are collected from people with the following techniques. Copy the point on Questionnaires on the left, then draw the diagram on the right: a questionnaire. Give it a title and label it clearly.</a:t>
+              <a:t>We continue with Observation, Recording and Measurement. Copy the point on Pictures, filming and video recording: write the key term first, then its explanation.</a:t>
             </a:r>
             <a:endParaRPr lang="en-US" dirty="0"/>
           </a:p>
@@ -4614,7 +4616,7 @@
           <a:p>
             <a:r>
               <a:rPr lang="en-US" dirty="0"/>
-              <a:t>We continue with Questionnaires, Interviews and Focus Groups. Copy the point on Interviews: write the key term first, then its explanation.</a:t>
+              <a:t>We continue with Observation, Recording and Measurement. Copy the point on Measurement: write the key term first, then its explanation.</a:t>
             </a:r>
             <a:endParaRPr lang="en-US" dirty="0"/>
           </a:p>
@@ -4702,7 +4704,7 @@
           <a:p>
             <a:r>
               <a:rPr lang="en-US" dirty="0"/>
-              <a:t>We continue with Questionnaires, Interviews and Focus Groups. Copy the point on Focus group discussions: write the key term first, then its explanation.</a:t>
+              <a:t>Let us copy Questionnaires, Interviews and Focus Groups. Data are collected from people with the following techniques. Copy the point on Questionnaires on the left, then draw the diagram on the right: a questionnaire. Give it a title and label it clearly.</a:t>
             </a:r>
             <a:endParaRPr lang="en-US" dirty="0"/>
           </a:p>
@@ -4790,7 +4792,7 @@
           <a:p>
             <a:r>
               <a:rPr lang="en-US" dirty="0"/>
-              <a:t>Now let us check what you have understood. Question 1: Distinguish primary data from secondary data, with one example from Garoua for each. Answer in your exercise book.</a:t>
+              <a:t>We continue with Questionnaires, Interviews and Focus Groups. Copy the point on Interviews: write the key term first, then its explanation.</a:t>
             </a:r>
             <a:endParaRPr lang="en-US" dirty="0"/>
           </a:p>
@@ -4878,7 +4880,7 @@
           <a:p>
             <a:r>
               <a:rPr lang="en-US" dirty="0"/>
-              <a:t>The expected answer is: primary: collected by the researcher (counting motos at a crossroads); secondary: already published (BUCREP census figures). If you got it right, well done.</a:t>
+              <a:t>We continue with Questionnaires, Interviews and Focus Groups. Copy the point on Focus group discussions: write the key term first, then its explanation.</a:t>
             </a:r>
             <a:endParaRPr lang="en-US" dirty="0"/>
           </a:p>
@@ -4966,7 +4968,7 @@
           <a:p>
             <a:r>
               <a:rPr lang="en-US" dirty="0"/>
-              <a:t>Now let us check what you have understood. Question 2: Explain how to select 30 people from a list of 600 by systematic sampling. Answer in your exercise book.</a:t>
+              <a:t>Now let us check what you have understood. Question 1: Distinguish primary data from secondary data, with one example from Garoua for each. Answer in your exercise book.</a:t>
             </a:r>
             <a:endParaRPr lang="en-US" dirty="0"/>
           </a:p>
@@ -5054,7 +5056,7 @@
           <a:p>
             <a:r>
               <a:rPr lang="en-US" dirty="0"/>
-              <a:t>The expected answer is: k = 600 ÷ 30 = 20; choose a random start between 1 and 20, then every 20th person. If you got it right, well done.</a:t>
+              <a:t>The expected answer is: primary: collected by the researcher (counting motos at a crossroads); secondary: already published (BUCREP census figures). If you got it right, well done.</a:t>
             </a:r>
             <a:endParaRPr lang="en-US" dirty="0"/>
           </a:p>
@@ -5142,7 +5144,7 @@
           <a:p>
             <a:r>
               <a:rPr lang="en-US" dirty="0"/>
-              <a:t>Take your time to copy this part; we will continue together.</a:t>
+              <a:t>Now let us check what you have understood. Question 2: Explain how to select 30 people from a list of 600 by systematic sampling. Answer in your exercise book.</a:t>
             </a:r>
             <a:endParaRPr lang="en-US" dirty="0"/>
           </a:p>
@@ -5230,7 +5232,7 @@
           <a:p>
             <a:r>
               <a:rPr lang="en-US" dirty="0"/>
-              <a:t>For those who need more practice, fill in the blanks in your exercise book. The answers are: number 1, primary; number 2, systematic; number 3, stratified.</a:t>
+              <a:t>The expected answer is: k = 600 ÷ 30 = 20; choose a random start between 1 and 20, then every 20th person. If you got it right, well done.</a:t>
             </a:r>
             <a:endParaRPr lang="en-US" dirty="0"/>
           </a:p>
@@ -5318,7 +5320,7 @@
           <a:p>
             <a:r>
               <a:rPr lang="en-US" dirty="0"/>
-              <a:t>For your homework: Define the arithmetic mean. We shall correct it at the beginning of our next lesson.</a:t>
+              <a:t>Take your time to copy this part; we will continue together.</a:t>
             </a:r>
             <a:endParaRPr lang="en-US" dirty="0"/>
           </a:p>
@@ -5494,7 +5496,7 @@
           <a:p>
             <a:r>
               <a:rPr lang="en-US" dirty="0"/>
-              <a:t>Our next lesson will be on Quantitative Techniques 3 (Part 1): Measures of Central Tendency, Range and Quartiles. Thank you for your attention, and see you next time.</a:t>
+              <a:t>For those who need more practice, fill in the blanks in your exercise book. The answers are: number 1, primary; number 2, systematic; number 3, stratified.</a:t>
             </a:r>
             <a:endParaRPr lang="en-US" dirty="0"/>
           </a:p>
@@ -5582,7 +5584,7 @@
           <a:p>
             <a:r>
               <a:rPr lang="en-US" dirty="0"/>
-              <a:t>Let us play the bilingual game. I say a word in English, and you give me the French word. Then we do the reverse.</a:t>
+              <a:t>For your homework: Define the arithmetic mean. We shall correct it at the beginning of our next lesson.</a:t>
             </a:r>
             <a:endParaRPr lang="en-US" dirty="0"/>
           </a:p>
@@ -5670,7 +5672,7 @@
           <a:p>
             <a:r>
               <a:rPr lang="en-US" dirty="0"/>
-              <a:t>I record this information in the official logbook of the class after the lesson.</a:t>
+              <a:t>Our next lesson will be on Quantitative Techniques 3 (Part 1): Measures of Central Tendency, Range and Quartiles. Thank you for your attention, and see you next time.</a:t>
             </a:r>
             <a:endParaRPr lang="en-US" dirty="0"/>
           </a:p>
@@ -5758,7 +5760,7 @@
           <a:p>
             <a:r>
               <a:rPr lang="en-US" dirty="0"/>
-              <a:t>I complete the second page of the logbook: the matter taught, the evaluation, the homework and the attendance.</a:t>
+              <a:t>Let us play the bilingual game. I say a word in English, and you give me the French word. Then we do the reverse.</a:t>
             </a:r>
             <a:endParaRPr lang="en-US" dirty="0"/>
           </a:p>
@@ -5846,7 +5848,7 @@
           <a:p>
             <a:r>
               <a:rPr lang="en-US" dirty="0"/>
-              <a:t>This slide is for me, the teacher: it gives the timing of the lesson and what to do if the projector is not available.</a:t>
+              <a:t>I record this information in the official logbook of the class after the lesson.</a:t>
             </a:r>
             <a:endParaRPr lang="en-US" dirty="0"/>
           </a:p>
@@ -5934,7 +5936,7 @@
           <a:p>
             <a:r>
               <a:rPr lang="en-US" dirty="0"/>
-              <a:t>These are the references and picture credits used to prepare this lesson.</a:t>
+              <a:t>I complete the second page of the logbook: the matter taught, the evaluation, the homework and the attendance.</a:t>
             </a:r>
             <a:endParaRPr lang="en-US" dirty="0"/>
           </a:p>
@@ -5958,6 +5960,182 @@
             <a:fld id="{F7021451-1387-4CA6-816F-3879F97B5CBC}" type="slidenum">
               <a:rPr lang="en-US"/>
               <a:t>65</a:t>
+            </a:fld>
+            <a:endParaRPr lang="en-US"/>
+          </a:p>
+        </p:txBody>
+      </p:sp>
+    </p:spTree>
+    <p:extLst>
+      <p:ext uri="{BB962C8B-B14F-4D97-AF65-F5344CB8AC3E}">
+        <p14:creationId xmlns:p14="http://schemas.microsoft.com/office/powerpoint/2010/main" val="1024086991"/>
+      </p:ext>
+    </p:extLst>
+  </p:cSld>
+  <p:clrMapOvr>
+    <a:masterClrMapping/>
+  </p:clrMapOvr>
+</p:notes>
+</file>
+
+<file path=ppt/notesSlides/notesSlide66.xml><?xml version="1.0" encoding="utf-8"?>
+<p:notes xmlns:a="http://schemas.openxmlformats.org/drawingml/2006/main" xmlns:r="http://schemas.openxmlformats.org/officeDocument/2006/relationships" xmlns:p="http://schemas.openxmlformats.org/presentationml/2006/main">
+  <p:cSld>
+    <p:spTree>
+      <p:nvGrpSpPr>
+        <p:cNvPr id="1" name=""/>
+        <p:cNvGrpSpPr/>
+        <p:nvPr/>
+      </p:nvGrpSpPr>
+      <p:grpSpPr>
+        <a:xfrm>
+          <a:off x="0" y="0"/>
+          <a:ext cx="0" cy="0"/>
+          <a:chOff x="0" y="0"/>
+          <a:chExt cx="0" cy="0"/>
+        </a:xfrm>
+      </p:grpSpPr>
+      <p:sp>
+        <p:nvSpPr>
+          <p:cNvPr id="2" name="Slide Image Placeholder 1"/>
+          <p:cNvSpPr>
+            <a:spLocks noGrp="1" noRot="1" noChangeAspect="1"/>
+          </p:cNvSpPr>
+          <p:nvPr>
+            <p:ph type="sldImg"/>
+          </p:nvPr>
+        </p:nvSpPr>
+        <p:spPr/>
+      </p:sp>
+      <p:sp>
+        <p:nvSpPr>
+          <p:cNvPr id="3" name="Notes Placeholder 2"/>
+          <p:cNvSpPr>
+            <a:spLocks noGrp="1"/>
+          </p:cNvSpPr>
+          <p:nvPr>
+            <p:ph type="body" idx="1"/>
+          </p:nvPr>
+        </p:nvSpPr>
+        <p:spPr/>
+        <p:txBody>
+          <a:bodyPr/>
+          <a:lstStyle/>
+          <a:p>
+            <a:r>
+              <a:rPr lang="en-US" dirty="0"/>
+              <a:t>This slide is for me, the teacher: it gives the timing of the lesson and what to do if the projector is not available.</a:t>
+            </a:r>
+            <a:endParaRPr lang="en-US" dirty="0"/>
+          </a:p>
+        </p:txBody>
+      </p:sp>
+      <p:sp>
+        <p:nvSpPr>
+          <p:cNvPr id="4" name="Slide Number Placeholder 3"/>
+          <p:cNvSpPr>
+            <a:spLocks noGrp="1"/>
+          </p:cNvSpPr>
+          <p:nvPr>
+            <p:ph type="sldNum" sz="quarter" idx="10"/>
+          </p:nvPr>
+        </p:nvSpPr>
+        <p:spPr/>
+        <p:txBody>
+          <a:bodyPr/>
+          <a:lstStyle/>
+          <a:p>
+            <a:fld id="{F7021451-1387-4CA6-816F-3879F97B5CBC}" type="slidenum">
+              <a:rPr lang="en-US"/>
+              <a:t>66</a:t>
+            </a:fld>
+            <a:endParaRPr lang="en-US"/>
+          </a:p>
+        </p:txBody>
+      </p:sp>
+    </p:spTree>
+    <p:extLst>
+      <p:ext uri="{BB962C8B-B14F-4D97-AF65-F5344CB8AC3E}">
+        <p14:creationId xmlns:p14="http://schemas.microsoft.com/office/powerpoint/2010/main" val="1024086991"/>
+      </p:ext>
+    </p:extLst>
+  </p:cSld>
+  <p:clrMapOvr>
+    <a:masterClrMapping/>
+  </p:clrMapOvr>
+</p:notes>
+</file>
+
+<file path=ppt/notesSlides/notesSlide67.xml><?xml version="1.0" encoding="utf-8"?>
+<p:notes xmlns:a="http://schemas.openxmlformats.org/drawingml/2006/main" xmlns:r="http://schemas.openxmlformats.org/officeDocument/2006/relationships" xmlns:p="http://schemas.openxmlformats.org/presentationml/2006/main">
+  <p:cSld>
+    <p:spTree>
+      <p:nvGrpSpPr>
+        <p:cNvPr id="1" name=""/>
+        <p:cNvGrpSpPr/>
+        <p:nvPr/>
+      </p:nvGrpSpPr>
+      <p:grpSpPr>
+        <a:xfrm>
+          <a:off x="0" y="0"/>
+          <a:ext cx="0" cy="0"/>
+          <a:chOff x="0" y="0"/>
+          <a:chExt cx="0" cy="0"/>
+        </a:xfrm>
+      </p:grpSpPr>
+      <p:sp>
+        <p:nvSpPr>
+          <p:cNvPr id="2" name="Slide Image Placeholder 1"/>
+          <p:cNvSpPr>
+            <a:spLocks noGrp="1" noRot="1" noChangeAspect="1"/>
+          </p:cNvSpPr>
+          <p:nvPr>
+            <p:ph type="sldImg"/>
+          </p:nvPr>
+        </p:nvSpPr>
+        <p:spPr/>
+      </p:sp>
+      <p:sp>
+        <p:nvSpPr>
+          <p:cNvPr id="3" name="Notes Placeholder 2"/>
+          <p:cNvSpPr>
+            <a:spLocks noGrp="1"/>
+          </p:cNvSpPr>
+          <p:nvPr>
+            <p:ph type="body" idx="1"/>
+          </p:nvPr>
+        </p:nvSpPr>
+        <p:spPr/>
+        <p:txBody>
+          <a:bodyPr/>
+          <a:lstStyle/>
+          <a:p>
+            <a:r>
+              <a:rPr lang="en-US" dirty="0"/>
+              <a:t>These are the references and picture credits used to prepare this lesson.</a:t>
+            </a:r>
+            <a:endParaRPr lang="en-US" dirty="0"/>
+          </a:p>
+        </p:txBody>
+      </p:sp>
+      <p:sp>
+        <p:nvSpPr>
+          <p:cNvPr id="4" name="Slide Number Placeholder 3"/>
+          <p:cNvSpPr>
+            <a:spLocks noGrp="1"/>
+          </p:cNvSpPr>
+          <p:nvPr>
+            <p:ph type="sldNum" sz="quarter" idx="10"/>
+          </p:nvPr>
+        </p:nvSpPr>
+        <p:spPr/>
+        <p:txBody>
+          <a:bodyPr/>
+          <a:lstStyle/>
+          <a:p>
+            <a:fld id="{F7021451-1387-4CA6-816F-3879F97B5CBC}" type="slidenum">
+              <a:rPr lang="en-US"/>
+              <a:t>67</a:t>
             </a:fld>
             <a:endParaRPr lang="en-US"/>
           </a:p>
@@ -15765,8 +15943,49 @@
         </p:nvSpPr>
         <p:spPr>
           <a:xfrm>
-            <a:off x="365760" y="1783080"/>
-            <a:ext cx="6035040" cy="4617720"/>
+            <a:off x="365760" y="1737360"/>
+            <a:ext cx="6035040" cy="457200"/>
+          </a:xfrm>
+          <a:prstGeom prst="rect">
+            <a:avLst/>
+          </a:prstGeom>
+          <a:noFill/>
+          <a:ln/>
+        </p:spPr>
+        <p:txBody>
+          <a:bodyPr wrap="square" lIns="0" tIns="0" rIns="0" bIns="0" rtlCol="0" anchor="ctr">
+            <a:normAutofit/>
+          </a:bodyPr>
+          <a:lstStyle/>
+          <a:p>
+            <a:pPr algn="l" indent="0" marL="0">
+              <a:buNone/>
+            </a:pPr>
+            <a:r>
+              <a:rPr lang="en-US" sz="3000" b="1" dirty="0">
+                <a:solidFill>
+                  <a:srgbClr val="990011"/>
+                </a:solidFill>
+                <a:latin typeface="Times New Roman" pitchFamily="34" charset="0"/>
+                <a:ea typeface="Times New Roman" pitchFamily="34" charset="-122"/>
+                <a:cs typeface="Times New Roman" pitchFamily="34" charset="-120"/>
+              </a:rPr>
+              <a:t>A) Primary Data</a:t>
+            </a:r>
+            <a:endParaRPr lang="en-US" sz="3000" dirty="0"/>
+          </a:p>
+        </p:txBody>
+      </p:sp>
+      <p:sp>
+        <p:nvSpPr>
+          <p:cNvPr id="5" name="Text 3"/>
+          <p:cNvSpPr/>
+          <p:nvPr/>
+        </p:nvSpPr>
+        <p:spPr>
+          <a:xfrm>
+            <a:off x="365760" y="2240280"/>
+            <a:ext cx="6035040" cy="4160520"/>
           </a:xfrm>
           <a:prstGeom prst="rect">
             <a:avLst/>
@@ -15785,7 +16004,7 @@
               <a:buNone/>
             </a:pPr>
             <a:r>
-              <a:rPr lang="en-US" sz="3000" i="1" dirty="0">
+              <a:rPr lang="en-US" sz="2800" i="1" dirty="0">
                 <a:solidFill>
                   <a:srgbClr val="111111"/>
                 </a:solidFill>
@@ -15793,9 +16012,9 @@
                 <a:ea typeface="Times New Roman" pitchFamily="34" charset="-122"/>
                 <a:cs typeface="Times New Roman" pitchFamily="34" charset="-120"/>
               </a:rPr>
-              <a:t>Geographical data come from the following sources:</a:t>
-            </a:r>
-            <a:endParaRPr lang="en-US" sz="3000" dirty="0"/>
+              <a:t>Primary data are presented as follows:</a:t>
+            </a:r>
+            <a:endParaRPr lang="en-US" sz="2800" dirty="0"/>
           </a:p>
           <a:p>
             <a:pPr algn="l" indent="0" marL="0">
@@ -15805,7 +16024,7 @@
               <a:buNone/>
             </a:pPr>
             <a:r>
-              <a:rPr lang="en-US" sz="3000" b="1" dirty="0">
+              <a:rPr lang="en-US" sz="2800" b="1" dirty="0">
                 <a:solidFill>
                   <a:srgbClr val="111111"/>
                 </a:solidFill>
@@ -15813,7 +16032,7 @@
                 <a:ea typeface="Times New Roman" pitchFamily="34" charset="-122"/>
                 <a:cs typeface="Times New Roman" pitchFamily="34" charset="-120"/>
               </a:rPr>
-              <a:t>Primary data: </a:t>
+              <a:t>Meaning: </a:t>
             </a:r>
             <a:pPr algn="l" indent="0" marL="0">
               <a:spcAft>
@@ -15822,7 +16041,7 @@
               <a:buNone/>
             </a:pPr>
             <a:r>
-              <a:rPr lang="en-US" sz="3000" dirty="0">
+              <a:rPr lang="en-US" sz="2800" dirty="0">
                 <a:solidFill>
                   <a:srgbClr val="111111"/>
                 </a:solidFill>
@@ -15830,15 +16049,15 @@
                 <a:ea typeface="Times New Roman" pitchFamily="34" charset="-122"/>
                 <a:cs typeface="Times New Roman" pitchFamily="34" charset="-120"/>
               </a:rPr>
-              <a:t>Primary data are collected by the researcher himself through fieldwork, observation, measurement, interviews and questionnaires. For example, a student measures the temperature of the Benue with a thermometer.</a:t>
-            </a:r>
-            <a:endParaRPr lang="en-US" sz="3000" dirty="0"/>
+              <a:t>Primary data are collected by the researcher in person through fieldwork, observation, measurement, interviews and questionnaires. For example, a student measures the temperature of the Benue with a thermometer.</a:t>
+            </a:r>
+            <a:endParaRPr lang="en-US" sz="2800" dirty="0"/>
           </a:p>
         </p:txBody>
       </p:sp>
       <p:pic>
         <p:nvPicPr>
-          <p:cNvPr id="5" name="Image 0" descr="/home/claude/f4/img/v2/data_sources_big.png">    </p:cNvPr>
+          <p:cNvPr id="6" name="Image 0" descr="/home/claude/f4/img/v2/data_sources_big.png">    </p:cNvPr>
           <p:cNvPicPr>
             <a:picLocks noChangeAspect="1"/>
           </p:cNvPicPr>
@@ -15862,7 +16081,7 @@
       </p:pic>
       <p:sp>
         <p:nvSpPr>
-          <p:cNvPr id="6" name="Text 3"/>
+          <p:cNvPr id="7" name="Text 4"/>
           <p:cNvSpPr/>
           <p:nvPr/>
         </p:nvSpPr>
@@ -16323,8 +16542,47 @@
         </p:nvSpPr>
         <p:spPr>
           <a:xfrm>
-            <a:off x="5349240" y="1783080"/>
-            <a:ext cx="6522415" cy="4663440"/>
+            <a:off x="5349240" y="1737360"/>
+            <a:ext cx="6522415" cy="457200"/>
+          </a:xfrm>
+          <a:prstGeom prst="rect">
+            <a:avLst/>
+          </a:prstGeom>
+          <a:noFill/>
+          <a:ln/>
+        </p:spPr>
+        <p:txBody>
+          <a:bodyPr wrap="square" lIns="0" tIns="0" rIns="0" bIns="0" rtlCol="0" anchor="ctr"/>
+          <a:lstStyle/>
+          <a:p>
+            <a:pPr algn="l" indent="0" marL="0">
+              <a:buNone/>
+            </a:pPr>
+            <a:r>
+              <a:rPr lang="en-US" sz="3200" b="1" dirty="0">
+                <a:solidFill>
+                  <a:srgbClr val="990011"/>
+                </a:solidFill>
+                <a:latin typeface="Times New Roman" pitchFamily="34" charset="0"/>
+                <a:ea typeface="Times New Roman" pitchFamily="34" charset="-122"/>
+                <a:cs typeface="Times New Roman" pitchFamily="34" charset="-120"/>
+              </a:rPr>
+              <a:t>A) Primary Data</a:t>
+            </a:r>
+            <a:endParaRPr lang="en-US" sz="3200" dirty="0"/>
+          </a:p>
+        </p:txBody>
+      </p:sp>
+      <p:sp>
+        <p:nvSpPr>
+          <p:cNvPr id="6" name="Text 3"/>
+          <p:cNvSpPr/>
+          <p:nvPr/>
+        </p:nvSpPr>
+        <p:spPr>
+          <a:xfrm>
+            <a:off x="5349240" y="2240280"/>
+            <a:ext cx="6522415" cy="4206240"/>
           </a:xfrm>
           <a:prstGeom prst="rect">
             <a:avLst/>
@@ -16351,7 +16609,7 @@
                 <a:ea typeface="Times New Roman" pitchFamily="34" charset="-122"/>
                 <a:cs typeface="Times New Roman" pitchFamily="34" charset="-120"/>
               </a:rPr>
-              <a:t>Value of primary data: </a:t>
+              <a:t>Original and suited to the study: </a:t>
             </a:r>
             <a:pPr algn="l" indent="0" marL="0">
               <a:spcAft>
@@ -16368,7 +16626,7 @@
                 <a:ea typeface="Times New Roman" pitchFamily="34" charset="-122"/>
                 <a:cs typeface="Times New Roman" pitchFamily="34" charset="-120"/>
               </a:rPr>
-              <a:t>They are original, up to date and fit the purpose of the study exactly. However, they take time and money to collect.</a:t>
+              <a:t>Primary data are new and up to date. They answer exactly the question that the researcher is studying.</a:t>
             </a:r>
             <a:endParaRPr lang="en-US" sz="4000" dirty="0"/>
           </a:p>
@@ -16503,7 +16761,7 @@
         <p:spPr>
           <a:xfrm>
             <a:off x="0" y="658368"/>
-            <a:ext cx="2468880" cy="5833872"/>
+            <a:ext cx="5120640" cy="5833872"/>
           </a:xfrm>
           <a:prstGeom prst="rect">
             <a:avLst/>
@@ -16518,8 +16776,8 @@
         </p:nvSpPr>
         <p:spPr>
           <a:xfrm>
-            <a:off x="2697480" y="1005840"/>
-            <a:ext cx="9174175" cy="731520"/>
+            <a:off x="5349240" y="1005840"/>
+            <a:ext cx="6522415" cy="731520"/>
           </a:xfrm>
           <a:prstGeom prst="rect">
             <a:avLst/>
@@ -16559,8 +16817,47 @@
         </p:nvSpPr>
         <p:spPr>
           <a:xfrm>
-            <a:off x="2697480" y="1783080"/>
-            <a:ext cx="9174175" cy="4663440"/>
+            <a:off x="5349240" y="1737360"/>
+            <a:ext cx="6522415" cy="457200"/>
+          </a:xfrm>
+          <a:prstGeom prst="rect">
+            <a:avLst/>
+          </a:prstGeom>
+          <a:noFill/>
+          <a:ln/>
+        </p:spPr>
+        <p:txBody>
+          <a:bodyPr wrap="square" lIns="0" tIns="0" rIns="0" bIns="0" rtlCol="0" anchor="ctr"/>
+          <a:lstStyle/>
+          <a:p>
+            <a:pPr algn="l" indent="0" marL="0">
+              <a:buNone/>
+            </a:pPr>
+            <a:r>
+              <a:rPr lang="en-US" sz="3200" b="1" dirty="0">
+                <a:solidFill>
+                  <a:srgbClr val="990011"/>
+                </a:solidFill>
+                <a:latin typeface="Times New Roman" pitchFamily="34" charset="0"/>
+                <a:ea typeface="Times New Roman" pitchFamily="34" charset="-122"/>
+                <a:cs typeface="Times New Roman" pitchFamily="34" charset="-120"/>
+              </a:rPr>
+              <a:t>A) Primary Data</a:t>
+            </a:r>
+            <a:endParaRPr lang="en-US" sz="3200" dirty="0"/>
+          </a:p>
+        </p:txBody>
+      </p:sp>
+      <p:sp>
+        <p:nvSpPr>
+          <p:cNvPr id="6" name="Text 3"/>
+          <p:cNvSpPr/>
+          <p:nvPr/>
+        </p:nvSpPr>
+        <p:spPr>
+          <a:xfrm>
+            <a:off x="5349240" y="2240280"/>
+            <a:ext cx="6522415" cy="4206240"/>
           </a:xfrm>
           <a:prstGeom prst="rect">
             <a:avLst/>
@@ -16587,7 +16884,7 @@
                 <a:ea typeface="Times New Roman" pitchFamily="34" charset="-122"/>
                 <a:cs typeface="Times New Roman" pitchFamily="34" charset="-120"/>
               </a:rPr>
-              <a:t>Secondary data: </a:t>
+              <a:t>Slow and costly to collect: </a:t>
             </a:r>
             <a:pPr algn="l" indent="0" marL="0">
               <a:spcAft>
@@ -16604,7 +16901,7 @@
                 <a:ea typeface="Times New Roman" pitchFamily="34" charset="-122"/>
                 <a:cs typeface="Times New Roman" pitchFamily="34" charset="-120"/>
               </a:rPr>
-              <a:t>Secondary data already exist in books, BUCREP census reports, INS statistics, newspapers such as Cameroon Tribune, maps and websites. Reports of the Ministry of Agriculture on cotton production are an example.</a:t>
+              <a:t>Fieldwork takes a lot of time, transport and materials. A researcher can therefore only cover a small area.</a:t>
             </a:r>
             <a:endParaRPr lang="en-US" sz="4000" dirty="0"/>
           </a:p>
@@ -16739,7 +17036,7 @@
         <p:spPr>
           <a:xfrm>
             <a:off x="0" y="658368"/>
-            <a:ext cx="5120640" cy="5833872"/>
+            <a:ext cx="2468880" cy="5833872"/>
           </a:xfrm>
           <a:prstGeom prst="rect">
             <a:avLst/>
@@ -16754,8 +17051,8 @@
         </p:nvSpPr>
         <p:spPr>
           <a:xfrm>
-            <a:off x="5349240" y="1005840"/>
-            <a:ext cx="6522415" cy="731520"/>
+            <a:off x="2697480" y="1005840"/>
+            <a:ext cx="9174175" cy="731520"/>
           </a:xfrm>
           <a:prstGeom prst="rect">
             <a:avLst/>
@@ -16795,8 +17092,47 @@
         </p:nvSpPr>
         <p:spPr>
           <a:xfrm>
-            <a:off x="5349240" y="1783080"/>
-            <a:ext cx="6522415" cy="4663440"/>
+            <a:off x="2697480" y="1737360"/>
+            <a:ext cx="9174175" cy="457200"/>
+          </a:xfrm>
+          <a:prstGeom prst="rect">
+            <a:avLst/>
+          </a:prstGeom>
+          <a:noFill/>
+          <a:ln/>
+        </p:spPr>
+        <p:txBody>
+          <a:bodyPr wrap="square" lIns="0" tIns="0" rIns="0" bIns="0" rtlCol="0" anchor="ctr"/>
+          <a:lstStyle/>
+          <a:p>
+            <a:pPr algn="l" indent="0" marL="0">
+              <a:buNone/>
+            </a:pPr>
+            <a:r>
+              <a:rPr lang="en-US" sz="3200" b="1" dirty="0">
+                <a:solidFill>
+                  <a:srgbClr val="990011"/>
+                </a:solidFill>
+                <a:latin typeface="Times New Roman" pitchFamily="34" charset="0"/>
+                <a:ea typeface="Times New Roman" pitchFamily="34" charset="-122"/>
+                <a:cs typeface="Times New Roman" pitchFamily="34" charset="-120"/>
+              </a:rPr>
+              <a:t>B) Secondary Data</a:t>
+            </a:r>
+            <a:endParaRPr lang="en-US" sz="3200" dirty="0"/>
+          </a:p>
+        </p:txBody>
+      </p:sp>
+      <p:sp>
+        <p:nvSpPr>
+          <p:cNvPr id="6" name="Text 3"/>
+          <p:cNvSpPr/>
+          <p:nvPr/>
+        </p:nvSpPr>
+        <p:spPr>
+          <a:xfrm>
+            <a:off x="2697480" y="2240280"/>
+            <a:ext cx="9174175" cy="4206240"/>
           </a:xfrm>
           <a:prstGeom prst="rect">
             <a:avLst/>
@@ -16815,7 +17151,7 @@
               <a:buNone/>
             </a:pPr>
             <a:r>
-              <a:rPr lang="en-US" sz="4000" b="1" dirty="0">
+              <a:rPr lang="en-US" sz="3600" i="1" dirty="0">
                 <a:solidFill>
                   <a:srgbClr val="111111"/>
                 </a:solidFill>
@@ -16823,8 +17159,11 @@
                 <a:ea typeface="Times New Roman" pitchFamily="34" charset="-122"/>
                 <a:cs typeface="Times New Roman" pitchFamily="34" charset="-120"/>
               </a:rPr>
-              <a:t>Value of secondary data: </a:t>
-            </a:r>
+              <a:t>Secondary data are presented as follows:</a:t>
+            </a:r>
+            <a:endParaRPr lang="en-US" sz="3600" dirty="0"/>
+          </a:p>
+          <a:p>
             <a:pPr algn="l" indent="0" marL="0">
               <a:spcAft>
                 <a:spcPts val="800"/>
@@ -16832,7 +17171,7 @@
               <a:buNone/>
             </a:pPr>
             <a:r>
-              <a:rPr lang="en-US" sz="4000" dirty="0">
+              <a:rPr lang="en-US" sz="3600" b="1" dirty="0">
                 <a:solidFill>
                   <a:srgbClr val="111111"/>
                 </a:solidFill>
@@ -16840,9 +17179,26 @@
                 <a:ea typeface="Times New Roman" pitchFamily="34" charset="-122"/>
                 <a:cs typeface="Times New Roman" pitchFamily="34" charset="-120"/>
               </a:rPr>
-              <a:t>They are cheap and quick to obtain and often cover large areas and long periods. However, they may be outdated or collected for another purpose.</a:t>
-            </a:r>
-            <a:endParaRPr lang="en-US" sz="4000" dirty="0"/>
+              <a:t>Meaning: </a:t>
+            </a:r>
+            <a:pPr algn="l" indent="0" marL="0">
+              <a:spcAft>
+                <a:spcPts val="800"/>
+              </a:spcAft>
+              <a:buNone/>
+            </a:pPr>
+            <a:r>
+              <a:rPr lang="en-US" sz="3600" dirty="0">
+                <a:solidFill>
+                  <a:srgbClr val="111111"/>
+                </a:solidFill>
+                <a:latin typeface="Times New Roman" pitchFamily="34" charset="0"/>
+                <a:ea typeface="Times New Roman" pitchFamily="34" charset="-122"/>
+                <a:cs typeface="Times New Roman" pitchFamily="34" charset="-120"/>
+              </a:rPr>
+              <a:t>Secondary data already exist in books, BUCREP census reports, INS statistics, newspapers such as Cameroon Tribune, maps and websites. Reports of the Ministry of Agriculture on cotton production are an example.</a:t>
+            </a:r>
+            <a:endParaRPr lang="en-US" sz="3600" dirty="0"/>
           </a:p>
         </p:txBody>
       </p:sp>
@@ -16958,129 +17314,9 @@
           </a:p>
         </p:txBody>
       </p:sp>
-      <p:sp>
-        <p:nvSpPr>
-          <p:cNvPr id="3" name="Text 1"/>
-          <p:cNvSpPr/>
-          <p:nvPr/>
-        </p:nvSpPr>
-        <p:spPr>
-          <a:xfrm>
-            <a:off x="365760" y="1005840"/>
-            <a:ext cx="11460175" cy="731520"/>
-          </a:xfrm>
-          <a:prstGeom prst="rect">
-            <a:avLst/>
-          </a:prstGeom>
-          <a:noFill/>
-          <a:ln/>
-        </p:spPr>
-        <p:txBody>
-          <a:bodyPr wrap="square" lIns="0" tIns="0" rIns="0" bIns="0" rtlCol="0" anchor="ctr">
-            <a:normAutofit/>
-          </a:bodyPr>
-          <a:lstStyle/>
-          <a:p>
-            <a:pPr algn="ctr" indent="0" marL="0">
-              <a:buNone/>
-            </a:pPr>
-            <a:r>
-              <a:rPr lang="en-US" sz="3600" b="1" dirty="0">
-                <a:solidFill>
-                  <a:srgbClr val="990011"/>
-                </a:solidFill>
-                <a:latin typeface="Times New Roman" pitchFamily="34" charset="0"/>
-                <a:ea typeface="Times New Roman" pitchFamily="34" charset="-122"/>
-                <a:cs typeface="Times New Roman" pitchFamily="34" charset="-120"/>
-              </a:rPr>
-              <a:t>2. Basic Sampling Procedures</a:t>
-            </a:r>
-            <a:endParaRPr lang="en-US" sz="3600" dirty="0"/>
-          </a:p>
-        </p:txBody>
-      </p:sp>
-      <p:sp>
-        <p:nvSpPr>
-          <p:cNvPr id="4" name="Text 2"/>
-          <p:cNvSpPr/>
-          <p:nvPr/>
-        </p:nvSpPr>
-        <p:spPr>
-          <a:xfrm>
-            <a:off x="365760" y="1783080"/>
-            <a:ext cx="6035040" cy="4617720"/>
-          </a:xfrm>
-          <a:prstGeom prst="rect">
-            <a:avLst/>
-          </a:prstGeom>
-          <a:noFill/>
-          <a:ln/>
-        </p:spPr>
-        <p:txBody>
-          <a:bodyPr wrap="square" lIns="0" tIns="0" rIns="0" bIns="0" rtlCol="0" anchor="t"/>
-          <a:lstStyle/>
-          <a:p>
-            <a:pPr algn="l" indent="0" marL="0">
-              <a:spcAft>
-                <a:spcPts val="800"/>
-              </a:spcAft>
-              <a:buNone/>
-            </a:pPr>
-            <a:r>
-              <a:rPr lang="en-US" sz="3400" i="1" dirty="0">
-                <a:solidFill>
-                  <a:srgbClr val="111111"/>
-                </a:solidFill>
-                <a:latin typeface="Times New Roman" pitchFamily="34" charset="0"/>
-                <a:ea typeface="Times New Roman" pitchFamily="34" charset="-122"/>
-                <a:cs typeface="Times New Roman" pitchFamily="34" charset="-120"/>
-              </a:rPr>
-              <a:t>Samples are chosen by the following procedures:</a:t>
-            </a:r>
-            <a:endParaRPr lang="en-US" sz="3400" dirty="0"/>
-          </a:p>
-          <a:p>
-            <a:pPr algn="l" indent="0" marL="0">
-              <a:spcAft>
-                <a:spcPts val="800"/>
-              </a:spcAft>
-              <a:buNone/>
-            </a:pPr>
-            <a:r>
-              <a:rPr lang="en-US" sz="3400" b="1" dirty="0">
-                <a:solidFill>
-                  <a:srgbClr val="111111"/>
-                </a:solidFill>
-                <a:latin typeface="Times New Roman" pitchFamily="34" charset="0"/>
-                <a:ea typeface="Times New Roman" pitchFamily="34" charset="-122"/>
-                <a:cs typeface="Times New Roman" pitchFamily="34" charset="-120"/>
-              </a:rPr>
-              <a:t>Why sample: </a:t>
-            </a:r>
-            <a:pPr algn="l" indent="0" marL="0">
-              <a:spcAft>
-                <a:spcPts val="800"/>
-              </a:spcAft>
-              <a:buNone/>
-            </a:pPr>
-            <a:r>
-              <a:rPr lang="en-US" sz="3400" dirty="0">
-                <a:solidFill>
-                  <a:srgbClr val="111111"/>
-                </a:solidFill>
-                <a:latin typeface="Times New Roman" pitchFamily="34" charset="0"/>
-                <a:ea typeface="Times New Roman" pitchFamily="34" charset="-122"/>
-                <a:cs typeface="Times New Roman" pitchFamily="34" charset="-120"/>
-              </a:rPr>
-              <a:t>It is often impossible, too slow or too costly to study every member of a population. A well-chosen sample gives reliable results for the whole group.</a:t>
-            </a:r>
-            <a:endParaRPr lang="en-US" sz="3400" dirty="0"/>
-          </a:p>
-        </p:txBody>
-      </p:sp>
       <p:pic>
         <p:nvPicPr>
-          <p:cNvPr id="5" name="Image 0" descr="/home/claude/f4/img/v2/sampling_big.png">    </p:cNvPr>
+          <p:cNvPr id="3" name="Image 0" descr="/home/claude/f4/img/minesec_sheet.png">    </p:cNvPr>
           <p:cNvPicPr>
             <a:picLocks noChangeAspect="1"/>
           </p:cNvPicPr>
@@ -17094,8 +17330,8 @@
         </p:blipFill>
         <p:spPr>
           <a:xfrm>
-            <a:off x="6537960" y="2849678"/>
-            <a:ext cx="5470855" cy="2137053"/>
+            <a:off x="0" y="658368"/>
+            <a:ext cx="5120640" cy="5833872"/>
           </a:xfrm>
           <a:prstGeom prst="rect">
             <a:avLst/>
@@ -17104,14 +17340,14 @@
       </p:pic>
       <p:sp>
         <p:nvSpPr>
-          <p:cNvPr id="6" name="Text 3"/>
+          <p:cNvPr id="4" name="Text 1"/>
           <p:cNvSpPr/>
           <p:nvPr/>
         </p:nvSpPr>
         <p:spPr>
           <a:xfrm>
-            <a:off x="6537960" y="6089904"/>
-            <a:ext cx="5470855" cy="347472"/>
+            <a:off x="5349240" y="1005840"/>
+            <a:ext cx="6522415" cy="731520"/>
           </a:xfrm>
           <a:prstGeom prst="rect">
             <a:avLst/>
@@ -17120,24 +17356,124 @@
           <a:ln/>
         </p:spPr>
         <p:txBody>
-          <a:bodyPr wrap="square" lIns="0" tIns="0" rIns="0" bIns="0" rtlCol="0" anchor="ctr"/>
+          <a:bodyPr wrap="square" lIns="0" tIns="0" rIns="0" bIns="0" rtlCol="0" anchor="ctr">
+            <a:normAutofit/>
+          </a:bodyPr>
           <a:lstStyle/>
           <a:p>
             <a:pPr algn="ctr" indent="0" marL="0">
               <a:buNone/>
             </a:pPr>
             <a:r>
-              <a:rPr lang="en-US" sz="1600" i="1" dirty="0">
-                <a:solidFill>
-                  <a:srgbClr val="555555"/>
+              <a:rPr lang="en-US" sz="3600" b="1" dirty="0">
+                <a:solidFill>
+                  <a:srgbClr val="990011"/>
                 </a:solidFill>
                 <a:latin typeface="Times New Roman" pitchFamily="34" charset="0"/>
                 <a:ea typeface="Times New Roman" pitchFamily="34" charset="-122"/>
                 <a:cs typeface="Times New Roman" pitchFamily="34" charset="-120"/>
               </a:rPr>
-              <a:t>Illustration: sampling methods</a:t>
-            </a:r>
-            <a:endParaRPr lang="en-US" sz="1600" dirty="0"/>
+              <a:t>1. Sources of Geographical Data</a:t>
+            </a:r>
+            <a:endParaRPr lang="en-US" sz="3600" dirty="0"/>
+          </a:p>
+        </p:txBody>
+      </p:sp>
+      <p:sp>
+        <p:nvSpPr>
+          <p:cNvPr id="5" name="Text 2"/>
+          <p:cNvSpPr/>
+          <p:nvPr/>
+        </p:nvSpPr>
+        <p:spPr>
+          <a:xfrm>
+            <a:off x="5349240" y="1737360"/>
+            <a:ext cx="6522415" cy="457200"/>
+          </a:xfrm>
+          <a:prstGeom prst="rect">
+            <a:avLst/>
+          </a:prstGeom>
+          <a:noFill/>
+          <a:ln/>
+        </p:spPr>
+        <p:txBody>
+          <a:bodyPr wrap="square" lIns="0" tIns="0" rIns="0" bIns="0" rtlCol="0" anchor="ctr"/>
+          <a:lstStyle/>
+          <a:p>
+            <a:pPr algn="l" indent="0" marL="0">
+              <a:buNone/>
+            </a:pPr>
+            <a:r>
+              <a:rPr lang="en-US" sz="3200" b="1" dirty="0">
+                <a:solidFill>
+                  <a:srgbClr val="990011"/>
+                </a:solidFill>
+                <a:latin typeface="Times New Roman" pitchFamily="34" charset="0"/>
+                <a:ea typeface="Times New Roman" pitchFamily="34" charset="-122"/>
+                <a:cs typeface="Times New Roman" pitchFamily="34" charset="-120"/>
+              </a:rPr>
+              <a:t>B) Secondary Data</a:t>
+            </a:r>
+            <a:endParaRPr lang="en-US" sz="3200" dirty="0"/>
+          </a:p>
+        </p:txBody>
+      </p:sp>
+      <p:sp>
+        <p:nvSpPr>
+          <p:cNvPr id="6" name="Text 3"/>
+          <p:cNvSpPr/>
+          <p:nvPr/>
+        </p:nvSpPr>
+        <p:spPr>
+          <a:xfrm>
+            <a:off x="5349240" y="2240280"/>
+            <a:ext cx="6522415" cy="4206240"/>
+          </a:xfrm>
+          <a:prstGeom prst="rect">
+            <a:avLst/>
+          </a:prstGeom>
+          <a:noFill/>
+          <a:ln/>
+        </p:spPr>
+        <p:txBody>
+          <a:bodyPr wrap="square" lIns="0" tIns="0" rIns="0" bIns="0" rtlCol="0" anchor="t"/>
+          <a:lstStyle/>
+          <a:p>
+            <a:pPr algn="l" indent="0" marL="0">
+              <a:spcAft>
+                <a:spcPts val="800"/>
+              </a:spcAft>
+              <a:buNone/>
+            </a:pPr>
+            <a:r>
+              <a:rPr lang="en-US" sz="4000" b="1" dirty="0">
+                <a:solidFill>
+                  <a:srgbClr val="111111"/>
+                </a:solidFill>
+                <a:latin typeface="Times New Roman" pitchFamily="34" charset="0"/>
+                <a:ea typeface="Times New Roman" pitchFamily="34" charset="-122"/>
+                <a:cs typeface="Times New Roman" pitchFamily="34" charset="-120"/>
+              </a:rPr>
+              <a:t>Cheap and quick to obtain: </a:t>
+            </a:r>
+            <a:pPr algn="l" indent="0" marL="0">
+              <a:spcAft>
+                <a:spcPts val="800"/>
+              </a:spcAft>
+              <a:buNone/>
+            </a:pPr>
+            <a:r>
+              <a:rPr lang="en-US" sz="4000" dirty="0">
+                <a:solidFill>
+                  <a:srgbClr val="111111"/>
+                </a:solidFill>
+                <a:latin typeface="Times New Roman" pitchFamily="34" charset="0"/>
+                <a:ea typeface="Times New Roman" pitchFamily="34" charset="-122"/>
+                <a:cs typeface="Times New Roman" pitchFamily="34" charset="-120"/>
+              </a:rPr>
+              <a:t>Secondary data are already published, so the researcher only has to consult them. They often cover large areas and long periods.</a:t>
+            </a:r>
+            <a:endParaRPr lang="en-US" sz="4000" dirty="0"/>
           </a:p>
         </p:txBody>
       </p:sp>
@@ -17270,7 +17606,7 @@
         <p:spPr>
           <a:xfrm>
             <a:off x="0" y="658368"/>
-            <a:ext cx="5120640" cy="5833872"/>
+            <a:ext cx="3840480" cy="5833872"/>
           </a:xfrm>
           <a:prstGeom prst="rect">
             <a:avLst/>
@@ -17285,8 +17621,8 @@
         </p:nvSpPr>
         <p:spPr>
           <a:xfrm>
-            <a:off x="5349240" y="1005840"/>
-            <a:ext cx="6522415" cy="731520"/>
+            <a:off x="4069080" y="1005840"/>
+            <a:ext cx="7802575" cy="731520"/>
           </a:xfrm>
           <a:prstGeom prst="rect">
             <a:avLst/>
@@ -17312,7 +17648,7 @@
                 <a:ea typeface="Times New Roman" pitchFamily="34" charset="-122"/>
                 <a:cs typeface="Times New Roman" pitchFamily="34" charset="-120"/>
               </a:rPr>
-              <a:t>2. Basic Sampling Procedures</a:t>
+              <a:t>1. Sources of Geographical Data</a:t>
             </a:r>
             <a:endParaRPr lang="en-US" sz="3600" dirty="0"/>
           </a:p>
@@ -17326,8 +17662,47 @@
         </p:nvSpPr>
         <p:spPr>
           <a:xfrm>
-            <a:off x="5349240" y="1783080"/>
-            <a:ext cx="6522415" cy="4663440"/>
+            <a:off x="4069080" y="1737360"/>
+            <a:ext cx="7802575" cy="457200"/>
+          </a:xfrm>
+          <a:prstGeom prst="rect">
+            <a:avLst/>
+          </a:prstGeom>
+          <a:noFill/>
+          <a:ln/>
+        </p:spPr>
+        <p:txBody>
+          <a:bodyPr wrap="square" lIns="0" tIns="0" rIns="0" bIns="0" rtlCol="0" anchor="ctr"/>
+          <a:lstStyle/>
+          <a:p>
+            <a:pPr algn="l" indent="0" marL="0">
+              <a:buNone/>
+            </a:pPr>
+            <a:r>
+              <a:rPr lang="en-US" sz="3200" b="1" dirty="0">
+                <a:solidFill>
+                  <a:srgbClr val="990011"/>
+                </a:solidFill>
+                <a:latin typeface="Times New Roman" pitchFamily="34" charset="0"/>
+                <a:ea typeface="Times New Roman" pitchFamily="34" charset="-122"/>
+                <a:cs typeface="Times New Roman" pitchFamily="34" charset="-120"/>
+              </a:rPr>
+              <a:t>B) Secondary Data</a:t>
+            </a:r>
+            <a:endParaRPr lang="en-US" sz="3200" dirty="0"/>
+          </a:p>
+        </p:txBody>
+      </p:sp>
+      <p:sp>
+        <p:nvSpPr>
+          <p:cNvPr id="6" name="Text 3"/>
+          <p:cNvSpPr/>
+          <p:nvPr/>
+        </p:nvSpPr>
+        <p:spPr>
+          <a:xfrm>
+            <a:off x="4069080" y="2240280"/>
+            <a:ext cx="7802575" cy="4206240"/>
           </a:xfrm>
           <a:prstGeom prst="rect">
             <a:avLst/>
@@ -17354,7 +17729,7 @@
                 <a:ea typeface="Times New Roman" pitchFamily="34" charset="-122"/>
                 <a:cs typeface="Times New Roman" pitchFamily="34" charset="-120"/>
               </a:rPr>
-              <a:t>Random sampling: </a:t>
+              <a:t>Possibly outdated or unsuited: </a:t>
             </a:r>
             <a:pPr algn="l" indent="0" marL="0">
               <a:spcAft>
@@ -17371,7 +17746,7 @@
                 <a:ea typeface="Times New Roman" pitchFamily="34" charset="-122"/>
                 <a:cs typeface="Times New Roman" pitchFamily="34" charset="-120"/>
               </a:rPr>
-              <a:t>Every member has an equal chance of being chosen, for example by drawing names from a box or using random numbers. This method avoids bias.</a:t>
+              <a:t>Secondary data may be old, for example a census taken many years ago. They were also collected for another purpose, so they may not answer the question exactly.</a:t>
             </a:r>
             <a:endParaRPr lang="en-US" sz="4000" dirty="0"/>
           </a:p>
@@ -17558,7 +17933,7 @@
               <a:buNone/>
             </a:pPr>
             <a:r>
-              <a:rPr lang="en-US" sz="3600" b="1" dirty="0">
+              <a:rPr lang="en-US" sz="3400" i="1" dirty="0">
                 <a:solidFill>
                   <a:srgbClr val="111111"/>
                 </a:solidFill>
@@ -17566,8 +17941,11 @@
                 <a:ea typeface="Times New Roman" pitchFamily="34" charset="-122"/>
                 <a:cs typeface="Times New Roman" pitchFamily="34" charset="-120"/>
               </a:rPr>
-              <a:t>Systematic sampling: </a:t>
-            </a:r>
+              <a:t>Samples are chosen by the following procedures:</a:t>
+            </a:r>
+            <a:endParaRPr lang="en-US" sz="3400" dirty="0"/>
+          </a:p>
+          <a:p>
             <a:pPr algn="l" indent="0" marL="0">
               <a:spcAft>
                 <a:spcPts val="800"/>
@@ -17575,7 +17953,7 @@
               <a:buNone/>
             </a:pPr>
             <a:r>
-              <a:rPr lang="en-US" sz="3600" dirty="0">
+              <a:rPr lang="en-US" sz="3400" b="1" dirty="0">
                 <a:solidFill>
                   <a:srgbClr val="111111"/>
                 </a:solidFill>
@@ -17583,15 +17961,32 @@
                 <a:ea typeface="Times New Roman" pitchFamily="34" charset="-122"/>
                 <a:cs typeface="Times New Roman" pitchFamily="34" charset="-120"/>
               </a:rPr>
-              <a:t>Members are chosen at a regular interval k = population ÷ sample size, starting from a random point. To choose 20 out of 200, k = 10, so the 7th, 17th, 27th and so on are chosen.</a:t>
-            </a:r>
-            <a:endParaRPr lang="en-US" sz="3600" dirty="0"/>
+              <a:t>Why sample: </a:t>
+            </a:r>
+            <a:pPr algn="l" indent="0" marL="0">
+              <a:spcAft>
+                <a:spcPts val="800"/>
+              </a:spcAft>
+              <a:buNone/>
+            </a:pPr>
+            <a:r>
+              <a:rPr lang="en-US" sz="3400" dirty="0">
+                <a:solidFill>
+                  <a:srgbClr val="111111"/>
+                </a:solidFill>
+                <a:latin typeface="Times New Roman" pitchFamily="34" charset="0"/>
+                <a:ea typeface="Times New Roman" pitchFamily="34" charset="-122"/>
+                <a:cs typeface="Times New Roman" pitchFamily="34" charset="-120"/>
+              </a:rPr>
+              <a:t>It is often impossible, too slow or too costly to study every member of a population. A well-chosen sample gives reliable results for the whole group.</a:t>
+            </a:r>
+            <a:endParaRPr lang="en-US" sz="3400" dirty="0"/>
           </a:p>
         </p:txBody>
       </p:sp>
       <p:pic>
         <p:nvPicPr>
-          <p:cNvPr id="5" name="Image 0" descr="/home/claude/f4/img/v2/stat2_systematic.png">    </p:cNvPr>
+          <p:cNvPr id="5" name="Image 0" descr="/home/claude/f4/img/v2/sampling_big.png">    </p:cNvPr>
           <p:cNvPicPr>
             <a:picLocks noChangeAspect="1"/>
           </p:cNvPicPr>
@@ -17646,7 +18041,7 @@
                 <a:ea typeface="Times New Roman" pitchFamily="34" charset="-122"/>
                 <a:cs typeface="Times New Roman" pitchFamily="34" charset="-120"/>
               </a:rPr>
-              <a:t>Illustration: systematic sampling</a:t>
+              <a:t>Illustration: sampling methods</a:t>
             </a:r>
             <a:endParaRPr lang="en-US" sz="1600" dirty="0"/>
           </a:p>
@@ -17781,7 +18176,7 @@
         <p:spPr>
           <a:xfrm>
             <a:off x="0" y="658368"/>
-            <a:ext cx="3840480" cy="5833872"/>
+            <a:ext cx="5120640" cy="5833872"/>
           </a:xfrm>
           <a:prstGeom prst="rect">
             <a:avLst/>
@@ -17796,8 +18191,8 @@
         </p:nvSpPr>
         <p:spPr>
           <a:xfrm>
-            <a:off x="4069080" y="1005840"/>
-            <a:ext cx="7802575" cy="731520"/>
+            <a:off x="5349240" y="1005840"/>
+            <a:ext cx="6522415" cy="731520"/>
           </a:xfrm>
           <a:prstGeom prst="rect">
             <a:avLst/>
@@ -17837,8 +18232,8 @@
         </p:nvSpPr>
         <p:spPr>
           <a:xfrm>
-            <a:off x="4069080" y="1783080"/>
-            <a:ext cx="7802575" cy="4663440"/>
+            <a:off x="5349240" y="1783080"/>
+            <a:ext cx="6522415" cy="4663440"/>
           </a:xfrm>
           <a:prstGeom prst="rect">
             <a:avLst/>
@@ -17865,7 +18260,7 @@
                 <a:ea typeface="Times New Roman" pitchFamily="34" charset="-122"/>
                 <a:cs typeface="Times New Roman" pitchFamily="34" charset="-120"/>
               </a:rPr>
-              <a:t>Stratified sampling: </a:t>
+              <a:t>Random sampling: </a:t>
             </a:r>
             <a:pPr algn="l" indent="0" marL="0">
               <a:spcAft>
@@ -17882,7 +18277,7 @@
                 <a:ea typeface="Times New Roman" pitchFamily="34" charset="-122"/>
                 <a:cs typeface="Times New Roman" pitchFamily="34" charset="-120"/>
               </a:rPr>
-              <a:t>The population is divided into groups (strata), such as the forms of a school, and each group is sampled in proportion to its size. This makes the sample very representative.</a:t>
+              <a:t>Every member has an equal chance of being chosen, for example by drawing names from a box or using random numbers. This method avoids bias.</a:t>
             </a:r>
             <a:endParaRPr lang="en-US" sz="4000" dirty="0"/>
           </a:p>
@@ -18035,7 +18430,7 @@
                 <a:ea typeface="Times New Roman" pitchFamily="34" charset="-122"/>
                 <a:cs typeface="Times New Roman" pitchFamily="34" charset="-120"/>
               </a:rPr>
-              <a:t>3. Primary Data Collection Techniques</a:t>
+              <a:t>2. Basic Sampling Procedures</a:t>
             </a:r>
             <a:endParaRPr lang="en-US" sz="3600" dirty="0"/>
           </a:p>
@@ -18049,49 +18444,8 @@
         </p:nvSpPr>
         <p:spPr>
           <a:xfrm>
-            <a:off x="365760" y="1737360"/>
-            <a:ext cx="6035040" cy="457200"/>
-          </a:xfrm>
-          <a:prstGeom prst="rect">
-            <a:avLst/>
-          </a:prstGeom>
-          <a:noFill/>
-          <a:ln/>
-        </p:spPr>
-        <p:txBody>
-          <a:bodyPr wrap="square" lIns="0" tIns="0" rIns="0" bIns="0" rtlCol="0" anchor="ctr">
-            <a:normAutofit/>
-          </a:bodyPr>
-          <a:lstStyle/>
-          <a:p>
-            <a:pPr algn="l" indent="0" marL="0">
-              <a:buNone/>
-            </a:pPr>
-            <a:r>
-              <a:rPr lang="en-US" sz="3000" b="1" dirty="0">
-                <a:solidFill>
-                  <a:srgbClr val="990011"/>
-                </a:solidFill>
-                <a:latin typeface="Times New Roman" pitchFamily="34" charset="0"/>
-                <a:ea typeface="Times New Roman" pitchFamily="34" charset="-122"/>
-                <a:cs typeface="Times New Roman" pitchFamily="34" charset="-120"/>
-              </a:rPr>
-              <a:t>A) Observation, Recording and Measurement</a:t>
-            </a:r>
-            <a:endParaRPr lang="en-US" sz="3000" dirty="0"/>
-          </a:p>
-        </p:txBody>
-      </p:sp>
-      <p:sp>
-        <p:nvSpPr>
-          <p:cNvPr id="5" name="Text 3"/>
-          <p:cNvSpPr/>
-          <p:nvPr/>
-        </p:nvSpPr>
-        <p:spPr>
-          <a:xfrm>
-            <a:off x="365760" y="2240280"/>
-            <a:ext cx="6035040" cy="4160520"/>
+            <a:off x="365760" y="1783080"/>
+            <a:ext cx="6035040" cy="4617720"/>
           </a:xfrm>
           <a:prstGeom prst="rect">
             <a:avLst/>
@@ -18110,7 +18464,7 @@
               <a:buNone/>
             </a:pPr>
             <a:r>
-              <a:rPr lang="en-US" sz="2800" i="1" dirty="0">
+              <a:rPr lang="en-US" sz="3600" b="1" dirty="0">
                 <a:solidFill>
                   <a:srgbClr val="111111"/>
                 </a:solidFill>
@@ -18118,11 +18472,8 @@
                 <a:ea typeface="Times New Roman" pitchFamily="34" charset="-122"/>
                 <a:cs typeface="Times New Roman" pitchFamily="34" charset="-120"/>
               </a:rPr>
-              <a:t>Data are collected in the field with the following techniques:</a:t>
-            </a:r>
-            <a:endParaRPr lang="en-US" sz="2800" dirty="0"/>
-          </a:p>
-          <a:p>
+              <a:t>Systematic sampling: </a:t>
+            </a:r>
             <a:pPr algn="l" indent="0" marL="0">
               <a:spcAft>
                 <a:spcPts val="800"/>
@@ -18130,7 +18481,7 @@
               <a:buNone/>
             </a:pPr>
             <a:r>
-              <a:rPr lang="en-US" sz="2800" b="1" dirty="0">
+              <a:rPr lang="en-US" sz="3600" dirty="0">
                 <a:solidFill>
                   <a:srgbClr val="111111"/>
                 </a:solidFill>
@@ -18138,32 +18489,15 @@
                 <a:ea typeface="Times New Roman" pitchFamily="34" charset="-122"/>
                 <a:cs typeface="Times New Roman" pitchFamily="34" charset="-120"/>
               </a:rPr>
-              <a:t>Observation, counting and recording of frequencies: </a:t>
-            </a:r>
-            <a:pPr algn="l" indent="0" marL="0">
-              <a:spcAft>
-                <a:spcPts val="800"/>
-              </a:spcAft>
-              <a:buNone/>
-            </a:pPr>
-            <a:r>
-              <a:rPr lang="en-US" sz="2800" dirty="0">
-                <a:solidFill>
-                  <a:srgbClr val="111111"/>
-                </a:solidFill>
-                <a:latin typeface="Times New Roman" pitchFamily="34" charset="0"/>
-                <a:ea typeface="Times New Roman" pitchFamily="34" charset="-122"/>
-                <a:cs typeface="Times New Roman" pitchFamily="34" charset="-120"/>
-              </a:rPr>
-              <a:t>The researcher watches and counts events and records them on a tally sheet. For example, he counts the cars, motorbikes and lorries crossing the Pont Neuf in Garoua in one hour.</a:t>
-            </a:r>
-            <a:endParaRPr lang="en-US" sz="2800" dirty="0"/>
+              <a:t>Members are chosen at a regular interval k = population ÷ sample size, starting from a random point. To choose 20 out of 200, k = 10, so the 7th, 17th, 27th and so on are chosen.</a:t>
+            </a:r>
+            <a:endParaRPr lang="en-US" sz="3600" dirty="0"/>
           </a:p>
         </p:txBody>
       </p:sp>
       <p:pic>
         <p:nvPicPr>
-          <p:cNvPr id="6" name="Image 0" descr="/home/claude/f4/img/v2/stat2_techniques.png">    </p:cNvPr>
+          <p:cNvPr id="5" name="Image 0" descr="/home/claude/f4/img/v2/stat2_systematic.png">    </p:cNvPr>
           <p:cNvPicPr>
             <a:picLocks noChangeAspect="1"/>
           </p:cNvPicPr>
@@ -18187,7 +18521,7 @@
       </p:pic>
       <p:sp>
         <p:nvSpPr>
-          <p:cNvPr id="7" name="Text 4"/>
+          <p:cNvPr id="6" name="Text 3"/>
           <p:cNvSpPr/>
           <p:nvPr/>
         </p:nvSpPr>
@@ -18218,7 +18552,7 @@
                 <a:ea typeface="Times New Roman" pitchFamily="34" charset="-122"/>
                 <a:cs typeface="Times New Roman" pitchFamily="34" charset="-120"/>
               </a:rPr>
-              <a:t>Illustration: data collection techniques</a:t>
+              <a:t>Illustration: systematic sampling</a:t>
             </a:r>
             <a:endParaRPr lang="en-US" sz="1600" dirty="0"/>
           </a:p>
@@ -18353,7 +18687,7 @@
         <p:spPr>
           <a:xfrm>
             <a:off x="0" y="658368"/>
-            <a:ext cx="2468880" cy="5833872"/>
+            <a:ext cx="3840480" cy="5833872"/>
           </a:xfrm>
           <a:prstGeom prst="rect">
             <a:avLst/>
@@ -18368,8 +18702,8 @@
         </p:nvSpPr>
         <p:spPr>
           <a:xfrm>
-            <a:off x="2697480" y="1005840"/>
-            <a:ext cx="9174175" cy="731520"/>
+            <a:off x="4069080" y="1005840"/>
+            <a:ext cx="7802575" cy="731520"/>
           </a:xfrm>
           <a:prstGeom prst="rect">
             <a:avLst/>
@@ -18395,7 +18729,7 @@
                 <a:ea typeface="Times New Roman" pitchFamily="34" charset="-122"/>
                 <a:cs typeface="Times New Roman" pitchFamily="34" charset="-120"/>
               </a:rPr>
-              <a:t>3. Primary Data Collection Techniques</a:t>
+              <a:t>2. Basic Sampling Procedures</a:t>
             </a:r>
             <a:endParaRPr lang="en-US" sz="3600" dirty="0"/>
           </a:p>
@@ -18409,47 +18743,8 @@
         </p:nvSpPr>
         <p:spPr>
           <a:xfrm>
-            <a:off x="2697480" y="1737360"/>
-            <a:ext cx="9174175" cy="457200"/>
-          </a:xfrm>
-          <a:prstGeom prst="rect">
-            <a:avLst/>
-          </a:prstGeom>
-          <a:noFill/>
-          <a:ln/>
-        </p:spPr>
-        <p:txBody>
-          <a:bodyPr wrap="square" lIns="0" tIns="0" rIns="0" bIns="0" rtlCol="0" anchor="ctr"/>
-          <a:lstStyle/>
-          <a:p>
-            <a:pPr algn="l" indent="0" marL="0">
-              <a:buNone/>
-            </a:pPr>
-            <a:r>
-              <a:rPr lang="en-US" sz="3200" b="1" dirty="0">
-                <a:solidFill>
-                  <a:srgbClr val="990011"/>
-                </a:solidFill>
-                <a:latin typeface="Times New Roman" pitchFamily="34" charset="0"/>
-                <a:ea typeface="Times New Roman" pitchFamily="34" charset="-122"/>
-                <a:cs typeface="Times New Roman" pitchFamily="34" charset="-120"/>
-              </a:rPr>
-              <a:t>A) Observation, Recording and Measurement</a:t>
-            </a:r>
-            <a:endParaRPr lang="en-US" sz="3200" dirty="0"/>
-          </a:p>
-        </p:txBody>
-      </p:sp>
-      <p:sp>
-        <p:nvSpPr>
-          <p:cNvPr id="6" name="Text 3"/>
-          <p:cNvSpPr/>
-          <p:nvPr/>
-        </p:nvSpPr>
-        <p:spPr>
-          <a:xfrm>
-            <a:off x="2697480" y="2240280"/>
-            <a:ext cx="9174175" cy="4206240"/>
+            <a:off x="4069080" y="1783080"/>
+            <a:ext cx="7802575" cy="4663440"/>
           </a:xfrm>
           <a:prstGeom prst="rect">
             <a:avLst/>
@@ -18476,7 +18771,7 @@
                 <a:ea typeface="Times New Roman" pitchFamily="34" charset="-122"/>
                 <a:cs typeface="Times New Roman" pitchFamily="34" charset="-120"/>
               </a:rPr>
-              <a:t>Pictures, filming and video recording: </a:t>
+              <a:t>Stratified sampling: </a:t>
             </a:r>
             <a:pPr algn="l" indent="0" marL="0">
               <a:spcAft>
@@ -18493,7 +18788,7 @@
                 <a:ea typeface="Times New Roman" pitchFamily="34" charset="-122"/>
                 <a:cs typeface="Times New Roman" pitchFamily="34" charset="-120"/>
               </a:rPr>
-              <a:t>Photographs and videos record landscapes, house types or activities as evidence. For example, a student photographs the types of houses in the Yelwa quarter.</a:t>
+              <a:t>The population is divided into groups (strata), such as the forms of a school, and each group is sampled in proportion to its size. This makes the sample very representative.</a:t>
             </a:r>
             <a:endParaRPr lang="en-US" sz="4000" dirty="0"/>
           </a:p>
@@ -18611,9 +18906,170 @@
           </a:p>
         </p:txBody>
       </p:sp>
+      <p:sp>
+        <p:nvSpPr>
+          <p:cNvPr id="3" name="Text 1"/>
+          <p:cNvSpPr/>
+          <p:nvPr/>
+        </p:nvSpPr>
+        <p:spPr>
+          <a:xfrm>
+            <a:off x="365760" y="1005840"/>
+            <a:ext cx="11460175" cy="731520"/>
+          </a:xfrm>
+          <a:prstGeom prst="rect">
+            <a:avLst/>
+          </a:prstGeom>
+          <a:noFill/>
+          <a:ln/>
+        </p:spPr>
+        <p:txBody>
+          <a:bodyPr wrap="square" lIns="0" tIns="0" rIns="0" bIns="0" rtlCol="0" anchor="ctr">
+            <a:normAutofit/>
+          </a:bodyPr>
+          <a:lstStyle/>
+          <a:p>
+            <a:pPr algn="ctr" indent="0" marL="0">
+              <a:buNone/>
+            </a:pPr>
+            <a:r>
+              <a:rPr lang="en-US" sz="3600" b="1" dirty="0">
+                <a:solidFill>
+                  <a:srgbClr val="990011"/>
+                </a:solidFill>
+                <a:latin typeface="Times New Roman" pitchFamily="34" charset="0"/>
+                <a:ea typeface="Times New Roman" pitchFamily="34" charset="-122"/>
+                <a:cs typeface="Times New Roman" pitchFamily="34" charset="-120"/>
+              </a:rPr>
+              <a:t>3. Primary Data Collection Techniques</a:t>
+            </a:r>
+            <a:endParaRPr lang="en-US" sz="3600" dirty="0"/>
+          </a:p>
+        </p:txBody>
+      </p:sp>
+      <p:sp>
+        <p:nvSpPr>
+          <p:cNvPr id="4" name="Text 2"/>
+          <p:cNvSpPr/>
+          <p:nvPr/>
+        </p:nvSpPr>
+        <p:spPr>
+          <a:xfrm>
+            <a:off x="365760" y="1737360"/>
+            <a:ext cx="6035040" cy="457200"/>
+          </a:xfrm>
+          <a:prstGeom prst="rect">
+            <a:avLst/>
+          </a:prstGeom>
+          <a:noFill/>
+          <a:ln/>
+        </p:spPr>
+        <p:txBody>
+          <a:bodyPr wrap="square" lIns="0" tIns="0" rIns="0" bIns="0" rtlCol="0" anchor="ctr">
+            <a:normAutofit/>
+          </a:bodyPr>
+          <a:lstStyle/>
+          <a:p>
+            <a:pPr algn="l" indent="0" marL="0">
+              <a:buNone/>
+            </a:pPr>
+            <a:r>
+              <a:rPr lang="en-US" sz="3000" b="1" dirty="0">
+                <a:solidFill>
+                  <a:srgbClr val="990011"/>
+                </a:solidFill>
+                <a:latin typeface="Times New Roman" pitchFamily="34" charset="0"/>
+                <a:ea typeface="Times New Roman" pitchFamily="34" charset="-122"/>
+                <a:cs typeface="Times New Roman" pitchFamily="34" charset="-120"/>
+              </a:rPr>
+              <a:t>A) Observation, Recording and Measurement</a:t>
+            </a:r>
+            <a:endParaRPr lang="en-US" sz="3000" dirty="0"/>
+          </a:p>
+        </p:txBody>
+      </p:sp>
+      <p:sp>
+        <p:nvSpPr>
+          <p:cNvPr id="5" name="Text 3"/>
+          <p:cNvSpPr/>
+          <p:nvPr/>
+        </p:nvSpPr>
+        <p:spPr>
+          <a:xfrm>
+            <a:off x="365760" y="2240280"/>
+            <a:ext cx="6035040" cy="4160520"/>
+          </a:xfrm>
+          <a:prstGeom prst="rect">
+            <a:avLst/>
+          </a:prstGeom>
+          <a:noFill/>
+          <a:ln/>
+        </p:spPr>
+        <p:txBody>
+          <a:bodyPr wrap="square" lIns="0" tIns="0" rIns="0" bIns="0" rtlCol="0" anchor="t"/>
+          <a:lstStyle/>
+          <a:p>
+            <a:pPr algn="l" indent="0" marL="0">
+              <a:spcAft>
+                <a:spcPts val="800"/>
+              </a:spcAft>
+              <a:buNone/>
+            </a:pPr>
+            <a:r>
+              <a:rPr lang="en-US" sz="2800" i="1" dirty="0">
+                <a:solidFill>
+                  <a:srgbClr val="111111"/>
+                </a:solidFill>
+                <a:latin typeface="Times New Roman" pitchFamily="34" charset="0"/>
+                <a:ea typeface="Times New Roman" pitchFamily="34" charset="-122"/>
+                <a:cs typeface="Times New Roman" pitchFamily="34" charset="-120"/>
+              </a:rPr>
+              <a:t>Data are collected in the field with the following techniques:</a:t>
+            </a:r>
+            <a:endParaRPr lang="en-US" sz="2800" dirty="0"/>
+          </a:p>
+          <a:p>
+            <a:pPr algn="l" indent="0" marL="0">
+              <a:spcAft>
+                <a:spcPts val="800"/>
+              </a:spcAft>
+              <a:buNone/>
+            </a:pPr>
+            <a:r>
+              <a:rPr lang="en-US" sz="2800" b="1" dirty="0">
+                <a:solidFill>
+                  <a:srgbClr val="111111"/>
+                </a:solidFill>
+                <a:latin typeface="Times New Roman" pitchFamily="34" charset="0"/>
+                <a:ea typeface="Times New Roman" pitchFamily="34" charset="-122"/>
+                <a:cs typeface="Times New Roman" pitchFamily="34" charset="-120"/>
+              </a:rPr>
+              <a:t>Observation, counting and recording of frequencies: </a:t>
+            </a:r>
+            <a:pPr algn="l" indent="0" marL="0">
+              <a:spcAft>
+                <a:spcPts val="800"/>
+              </a:spcAft>
+              <a:buNone/>
+            </a:pPr>
+            <a:r>
+              <a:rPr lang="en-US" sz="2800" dirty="0">
+                <a:solidFill>
+                  <a:srgbClr val="111111"/>
+                </a:solidFill>
+                <a:latin typeface="Times New Roman" pitchFamily="34" charset="0"/>
+                <a:ea typeface="Times New Roman" pitchFamily="34" charset="-122"/>
+                <a:cs typeface="Times New Roman" pitchFamily="34" charset="-120"/>
+              </a:rPr>
+              <a:t>The researcher watches and counts events and records them on a tally sheet. For example, he counts the cars, motorbikes and lorries crossing the Pont Neuf in Garoua in one hour.</a:t>
+            </a:r>
+            <a:endParaRPr lang="en-US" sz="2800" dirty="0"/>
+          </a:p>
+        </p:txBody>
+      </p:sp>
       <p:pic>
         <p:nvPicPr>
-          <p:cNvPr id="3" name="Image 0" descr="/home/claude/f4/img/minesec_sheet.png">    </p:cNvPr>
+          <p:cNvPr id="6" name="Image 0" descr="/home/claude/f4/img/v2/stat2_techniques.png">    </p:cNvPr>
           <p:cNvPicPr>
             <a:picLocks noChangeAspect="1"/>
           </p:cNvPicPr>
@@ -18627,8 +19083,8 @@
         </p:blipFill>
         <p:spPr>
           <a:xfrm>
-            <a:off x="0" y="658368"/>
-            <a:ext cx="2468880" cy="5833872"/>
+            <a:off x="6537960" y="2849678"/>
+            <a:ext cx="5470855" cy="2137053"/>
           </a:xfrm>
           <a:prstGeom prst="rect">
             <a:avLst/>
@@ -18637,14 +19093,14 @@
       </p:pic>
       <p:sp>
         <p:nvSpPr>
-          <p:cNvPr id="4" name="Text 1"/>
+          <p:cNvPr id="7" name="Text 4"/>
           <p:cNvSpPr/>
           <p:nvPr/>
         </p:nvSpPr>
         <p:spPr>
           <a:xfrm>
-            <a:off x="2697480" y="1005840"/>
-            <a:ext cx="9174175" cy="731520"/>
+            <a:off x="6537960" y="6089904"/>
+            <a:ext cx="5470855" cy="347472"/>
           </a:xfrm>
           <a:prstGeom prst="rect">
             <a:avLst/>
@@ -18653,124 +19109,24 @@
           <a:ln/>
         </p:spPr>
         <p:txBody>
-          <a:bodyPr wrap="square" lIns="0" tIns="0" rIns="0" bIns="0" rtlCol="0" anchor="ctr">
-            <a:normAutofit/>
-          </a:bodyPr>
+          <a:bodyPr wrap="square" lIns="0" tIns="0" rIns="0" bIns="0" rtlCol="0" anchor="ctr"/>
           <a:lstStyle/>
           <a:p>
             <a:pPr algn="ctr" indent="0" marL="0">
               <a:buNone/>
             </a:pPr>
             <a:r>
-              <a:rPr lang="en-US" sz="3600" b="1" dirty="0">
-                <a:solidFill>
-                  <a:srgbClr val="990011"/>
+              <a:rPr lang="en-US" sz="1600" i="1" dirty="0">
+                <a:solidFill>
+                  <a:srgbClr val="555555"/>
                 </a:solidFill>
                 <a:latin typeface="Times New Roman" pitchFamily="34" charset="0"/>
                 <a:ea typeface="Times New Roman" pitchFamily="34" charset="-122"/>
                 <a:cs typeface="Times New Roman" pitchFamily="34" charset="-120"/>
               </a:rPr>
-              <a:t>3. Primary Data Collection Techniques</a:t>
-            </a:r>
-            <a:endParaRPr lang="en-US" sz="3600" dirty="0"/>
-          </a:p>
-        </p:txBody>
-      </p:sp>
-      <p:sp>
-        <p:nvSpPr>
-          <p:cNvPr id="5" name="Text 2"/>
-          <p:cNvSpPr/>
-          <p:nvPr/>
-        </p:nvSpPr>
-        <p:spPr>
-          <a:xfrm>
-            <a:off x="2697480" y="1737360"/>
-            <a:ext cx="9174175" cy="457200"/>
-          </a:xfrm>
-          <a:prstGeom prst="rect">
-            <a:avLst/>
-          </a:prstGeom>
-          <a:noFill/>
-          <a:ln/>
-        </p:spPr>
-        <p:txBody>
-          <a:bodyPr wrap="square" lIns="0" tIns="0" rIns="0" bIns="0" rtlCol="0" anchor="ctr"/>
-          <a:lstStyle/>
-          <a:p>
-            <a:pPr algn="l" indent="0" marL="0">
-              <a:buNone/>
-            </a:pPr>
-            <a:r>
-              <a:rPr lang="en-US" sz="3200" b="1" dirty="0">
-                <a:solidFill>
-                  <a:srgbClr val="990011"/>
-                </a:solidFill>
-                <a:latin typeface="Times New Roman" pitchFamily="34" charset="0"/>
-                <a:ea typeface="Times New Roman" pitchFamily="34" charset="-122"/>
-                <a:cs typeface="Times New Roman" pitchFamily="34" charset="-120"/>
-              </a:rPr>
-              <a:t>A) Observation, Recording and Measurement</a:t>
-            </a:r>
-            <a:endParaRPr lang="en-US" sz="3200" dirty="0"/>
-          </a:p>
-        </p:txBody>
-      </p:sp>
-      <p:sp>
-        <p:nvSpPr>
-          <p:cNvPr id="6" name="Text 3"/>
-          <p:cNvSpPr/>
-          <p:nvPr/>
-        </p:nvSpPr>
-        <p:spPr>
-          <a:xfrm>
-            <a:off x="2697480" y="2240280"/>
-            <a:ext cx="9174175" cy="4206240"/>
-          </a:xfrm>
-          <a:prstGeom prst="rect">
-            <a:avLst/>
-          </a:prstGeom>
-          <a:noFill/>
-          <a:ln/>
-        </p:spPr>
-        <p:txBody>
-          <a:bodyPr wrap="square" lIns="0" tIns="0" rIns="0" bIns="0" rtlCol="0" anchor="t"/>
-          <a:lstStyle/>
-          <a:p>
-            <a:pPr algn="l" indent="0" marL="0">
-              <a:spcAft>
-                <a:spcPts val="800"/>
-              </a:spcAft>
-              <a:buNone/>
-            </a:pPr>
-            <a:r>
-              <a:rPr lang="en-US" sz="4000" b="1" dirty="0">
-                <a:solidFill>
-                  <a:srgbClr val="111111"/>
-                </a:solidFill>
-                <a:latin typeface="Times New Roman" pitchFamily="34" charset="0"/>
-                <a:ea typeface="Times New Roman" pitchFamily="34" charset="-122"/>
-                <a:cs typeface="Times New Roman" pitchFamily="34" charset="-120"/>
-              </a:rPr>
-              <a:t>Measurement: </a:t>
-            </a:r>
-            <a:pPr algn="l" indent="0" marL="0">
-              <a:spcAft>
-                <a:spcPts val="800"/>
-              </a:spcAft>
-              <a:buNone/>
-            </a:pPr>
-            <a:r>
-              <a:rPr lang="en-US" sz="4000" dirty="0">
-                <a:solidFill>
-                  <a:srgbClr val="111111"/>
-                </a:solidFill>
-                <a:latin typeface="Times New Roman" pitchFamily="34" charset="0"/>
-                <a:ea typeface="Times New Roman" pitchFamily="34" charset="-122"/>
-                <a:cs typeface="Times New Roman" pitchFamily="34" charset="-120"/>
-              </a:rPr>
-              <a:t>Instruments give precise figures, such as a thermometer for temperature, a rain gauge for rainfall and a measuring tape for the width of a river. A clinometer measures the angle of slopes.</a:t>
-            </a:r>
-            <a:endParaRPr lang="en-US" sz="4000" dirty="0"/>
+              <a:t>Illustration: data collection techniques</a:t>
+            </a:r>
+            <a:endParaRPr lang="en-US" sz="1600" dirty="0"/>
           </a:p>
         </p:txBody>
       </p:sp>
@@ -19105,170 +19461,9 @@
           </a:p>
         </p:txBody>
       </p:sp>
-      <p:sp>
-        <p:nvSpPr>
-          <p:cNvPr id="3" name="Text 1"/>
-          <p:cNvSpPr/>
-          <p:nvPr/>
-        </p:nvSpPr>
-        <p:spPr>
-          <a:xfrm>
-            <a:off x="365760" y="1005840"/>
-            <a:ext cx="11460175" cy="731520"/>
-          </a:xfrm>
-          <a:prstGeom prst="rect">
-            <a:avLst/>
-          </a:prstGeom>
-          <a:noFill/>
-          <a:ln/>
-        </p:spPr>
-        <p:txBody>
-          <a:bodyPr wrap="square" lIns="0" tIns="0" rIns="0" bIns="0" rtlCol="0" anchor="ctr">
-            <a:normAutofit/>
-          </a:bodyPr>
-          <a:lstStyle/>
-          <a:p>
-            <a:pPr algn="ctr" indent="0" marL="0">
-              <a:buNone/>
-            </a:pPr>
-            <a:r>
-              <a:rPr lang="en-US" sz="3600" b="1" dirty="0">
-                <a:solidFill>
-                  <a:srgbClr val="990011"/>
-                </a:solidFill>
-                <a:latin typeface="Times New Roman" pitchFamily="34" charset="0"/>
-                <a:ea typeface="Times New Roman" pitchFamily="34" charset="-122"/>
-                <a:cs typeface="Times New Roman" pitchFamily="34" charset="-120"/>
-              </a:rPr>
-              <a:t>3. Primary Data Collection Techniques</a:t>
-            </a:r>
-            <a:endParaRPr lang="en-US" sz="3600" dirty="0"/>
-          </a:p>
-        </p:txBody>
-      </p:sp>
-      <p:sp>
-        <p:nvSpPr>
-          <p:cNvPr id="4" name="Text 2"/>
-          <p:cNvSpPr/>
-          <p:nvPr/>
-        </p:nvSpPr>
-        <p:spPr>
-          <a:xfrm>
-            <a:off x="365760" y="1737360"/>
-            <a:ext cx="6035040" cy="457200"/>
-          </a:xfrm>
-          <a:prstGeom prst="rect">
-            <a:avLst/>
-          </a:prstGeom>
-          <a:noFill/>
-          <a:ln/>
-        </p:spPr>
-        <p:txBody>
-          <a:bodyPr wrap="square" lIns="0" tIns="0" rIns="0" bIns="0" rtlCol="0" anchor="ctr">
-            <a:normAutofit/>
-          </a:bodyPr>
-          <a:lstStyle/>
-          <a:p>
-            <a:pPr algn="l" indent="0" marL="0">
-              <a:buNone/>
-            </a:pPr>
-            <a:r>
-              <a:rPr lang="en-US" sz="3000" b="1" dirty="0">
-                <a:solidFill>
-                  <a:srgbClr val="990011"/>
-                </a:solidFill>
-                <a:latin typeface="Times New Roman" pitchFamily="34" charset="0"/>
-                <a:ea typeface="Times New Roman" pitchFamily="34" charset="-122"/>
-                <a:cs typeface="Times New Roman" pitchFamily="34" charset="-120"/>
-              </a:rPr>
-              <a:t>B) Questionnaires, Interviews and Focus Groups</a:t>
-            </a:r>
-            <a:endParaRPr lang="en-US" sz="3000" dirty="0"/>
-          </a:p>
-        </p:txBody>
-      </p:sp>
-      <p:sp>
-        <p:nvSpPr>
-          <p:cNvPr id="5" name="Text 3"/>
-          <p:cNvSpPr/>
-          <p:nvPr/>
-        </p:nvSpPr>
-        <p:spPr>
-          <a:xfrm>
-            <a:off x="365760" y="2240280"/>
-            <a:ext cx="6035040" cy="4160520"/>
-          </a:xfrm>
-          <a:prstGeom prst="rect">
-            <a:avLst/>
-          </a:prstGeom>
-          <a:noFill/>
-          <a:ln/>
-        </p:spPr>
-        <p:txBody>
-          <a:bodyPr wrap="square" lIns="0" tIns="0" rIns="0" bIns="0" rtlCol="0" anchor="t"/>
-          <a:lstStyle/>
-          <a:p>
-            <a:pPr algn="l" indent="0" marL="0">
-              <a:spcAft>
-                <a:spcPts val="800"/>
-              </a:spcAft>
-              <a:buNone/>
-            </a:pPr>
-            <a:r>
-              <a:rPr lang="en-US" sz="2800" i="1" dirty="0">
-                <a:solidFill>
-                  <a:srgbClr val="111111"/>
-                </a:solidFill>
-                <a:latin typeface="Times New Roman" pitchFamily="34" charset="0"/>
-                <a:ea typeface="Times New Roman" pitchFamily="34" charset="-122"/>
-                <a:cs typeface="Times New Roman" pitchFamily="34" charset="-120"/>
-              </a:rPr>
-              <a:t>Data are collected from people with the following techniques:</a:t>
-            </a:r>
-            <a:endParaRPr lang="en-US" sz="2800" dirty="0"/>
-          </a:p>
-          <a:p>
-            <a:pPr algn="l" indent="0" marL="0">
-              <a:spcAft>
-                <a:spcPts val="800"/>
-              </a:spcAft>
-              <a:buNone/>
-            </a:pPr>
-            <a:r>
-              <a:rPr lang="en-US" sz="2800" b="1" dirty="0">
-                <a:solidFill>
-                  <a:srgbClr val="111111"/>
-                </a:solidFill>
-                <a:latin typeface="Times New Roman" pitchFamily="34" charset="0"/>
-                <a:ea typeface="Times New Roman" pitchFamily="34" charset="-122"/>
-                <a:cs typeface="Times New Roman" pitchFamily="34" charset="-120"/>
-              </a:rPr>
-              <a:t>Questionnaires: </a:t>
-            </a:r>
-            <a:pPr algn="l" indent="0" marL="0">
-              <a:spcAft>
-                <a:spcPts val="800"/>
-              </a:spcAft>
-              <a:buNone/>
-            </a:pPr>
-            <a:r>
-              <a:rPr lang="en-US" sz="2800" dirty="0">
-                <a:solidFill>
-                  <a:srgbClr val="111111"/>
-                </a:solidFill>
-                <a:latin typeface="Times New Roman" pitchFamily="34" charset="0"/>
-                <a:ea typeface="Times New Roman" pitchFamily="34" charset="-122"/>
-                <a:cs typeface="Times New Roman" pitchFamily="34" charset="-120"/>
-              </a:rPr>
-              <a:t>They are written questions answered by respondents, with closed questions (yes or no, or choices) or open questions. Closed questions are easy to count, while open questions give more detail.</a:t>
-            </a:r>
-            <a:endParaRPr lang="en-US" sz="2800" dirty="0"/>
-          </a:p>
-        </p:txBody>
-      </p:sp>
       <p:pic>
         <p:nvPicPr>
-          <p:cNvPr id="6" name="Image 0" descr="/home/claude/f4/img/v2/questionnaire_big.png">    </p:cNvPr>
+          <p:cNvPr id="3" name="Image 0" descr="/home/claude/f4/img/minesec_sheet.png">    </p:cNvPr>
           <p:cNvPicPr>
             <a:picLocks noChangeAspect="1"/>
           </p:cNvPicPr>
@@ -19282,8 +19477,8 @@
         </p:blipFill>
         <p:spPr>
           <a:xfrm>
-            <a:off x="6537960" y="2849678"/>
-            <a:ext cx="5470855" cy="2137053"/>
+            <a:off x="0" y="658368"/>
+            <a:ext cx="2468880" cy="5833872"/>
           </a:xfrm>
           <a:prstGeom prst="rect">
             <a:avLst/>
@@ -19292,14 +19487,14 @@
       </p:pic>
       <p:sp>
         <p:nvSpPr>
-          <p:cNvPr id="7" name="Text 4"/>
+          <p:cNvPr id="4" name="Text 1"/>
           <p:cNvSpPr/>
           <p:nvPr/>
         </p:nvSpPr>
         <p:spPr>
           <a:xfrm>
-            <a:off x="6537960" y="6089904"/>
-            <a:ext cx="5470855" cy="347472"/>
+            <a:off x="2697480" y="1005840"/>
+            <a:ext cx="9174175" cy="731520"/>
           </a:xfrm>
           <a:prstGeom prst="rect">
             <a:avLst/>
@@ -19308,24 +19503,124 @@
           <a:ln/>
         </p:spPr>
         <p:txBody>
-          <a:bodyPr wrap="square" lIns="0" tIns="0" rIns="0" bIns="0" rtlCol="0" anchor="ctr"/>
+          <a:bodyPr wrap="square" lIns="0" tIns="0" rIns="0" bIns="0" rtlCol="0" anchor="ctr">
+            <a:normAutofit/>
+          </a:bodyPr>
           <a:lstStyle/>
           <a:p>
             <a:pPr algn="ctr" indent="0" marL="0">
               <a:buNone/>
             </a:pPr>
             <a:r>
-              <a:rPr lang="en-US" sz="1600" i="1" dirty="0">
-                <a:solidFill>
-                  <a:srgbClr val="555555"/>
+              <a:rPr lang="en-US" sz="3600" b="1" dirty="0">
+                <a:solidFill>
+                  <a:srgbClr val="990011"/>
                 </a:solidFill>
                 <a:latin typeface="Times New Roman" pitchFamily="34" charset="0"/>
                 <a:ea typeface="Times New Roman" pitchFamily="34" charset="-122"/>
                 <a:cs typeface="Times New Roman" pitchFamily="34" charset="-120"/>
               </a:rPr>
-              <a:t>Illustration: a questionnaire</a:t>
-            </a:r>
-            <a:endParaRPr lang="en-US" sz="1600" dirty="0"/>
+              <a:t>3. Primary Data Collection Techniques</a:t>
+            </a:r>
+            <a:endParaRPr lang="en-US" sz="3600" dirty="0"/>
+          </a:p>
+        </p:txBody>
+      </p:sp>
+      <p:sp>
+        <p:nvSpPr>
+          <p:cNvPr id="5" name="Text 2"/>
+          <p:cNvSpPr/>
+          <p:nvPr/>
+        </p:nvSpPr>
+        <p:spPr>
+          <a:xfrm>
+            <a:off x="2697480" y="1737360"/>
+            <a:ext cx="9174175" cy="457200"/>
+          </a:xfrm>
+          <a:prstGeom prst="rect">
+            <a:avLst/>
+          </a:prstGeom>
+          <a:noFill/>
+          <a:ln/>
+        </p:spPr>
+        <p:txBody>
+          <a:bodyPr wrap="square" lIns="0" tIns="0" rIns="0" bIns="0" rtlCol="0" anchor="ctr"/>
+          <a:lstStyle/>
+          <a:p>
+            <a:pPr algn="l" indent="0" marL="0">
+              <a:buNone/>
+            </a:pPr>
+            <a:r>
+              <a:rPr lang="en-US" sz="3200" b="1" dirty="0">
+                <a:solidFill>
+                  <a:srgbClr val="990011"/>
+                </a:solidFill>
+                <a:latin typeface="Times New Roman" pitchFamily="34" charset="0"/>
+                <a:ea typeface="Times New Roman" pitchFamily="34" charset="-122"/>
+                <a:cs typeface="Times New Roman" pitchFamily="34" charset="-120"/>
+              </a:rPr>
+              <a:t>A) Observation, Recording and Measurement</a:t>
+            </a:r>
+            <a:endParaRPr lang="en-US" sz="3200" dirty="0"/>
+          </a:p>
+        </p:txBody>
+      </p:sp>
+      <p:sp>
+        <p:nvSpPr>
+          <p:cNvPr id="6" name="Text 3"/>
+          <p:cNvSpPr/>
+          <p:nvPr/>
+        </p:nvSpPr>
+        <p:spPr>
+          <a:xfrm>
+            <a:off x="2697480" y="2240280"/>
+            <a:ext cx="9174175" cy="4206240"/>
+          </a:xfrm>
+          <a:prstGeom prst="rect">
+            <a:avLst/>
+          </a:prstGeom>
+          <a:noFill/>
+          <a:ln/>
+        </p:spPr>
+        <p:txBody>
+          <a:bodyPr wrap="square" lIns="0" tIns="0" rIns="0" bIns="0" rtlCol="0" anchor="t"/>
+          <a:lstStyle/>
+          <a:p>
+            <a:pPr algn="l" indent="0" marL="0">
+              <a:spcAft>
+                <a:spcPts val="800"/>
+              </a:spcAft>
+              <a:buNone/>
+            </a:pPr>
+            <a:r>
+              <a:rPr lang="en-US" sz="4000" b="1" dirty="0">
+                <a:solidFill>
+                  <a:srgbClr val="111111"/>
+                </a:solidFill>
+                <a:latin typeface="Times New Roman" pitchFamily="34" charset="0"/>
+                <a:ea typeface="Times New Roman" pitchFamily="34" charset="-122"/>
+                <a:cs typeface="Times New Roman" pitchFamily="34" charset="-120"/>
+              </a:rPr>
+              <a:t>Pictures, filming and video recording: </a:t>
+            </a:r>
+            <a:pPr algn="l" indent="0" marL="0">
+              <a:spcAft>
+                <a:spcPts val="800"/>
+              </a:spcAft>
+              <a:buNone/>
+            </a:pPr>
+            <a:r>
+              <a:rPr lang="en-US" sz="4000" dirty="0">
+                <a:solidFill>
+                  <a:srgbClr val="111111"/>
+                </a:solidFill>
+                <a:latin typeface="Times New Roman" pitchFamily="34" charset="0"/>
+                <a:ea typeface="Times New Roman" pitchFamily="34" charset="-122"/>
+                <a:cs typeface="Times New Roman" pitchFamily="34" charset="-120"/>
+              </a:rPr>
+              <a:t>Photographs and videos record landscapes, house types or activities as evidence. For example, a student photographs the types of houses in the Yelwa quarter.</a:t>
+            </a:r>
+            <a:endParaRPr lang="en-US" sz="4000" dirty="0"/>
           </a:p>
         </p:txBody>
       </p:sp>
@@ -19458,7 +19753,7 @@
         <p:spPr>
           <a:xfrm>
             <a:off x="0" y="658368"/>
-            <a:ext cx="3840480" cy="5833872"/>
+            <a:ext cx="2468880" cy="5833872"/>
           </a:xfrm>
           <a:prstGeom prst="rect">
             <a:avLst/>
@@ -19473,8 +19768,8 @@
         </p:nvSpPr>
         <p:spPr>
           <a:xfrm>
-            <a:off x="4069080" y="1005840"/>
-            <a:ext cx="7802575" cy="731520"/>
+            <a:off x="2697480" y="1005840"/>
+            <a:ext cx="9174175" cy="731520"/>
           </a:xfrm>
           <a:prstGeom prst="rect">
             <a:avLst/>
@@ -19514,8 +19809,8 @@
         </p:nvSpPr>
         <p:spPr>
           <a:xfrm>
-            <a:off x="4069080" y="1737360"/>
-            <a:ext cx="7802575" cy="457200"/>
+            <a:off x="2697480" y="1737360"/>
+            <a:ext cx="9174175" cy="457200"/>
           </a:xfrm>
           <a:prstGeom prst="rect">
             <a:avLst/>
@@ -19531,7 +19826,7 @@
               <a:buNone/>
             </a:pPr>
             <a:r>
-              <a:rPr lang="en-US" sz="2600" b="1" dirty="0">
+              <a:rPr lang="en-US" sz="3200" b="1" dirty="0">
                 <a:solidFill>
                   <a:srgbClr val="990011"/>
                 </a:solidFill>
@@ -19539,9 +19834,9 @@
                 <a:ea typeface="Times New Roman" pitchFamily="34" charset="-122"/>
                 <a:cs typeface="Times New Roman" pitchFamily="34" charset="-120"/>
               </a:rPr>
-              <a:t>B) Questionnaires, Interviews and Focus Groups</a:t>
-            </a:r>
-            <a:endParaRPr lang="en-US" sz="2600" dirty="0"/>
+              <a:t>A) Observation, Recording and Measurement</a:t>
+            </a:r>
+            <a:endParaRPr lang="en-US" sz="3200" dirty="0"/>
           </a:p>
         </p:txBody>
       </p:sp>
@@ -19553,8 +19848,8 @@
         </p:nvSpPr>
         <p:spPr>
           <a:xfrm>
-            <a:off x="4069080" y="2240280"/>
-            <a:ext cx="7802575" cy="4206240"/>
+            <a:off x="2697480" y="2240280"/>
+            <a:ext cx="9174175" cy="4206240"/>
           </a:xfrm>
           <a:prstGeom prst="rect">
             <a:avLst/>
@@ -19581,7 +19876,7 @@
                 <a:ea typeface="Times New Roman" pitchFamily="34" charset="-122"/>
                 <a:cs typeface="Times New Roman" pitchFamily="34" charset="-120"/>
               </a:rPr>
-              <a:t>Interviews: </a:t>
+              <a:t>Measurement: </a:t>
             </a:r>
             <a:pPr algn="l" indent="0" marL="0">
               <a:spcAft>
@@ -19598,7 +19893,7 @@
                 <a:ea typeface="Times New Roman" pitchFamily="34" charset="-122"/>
                 <a:cs typeface="Times New Roman" pitchFamily="34" charset="-120"/>
               </a:rPr>
-              <a:t>They are face-to-face or telephone conversations with respondents. They can be structured, with fixed questions, or unstructured, like a free conversation.</a:t>
+              <a:t>Instruments give precise figures, such as a thermometer for temperature, a rain gauge for rainfall and a measuring tape for the width of a river. A clinometer measures the angle of slopes.</a:t>
             </a:r>
             <a:endParaRPr lang="en-US" sz="4000" dirty="0"/>
           </a:p>
@@ -19716,9 +20011,170 @@
           </a:p>
         </p:txBody>
       </p:sp>
+      <p:sp>
+        <p:nvSpPr>
+          <p:cNvPr id="3" name="Text 1"/>
+          <p:cNvSpPr/>
+          <p:nvPr/>
+        </p:nvSpPr>
+        <p:spPr>
+          <a:xfrm>
+            <a:off x="365760" y="1005840"/>
+            <a:ext cx="11460175" cy="731520"/>
+          </a:xfrm>
+          <a:prstGeom prst="rect">
+            <a:avLst/>
+          </a:prstGeom>
+          <a:noFill/>
+          <a:ln/>
+        </p:spPr>
+        <p:txBody>
+          <a:bodyPr wrap="square" lIns="0" tIns="0" rIns="0" bIns="0" rtlCol="0" anchor="ctr">
+            <a:normAutofit/>
+          </a:bodyPr>
+          <a:lstStyle/>
+          <a:p>
+            <a:pPr algn="ctr" indent="0" marL="0">
+              <a:buNone/>
+            </a:pPr>
+            <a:r>
+              <a:rPr lang="en-US" sz="3600" b="1" dirty="0">
+                <a:solidFill>
+                  <a:srgbClr val="990011"/>
+                </a:solidFill>
+                <a:latin typeface="Times New Roman" pitchFamily="34" charset="0"/>
+                <a:ea typeface="Times New Roman" pitchFamily="34" charset="-122"/>
+                <a:cs typeface="Times New Roman" pitchFamily="34" charset="-120"/>
+              </a:rPr>
+              <a:t>3. Primary Data Collection Techniques</a:t>
+            </a:r>
+            <a:endParaRPr lang="en-US" sz="3600" dirty="0"/>
+          </a:p>
+        </p:txBody>
+      </p:sp>
+      <p:sp>
+        <p:nvSpPr>
+          <p:cNvPr id="4" name="Text 2"/>
+          <p:cNvSpPr/>
+          <p:nvPr/>
+        </p:nvSpPr>
+        <p:spPr>
+          <a:xfrm>
+            <a:off x="365760" y="1737360"/>
+            <a:ext cx="6035040" cy="457200"/>
+          </a:xfrm>
+          <a:prstGeom prst="rect">
+            <a:avLst/>
+          </a:prstGeom>
+          <a:noFill/>
+          <a:ln/>
+        </p:spPr>
+        <p:txBody>
+          <a:bodyPr wrap="square" lIns="0" tIns="0" rIns="0" bIns="0" rtlCol="0" anchor="ctr">
+            <a:normAutofit/>
+          </a:bodyPr>
+          <a:lstStyle/>
+          <a:p>
+            <a:pPr algn="l" indent="0" marL="0">
+              <a:buNone/>
+            </a:pPr>
+            <a:r>
+              <a:rPr lang="en-US" sz="3000" b="1" dirty="0">
+                <a:solidFill>
+                  <a:srgbClr val="990011"/>
+                </a:solidFill>
+                <a:latin typeface="Times New Roman" pitchFamily="34" charset="0"/>
+                <a:ea typeface="Times New Roman" pitchFamily="34" charset="-122"/>
+                <a:cs typeface="Times New Roman" pitchFamily="34" charset="-120"/>
+              </a:rPr>
+              <a:t>B) Questionnaires, Interviews and Focus Groups</a:t>
+            </a:r>
+            <a:endParaRPr lang="en-US" sz="3000" dirty="0"/>
+          </a:p>
+        </p:txBody>
+      </p:sp>
+      <p:sp>
+        <p:nvSpPr>
+          <p:cNvPr id="5" name="Text 3"/>
+          <p:cNvSpPr/>
+          <p:nvPr/>
+        </p:nvSpPr>
+        <p:spPr>
+          <a:xfrm>
+            <a:off x="365760" y="2240280"/>
+            <a:ext cx="6035040" cy="4160520"/>
+          </a:xfrm>
+          <a:prstGeom prst="rect">
+            <a:avLst/>
+          </a:prstGeom>
+          <a:noFill/>
+          <a:ln/>
+        </p:spPr>
+        <p:txBody>
+          <a:bodyPr wrap="square" lIns="0" tIns="0" rIns="0" bIns="0" rtlCol="0" anchor="t"/>
+          <a:lstStyle/>
+          <a:p>
+            <a:pPr algn="l" indent="0" marL="0">
+              <a:spcAft>
+                <a:spcPts val="800"/>
+              </a:spcAft>
+              <a:buNone/>
+            </a:pPr>
+            <a:r>
+              <a:rPr lang="en-US" sz="2800" i="1" dirty="0">
+                <a:solidFill>
+                  <a:srgbClr val="111111"/>
+                </a:solidFill>
+                <a:latin typeface="Times New Roman" pitchFamily="34" charset="0"/>
+                <a:ea typeface="Times New Roman" pitchFamily="34" charset="-122"/>
+                <a:cs typeface="Times New Roman" pitchFamily="34" charset="-120"/>
+              </a:rPr>
+              <a:t>Data are collected from people with the following techniques:</a:t>
+            </a:r>
+            <a:endParaRPr lang="en-US" sz="2800" dirty="0"/>
+          </a:p>
+          <a:p>
+            <a:pPr algn="l" indent="0" marL="0">
+              <a:spcAft>
+                <a:spcPts val="800"/>
+              </a:spcAft>
+              <a:buNone/>
+            </a:pPr>
+            <a:r>
+              <a:rPr lang="en-US" sz="2800" b="1" dirty="0">
+                <a:solidFill>
+                  <a:srgbClr val="111111"/>
+                </a:solidFill>
+                <a:latin typeface="Times New Roman" pitchFamily="34" charset="0"/>
+                <a:ea typeface="Times New Roman" pitchFamily="34" charset="-122"/>
+                <a:cs typeface="Times New Roman" pitchFamily="34" charset="-120"/>
+              </a:rPr>
+              <a:t>Questionnaires: </a:t>
+            </a:r>
+            <a:pPr algn="l" indent="0" marL="0">
+              <a:spcAft>
+                <a:spcPts val="800"/>
+              </a:spcAft>
+              <a:buNone/>
+            </a:pPr>
+            <a:r>
+              <a:rPr lang="en-US" sz="2800" dirty="0">
+                <a:solidFill>
+                  <a:srgbClr val="111111"/>
+                </a:solidFill>
+                <a:latin typeface="Times New Roman" pitchFamily="34" charset="0"/>
+                <a:ea typeface="Times New Roman" pitchFamily="34" charset="-122"/>
+                <a:cs typeface="Times New Roman" pitchFamily="34" charset="-120"/>
+              </a:rPr>
+              <a:t>They are written questions answered by respondents, with closed questions (yes or no, or choices) or open questions. Closed questions are easy to count, while open questions give more detail.</a:t>
+            </a:r>
+            <a:endParaRPr lang="en-US" sz="2800" dirty="0"/>
+          </a:p>
+        </p:txBody>
+      </p:sp>
       <p:pic>
         <p:nvPicPr>
-          <p:cNvPr id="3" name="Image 0" descr="/home/claude/f4/img/minesec_sheet.png">    </p:cNvPr>
+          <p:cNvPr id="6" name="Image 0" descr="/home/claude/f4/img/v2/questionnaire_big.png">    </p:cNvPr>
           <p:cNvPicPr>
             <a:picLocks noChangeAspect="1"/>
           </p:cNvPicPr>
@@ -19732,8 +20188,8 @@
         </p:blipFill>
         <p:spPr>
           <a:xfrm>
-            <a:off x="0" y="658368"/>
-            <a:ext cx="2468880" cy="5833872"/>
+            <a:off x="6537960" y="2849678"/>
+            <a:ext cx="5470855" cy="2137053"/>
           </a:xfrm>
           <a:prstGeom prst="rect">
             <a:avLst/>
@@ -19742,14 +20198,14 @@
       </p:pic>
       <p:sp>
         <p:nvSpPr>
-          <p:cNvPr id="4" name="Text 1"/>
+          <p:cNvPr id="7" name="Text 4"/>
           <p:cNvSpPr/>
           <p:nvPr/>
         </p:nvSpPr>
         <p:spPr>
           <a:xfrm>
-            <a:off x="2697480" y="1005840"/>
-            <a:ext cx="9174175" cy="731520"/>
+            <a:off x="6537960" y="6089904"/>
+            <a:ext cx="5470855" cy="347472"/>
           </a:xfrm>
           <a:prstGeom prst="rect">
             <a:avLst/>
@@ -19758,124 +20214,24 @@
           <a:ln/>
         </p:spPr>
         <p:txBody>
-          <a:bodyPr wrap="square" lIns="0" tIns="0" rIns="0" bIns="0" rtlCol="0" anchor="ctr">
-            <a:normAutofit/>
-          </a:bodyPr>
+          <a:bodyPr wrap="square" lIns="0" tIns="0" rIns="0" bIns="0" rtlCol="0" anchor="ctr"/>
           <a:lstStyle/>
           <a:p>
             <a:pPr algn="ctr" indent="0" marL="0">
               <a:buNone/>
             </a:pPr>
             <a:r>
-              <a:rPr lang="en-US" sz="3600" b="1" dirty="0">
-                <a:solidFill>
-                  <a:srgbClr val="990011"/>
+              <a:rPr lang="en-US" sz="1600" i="1" dirty="0">
+                <a:solidFill>
+                  <a:srgbClr val="555555"/>
                 </a:solidFill>
                 <a:latin typeface="Times New Roman" pitchFamily="34" charset="0"/>
                 <a:ea typeface="Times New Roman" pitchFamily="34" charset="-122"/>
                 <a:cs typeface="Times New Roman" pitchFamily="34" charset="-120"/>
               </a:rPr>
-              <a:t>3. Primary Data Collection Techniques</a:t>
-            </a:r>
-            <a:endParaRPr lang="en-US" sz="3600" dirty="0"/>
-          </a:p>
-        </p:txBody>
-      </p:sp>
-      <p:sp>
-        <p:nvSpPr>
-          <p:cNvPr id="5" name="Text 2"/>
-          <p:cNvSpPr/>
-          <p:nvPr/>
-        </p:nvSpPr>
-        <p:spPr>
-          <a:xfrm>
-            <a:off x="2697480" y="1737360"/>
-            <a:ext cx="9174175" cy="457200"/>
-          </a:xfrm>
-          <a:prstGeom prst="rect">
-            <a:avLst/>
-          </a:prstGeom>
-          <a:noFill/>
-          <a:ln/>
-        </p:spPr>
-        <p:txBody>
-          <a:bodyPr wrap="square" lIns="0" tIns="0" rIns="0" bIns="0" rtlCol="0" anchor="ctr"/>
-          <a:lstStyle/>
-          <a:p>
-            <a:pPr algn="l" indent="0" marL="0">
-              <a:buNone/>
-            </a:pPr>
-            <a:r>
-              <a:rPr lang="en-US" sz="3100" b="1" dirty="0">
-                <a:solidFill>
-                  <a:srgbClr val="990011"/>
-                </a:solidFill>
-                <a:latin typeface="Times New Roman" pitchFamily="34" charset="0"/>
-                <a:ea typeface="Times New Roman" pitchFamily="34" charset="-122"/>
-                <a:cs typeface="Times New Roman" pitchFamily="34" charset="-120"/>
-              </a:rPr>
-              <a:t>B) Questionnaires, Interviews and Focus Groups</a:t>
-            </a:r>
-            <a:endParaRPr lang="en-US" sz="3100" dirty="0"/>
-          </a:p>
-        </p:txBody>
-      </p:sp>
-      <p:sp>
-        <p:nvSpPr>
-          <p:cNvPr id="6" name="Text 3"/>
-          <p:cNvSpPr/>
-          <p:nvPr/>
-        </p:nvSpPr>
-        <p:spPr>
-          <a:xfrm>
-            <a:off x="2697480" y="2240280"/>
-            <a:ext cx="9174175" cy="4206240"/>
-          </a:xfrm>
-          <a:prstGeom prst="rect">
-            <a:avLst/>
-          </a:prstGeom>
-          <a:noFill/>
-          <a:ln/>
-        </p:spPr>
-        <p:txBody>
-          <a:bodyPr wrap="square" lIns="0" tIns="0" rIns="0" bIns="0" rtlCol="0" anchor="t"/>
-          <a:lstStyle/>
-          <a:p>
-            <a:pPr algn="l" indent="0" marL="0">
-              <a:spcAft>
-                <a:spcPts val="800"/>
-              </a:spcAft>
-              <a:buNone/>
-            </a:pPr>
-            <a:r>
-              <a:rPr lang="en-US" sz="4000" b="1" dirty="0">
-                <a:solidFill>
-                  <a:srgbClr val="111111"/>
-                </a:solidFill>
-                <a:latin typeface="Times New Roman" pitchFamily="34" charset="0"/>
-                <a:ea typeface="Times New Roman" pitchFamily="34" charset="-122"/>
-                <a:cs typeface="Times New Roman" pitchFamily="34" charset="-120"/>
-              </a:rPr>
-              <a:t>Focus group discussions: </a:t>
-            </a:r>
-            <a:pPr algn="l" indent="0" marL="0">
-              <a:spcAft>
-                <a:spcPts val="800"/>
-              </a:spcAft>
-              <a:buNone/>
-            </a:pPr>
-            <a:r>
-              <a:rPr lang="en-US" sz="4000" dirty="0">
-                <a:solidFill>
-                  <a:srgbClr val="111111"/>
-                </a:solidFill>
-                <a:latin typeface="Times New Roman" pitchFamily="34" charset="0"/>
-                <a:ea typeface="Times New Roman" pitchFamily="34" charset="-122"/>
-                <a:cs typeface="Times New Roman" pitchFamily="34" charset="-120"/>
-              </a:rPr>
-              <a:t>A small group of 6 to 10 people who share a characteristic discusses a topic guided by the researcher. For example, cotton farmers near Garoua discuss the effects of climate change on their harvests.</a:t>
-            </a:r>
-            <a:endParaRPr lang="en-US" sz="4000" dirty="0"/>
+              <a:t>Illustration: a questionnaire</a:t>
+            </a:r>
+            <a:endParaRPr lang="en-US" sz="1600" dirty="0"/>
           </a:p>
         </p:txBody>
       </p:sp>
@@ -19985,7 +20341,7 @@
                 <a:ea typeface="Calibri" pitchFamily="34" charset="-122"/>
                 <a:cs typeface="Calibri" pitchFamily="34" charset="-120"/>
               </a:rPr>
-              <a:t>FORMATIVE EVALUATION</a:t>
+              <a:t>BOARD SUMMARY</a:t>
             </a:r>
             <a:endParaRPr lang="en-US" sz="1400" dirty="0"/>
           </a:p>
@@ -20008,7 +20364,7 @@
         <p:spPr>
           <a:xfrm>
             <a:off x="0" y="658368"/>
-            <a:ext cx="5120640" cy="5833872"/>
+            <a:ext cx="3840480" cy="5833872"/>
           </a:xfrm>
           <a:prstGeom prst="rect">
             <a:avLst/>
@@ -20023,8 +20379,8 @@
         </p:nvSpPr>
         <p:spPr>
           <a:xfrm>
-            <a:off x="5349240" y="1005840"/>
-            <a:ext cx="6522415" cy="731520"/>
+            <a:off x="4069080" y="1005840"/>
+            <a:ext cx="7802575" cy="731520"/>
           </a:xfrm>
           <a:prstGeom prst="rect">
             <a:avLst/>
@@ -20050,7 +20406,7 @@
                 <a:ea typeface="Times New Roman" pitchFamily="34" charset="-122"/>
                 <a:cs typeface="Times New Roman" pitchFamily="34" charset="-120"/>
               </a:rPr>
-              <a:t>Evaluation 1</a:t>
+              <a:t>3. Primary Data Collection Techniques</a:t>
             </a:r>
             <a:endParaRPr lang="en-US" sz="3600" dirty="0"/>
           </a:p>
@@ -20064,8 +20420,47 @@
         </p:nvSpPr>
         <p:spPr>
           <a:xfrm>
-            <a:off x="5349240" y="1783080"/>
-            <a:ext cx="6522415" cy="4663440"/>
+            <a:off x="4069080" y="1737360"/>
+            <a:ext cx="7802575" cy="457200"/>
+          </a:xfrm>
+          <a:prstGeom prst="rect">
+            <a:avLst/>
+          </a:prstGeom>
+          <a:noFill/>
+          <a:ln/>
+        </p:spPr>
+        <p:txBody>
+          <a:bodyPr wrap="square" lIns="0" tIns="0" rIns="0" bIns="0" rtlCol="0" anchor="ctr"/>
+          <a:lstStyle/>
+          <a:p>
+            <a:pPr algn="l" indent="0" marL="0">
+              <a:buNone/>
+            </a:pPr>
+            <a:r>
+              <a:rPr lang="en-US" sz="2600" b="1" dirty="0">
+                <a:solidFill>
+                  <a:srgbClr val="990011"/>
+                </a:solidFill>
+                <a:latin typeface="Times New Roman" pitchFamily="34" charset="0"/>
+                <a:ea typeface="Times New Roman" pitchFamily="34" charset="-122"/>
+                <a:cs typeface="Times New Roman" pitchFamily="34" charset="-120"/>
+              </a:rPr>
+              <a:t>B) Questionnaires, Interviews and Focus Groups</a:t>
+            </a:r>
+            <a:endParaRPr lang="en-US" sz="2600" dirty="0"/>
+          </a:p>
+        </p:txBody>
+      </p:sp>
+      <p:sp>
+        <p:nvSpPr>
+          <p:cNvPr id="6" name="Text 3"/>
+          <p:cNvSpPr/>
+          <p:nvPr/>
+        </p:nvSpPr>
+        <p:spPr>
+          <a:xfrm>
+            <a:off x="4069080" y="2240280"/>
+            <a:ext cx="7802575" cy="4206240"/>
           </a:xfrm>
           <a:prstGeom prst="rect">
             <a:avLst/>
@@ -20084,7 +20479,7 @@
               <a:buNone/>
             </a:pPr>
             <a:r>
-              <a:rPr lang="en-US" sz="4000" dirty="0">
+              <a:rPr lang="en-US" sz="4000" b="1" dirty="0">
                 <a:solidFill>
                   <a:srgbClr val="111111"/>
                 </a:solidFill>
@@ -20092,7 +20487,24 @@
                 <a:ea typeface="Times New Roman" pitchFamily="34" charset="-122"/>
                 <a:cs typeface="Times New Roman" pitchFamily="34" charset="-120"/>
               </a:rPr>
-              <a:t>Distinguish primary data from secondary data, with one example from Garoua for each.</a:t>
+              <a:t>Interviews: </a:t>
+            </a:r>
+            <a:pPr algn="l" indent="0" marL="0">
+              <a:spcAft>
+                <a:spcPts val="800"/>
+              </a:spcAft>
+              <a:buNone/>
+            </a:pPr>
+            <a:r>
+              <a:rPr lang="en-US" sz="4000" dirty="0">
+                <a:solidFill>
+                  <a:srgbClr val="111111"/>
+                </a:solidFill>
+                <a:latin typeface="Times New Roman" pitchFamily="34" charset="0"/>
+                <a:ea typeface="Times New Roman" pitchFamily="34" charset="-122"/>
+                <a:cs typeface="Times New Roman" pitchFamily="34" charset="-120"/>
+              </a:rPr>
+              <a:t>They are face-to-face or telephone conversations with respondents. They can be structured, with fixed questions, or unstructured, like a free conversation.</a:t>
             </a:r>
             <a:endParaRPr lang="en-US" sz="4000" dirty="0"/>
           </a:p>
@@ -20204,7 +20616,7 @@
                 <a:ea typeface="Calibri" pitchFamily="34" charset="-122"/>
                 <a:cs typeface="Calibri" pitchFamily="34" charset="-120"/>
               </a:rPr>
-              <a:t>FORMATIVE EVALUATION</a:t>
+              <a:t>BOARD SUMMARY</a:t>
             </a:r>
             <a:endParaRPr lang="en-US" sz="1400" dirty="0"/>
           </a:p>
@@ -20227,7 +20639,7 @@
         <p:spPr>
           <a:xfrm>
             <a:off x="0" y="658368"/>
-            <a:ext cx="5120640" cy="5833872"/>
+            <a:ext cx="2468880" cy="5833872"/>
           </a:xfrm>
           <a:prstGeom prst="rect">
             <a:avLst/>
@@ -20242,8 +20654,8 @@
         </p:nvSpPr>
         <p:spPr>
           <a:xfrm>
-            <a:off x="5349240" y="1005840"/>
-            <a:ext cx="6522415" cy="731520"/>
+            <a:off x="2697480" y="1005840"/>
+            <a:ext cx="9174175" cy="731520"/>
           </a:xfrm>
           <a:prstGeom prst="rect">
             <a:avLst/>
@@ -20269,7 +20681,7 @@
                 <a:ea typeface="Times New Roman" pitchFamily="34" charset="-122"/>
                 <a:cs typeface="Times New Roman" pitchFamily="34" charset="-120"/>
               </a:rPr>
-              <a:t>Expected Answer</a:t>
+              <a:t>3. Primary Data Collection Techniques</a:t>
             </a:r>
             <a:endParaRPr lang="en-US" sz="3600" dirty="0"/>
           </a:p>
@@ -20283,8 +20695,47 @@
         </p:nvSpPr>
         <p:spPr>
           <a:xfrm>
-            <a:off x="5349240" y="1783080"/>
-            <a:ext cx="6522415" cy="4663440"/>
+            <a:off x="2697480" y="1737360"/>
+            <a:ext cx="9174175" cy="457200"/>
+          </a:xfrm>
+          <a:prstGeom prst="rect">
+            <a:avLst/>
+          </a:prstGeom>
+          <a:noFill/>
+          <a:ln/>
+        </p:spPr>
+        <p:txBody>
+          <a:bodyPr wrap="square" lIns="0" tIns="0" rIns="0" bIns="0" rtlCol="0" anchor="ctr"/>
+          <a:lstStyle/>
+          <a:p>
+            <a:pPr algn="l" indent="0" marL="0">
+              <a:buNone/>
+            </a:pPr>
+            <a:r>
+              <a:rPr lang="en-US" sz="3100" b="1" dirty="0">
+                <a:solidFill>
+                  <a:srgbClr val="990011"/>
+                </a:solidFill>
+                <a:latin typeface="Times New Roman" pitchFamily="34" charset="0"/>
+                <a:ea typeface="Times New Roman" pitchFamily="34" charset="-122"/>
+                <a:cs typeface="Times New Roman" pitchFamily="34" charset="-120"/>
+              </a:rPr>
+              <a:t>B) Questionnaires, Interviews and Focus Groups</a:t>
+            </a:r>
+            <a:endParaRPr lang="en-US" sz="3100" dirty="0"/>
+          </a:p>
+        </p:txBody>
+      </p:sp>
+      <p:sp>
+        <p:nvSpPr>
+          <p:cNvPr id="6" name="Text 3"/>
+          <p:cNvSpPr/>
+          <p:nvPr/>
+        </p:nvSpPr>
+        <p:spPr>
+          <a:xfrm>
+            <a:off x="2697480" y="2240280"/>
+            <a:ext cx="9174175" cy="4206240"/>
           </a:xfrm>
           <a:prstGeom prst="rect">
             <a:avLst/>
@@ -20303,7 +20754,7 @@
               <a:buNone/>
             </a:pPr>
             <a:r>
-              <a:rPr lang="en-US" sz="4000" dirty="0">
+              <a:rPr lang="en-US" sz="4000" b="1" dirty="0">
                 <a:solidFill>
                   <a:srgbClr val="111111"/>
                 </a:solidFill>
@@ -20311,7 +20762,24 @@
                 <a:ea typeface="Times New Roman" pitchFamily="34" charset="-122"/>
                 <a:cs typeface="Times New Roman" pitchFamily="34" charset="-120"/>
               </a:rPr>
-              <a:t>Primary: collected by the researcher (counting motos at a crossroads); secondary: already published (BUCREP census figures).</a:t>
+              <a:t>Focus group discussions: </a:t>
+            </a:r>
+            <a:pPr algn="l" indent="0" marL="0">
+              <a:spcAft>
+                <a:spcPts val="800"/>
+              </a:spcAft>
+              <a:buNone/>
+            </a:pPr>
+            <a:r>
+              <a:rPr lang="en-US" sz="4000" dirty="0">
+                <a:solidFill>
+                  <a:srgbClr val="111111"/>
+                </a:solidFill>
+                <a:latin typeface="Times New Roman" pitchFamily="34" charset="0"/>
+                <a:ea typeface="Times New Roman" pitchFamily="34" charset="-122"/>
+                <a:cs typeface="Times New Roman" pitchFamily="34" charset="-120"/>
+              </a:rPr>
+              <a:t>A small group of 6 to 10 people who share a characteristic discusses a topic guided by the researcher. For example, cotton farmers near Garoua discuss the effects of climate change on their harvests.</a:t>
             </a:r>
             <a:endParaRPr lang="en-US" sz="4000" dirty="0"/>
           </a:p>
@@ -20488,7 +20956,7 @@
                 <a:ea typeface="Times New Roman" pitchFamily="34" charset="-122"/>
                 <a:cs typeface="Times New Roman" pitchFamily="34" charset="-120"/>
               </a:rPr>
-              <a:t>Evaluation 2</a:t>
+              <a:t>Evaluation 1</a:t>
             </a:r>
             <a:endParaRPr lang="en-US" sz="3600" dirty="0"/>
           </a:p>
@@ -20530,7 +20998,7 @@
                 <a:ea typeface="Times New Roman" pitchFamily="34" charset="-122"/>
                 <a:cs typeface="Times New Roman" pitchFamily="34" charset="-120"/>
               </a:rPr>
-              <a:t>Explain how to select 30 people from a list of 600 by systematic sampling.</a:t>
+              <a:t>Distinguish primary data from secondary data, with one example from Garoua for each.</a:t>
             </a:r>
             <a:endParaRPr lang="en-US" sz="4000" dirty="0"/>
           </a:p>
@@ -20749,7 +21217,7 @@
                 <a:ea typeface="Times New Roman" pitchFamily="34" charset="-122"/>
                 <a:cs typeface="Times New Roman" pitchFamily="34" charset="-120"/>
               </a:rPr>
-              <a:t>k = 600 ÷ 30 = 20; choose a random start between 1 and 20, then every 20th person.</a:t>
+              <a:t>Primary: collected by the researcher (counting motos at a crossroads); secondary: already published (BUCREP census figures).</a:t>
             </a:r>
             <a:endParaRPr lang="en-US" sz="4000" dirty="0"/>
           </a:p>
@@ -20861,7 +21329,7 @@
                 <a:ea typeface="Calibri" pitchFamily="34" charset="-122"/>
                 <a:cs typeface="Calibri" pitchFamily="34" charset="-120"/>
               </a:rPr>
-              <a:t>REMEDIATION</a:t>
+              <a:t>FORMATIVE EVALUATION</a:t>
             </a:r>
             <a:endParaRPr lang="en-US" sz="1400" dirty="0"/>
           </a:p>
@@ -20926,7 +21394,7 @@
                 <a:ea typeface="Times New Roman" pitchFamily="34" charset="-122"/>
                 <a:cs typeface="Times New Roman" pitchFamily="34" charset="-120"/>
               </a:rPr>
-              <a:t>Remediation</a:t>
+              <a:t>Evaluation 2</a:t>
             </a:r>
             <a:endParaRPr lang="en-US" sz="3600" dirty="0"/>
           </a:p>
@@ -20960,7 +21428,7 @@
               <a:buNone/>
             </a:pPr>
             <a:r>
-              <a:rPr lang="en-US" sz="4000" b="1" dirty="0">
+              <a:rPr lang="en-US" sz="4000" dirty="0">
                 <a:solidFill>
                   <a:srgbClr val="111111"/>
                 </a:solidFill>
@@ -20968,51 +21436,7 @@
                 <a:ea typeface="Times New Roman" pitchFamily="34" charset="-122"/>
                 <a:cs typeface="Times New Roman" pitchFamily="34" charset="-120"/>
               </a:rPr>
-              <a:t>Fill in the blanks:</a:t>
-            </a:r>
-            <a:endParaRPr lang="en-US" sz="4000" dirty="0"/>
-          </a:p>
-          <a:p>
-            <a:pPr algn="l" marL="342900" indent="-342900">
-              <a:spcAft>
-                <a:spcPts val="800"/>
-              </a:spcAft>
-              <a:buSzPct val="100000"/>
-              <a:buFont typeface="+mj-lt"/>
-              <a:buAutoNum type="arabicPeriod" startAt="1"/>
-            </a:pPr>
-            <a:r>
-              <a:rPr lang="en-US" sz="4000" dirty="0">
-                <a:solidFill>
-                  <a:srgbClr val="111111"/>
-                </a:solidFill>
-                <a:latin typeface="Times New Roman" pitchFamily="34" charset="0"/>
-                <a:ea typeface="Times New Roman" pitchFamily="34" charset="-122"/>
-                <a:cs typeface="Times New Roman" pitchFamily="34" charset="-120"/>
-              </a:rPr>
-              <a:t>Data collected by the researcher are ______ data.</a:t>
-            </a:r>
-            <a:endParaRPr lang="en-US" sz="4000" dirty="0"/>
-          </a:p>
-          <a:p>
-            <a:pPr algn="l" marL="342900" indent="-342900">
-              <a:spcAft>
-                <a:spcPts val="800"/>
-              </a:spcAft>
-              <a:buSzPct val="100000"/>
-              <a:buFont typeface="+mj-lt"/>
-              <a:buAutoNum type="arabicPeriod" startAt="1"/>
-            </a:pPr>
-            <a:r>
-              <a:rPr lang="en-US" sz="4000" dirty="0">
-                <a:solidFill>
-                  <a:srgbClr val="111111"/>
-                </a:solidFill>
-                <a:latin typeface="Times New Roman" pitchFamily="34" charset="0"/>
-                <a:ea typeface="Times New Roman" pitchFamily="34" charset="-122"/>
-                <a:cs typeface="Times New Roman" pitchFamily="34" charset="-120"/>
-              </a:rPr>
-              <a:t>Choosing every 10th house is ______ sampling.</a:t>
+              <a:t>Explain how to select 30 people from a list of 600 by systematic sampling.</a:t>
             </a:r>
             <a:endParaRPr lang="en-US" sz="4000" dirty="0"/>
           </a:p>
@@ -21124,7 +21548,7 @@
                 <a:ea typeface="Calibri" pitchFamily="34" charset="-122"/>
                 <a:cs typeface="Calibri" pitchFamily="34" charset="-120"/>
               </a:rPr>
-              <a:t>REMEDIATION</a:t>
+              <a:t>FORMATIVE EVALUATION</a:t>
             </a:r>
             <a:endParaRPr lang="en-US" sz="1400" dirty="0"/>
           </a:p>
@@ -21189,7 +21613,7 @@
                 <a:ea typeface="Times New Roman" pitchFamily="34" charset="-122"/>
                 <a:cs typeface="Times New Roman" pitchFamily="34" charset="-120"/>
               </a:rPr>
-              <a:t>Remediation (continued)</a:t>
+              <a:t>Expected Answer</a:t>
             </a:r>
             <a:endParaRPr lang="en-US" sz="3600" dirty="0"/>
           </a:p>
@@ -21216,13 +21640,11 @@
           <a:bodyPr wrap="square" lIns="0" tIns="0" rIns="0" bIns="0" rtlCol="0" anchor="t"/>
           <a:lstStyle/>
           <a:p>
-            <a:pPr algn="l" marL="342900" indent="-342900">
+            <a:pPr algn="l" indent="0" marL="0">
               <a:spcAft>
                 <a:spcPts val="800"/>
               </a:spcAft>
-              <a:buSzPct val="100000"/>
-              <a:buFont typeface="+mj-lt"/>
-              <a:buAutoNum type="arabicPeriod" startAt="1"/>
+              <a:buNone/>
             </a:pPr>
             <a:r>
               <a:rPr lang="en-US" sz="4000" dirty="0">
@@ -21233,7 +21655,7 @@
                 <a:ea typeface="Times New Roman" pitchFamily="34" charset="-122"/>
                 <a:cs typeface="Times New Roman" pitchFamily="34" charset="-120"/>
               </a:rPr>
-              <a:t>Dividing the population into groups first is ______ sampling.</a:t>
+              <a:t>k = 600 ÷ 30 = 20; choose a random start between 1 and 20, then every 20th person.</a:t>
             </a:r>
             <a:endParaRPr lang="en-US" sz="4000" dirty="0"/>
           </a:p>
@@ -21345,7 +21767,7 @@
                 <a:ea typeface="Calibri" pitchFamily="34" charset="-122"/>
                 <a:cs typeface="Calibri" pitchFamily="34" charset="-120"/>
               </a:rPr>
-              <a:t>HOMEWORK</a:t>
+              <a:t>REMEDIATION</a:t>
             </a:r>
             <a:endParaRPr lang="en-US" sz="1400" dirty="0"/>
           </a:p>
@@ -21410,7 +21832,7 @@
                 <a:ea typeface="Times New Roman" pitchFamily="34" charset="-122"/>
                 <a:cs typeface="Times New Roman" pitchFamily="34" charset="-120"/>
               </a:rPr>
-              <a:t>Homework</a:t>
+              <a:t>Remediation</a:t>
             </a:r>
             <a:endParaRPr lang="en-US" sz="3600" dirty="0"/>
           </a:p>
@@ -21444,7 +21866,7 @@
               <a:buNone/>
             </a:pPr>
             <a:r>
-              <a:rPr lang="en-US" sz="4000" dirty="0">
+              <a:rPr lang="en-US" sz="4000" b="1" dirty="0">
                 <a:solidFill>
                   <a:srgbClr val="111111"/>
                 </a:solidFill>
@@ -21452,7 +21874,51 @@
                 <a:ea typeface="Times New Roman" pitchFamily="34" charset="-122"/>
                 <a:cs typeface="Times New Roman" pitchFamily="34" charset="-120"/>
               </a:rPr>
-              <a:t>Define the arithmetic mean.</a:t>
+              <a:t>Fill in the blanks:</a:t>
+            </a:r>
+            <a:endParaRPr lang="en-US" sz="4000" dirty="0"/>
+          </a:p>
+          <a:p>
+            <a:pPr algn="l" marL="342900" indent="-342900">
+              <a:spcAft>
+                <a:spcPts val="800"/>
+              </a:spcAft>
+              <a:buSzPct val="100000"/>
+              <a:buFont typeface="+mj-lt"/>
+              <a:buAutoNum type="arabicPeriod" startAt="1"/>
+            </a:pPr>
+            <a:r>
+              <a:rPr lang="en-US" sz="4000" dirty="0">
+                <a:solidFill>
+                  <a:srgbClr val="111111"/>
+                </a:solidFill>
+                <a:latin typeface="Times New Roman" pitchFamily="34" charset="0"/>
+                <a:ea typeface="Times New Roman" pitchFamily="34" charset="-122"/>
+                <a:cs typeface="Times New Roman" pitchFamily="34" charset="-120"/>
+              </a:rPr>
+              <a:t>Data collected by the researcher are ______ data.</a:t>
+            </a:r>
+            <a:endParaRPr lang="en-US" sz="4000" dirty="0"/>
+          </a:p>
+          <a:p>
+            <a:pPr algn="l" marL="342900" indent="-342900">
+              <a:spcAft>
+                <a:spcPts val="800"/>
+              </a:spcAft>
+              <a:buSzPct val="100000"/>
+              <a:buFont typeface="+mj-lt"/>
+              <a:buAutoNum type="arabicPeriod" startAt="1"/>
+            </a:pPr>
+            <a:r>
+              <a:rPr lang="en-US" sz="4000" dirty="0">
+                <a:solidFill>
+                  <a:srgbClr val="111111"/>
+                </a:solidFill>
+                <a:latin typeface="Times New Roman" pitchFamily="34" charset="0"/>
+                <a:ea typeface="Times New Roman" pitchFamily="34" charset="-122"/>
+                <a:cs typeface="Times New Roman" pitchFamily="34" charset="-120"/>
+              </a:rPr>
+              <a:t>Choosing every 10th house is ______ sampling.</a:t>
             </a:r>
             <a:endParaRPr lang="en-US" sz="4000" dirty="0"/>
           </a:p>
@@ -21895,7 +22361,7 @@
                 <a:ea typeface="Calibri" pitchFamily="34" charset="-122"/>
                 <a:cs typeface="Calibri" pitchFamily="34" charset="-120"/>
               </a:rPr>
-              <a:t>NEXT LESSON</a:t>
+              <a:t>REMEDIATION</a:t>
             </a:r>
             <a:endParaRPr lang="en-US" sz="1400" dirty="0"/>
           </a:p>
@@ -21960,7 +22426,7 @@
                 <a:ea typeface="Times New Roman" pitchFamily="34" charset="-122"/>
                 <a:cs typeface="Times New Roman" pitchFamily="34" charset="-120"/>
               </a:rPr>
-              <a:t>Next Lesson</a:t>
+              <a:t>Remediation (continued)</a:t>
             </a:r>
             <a:endParaRPr lang="en-US" sz="3600" dirty="0"/>
           </a:p>
@@ -21984,17 +22450,19 @@
           <a:ln/>
         </p:spPr>
         <p:txBody>
-          <a:bodyPr wrap="square" lIns="0" tIns="0" rIns="0" bIns="0" rtlCol="0" anchor="ctr"/>
-          <a:lstStyle/>
-          <a:p>
-            <a:pPr algn="ctr" indent="0" marL="0">
+          <a:bodyPr wrap="square" lIns="0" tIns="0" rIns="0" bIns="0" rtlCol="0" anchor="t"/>
+          <a:lstStyle/>
+          <a:p>
+            <a:pPr algn="l" marL="342900" indent="-342900">
               <a:spcAft>
                 <a:spcPts val="800"/>
               </a:spcAft>
-              <a:buNone/>
-            </a:pPr>
-            <a:r>
-              <a:rPr lang="en-US" sz="4000" b="1" dirty="0">
+              <a:buSzPct val="100000"/>
+              <a:buFont typeface="+mj-lt"/>
+              <a:buAutoNum type="arabicPeriod" startAt="1"/>
+            </a:pPr>
+            <a:r>
+              <a:rPr lang="en-US" sz="4000" dirty="0">
                 <a:solidFill>
                   <a:srgbClr val="111111"/>
                 </a:solidFill>
@@ -22002,27 +22470,7 @@
                 <a:ea typeface="Times New Roman" pitchFamily="34" charset="-122"/>
                 <a:cs typeface="Times New Roman" pitchFamily="34" charset="-120"/>
               </a:rPr>
-              <a:t>Our next lesson will be on:</a:t>
-            </a:r>
-            <a:endParaRPr lang="en-US" sz="4000" dirty="0"/>
-          </a:p>
-          <a:p>
-            <a:pPr algn="ctr" indent="0" marL="0">
-              <a:spcAft>
-                <a:spcPts val="800"/>
-              </a:spcAft>
-              <a:buNone/>
-            </a:pPr>
-            <a:r>
-              <a:rPr lang="en-US" sz="4000" b="1" dirty="0">
-                <a:solidFill>
-                  <a:srgbClr val="990011"/>
-                </a:solidFill>
-                <a:latin typeface="Times New Roman" pitchFamily="34" charset="0"/>
-                <a:ea typeface="Times New Roman" pitchFamily="34" charset="-122"/>
-                <a:cs typeface="Times New Roman" pitchFamily="34" charset="-120"/>
-              </a:rPr>
-              <a:t>Quantitative Techniques 3 (Part 1): Measures of Central Tendency, Range and Quartiles</a:t>
+              <a:t>Dividing the population into groups first is ______ sampling.</a:t>
             </a:r>
             <a:endParaRPr lang="en-US" sz="4000" dirty="0"/>
           </a:p>
@@ -22134,22 +22582,46 @@
                 <a:ea typeface="Calibri" pitchFamily="34" charset="-122"/>
                 <a:cs typeface="Calibri" pitchFamily="34" charset="-120"/>
               </a:rPr>
-              <a:t>BILINGUAL GAME</a:t>
+              <a:t>HOMEWORK</a:t>
             </a:r>
             <a:endParaRPr lang="en-US" sz="1400" dirty="0"/>
           </a:p>
         </p:txBody>
       </p:sp>
-      <p:sp>
-        <p:nvSpPr>
-          <p:cNvPr id="3" name="Text 1"/>
+      <p:pic>
+        <p:nvPicPr>
+          <p:cNvPr id="3" name="Image 0" descr="/home/claude/f4/img/minesec_sheet.png">    </p:cNvPr>
+          <p:cNvPicPr>
+            <a:picLocks noChangeAspect="1"/>
+          </p:cNvPicPr>
+          <p:nvPr/>
+        </p:nvPicPr>
+        <p:blipFill>
+          <a:blip r:embed="rId1"/>
+          <a:stretch>
+            <a:fillRect/>
+          </a:stretch>
+        </p:blipFill>
+        <p:spPr>
+          <a:xfrm>
+            <a:off x="0" y="658368"/>
+            <a:ext cx="5120640" cy="5833872"/>
+          </a:xfrm>
+          <a:prstGeom prst="rect">
+            <a:avLst/>
+          </a:prstGeom>
+        </p:spPr>
+      </p:pic>
+      <p:sp>
+        <p:nvSpPr>
+          <p:cNvPr id="4" name="Text 1"/>
           <p:cNvSpPr/>
           <p:nvPr/>
         </p:nvSpPr>
         <p:spPr>
           <a:xfrm>
-            <a:off x="457200" y="1005840"/>
-            <a:ext cx="11277295" cy="731520"/>
+            <a:off x="5349240" y="1005840"/>
+            <a:ext cx="6522415" cy="731520"/>
           </a:xfrm>
           <a:prstGeom prst="rect">
             <a:avLst/>
@@ -22158,7 +22630,9 @@
           <a:ln/>
         </p:spPr>
         <p:txBody>
-          <a:bodyPr wrap="square" lIns="0" tIns="0" rIns="0" bIns="0" rtlCol="0" anchor="ctr"/>
+          <a:bodyPr wrap="square" lIns="0" tIns="0" rIns="0" bIns="0" rtlCol="0" anchor="ctr">
+            <a:normAutofit/>
+          </a:bodyPr>
           <a:lstStyle/>
           <a:p>
             <a:pPr algn="ctr" indent="0" marL="0">
@@ -22173,6 +22647,438 @@
                 <a:ea typeface="Times New Roman" pitchFamily="34" charset="-122"/>
                 <a:cs typeface="Times New Roman" pitchFamily="34" charset="-120"/>
               </a:rPr>
+              <a:t>Homework</a:t>
+            </a:r>
+            <a:endParaRPr lang="en-US" sz="3600" dirty="0"/>
+          </a:p>
+        </p:txBody>
+      </p:sp>
+      <p:sp>
+        <p:nvSpPr>
+          <p:cNvPr id="5" name="Text 2"/>
+          <p:cNvSpPr/>
+          <p:nvPr/>
+        </p:nvSpPr>
+        <p:spPr>
+          <a:xfrm>
+            <a:off x="5349240" y="1783080"/>
+            <a:ext cx="6522415" cy="4663440"/>
+          </a:xfrm>
+          <a:prstGeom prst="rect">
+            <a:avLst/>
+          </a:prstGeom>
+          <a:noFill/>
+          <a:ln/>
+        </p:spPr>
+        <p:txBody>
+          <a:bodyPr wrap="square" lIns="0" tIns="0" rIns="0" bIns="0" rtlCol="0" anchor="t"/>
+          <a:lstStyle/>
+          <a:p>
+            <a:pPr algn="l" indent="0" marL="0">
+              <a:spcAft>
+                <a:spcPts val="800"/>
+              </a:spcAft>
+              <a:buNone/>
+            </a:pPr>
+            <a:r>
+              <a:rPr lang="en-US" sz="4000" dirty="0">
+                <a:solidFill>
+                  <a:srgbClr val="111111"/>
+                </a:solidFill>
+                <a:latin typeface="Times New Roman" pitchFamily="34" charset="0"/>
+                <a:ea typeface="Times New Roman" pitchFamily="34" charset="-122"/>
+                <a:cs typeface="Times New Roman" pitchFamily="34" charset="-120"/>
+              </a:rPr>
+              <a:t>Define the arithmetic mean.</a:t>
+            </a:r>
+            <a:endParaRPr lang="en-US" sz="4000" dirty="0"/>
+          </a:p>
+        </p:txBody>
+      </p:sp>
+      <p:sp>
+        <p:nvSpPr>
+          <p:cNvPr id="25" name="Slide Number Placeholder 0"/>
+          <p:cNvSpPr>
+            <a:spLocks noGrp="1"/>
+          </p:cNvSpPr>
+          <p:nvPr>
+            <p:ph type="sldNum" sz="quarter" idx="4294967295"/>
+          </p:nvPr>
+        </p:nvSpPr>
+        <p:spPr>
+          <a:xfrm>
+            <a:off x="27432" y="91440"/>
+            <a:ext cx="585216" cy="475488"/>
+          </a:xfrm>
+          <a:prstGeom prst="rect">
+            <a:avLst/>
+          </a:prstGeom>
+          <a:extLst>
+            <a:ext uri="{C572A759-6A51-4108-AA02-DFA0A04FC94B}">
+              <ma14:wrappingTextBoxFlag xmlns:ma14="http://schemas.microsoft.com/office/mac/drawingml/2011/main" val="0"/>
+            </a:ext>
+          </a:extLst>
+        </p:spPr>
+        <p:txBody>
+          <a:bodyPr/>
+          <a:lstStyle>
+            <a:lvl1pPr>
+              <a:defRPr sz="2000">
+                <a:solidFill>
+                  <a:srgbClr val="FFFFFF"/>
+                </a:solidFill>
+                <a:latin typeface="Calibri"/>
+                <a:ea typeface="Calibri"/>
+                <a:cs typeface="Calibri"/>
+              </a:defRPr>
+            </a:lvl1pPr>
+          </a:lstStyle>
+          <a:p>
+            <a:pPr algn="ctr"/>
+            <a:fld id="{F7021451-1387-4CA6-816F-3879F97B5CBC}" type="slidenum">
+              <a:rPr b="1" lang="en-US"/>
+              <a:t>61</a:t>
+            </a:fld>
+            <a:endParaRPr lang="en-US"/>
+          </a:p>
+        </p:txBody>
+      </p:sp>
+    </p:spTree>
+  </p:cSld>
+  <p:clrMapOvr>
+    <a:masterClrMapping/>
+  </p:clrMapOvr>
+</p:sld>
+</file>
+
+<file path=ppt/slides/slide62.xml><?xml version="1.0" encoding="utf-8"?>
+<p:sld xmlns:a="http://schemas.openxmlformats.org/drawingml/2006/main" xmlns:r="http://schemas.openxmlformats.org/officeDocument/2006/relationships" xmlns:p="http://schemas.openxmlformats.org/presentationml/2006/main">
+  <p:cSld name="Slide 62">
+    <p:spTree>
+      <p:nvGrpSpPr>
+        <p:cNvPr id="1" name=""/>
+        <p:cNvGrpSpPr/>
+        <p:nvPr/>
+      </p:nvGrpSpPr>
+      <p:grpSpPr>
+        <a:xfrm>
+          <a:off x="0" y="0"/>
+          <a:ext cx="0" cy="0"/>
+          <a:chOff x="0" y="0"/>
+          <a:chExt cx="0" cy="0"/>
+        </a:xfrm>
+      </p:grpSpPr>
+      <p:sp>
+        <p:nvSpPr>
+          <p:cNvPr id="2" name="Text 0"/>
+          <p:cNvSpPr/>
+          <p:nvPr/>
+        </p:nvSpPr>
+        <p:spPr>
+          <a:xfrm>
+            <a:off x="457200" y="713232"/>
+            <a:ext cx="11368735" cy="274320"/>
+          </a:xfrm>
+          <a:prstGeom prst="rect">
+            <a:avLst/>
+          </a:prstGeom>
+          <a:noFill/>
+          <a:ln/>
+        </p:spPr>
+        <p:txBody>
+          <a:bodyPr wrap="square" lIns="0" tIns="0" rIns="0" bIns="0" rtlCol="0" anchor="ctr"/>
+          <a:lstStyle/>
+          <a:p>
+            <a:pPr algn="r" indent="0" marL="0">
+              <a:buNone/>
+            </a:pPr>
+            <a:r>
+              <a:rPr lang="en-US" sz="1400" b="1" dirty="0">
+                <a:solidFill>
+                  <a:srgbClr val="1C3F6E"/>
+                </a:solidFill>
+                <a:latin typeface="Calibri" pitchFamily="34" charset="0"/>
+                <a:ea typeface="Calibri" pitchFamily="34" charset="-122"/>
+                <a:cs typeface="Calibri" pitchFamily="34" charset="-120"/>
+              </a:rPr>
+              <a:t>NEXT LESSON</a:t>
+            </a:r>
+            <a:endParaRPr lang="en-US" sz="1400" dirty="0"/>
+          </a:p>
+        </p:txBody>
+      </p:sp>
+      <p:pic>
+        <p:nvPicPr>
+          <p:cNvPr id="3" name="Image 0" descr="/home/claude/f4/img/minesec_sheet.png">    </p:cNvPr>
+          <p:cNvPicPr>
+            <a:picLocks noChangeAspect="1"/>
+          </p:cNvPicPr>
+          <p:nvPr/>
+        </p:nvPicPr>
+        <p:blipFill>
+          <a:blip r:embed="rId1"/>
+          <a:stretch>
+            <a:fillRect/>
+          </a:stretch>
+        </p:blipFill>
+        <p:spPr>
+          <a:xfrm>
+            <a:off x="0" y="658368"/>
+            <a:ext cx="5120640" cy="5833872"/>
+          </a:xfrm>
+          <a:prstGeom prst="rect">
+            <a:avLst/>
+          </a:prstGeom>
+        </p:spPr>
+      </p:pic>
+      <p:sp>
+        <p:nvSpPr>
+          <p:cNvPr id="4" name="Text 1"/>
+          <p:cNvSpPr/>
+          <p:nvPr/>
+        </p:nvSpPr>
+        <p:spPr>
+          <a:xfrm>
+            <a:off x="5349240" y="1005840"/>
+            <a:ext cx="6522415" cy="731520"/>
+          </a:xfrm>
+          <a:prstGeom prst="rect">
+            <a:avLst/>
+          </a:prstGeom>
+          <a:noFill/>
+          <a:ln/>
+        </p:spPr>
+        <p:txBody>
+          <a:bodyPr wrap="square" lIns="0" tIns="0" rIns="0" bIns="0" rtlCol="0" anchor="ctr">
+            <a:normAutofit/>
+          </a:bodyPr>
+          <a:lstStyle/>
+          <a:p>
+            <a:pPr algn="ctr" indent="0" marL="0">
+              <a:buNone/>
+            </a:pPr>
+            <a:r>
+              <a:rPr lang="en-US" sz="3600" b="1" dirty="0">
+                <a:solidFill>
+                  <a:srgbClr val="990011"/>
+                </a:solidFill>
+                <a:latin typeface="Times New Roman" pitchFamily="34" charset="0"/>
+                <a:ea typeface="Times New Roman" pitchFamily="34" charset="-122"/>
+                <a:cs typeface="Times New Roman" pitchFamily="34" charset="-120"/>
+              </a:rPr>
+              <a:t>Next Lesson</a:t>
+            </a:r>
+            <a:endParaRPr lang="en-US" sz="3600" dirty="0"/>
+          </a:p>
+        </p:txBody>
+      </p:sp>
+      <p:sp>
+        <p:nvSpPr>
+          <p:cNvPr id="5" name="Text 2"/>
+          <p:cNvSpPr/>
+          <p:nvPr/>
+        </p:nvSpPr>
+        <p:spPr>
+          <a:xfrm>
+            <a:off x="5349240" y="1783080"/>
+            <a:ext cx="6522415" cy="4663440"/>
+          </a:xfrm>
+          <a:prstGeom prst="rect">
+            <a:avLst/>
+          </a:prstGeom>
+          <a:noFill/>
+          <a:ln/>
+        </p:spPr>
+        <p:txBody>
+          <a:bodyPr wrap="square" lIns="0" tIns="0" rIns="0" bIns="0" rtlCol="0" anchor="ctr"/>
+          <a:lstStyle/>
+          <a:p>
+            <a:pPr algn="ctr" indent="0" marL="0">
+              <a:spcAft>
+                <a:spcPts val="800"/>
+              </a:spcAft>
+              <a:buNone/>
+            </a:pPr>
+            <a:r>
+              <a:rPr lang="en-US" sz="4000" b="1" dirty="0">
+                <a:solidFill>
+                  <a:srgbClr val="111111"/>
+                </a:solidFill>
+                <a:latin typeface="Times New Roman" pitchFamily="34" charset="0"/>
+                <a:ea typeface="Times New Roman" pitchFamily="34" charset="-122"/>
+                <a:cs typeface="Times New Roman" pitchFamily="34" charset="-120"/>
+              </a:rPr>
+              <a:t>Our next lesson will be on:</a:t>
+            </a:r>
+            <a:endParaRPr lang="en-US" sz="4000" dirty="0"/>
+          </a:p>
+          <a:p>
+            <a:pPr algn="ctr" indent="0" marL="0">
+              <a:spcAft>
+                <a:spcPts val="800"/>
+              </a:spcAft>
+              <a:buNone/>
+            </a:pPr>
+            <a:r>
+              <a:rPr lang="en-US" sz="4000" b="1" dirty="0">
+                <a:solidFill>
+                  <a:srgbClr val="990011"/>
+                </a:solidFill>
+                <a:latin typeface="Times New Roman" pitchFamily="34" charset="0"/>
+                <a:ea typeface="Times New Roman" pitchFamily="34" charset="-122"/>
+                <a:cs typeface="Times New Roman" pitchFamily="34" charset="-120"/>
+              </a:rPr>
+              <a:t>Quantitative Techniques 3 (Part 1): Measures of Central Tendency, Range and Quartiles</a:t>
+            </a:r>
+            <a:endParaRPr lang="en-US" sz="4000" dirty="0"/>
+          </a:p>
+        </p:txBody>
+      </p:sp>
+      <p:sp>
+        <p:nvSpPr>
+          <p:cNvPr id="25" name="Slide Number Placeholder 0"/>
+          <p:cNvSpPr>
+            <a:spLocks noGrp="1"/>
+          </p:cNvSpPr>
+          <p:nvPr>
+            <p:ph type="sldNum" sz="quarter" idx="4294967295"/>
+          </p:nvPr>
+        </p:nvSpPr>
+        <p:spPr>
+          <a:xfrm>
+            <a:off x="27432" y="91440"/>
+            <a:ext cx="585216" cy="475488"/>
+          </a:xfrm>
+          <a:prstGeom prst="rect">
+            <a:avLst/>
+          </a:prstGeom>
+          <a:extLst>
+            <a:ext uri="{C572A759-6A51-4108-AA02-DFA0A04FC94B}">
+              <ma14:wrappingTextBoxFlag xmlns:ma14="http://schemas.microsoft.com/office/mac/drawingml/2011/main" val="0"/>
+            </a:ext>
+          </a:extLst>
+        </p:spPr>
+        <p:txBody>
+          <a:bodyPr/>
+          <a:lstStyle>
+            <a:lvl1pPr>
+              <a:defRPr sz="2000">
+                <a:solidFill>
+                  <a:srgbClr val="FFFFFF"/>
+                </a:solidFill>
+                <a:latin typeface="Calibri"/>
+                <a:ea typeface="Calibri"/>
+                <a:cs typeface="Calibri"/>
+              </a:defRPr>
+            </a:lvl1pPr>
+          </a:lstStyle>
+          <a:p>
+            <a:pPr algn="ctr"/>
+            <a:fld id="{F7021451-1387-4CA6-816F-3879F97B5CBC}" type="slidenum">
+              <a:rPr b="1" lang="en-US"/>
+              <a:t>62</a:t>
+            </a:fld>
+            <a:endParaRPr lang="en-US"/>
+          </a:p>
+        </p:txBody>
+      </p:sp>
+    </p:spTree>
+  </p:cSld>
+  <p:clrMapOvr>
+    <a:masterClrMapping/>
+  </p:clrMapOvr>
+</p:sld>
+</file>
+
+<file path=ppt/slides/slide63.xml><?xml version="1.0" encoding="utf-8"?>
+<p:sld xmlns:a="http://schemas.openxmlformats.org/drawingml/2006/main" xmlns:r="http://schemas.openxmlformats.org/officeDocument/2006/relationships" xmlns:p="http://schemas.openxmlformats.org/presentationml/2006/main">
+  <p:cSld name="Slide 63">
+    <p:spTree>
+      <p:nvGrpSpPr>
+        <p:cNvPr id="1" name=""/>
+        <p:cNvGrpSpPr/>
+        <p:nvPr/>
+      </p:nvGrpSpPr>
+      <p:grpSpPr>
+        <a:xfrm>
+          <a:off x="0" y="0"/>
+          <a:ext cx="0" cy="0"/>
+          <a:chOff x="0" y="0"/>
+          <a:chExt cx="0" cy="0"/>
+        </a:xfrm>
+      </p:grpSpPr>
+      <p:sp>
+        <p:nvSpPr>
+          <p:cNvPr id="2" name="Text 0"/>
+          <p:cNvSpPr/>
+          <p:nvPr/>
+        </p:nvSpPr>
+        <p:spPr>
+          <a:xfrm>
+            <a:off x="457200" y="713232"/>
+            <a:ext cx="11368735" cy="274320"/>
+          </a:xfrm>
+          <a:prstGeom prst="rect">
+            <a:avLst/>
+          </a:prstGeom>
+          <a:noFill/>
+          <a:ln/>
+        </p:spPr>
+        <p:txBody>
+          <a:bodyPr wrap="square" lIns="0" tIns="0" rIns="0" bIns="0" rtlCol="0" anchor="ctr"/>
+          <a:lstStyle/>
+          <a:p>
+            <a:pPr algn="r" indent="0" marL="0">
+              <a:buNone/>
+            </a:pPr>
+            <a:r>
+              <a:rPr lang="en-US" sz="1400" b="1" dirty="0">
+                <a:solidFill>
+                  <a:srgbClr val="1C3F6E"/>
+                </a:solidFill>
+                <a:latin typeface="Calibri" pitchFamily="34" charset="0"/>
+                <a:ea typeface="Calibri" pitchFamily="34" charset="-122"/>
+                <a:cs typeface="Calibri" pitchFamily="34" charset="-120"/>
+              </a:rPr>
+              <a:t>BILINGUAL GAME</a:t>
+            </a:r>
+            <a:endParaRPr lang="en-US" sz="1400" dirty="0"/>
+          </a:p>
+        </p:txBody>
+      </p:sp>
+      <p:sp>
+        <p:nvSpPr>
+          <p:cNvPr id="3" name="Text 1"/>
+          <p:cNvSpPr/>
+          <p:nvPr/>
+        </p:nvSpPr>
+        <p:spPr>
+          <a:xfrm>
+            <a:off x="457200" y="1005840"/>
+            <a:ext cx="11277295" cy="731520"/>
+          </a:xfrm>
+          <a:prstGeom prst="rect">
+            <a:avLst/>
+          </a:prstGeom>
+          <a:noFill/>
+          <a:ln/>
+        </p:spPr>
+        <p:txBody>
+          <a:bodyPr wrap="square" lIns="0" tIns="0" rIns="0" bIns="0" rtlCol="0" anchor="ctr"/>
+          <a:lstStyle/>
+          <a:p>
+            <a:pPr algn="ctr" indent="0" marL="0">
+              <a:buNone/>
+            </a:pPr>
+            <a:r>
+              <a:rPr lang="en-US" sz="3600" b="1" dirty="0">
+                <a:solidFill>
+                  <a:srgbClr val="990011"/>
+                </a:solidFill>
+                <a:latin typeface="Times New Roman" pitchFamily="34" charset="0"/>
+                <a:ea typeface="Times New Roman" pitchFamily="34" charset="-122"/>
+                <a:cs typeface="Times New Roman" pitchFamily="34" charset="-120"/>
+              </a:rPr>
               <a:t>Bilingual Game (Jeu Bilingue)</a:t>
             </a:r>
             <a:endParaRPr lang="en-US" sz="3600" dirty="0"/>
@@ -22181,7 +23087,7 @@
       </p:sp>
       <p:graphicFrame>
         <p:nvGraphicFramePr>
-          <p:cNvPr id="62" name="Table 0"/>
+          <p:cNvPr id="64" name="Table 0"/>
           <p:cNvGraphicFramePr>
             <a:graphicFrameLocks noGrp="1"/>
           </p:cNvGraphicFramePr>
@@ -23217,7 +24123,7 @@
             <a:pPr algn="ctr"/>
             <a:fld id="{F7021451-1387-4CA6-816F-3879F97B5CBC}" type="slidenum">
               <a:rPr b="1" lang="en-US"/>
-              <a:t>61</a:t>
+              <a:t>63</a:t>
             </a:fld>
             <a:endParaRPr lang="en-US"/>
           </a:p>
@@ -23231,9 +24137,9 @@
 </p:sld>
 </file>
 
-<file path=ppt/slides/slide62.xml><?xml version="1.0" encoding="utf-8"?>
+<file path=ppt/slides/slide64.xml><?xml version="1.0" encoding="utf-8"?>
 <p:sld xmlns:a="http://schemas.openxmlformats.org/drawingml/2006/main" xmlns:r="http://schemas.openxmlformats.org/officeDocument/2006/relationships" xmlns:p="http://schemas.openxmlformats.org/presentationml/2006/main">
-  <p:cSld name="Slide 62">
+  <p:cSld name="Slide 64">
     <p:spTree>
       <p:nvGrpSpPr>
         <p:cNvPr id="1" name=""/>
@@ -23328,7 +24234,7 @@
       </p:sp>
       <p:graphicFrame>
         <p:nvGraphicFramePr>
-          <p:cNvPr id="63" name="Table 0"/>
+          <p:cNvPr id="65" name="Table 0"/>
           <p:cNvGraphicFramePr>
             <a:graphicFrameLocks noGrp="1"/>
           </p:cNvGraphicFramePr>
@@ -23950,7 +24856,7 @@
             <a:pPr algn="ctr"/>
             <a:fld id="{F7021451-1387-4CA6-816F-3879F97B5CBC}" type="slidenum">
               <a:rPr b="1" lang="en-US"/>
-              <a:t>62</a:t>
+              <a:t>64</a:t>
             </a:fld>
             <a:endParaRPr lang="en-US"/>
           </a:p>
@@ -23964,9 +24870,9 @@
 </p:sld>
 </file>
 
-<file path=ppt/slides/slide63.xml><?xml version="1.0" encoding="utf-8"?>
+<file path=ppt/slides/slide65.xml><?xml version="1.0" encoding="utf-8"?>
 <p:sld xmlns:a="http://schemas.openxmlformats.org/drawingml/2006/main" xmlns:r="http://schemas.openxmlformats.org/officeDocument/2006/relationships" xmlns:p="http://schemas.openxmlformats.org/presentationml/2006/main">
-  <p:cSld name="Slide 63">
+  <p:cSld name="Slide 65">
     <p:spTree>
       <p:nvGrpSpPr>
         <p:cNvPr id="1" name=""/>
@@ -24061,7 +24967,7 @@
       </p:sp>
       <p:graphicFrame>
         <p:nvGraphicFramePr>
-          <p:cNvPr id="64" name="Table 0"/>
+          <p:cNvPr id="66" name="Table 0"/>
           <p:cNvGraphicFramePr>
             <a:graphicFrameLocks noGrp="1"/>
           </p:cNvGraphicFramePr>
@@ -24171,7 +25077,7 @@
                           <a:ea typeface="Calibri" pitchFamily="34" charset="-122"/>
                           <a:cs typeface="Calibri" pitchFamily="34" charset="-120"/>
                         </a:rPr>
-                        <a:t>DEFINITIONS; Sources of Geographical Data; Basic Sampling Procedures; Observation, Recording and Measurement; Questionnaires, Interviews and Focus Groups.</a:t>
+                        <a:t>DEFINITIONS; Primary Data; Secondary Data; Basic Sampling Procedures; Observation, Recording and Measurement; Questionnaires, Interviews and Focus Groups.</a:t>
                       </a:r>
                       <a:endParaRPr lang="en-US" sz="1600" dirty="0">
                         <a:latin typeface="Calibri" charset="0"/>
@@ -24821,7 +25727,7 @@
             <a:pPr algn="ctr"/>
             <a:fld id="{F7021451-1387-4CA6-816F-3879F97B5CBC}" type="slidenum">
               <a:rPr b="1" lang="en-US"/>
-              <a:t>63</a:t>
+              <a:t>65</a:t>
             </a:fld>
             <a:endParaRPr lang="en-US"/>
           </a:p>
@@ -24835,9 +25741,9 @@
 </p:sld>
 </file>
 
-<file path=ppt/slides/slide64.xml><?xml version="1.0" encoding="utf-8"?>
+<file path=ppt/slides/slide66.xml><?xml version="1.0" encoding="utf-8"?>
 <p:sld xmlns:a="http://schemas.openxmlformats.org/drawingml/2006/main" xmlns:r="http://schemas.openxmlformats.org/officeDocument/2006/relationships" xmlns:p="http://schemas.openxmlformats.org/presentationml/2006/main">
-  <p:cSld name="Slide 64">
+  <p:cSld name="Slide 66">
     <p:spTree>
       <p:nvGrpSpPr>
         <p:cNvPr id="1" name=""/>
@@ -25146,7 +26052,7 @@
             <a:pPr algn="ctr"/>
             <a:fld id="{F7021451-1387-4CA6-816F-3879F97B5CBC}" type="slidenum">
               <a:rPr b="1" lang="en-US"/>
-              <a:t>64</a:t>
+              <a:t>66</a:t>
             </a:fld>
             <a:endParaRPr lang="en-US"/>
           </a:p>
@@ -25160,9 +26066,9 @@
 </p:sld>
 </file>
 
-<file path=ppt/slides/slide65.xml><?xml version="1.0" encoding="utf-8"?>
+<file path=ppt/slides/slide67.xml><?xml version="1.0" encoding="utf-8"?>
 <p:sld xmlns:a="http://schemas.openxmlformats.org/drawingml/2006/main" xmlns:r="http://schemas.openxmlformats.org/officeDocument/2006/relationships" xmlns:p="http://schemas.openxmlformats.org/presentationml/2006/main">
-  <p:cSld name="Slide 65">
+  <p:cSld name="Slide 67">
     <p:spTree>
       <p:nvGrpSpPr>
         <p:cNvPr id="1" name=""/>
@@ -25408,7 +26314,7 @@
             <a:pPr algn="ctr"/>
             <a:fld id="{F7021451-1387-4CA6-816F-3879F97B5CBC}" type="slidenum">
               <a:rPr b="1" lang="en-US"/>
-              <a:t>65</a:t>
+              <a:t>67</a:t>
             </a:fld>
             <a:endParaRPr lang="en-US"/>
           </a:p>
